--- a/Technical Report_ Book Library and Analytics API.pptx
+++ b/Technical Report_ Book Library and Analytics API.pptx
@@ -3,13 +3,13 @@
 <p:presentation xmlns:a="http://schemas.openxmlformats.org/drawingml/2006/main" xmlns:r="http://schemas.openxmlformats.org/officeDocument/2006/relationships" xmlns:p="http://schemas.openxmlformats.org/presentationml/2006/main" strictFirstAndLastChars="0" autoCompressPictures="0">
   <p:sldMasterIdLst>
     <p:sldMasterId id="2147483648" r:id="rId1"/>
-    <p:sldMasterId id="2147483660" r:id="rId3"/>
+    <p:sldMasterId id="2147483661" r:id="rId3"/>
   </p:sldMasterIdLst>
   <p:notesMasterIdLst>
     <p:notesMasterId r:id="rId5"/>
   </p:notesMasterIdLst>
   <p:handoutMasterIdLst>
-    <p:handoutMasterId r:id="rId25"/>
+    <p:handoutMasterId r:id="rId28"/>
   </p:handoutMasterIdLst>
   <p:sldIdLst>
     <p:sldId id="256" r:id="rId4"/>
@@ -31,7 +31,10 @@
     <p:sldId id="272" r:id="rId21"/>
     <p:sldId id="273" r:id="rId22"/>
     <p:sldId id="274" r:id="rId23"/>
-    <p:sldId id="275" r:id="rId24"/>
+    <p:sldId id="276" r:id="rId24"/>
+    <p:sldId id="277" r:id="rId25"/>
+    <p:sldId id="279" r:id="rId26"/>
+    <p:sldId id="275" r:id="rId27"/>
   </p:sldIdLst>
   <p:sldSz cx="12192000" cy="6858000"/>
   <p:notesSz cx="6858000" cy="9144000"/>
@@ -283,6 +286,12 @@
 </p:presentation>
 </file>
 
+<file path=ppt/commentAuthors.xml><?xml version="1.0" encoding="utf-8"?>
+<p:cmAuthorLst xmlns:a="http://schemas.openxmlformats.org/drawingml/2006/main" xmlns:r="http://schemas.openxmlformats.org/officeDocument/2006/relationships" xmlns:p="http://schemas.openxmlformats.org/presentationml/2006/main">
+  <p:cmAuthor id="1" name="作者" initials="A" lastIdx="0" clrIdx="0"/>
+</p:cmAuthorLst>
+</file>
+
 <file path=ppt/handoutMasters/handoutMaster1.xml><?xml version="1.0" encoding="utf-8"?>
 <p:handoutMaster xmlns:a="http://schemas.openxmlformats.org/drawingml/2006/main" xmlns:r="http://schemas.openxmlformats.org/officeDocument/2006/relationships" xmlns:p="http://schemas.openxmlformats.org/presentationml/2006/main">
   <p:cSld>
@@ -3711,6 +3720,145 @@
       </p:grpSpPr>
       <p:sp>
         <p:nvSpPr>
+          <p:cNvPr id="5122" name="幻灯片图像占位符 1"/>
+          <p:cNvSpPr>
+            <a:spLocks noGrp="1" noRot="1" noChangeAspect="1" noTextEdit="1"/>
+          </p:cNvSpPr>
+          <p:nvPr>
+            <p:ph type="sldImg"/>
+          </p:nvPr>
+        </p:nvSpPr>
+        <p:spPr>
+          <a:ln>
+            <a:miter lim="800000"/>
+          </a:ln>
+        </p:spPr>
+      </p:sp>
+      <p:sp>
+        <p:nvSpPr>
+          <p:cNvPr id="5123" name="文本占位符 2"/>
+          <p:cNvSpPr>
+            <a:spLocks noGrp="1"/>
+          </p:cNvSpPr>
+          <p:nvPr>
+            <p:ph type="body"/>
+          </p:nvPr>
+        </p:nvSpPr>
+        <p:spPr/>
+        <p:txBody>
+          <a:bodyPr wrap="square" lIns="91440" tIns="45720" rIns="91440" bIns="45720" anchor="t"/>
+          <a:lstStyle/>
+          <a:p>
+            <a:pPr lvl="0" eaLnBrk="1" hangingPunct="1"/>
+            <a:endParaRPr lang="zh-CN" altLang="en-US" dirty="0"/>
+          </a:p>
+        </p:txBody>
+      </p:sp>
+    </p:spTree>
+  </p:cSld>
+  <p:clrMapOvr>
+    <a:masterClrMapping/>
+  </p:clrMapOvr>
+</p:notes>
+</file>
+
+<file path=ppt/notesSlides/notesSlide21.xml><?xml version="1.0" encoding="utf-8"?>
+<p:notes xmlns:a="http://schemas.openxmlformats.org/drawingml/2006/main" xmlns:r="http://schemas.openxmlformats.org/officeDocument/2006/relationships" xmlns:p="http://schemas.openxmlformats.org/presentationml/2006/main">
+  <p:cSld>
+    <p:spTree>
+      <p:nvGrpSpPr>
+        <p:cNvPr id="1" name=""/>
+        <p:cNvGrpSpPr/>
+        <p:nvPr/>
+      </p:nvGrpSpPr>
+      <p:grpSpPr>
+        <a:xfrm>
+          <a:off x="0" y="0"/>
+          <a:ext cx="0" cy="0"/>
+          <a:chOff x="0" y="0"/>
+          <a:chExt cx="0" cy="0"/>
+        </a:xfrm>
+      </p:grpSpPr>
+      <p:sp>
+        <p:nvSpPr>
+          <p:cNvPr id="2" name="幻灯片图像占位符 1"/>
+          <p:cNvSpPr>
+            <a:spLocks noGrp="1" noRot="1" noChangeAspect="1"/>
+          </p:cNvSpPr>
+          <p:nvPr>
+            <p:ph type="sldImg"/>
+          </p:nvPr>
+        </p:nvSpPr>
+        <p:spPr/>
+      </p:sp>
+      <p:sp>
+        <p:nvSpPr>
+          <p:cNvPr id="3" name="备注占位符 2"/>
+          <p:cNvSpPr>
+            <a:spLocks noGrp="1"/>
+          </p:cNvSpPr>
+          <p:nvPr>
+            <p:ph type="body" idx="1"/>
+          </p:nvPr>
+        </p:nvSpPr>
+        <p:spPr/>
+        <p:txBody>
+          <a:bodyPr/>
+          <a:lstStyle/>
+          <a:p>
+            <a:endParaRPr lang="zh-CN" altLang="en-US" dirty="0"/>
+          </a:p>
+        </p:txBody>
+      </p:sp>
+      <p:sp>
+        <p:nvSpPr>
+          <p:cNvPr id="4" name="灯片编号占位符 3"/>
+          <p:cNvSpPr>
+            <a:spLocks noGrp="1"/>
+          </p:cNvSpPr>
+          <p:nvPr>
+            <p:ph type="sldNum" sz="quarter" idx="5"/>
+          </p:nvPr>
+        </p:nvSpPr>
+        <p:spPr/>
+        <p:txBody>
+          <a:bodyPr/>
+          <a:lstStyle/>
+          <a:p>
+            <a:fld id="{85D0DACE-38E0-42D2-9336-2B707D34BC6D}" type="slidenum">
+              <a:rPr lang="zh-CN" altLang="en-US" smtClean="0"/>
+            </a:fld>
+            <a:endParaRPr lang="zh-CN" altLang="en-US"/>
+          </a:p>
+        </p:txBody>
+      </p:sp>
+    </p:spTree>
+  </p:cSld>
+  <p:clrMapOvr>
+    <a:masterClrMapping/>
+  </p:clrMapOvr>
+</p:notes>
+</file>
+
+<file path=ppt/notesSlides/notesSlide22.xml><?xml version="1.0" encoding="utf-8"?>
+<p:notes xmlns:a="http://schemas.openxmlformats.org/drawingml/2006/main" xmlns:r="http://schemas.openxmlformats.org/officeDocument/2006/relationships" xmlns:p="http://schemas.openxmlformats.org/presentationml/2006/main">
+  <p:cSld>
+    <p:spTree>
+      <p:nvGrpSpPr>
+        <p:cNvPr id="1" name=""/>
+        <p:cNvGrpSpPr/>
+        <p:nvPr/>
+      </p:nvGrpSpPr>
+      <p:grpSpPr>
+        <a:xfrm>
+          <a:off x="0" y="0"/>
+          <a:ext cx="0" cy="0"/>
+          <a:chOff x="0" y="0"/>
+          <a:chExt cx="0" cy="0"/>
+        </a:xfrm>
+      </p:grpSpPr>
+      <p:sp>
+        <p:nvSpPr>
           <p:cNvPr id="2" name="Header Placeholder 1"/>
           <p:cNvSpPr>
             <a:spLocks noGrp="1"/>
@@ -7754,6 +7902,135 @@
 </file>
 
 <file path=ppt/slideLayouts/slideLayout12.xml><?xml version="1.0" encoding="utf-8"?>
+<p:sldLayout xmlns:a="http://schemas.openxmlformats.org/drawingml/2006/main" xmlns:r="http://schemas.openxmlformats.org/officeDocument/2006/relationships" xmlns:p="http://schemas.openxmlformats.org/presentationml/2006/main" type="titleOnly" preserve="1">
+  <p:cSld name="仅标题">
+    <p:spTree>
+      <p:nvGrpSpPr>
+        <p:cNvPr id="1" name=""/>
+        <p:cNvGrpSpPr/>
+        <p:nvPr/>
+      </p:nvGrpSpPr>
+      <p:grpSpPr>
+        <a:xfrm>
+          <a:off x="0" y="0"/>
+          <a:ext cx="0" cy="0"/>
+          <a:chOff x="0" y="0"/>
+          <a:chExt cx="0" cy="0"/>
+        </a:xfrm>
+      </p:grpSpPr>
+      <p:sp>
+        <p:nvSpPr>
+          <p:cNvPr id="2" name="标题 1"/>
+          <p:cNvSpPr>
+            <a:spLocks noGrp="1"/>
+          </p:cNvSpPr>
+          <p:nvPr>
+            <p:ph type="title"/>
+            <p:custDataLst>
+              <p:tags r:id="rId2"/>
+            </p:custDataLst>
+          </p:nvPr>
+        </p:nvSpPr>
+        <p:spPr/>
+        <p:txBody>
+          <a:bodyPr wrap="square">
+            <a:normAutofit/>
+          </a:bodyPr>
+          <a:lstStyle/>
+          <a:p>
+            <a:r>
+              <a:rPr lang="zh-CN" altLang="en-US" dirty="0"/>
+              <a:t>单击此处编辑母版标题样式</a:t>
+            </a:r>
+            <a:endParaRPr lang="zh-CN" altLang="en-US" dirty="0"/>
+          </a:p>
+        </p:txBody>
+      </p:sp>
+      <p:sp>
+        <p:nvSpPr>
+          <p:cNvPr id="3" name="日期占位符 2"/>
+          <p:cNvSpPr>
+            <a:spLocks noGrp="1"/>
+          </p:cNvSpPr>
+          <p:nvPr>
+            <p:ph type="dt" sz="half" idx="10"/>
+            <p:custDataLst>
+              <p:tags r:id="rId3"/>
+            </p:custDataLst>
+          </p:nvPr>
+        </p:nvSpPr>
+        <p:spPr/>
+        <p:txBody>
+          <a:bodyPr wrap="square">
+            <a:normAutofit/>
+          </a:bodyPr>
+          <a:lstStyle/>
+          <a:p>
+            <a:fld id="{5592522B-0F24-4480-B9DD-A9474A6880D6}" type="datetimeFigureOut">
+              <a:rPr lang="zh-CN" altLang="en-US" smtClean="0"/>
+            </a:fld>
+            <a:endParaRPr lang="zh-CN" altLang="en-US"/>
+          </a:p>
+        </p:txBody>
+      </p:sp>
+      <p:sp>
+        <p:nvSpPr>
+          <p:cNvPr id="4" name="页脚占位符 3"/>
+          <p:cNvSpPr>
+            <a:spLocks noGrp="1"/>
+          </p:cNvSpPr>
+          <p:nvPr>
+            <p:ph type="ftr" sz="quarter" idx="11"/>
+            <p:custDataLst>
+              <p:tags r:id="rId4"/>
+            </p:custDataLst>
+          </p:nvPr>
+        </p:nvSpPr>
+        <p:spPr/>
+        <p:txBody>
+          <a:bodyPr/>
+          <a:lstStyle/>
+          <a:p>
+            <a:endParaRPr lang="zh-CN" altLang="en-US"/>
+          </a:p>
+        </p:txBody>
+      </p:sp>
+      <p:sp>
+        <p:nvSpPr>
+          <p:cNvPr id="5" name="灯片编号占位符 4"/>
+          <p:cNvSpPr>
+            <a:spLocks noGrp="1"/>
+          </p:cNvSpPr>
+          <p:nvPr>
+            <p:ph type="sldNum" sz="quarter" idx="12"/>
+            <p:custDataLst>
+              <p:tags r:id="rId5"/>
+            </p:custDataLst>
+          </p:nvPr>
+        </p:nvSpPr>
+        <p:spPr/>
+        <p:txBody>
+          <a:bodyPr wrap="square">
+            <a:normAutofit/>
+          </a:bodyPr>
+          <a:lstStyle/>
+          <a:p>
+            <a:fld id="{BE5F26B5-172A-4DC2-B0B7-181CFC56B87C}" type="slidenum">
+              <a:rPr lang="zh-CN" altLang="en-US" smtClean="0"/>
+            </a:fld>
+            <a:endParaRPr lang="zh-CN" altLang="en-US"/>
+          </a:p>
+        </p:txBody>
+      </p:sp>
+    </p:spTree>
+  </p:cSld>
+  <p:clrMapOvr>
+    <a:masterClrMapping/>
+  </p:clrMapOvr>
+</p:sldLayout>
+</file>
+
+<file path=ppt/slideLayouts/slideLayout13.xml><?xml version="1.0" encoding="utf-8"?>
 <p:sldLayout xmlns:a="http://schemas.openxmlformats.org/drawingml/2006/main" xmlns:r="http://schemas.openxmlformats.org/officeDocument/2006/relationships" xmlns:p="http://schemas.openxmlformats.org/presentationml/2006/main" type="title" preserve="1">
   <p:cSld>
     <p:spTree>
@@ -7770,6 +8047,260 @@
           <a:chExt cx="0" cy="0"/>
         </a:xfrm>
       </p:grpSpPr>
+    </p:spTree>
+  </p:cSld>
+  <p:clrMapOvr>
+    <a:masterClrMapping/>
+  </p:clrMapOvr>
+</p:sldLayout>
+</file>
+
+<file path=ppt/slideLayouts/slideLayout14.xml><?xml version="1.0" encoding="utf-8"?>
+<p:sldLayout xmlns:a="http://schemas.openxmlformats.org/drawingml/2006/main" xmlns:r="http://schemas.openxmlformats.org/officeDocument/2006/relationships" xmlns:p="http://schemas.openxmlformats.org/presentationml/2006/main" type="titleOnly" preserve="1">
+  <p:cSld name="仅标题">
+    <p:spTree>
+      <p:nvGrpSpPr>
+        <p:cNvPr id="1" name=""/>
+        <p:cNvGrpSpPr/>
+        <p:nvPr/>
+      </p:nvGrpSpPr>
+      <p:grpSpPr>
+        <a:xfrm>
+          <a:off x="0" y="0"/>
+          <a:ext cx="0" cy="0"/>
+          <a:chOff x="0" y="0"/>
+          <a:chExt cx="0" cy="0"/>
+        </a:xfrm>
+      </p:grpSpPr>
+      <p:sp>
+        <p:nvSpPr>
+          <p:cNvPr id="2" name="标题 1"/>
+          <p:cNvSpPr>
+            <a:spLocks noGrp="1"/>
+          </p:cNvSpPr>
+          <p:nvPr>
+            <p:ph type="title"/>
+            <p:custDataLst>
+              <p:tags r:id="rId2"/>
+            </p:custDataLst>
+          </p:nvPr>
+        </p:nvSpPr>
+        <p:spPr>
+          <a:xfrm>
+            <a:off x="695960" y="360000"/>
+            <a:ext cx="10800000" cy="720000"/>
+          </a:xfrm>
+        </p:spPr>
+        <p:txBody>
+          <a:bodyPr wrap="square">
+            <a:normAutofit/>
+          </a:bodyPr>
+          <a:lstStyle/>
+          <a:p>
+            <a:r>
+              <a:rPr lang="zh-CN" altLang="en-US"/>
+              <a:t>单击此处编辑母版标题样式</a:t>
+            </a:r>
+            <a:endParaRPr lang="zh-CN" altLang="en-US" dirty="0"/>
+          </a:p>
+        </p:txBody>
+      </p:sp>
+      <p:sp>
+        <p:nvSpPr>
+          <p:cNvPr id="3" name="日期占位符 2"/>
+          <p:cNvSpPr>
+            <a:spLocks noGrp="1"/>
+          </p:cNvSpPr>
+          <p:nvPr>
+            <p:ph type="dt" sz="half" idx="10"/>
+            <p:custDataLst>
+              <p:tags r:id="rId3"/>
+            </p:custDataLst>
+          </p:nvPr>
+        </p:nvSpPr>
+        <p:spPr>
+          <a:xfrm>
+            <a:off x="695960" y="6356350"/>
+            <a:ext cx="2743200" cy="365125"/>
+          </a:xfrm>
+        </p:spPr>
+        <p:txBody>
+          <a:bodyPr wrap="square">
+            <a:normAutofit/>
+          </a:bodyPr>
+          <a:lstStyle/>
+          <a:p>
+            <a:r>
+              <a:rPr lang="en-US" altLang="zh-CN"/>
+              <a:t>2024/12/16</a:t>
+            </a:r>
+            <a:endParaRPr lang="zh-CN" altLang="en-US"/>
+          </a:p>
+        </p:txBody>
+      </p:sp>
+      <p:sp>
+        <p:nvSpPr>
+          <p:cNvPr id="4" name="页脚占位符 3"/>
+          <p:cNvSpPr>
+            <a:spLocks noGrp="1"/>
+          </p:cNvSpPr>
+          <p:nvPr>
+            <p:ph type="ftr" sz="quarter" idx="11"/>
+            <p:custDataLst>
+              <p:tags r:id="rId4"/>
+            </p:custDataLst>
+          </p:nvPr>
+        </p:nvSpPr>
+        <p:spPr>
+          <a:xfrm>
+            <a:off x="4038600" y="6356350"/>
+            <a:ext cx="4114800" cy="365125"/>
+          </a:xfrm>
+        </p:spPr>
+        <p:txBody>
+          <a:bodyPr/>
+          <a:lstStyle/>
+          <a:p>
+            <a:endParaRPr lang="zh-CN" altLang="en-US"/>
+          </a:p>
+        </p:txBody>
+      </p:sp>
+      <p:sp>
+        <p:nvSpPr>
+          <p:cNvPr id="5" name="灯片编号占位符 4"/>
+          <p:cNvSpPr>
+            <a:spLocks noGrp="1"/>
+          </p:cNvSpPr>
+          <p:nvPr>
+            <p:ph type="sldNum" sz="quarter" idx="12"/>
+            <p:custDataLst>
+              <p:tags r:id="rId5"/>
+            </p:custDataLst>
+          </p:nvPr>
+        </p:nvSpPr>
+        <p:spPr>
+          <a:xfrm>
+            <a:off x="8753983" y="6356350"/>
+            <a:ext cx="2743200" cy="365125"/>
+          </a:xfrm>
+        </p:spPr>
+        <p:txBody>
+          <a:bodyPr wrap="square">
+            <a:normAutofit/>
+          </a:bodyPr>
+          <a:lstStyle/>
+          <a:p>
+            <a:r>
+              <a:rPr lang="en-US" altLang="zh-CN"/>
+              <a:t>‹#›</a:t>
+            </a:r>
+            <a:endParaRPr lang="zh-CN" altLang="en-US"/>
+          </a:p>
+        </p:txBody>
+      </p:sp>
+    </p:spTree>
+  </p:cSld>
+  <p:clrMapOvr>
+    <a:masterClrMapping/>
+  </p:clrMapOvr>
+</p:sldLayout>
+</file>
+
+<file path=ppt/slideLayouts/slideLayout15.xml><?xml version="1.0" encoding="utf-8"?>
+<p:sldLayout xmlns:a="http://schemas.openxmlformats.org/drawingml/2006/main" xmlns:r="http://schemas.openxmlformats.org/officeDocument/2006/relationships" xmlns:p="http://schemas.openxmlformats.org/presentationml/2006/main" type="blank" preserve="1">
+  <p:cSld name="空白">
+    <p:spTree>
+      <p:nvGrpSpPr>
+        <p:cNvPr id="1" name=""/>
+        <p:cNvGrpSpPr/>
+        <p:nvPr/>
+      </p:nvGrpSpPr>
+      <p:grpSpPr>
+        <a:xfrm>
+          <a:off x="0" y="0"/>
+          <a:ext cx="0" cy="0"/>
+          <a:chOff x="0" y="0"/>
+          <a:chExt cx="0" cy="0"/>
+        </a:xfrm>
+      </p:grpSpPr>
+      <p:sp>
+        <p:nvSpPr>
+          <p:cNvPr id="2" name="日期占位符 1"/>
+          <p:cNvSpPr>
+            <a:spLocks noGrp="1"/>
+          </p:cNvSpPr>
+          <p:nvPr>
+            <p:ph type="dt" sz="half" idx="10"/>
+          </p:nvPr>
+        </p:nvSpPr>
+        <p:spPr>
+          <a:xfrm>
+            <a:off x="838200" y="6356350"/>
+            <a:ext cx="2743200" cy="365125"/>
+          </a:xfrm>
+        </p:spPr>
+        <p:txBody>
+          <a:bodyPr/>
+          <a:lstStyle/>
+          <a:p>
+            <a:fld id="{82F288E0-7875-42C4-84C8-98DBBD3BF4D2}" type="datetimeFigureOut">
+              <a:rPr lang="zh-CN" altLang="en-US" smtClean="0"/>
+            </a:fld>
+            <a:endParaRPr lang="zh-CN" altLang="en-US"/>
+          </a:p>
+        </p:txBody>
+      </p:sp>
+      <p:sp>
+        <p:nvSpPr>
+          <p:cNvPr id="3" name="页脚占位符 2"/>
+          <p:cNvSpPr>
+            <a:spLocks noGrp="1"/>
+          </p:cNvSpPr>
+          <p:nvPr>
+            <p:ph type="ftr" sz="quarter" idx="11"/>
+          </p:nvPr>
+        </p:nvSpPr>
+        <p:spPr>
+          <a:xfrm>
+            <a:off x="4038600" y="6356350"/>
+            <a:ext cx="4114800" cy="365125"/>
+          </a:xfrm>
+        </p:spPr>
+        <p:txBody>
+          <a:bodyPr/>
+          <a:lstStyle/>
+          <a:p>
+            <a:endParaRPr lang="zh-CN" altLang="en-US"/>
+          </a:p>
+        </p:txBody>
+      </p:sp>
+      <p:sp>
+        <p:nvSpPr>
+          <p:cNvPr id="4" name="灯片编号占位符 3"/>
+          <p:cNvSpPr>
+            <a:spLocks noGrp="1"/>
+          </p:cNvSpPr>
+          <p:nvPr>
+            <p:ph type="sldNum" sz="quarter" idx="12"/>
+          </p:nvPr>
+        </p:nvSpPr>
+        <p:spPr>
+          <a:xfrm>
+            <a:off x="8610600" y="6356350"/>
+            <a:ext cx="2743200" cy="365125"/>
+          </a:xfrm>
+        </p:spPr>
+        <p:txBody>
+          <a:bodyPr/>
+          <a:lstStyle/>
+          <a:p>
+            <a:fld id="{7D9BB5D0-35E4-459D-AEF3-FE4D7C45CC19}" type="slidenum">
+              <a:rPr lang="zh-CN" altLang="en-US" smtClean="0"/>
+            </a:fld>
+            <a:endParaRPr lang="zh-CN" altLang="en-US"/>
+          </a:p>
+        </p:txBody>
+      </p:sp>
     </p:spTree>
   </p:cSld>
   <p:clrMapOvr>
@@ -14946,6 +15477,7 @@
     <p:sldLayoutId id="2147483657" r:id="rId9"/>
     <p:sldLayoutId id="2147483658" r:id="rId10"/>
     <p:sldLayoutId id="2147483659" r:id="rId11"/>
+    <p:sldLayoutId id="2147483660" r:id="rId12"/>
   </p:sldLayoutIdLst>
   <p:hf sldNum="0" hdr="0" ftr="0" dt="0"/>
   <p:txStyles>
@@ -15671,7 +16203,9 @@
   </p:cSld>
   <p:clrMap bg1="lt1" tx1="dk1" bg2="dk2" tx2="lt2" accent1="accent1" accent2="accent2" accent3="accent3" accent4="accent4" accent5="accent5" accent6="accent6" hlink="hlink" folHlink="folHlink"/>
   <p:sldLayoutIdLst>
-    <p:sldLayoutId id="2147483661" r:id="rId1"/>
+    <p:sldLayoutId id="2147483662" r:id="rId1"/>
+    <p:sldLayoutId id="2147483663" r:id="rId2"/>
+    <p:sldLayoutId id="2147483664" r:id="rId3"/>
   </p:sldLayoutIdLst>
   <p:hf sldNum="0" hdr="0" ftr="0" dt="0"/>
   <p:txStyles>
@@ -30870,6 +31404,5989 @@
 <file path=ppt/slides/slide20.xml><?xml version="1.0" encoding="utf-8"?>
 <p:sld xmlns:a="http://schemas.openxmlformats.org/drawingml/2006/main" xmlns:r="http://schemas.openxmlformats.org/officeDocument/2006/relationships" xmlns:p="http://schemas.openxmlformats.org/presentationml/2006/main">
   <p:cSld>
+    <p:spTree>
+      <p:nvGrpSpPr>
+        <p:cNvPr id="1" name=""/>
+        <p:cNvGrpSpPr/>
+        <p:nvPr/>
+      </p:nvGrpSpPr>
+      <p:grpSpPr>
+        <a:xfrm>
+          <a:off x="0" y="0"/>
+          <a:ext cx="0" cy="0"/>
+          <a:chOff x="0" y="0"/>
+          <a:chExt cx="0" cy="0"/>
+        </a:xfrm>
+      </p:grpSpPr>
+      <p:sp>
+        <p:nvSpPr>
+          <p:cNvPr id="2" name="标题 1"/>
+          <p:cNvSpPr>
+            <a:spLocks noGrp="1"/>
+          </p:cNvSpPr>
+          <p:nvPr>
+            <p:ph type="title"/>
+            <p:custDataLst>
+              <p:tags r:id="rId1"/>
+            </p:custDataLst>
+          </p:nvPr>
+        </p:nvSpPr>
+        <p:spPr>
+          <a:xfrm>
+            <a:off x="532130" y="2036445"/>
+            <a:ext cx="2563495" cy="2195830"/>
+          </a:xfrm>
+        </p:spPr>
+        <p:txBody>
+          <a:bodyPr anchor="b" anchorCtr="0"/>
+          <a:lstStyle/>
+          <a:p>
+            <a:pPr algn="ctr"/>
+            <a:r>
+              <a:rPr lang="en-US" altLang="zh-CN" sz="3600"/>
+              <a:t>V</a:t>
+            </a:r>
+            <a:r>
+              <a:rPr lang="en-US" altLang="zh-CN" sz="3600"/>
+              <a:t>ersion  Control</a:t>
+            </a:r>
+            <a:endParaRPr lang="en-US" altLang="zh-CN" sz="3600"/>
+          </a:p>
+        </p:txBody>
+      </p:sp>
+      <p:sp>
+        <p:nvSpPr>
+          <p:cNvPr id="3" name="矩形 2"/>
+          <p:cNvSpPr/>
+          <p:nvPr>
+            <p:custDataLst>
+              <p:tags r:id="rId2"/>
+            </p:custDataLst>
+          </p:nvPr>
+        </p:nvSpPr>
+        <p:spPr>
+          <a:xfrm>
+            <a:off x="754380" y="4300855"/>
+            <a:ext cx="2157095" cy="125095"/>
+          </a:xfrm>
+          <a:prstGeom prst="rect">
+            <a:avLst/>
+          </a:prstGeom>
+          <a:ln>
+            <a:noFill/>
+          </a:ln>
+        </p:spPr>
+        <p:style>
+          <a:lnRef idx="2">
+            <a:schemeClr val="accent1">
+              <a:shade val="50000"/>
+            </a:schemeClr>
+          </a:lnRef>
+          <a:fillRef idx="1">
+            <a:schemeClr val="accent1"/>
+          </a:fillRef>
+          <a:effectRef idx="0">
+            <a:schemeClr val="accent1"/>
+          </a:effectRef>
+          <a:fontRef idx="minor">
+            <a:schemeClr val="lt1"/>
+          </a:fontRef>
+        </p:style>
+        <p:txBody>
+          <a:bodyPr anchor="ctr"/>
+          <a:lstStyle/>
+          <a:p>
+            <a:pPr marL="0" marR="0" lvl="0" indent="0" algn="ctr" defTabSz="914400" rtl="0" eaLnBrk="1" fontAlgn="auto" latinLnBrk="0" hangingPunct="1">
+              <a:lnSpc>
+                <a:spcPct val="100000"/>
+              </a:lnSpc>
+              <a:spcBef>
+                <a:spcPct val="0"/>
+              </a:spcBef>
+              <a:spcAft>
+                <a:spcPct val="0"/>
+              </a:spcAft>
+              <a:buClrTx/>
+              <a:buSzTx/>
+              <a:buFontTx/>
+              <a:buNone/>
+            </a:pPr>
+            <a:endParaRPr kumimoji="0" lang="zh-CN" altLang="en-US" sz="1800" b="0" i="0" u="none" strike="noStrike" kern="1200" cap="none" spc="0" normalizeH="0" baseline="0" noProof="1">
+              <a:ln>
+                <a:noFill/>
+              </a:ln>
+              <a:solidFill>
+                <a:schemeClr val="tx1">
+                  <a:lumMod val="85000"/>
+                  <a:lumOff val="15000"/>
+                </a:schemeClr>
+              </a:solidFill>
+              <a:effectLst/>
+              <a:uLnTx/>
+              <a:uFillTx/>
+              <a:latin typeface="Arial" panose="020B0604020202020204" pitchFamily="34" charset="0"/>
+              <a:ea typeface="微软雅黑" panose="020B0503020204020204" charset="-122"/>
+              <a:sym typeface="Arial" panose="020B0604020202020204" pitchFamily="34" charset="0"/>
+            </a:endParaRPr>
+          </a:p>
+        </p:txBody>
+      </p:sp>
+      <p:sp>
+        <p:nvSpPr>
+          <p:cNvPr id="7" name="任意多边形 6"/>
+          <p:cNvSpPr/>
+          <p:nvPr>
+            <p:custDataLst>
+              <p:tags r:id="rId3"/>
+            </p:custDataLst>
+          </p:nvPr>
+        </p:nvSpPr>
+        <p:spPr>
+          <a:xfrm>
+            <a:off x="1804670" y="945198"/>
+            <a:ext cx="8893175" cy="4967605"/>
+          </a:xfrm>
+          <a:custGeom>
+            <a:avLst/>
+            <a:gdLst>
+              <a:gd name="connsiteX0" fmla="*/ 5 w 14004"/>
+              <a:gd name="connsiteY0" fmla="*/ 1622 h 7822"/>
+              <a:gd name="connsiteX1" fmla="*/ 0 w 14004"/>
+              <a:gd name="connsiteY1" fmla="*/ 0 h 7822"/>
+              <a:gd name="connsiteX2" fmla="*/ 14004 w 14004"/>
+              <a:gd name="connsiteY2" fmla="*/ 0 h 7822"/>
+              <a:gd name="connsiteX3" fmla="*/ 14004 w 14004"/>
+              <a:gd name="connsiteY3" fmla="*/ 7822 h 7822"/>
+              <a:gd name="connsiteX4" fmla="*/ 0 w 14004"/>
+              <a:gd name="connsiteY4" fmla="*/ 7822 h 7822"/>
+              <a:gd name="connsiteX5" fmla="*/ 5 w 14004"/>
+              <a:gd name="connsiteY5" fmla="*/ 6212 h 7822"/>
+            </a:gdLst>
+            <a:ahLst/>
+            <a:cxnLst>
+              <a:cxn ang="0">
+                <a:pos x="connsiteX0" y="connsiteY0"/>
+              </a:cxn>
+              <a:cxn ang="0">
+                <a:pos x="connsiteX1" y="connsiteY1"/>
+              </a:cxn>
+              <a:cxn ang="0">
+                <a:pos x="connsiteX2" y="connsiteY2"/>
+              </a:cxn>
+              <a:cxn ang="0">
+                <a:pos x="connsiteX3" y="connsiteY3"/>
+              </a:cxn>
+              <a:cxn ang="0">
+                <a:pos x="connsiteX4" y="connsiteY4"/>
+              </a:cxn>
+              <a:cxn ang="0">
+                <a:pos x="connsiteX5" y="connsiteY5"/>
+              </a:cxn>
+            </a:cxnLst>
+            <a:rect l="l" t="t" r="r" b="b"/>
+            <a:pathLst>
+              <a:path w="14004" h="7822">
+                <a:moveTo>
+                  <a:pt x="5" y="1622"/>
+                </a:moveTo>
+                <a:lnTo>
+                  <a:pt x="0" y="0"/>
+                </a:lnTo>
+                <a:lnTo>
+                  <a:pt x="14004" y="0"/>
+                </a:lnTo>
+                <a:lnTo>
+                  <a:pt x="14004" y="7822"/>
+                </a:lnTo>
+                <a:lnTo>
+                  <a:pt x="0" y="7822"/>
+                </a:lnTo>
+                <a:lnTo>
+                  <a:pt x="5" y="6212"/>
+                </a:lnTo>
+              </a:path>
+            </a:pathLst>
+          </a:custGeom>
+          <a:noFill/>
+          <a:ln w="19050">
+            <a:solidFill>
+              <a:schemeClr val="accent1">
+                <a:alpha val="75000"/>
+              </a:schemeClr>
+            </a:solidFill>
+          </a:ln>
+        </p:spPr>
+        <p:style>
+          <a:lnRef idx="2">
+            <a:schemeClr val="accent1">
+              <a:shade val="50000"/>
+            </a:schemeClr>
+          </a:lnRef>
+          <a:fillRef idx="1">
+            <a:schemeClr val="accent1"/>
+          </a:fillRef>
+          <a:effectRef idx="0">
+            <a:schemeClr val="accent1"/>
+          </a:effectRef>
+          <a:fontRef idx="minor">
+            <a:schemeClr val="lt1"/>
+          </a:fontRef>
+        </p:style>
+        <p:txBody>
+          <a:bodyPr lIns="2520000" anchor="ctr"/>
+          <a:lstStyle/>
+          <a:p>
+            <a:pPr indent="0" algn="just" fontAlgn="auto">
+              <a:lnSpc>
+                <a:spcPct val="150000"/>
+              </a:lnSpc>
+            </a:pPr>
+            <a:endParaRPr lang="zh-CN" altLang="en-US" kern="0" spc="0" dirty="0">
+              <a:ln>
+                <a:noFill/>
+                <a:prstDash val="sysDot"/>
+              </a:ln>
+              <a:solidFill>
+                <a:schemeClr val="tx1">
+                  <a:lumMod val="85000"/>
+                  <a:lumOff val="15000"/>
+                </a:schemeClr>
+              </a:solidFill>
+              <a:latin typeface="+mn-ea"/>
+              <a:ea typeface="+mn-ea"/>
+              <a:sym typeface="+mn-ea"/>
+            </a:endParaRPr>
+          </a:p>
+        </p:txBody>
+      </p:sp>
+      <p:sp>
+        <p:nvSpPr>
+          <p:cNvPr id="4" name="文本框 3"/>
+          <p:cNvSpPr txBox="1"/>
+          <p:nvPr>
+            <p:custDataLst>
+              <p:tags r:id="rId4"/>
+            </p:custDataLst>
+          </p:nvPr>
+        </p:nvSpPr>
+        <p:spPr>
+          <a:xfrm>
+            <a:off x="3715385" y="1221740"/>
+            <a:ext cx="6691630" cy="4405630"/>
+          </a:xfrm>
+          <a:prstGeom prst="rect">
+            <a:avLst/>
+          </a:prstGeom>
+          <a:noFill/>
+        </p:spPr>
+        <p:txBody>
+          <a:bodyPr wrap="square" rtlCol="0" anchor="ctr" anchorCtr="0">
+            <a:normAutofit/>
+          </a:bodyPr>
+          <a:lstStyle/>
+          <a:p>
+            <a:pPr indent="0" fontAlgn="auto">
+              <a:lnSpc>
+                <a:spcPct val="150000"/>
+              </a:lnSpc>
+            </a:pPr>
+            <a:r>
+              <a:rPr lang="zh-CN" altLang="en-US"/>
+              <a:t>单击此处添加文本具体内容，简明扼要地阐述您的观点。根据需要可酌情增减文字，以便观者准确地理解您传达的思想。单击此处添加文本具体内容，简明扼要地阐述您的观点。根据需要可酌情增减文字，以便观者准确地理解您传达的思想。单击此处添加文本具体内容，简明扼要地阐述您的观点。根据需要可酌情增减文字，以便观者准确地理解您传达的思想。单击此处添加文本具体内容，简明扼要地阐述您的观点。根据需要可酌情增减文字，以便观者准确地理解您传达的思想</a:t>
+            </a:r>
+            <a:endParaRPr lang="zh-CN" altLang="en-US"/>
+          </a:p>
+        </p:txBody>
+      </p:sp>
+      <p:pic>
+        <p:nvPicPr>
+          <p:cNvPr id="5" name="图片 4" descr="QQ20260419-152958"/>
+          <p:cNvPicPr>
+            <a:picLocks noChangeAspect="1"/>
+          </p:cNvPicPr>
+          <p:nvPr/>
+        </p:nvPicPr>
+        <p:blipFill>
+          <a:blip r:embed="rId5"/>
+          <a:stretch>
+            <a:fillRect/>
+          </a:stretch>
+        </p:blipFill>
+        <p:spPr>
+          <a:xfrm>
+            <a:off x="3158490" y="1315720"/>
+            <a:ext cx="7413625" cy="4311650"/>
+          </a:xfrm>
+          <a:prstGeom prst="rect">
+            <a:avLst/>
+          </a:prstGeom>
+        </p:spPr>
+      </p:pic>
+    </p:spTree>
+    <p:custDataLst>
+      <p:tags r:id="rId6"/>
+    </p:custDataLst>
+  </p:cSld>
+  <p:clrMapOvr>
+    <a:masterClrMapping/>
+  </p:clrMapOvr>
+</p:sld>
+</file>
+
+<file path=ppt/slides/slide21.xml><?xml version="1.0" encoding="utf-8"?>
+<p:sld xmlns:a="http://schemas.openxmlformats.org/drawingml/2006/main" xmlns:r="http://schemas.openxmlformats.org/officeDocument/2006/relationships" xmlns:p="http://schemas.openxmlformats.org/presentationml/2006/main">
+  <p:cSld>
+    <p:spTree>
+      <p:nvGrpSpPr>
+        <p:cNvPr id="1" name=""/>
+        <p:cNvGrpSpPr/>
+        <p:nvPr/>
+      </p:nvGrpSpPr>
+      <p:grpSpPr>
+        <a:xfrm>
+          <a:off x="0" y="0"/>
+          <a:ext cx="0" cy="0"/>
+          <a:chOff x="0" y="0"/>
+          <a:chExt cx="0" cy="0"/>
+        </a:xfrm>
+      </p:grpSpPr>
+      <p:sp>
+        <p:nvSpPr>
+          <p:cNvPr id="17" name="标题 16"/>
+          <p:cNvSpPr>
+            <a:spLocks noGrp="1"/>
+          </p:cNvSpPr>
+          <p:nvPr>
+            <p:ph type="title"/>
+            <p:custDataLst>
+              <p:tags r:id="rId1"/>
+            </p:custDataLst>
+          </p:nvPr>
+        </p:nvSpPr>
+        <p:spPr>
+          <a:xfrm>
+            <a:off x="343535" y="217125"/>
+            <a:ext cx="10800000" cy="720000"/>
+          </a:xfrm>
+        </p:spPr>
+        <p:txBody>
+          <a:bodyPr/>
+          <a:lstStyle/>
+          <a:p>
+            <a:r>
+              <a:rPr lang="en-US" altLang="zh-CN" sz="3200">
+                <a:latin typeface="Noto Sans SC" panose="020B0200000000000000" charset="-122"/>
+                <a:ea typeface="Noto Sans SC" panose="020B0200000000000000" charset="-122"/>
+              </a:rPr>
+              <a:t>Technical Report Highlights</a:t>
+            </a:r>
+            <a:endParaRPr lang="en-US" altLang="zh-CN" sz="3200">
+              <a:latin typeface="Noto Sans SC" panose="020B0200000000000000" charset="-122"/>
+              <a:ea typeface="Noto Sans SC" panose="020B0200000000000000" charset="-122"/>
+            </a:endParaRPr>
+          </a:p>
+        </p:txBody>
+      </p:sp>
+      <p:sp>
+        <p:nvSpPr>
+          <p:cNvPr id="29" name="任意多边形: 形状 28"/>
+          <p:cNvSpPr/>
+          <p:nvPr>
+            <p:custDataLst>
+              <p:tags r:id="rId2"/>
+            </p:custDataLst>
+          </p:nvPr>
+        </p:nvSpPr>
+        <p:spPr>
+          <a:xfrm>
+            <a:off x="6296660" y="5178425"/>
+            <a:ext cx="1949450" cy="422910"/>
+          </a:xfrm>
+          <a:custGeom>
+            <a:avLst/>
+            <a:gdLst>
+              <a:gd name="connsiteX0" fmla="*/ 0 w 1949713"/>
+              <a:gd name="connsiteY0" fmla="*/ 423193 h 445864"/>
+              <a:gd name="connsiteX1" fmla="*/ 0 w 1949713"/>
+              <a:gd name="connsiteY1" fmla="*/ 423193 h 445864"/>
+              <a:gd name="connsiteX2" fmla="*/ 733032 w 1949713"/>
+              <a:gd name="connsiteY2" fmla="*/ 430750 h 445864"/>
+              <a:gd name="connsiteX3" fmla="*/ 1156225 w 1949713"/>
+              <a:gd name="connsiteY3" fmla="*/ 430750 h 445864"/>
+              <a:gd name="connsiteX4" fmla="*/ 1292251 w 1949713"/>
+              <a:gd name="connsiteY4" fmla="*/ 423193 h 445864"/>
+              <a:gd name="connsiteX5" fmla="*/ 1330036 w 1949713"/>
+              <a:gd name="connsiteY5" fmla="*/ 415636 h 445864"/>
+              <a:gd name="connsiteX6" fmla="*/ 1367822 w 1949713"/>
+              <a:gd name="connsiteY6" fmla="*/ 423193 h 445864"/>
+              <a:gd name="connsiteX7" fmla="*/ 1488734 w 1949713"/>
+              <a:gd name="connsiteY7" fmla="*/ 445864 h 445864"/>
+              <a:gd name="connsiteX8" fmla="*/ 1775901 w 1949713"/>
+              <a:gd name="connsiteY8" fmla="*/ 0 h 445864"/>
+              <a:gd name="connsiteX9" fmla="*/ 1949713 w 1949713"/>
+              <a:gd name="connsiteY9" fmla="*/ 0 h 445864"/>
+              <a:gd name="connsiteX0-1" fmla="*/ 0 w 1949713"/>
+              <a:gd name="connsiteY0-2" fmla="*/ 423193 h 470957"/>
+              <a:gd name="connsiteX1-3" fmla="*/ 0 w 1949713"/>
+              <a:gd name="connsiteY1-4" fmla="*/ 423193 h 470957"/>
+              <a:gd name="connsiteX2-5" fmla="*/ 733032 w 1949713"/>
+              <a:gd name="connsiteY2-6" fmla="*/ 430750 h 470957"/>
+              <a:gd name="connsiteX3-7" fmla="*/ 1156225 w 1949713"/>
+              <a:gd name="connsiteY3-8" fmla="*/ 430750 h 470957"/>
+              <a:gd name="connsiteX4-9" fmla="*/ 1292251 w 1949713"/>
+              <a:gd name="connsiteY4-10" fmla="*/ 423193 h 470957"/>
+              <a:gd name="connsiteX5-11" fmla="*/ 1330036 w 1949713"/>
+              <a:gd name="connsiteY5-12" fmla="*/ 415636 h 470957"/>
+              <a:gd name="connsiteX6-13" fmla="*/ 1488734 w 1949713"/>
+              <a:gd name="connsiteY6-14" fmla="*/ 445864 h 470957"/>
+              <a:gd name="connsiteX7-15" fmla="*/ 1775901 w 1949713"/>
+              <a:gd name="connsiteY7-16" fmla="*/ 0 h 470957"/>
+              <a:gd name="connsiteX8-17" fmla="*/ 1949713 w 1949713"/>
+              <a:gd name="connsiteY8-18" fmla="*/ 0 h 470957"/>
+              <a:gd name="connsiteX0-19" fmla="*/ 0 w 1949713"/>
+              <a:gd name="connsiteY0-20" fmla="*/ 423193 h 472667"/>
+              <a:gd name="connsiteX1-21" fmla="*/ 0 w 1949713"/>
+              <a:gd name="connsiteY1-22" fmla="*/ 423193 h 472667"/>
+              <a:gd name="connsiteX2-23" fmla="*/ 733032 w 1949713"/>
+              <a:gd name="connsiteY2-24" fmla="*/ 430750 h 472667"/>
+              <a:gd name="connsiteX3-25" fmla="*/ 1156225 w 1949713"/>
+              <a:gd name="connsiteY3-26" fmla="*/ 430750 h 472667"/>
+              <a:gd name="connsiteX4-27" fmla="*/ 1292251 w 1949713"/>
+              <a:gd name="connsiteY4-28" fmla="*/ 423193 h 472667"/>
+              <a:gd name="connsiteX5-29" fmla="*/ 1488734 w 1949713"/>
+              <a:gd name="connsiteY5-30" fmla="*/ 445864 h 472667"/>
+              <a:gd name="connsiteX6-31" fmla="*/ 1775901 w 1949713"/>
+              <a:gd name="connsiteY6-32" fmla="*/ 0 h 472667"/>
+              <a:gd name="connsiteX7-33" fmla="*/ 1949713 w 1949713"/>
+              <a:gd name="connsiteY7-34" fmla="*/ 0 h 472667"/>
+              <a:gd name="connsiteX0-35" fmla="*/ 0 w 1949713"/>
+              <a:gd name="connsiteY0-36" fmla="*/ 423193 h 474737"/>
+              <a:gd name="connsiteX1-37" fmla="*/ 0 w 1949713"/>
+              <a:gd name="connsiteY1-38" fmla="*/ 423193 h 474737"/>
+              <a:gd name="connsiteX2-39" fmla="*/ 733032 w 1949713"/>
+              <a:gd name="connsiteY2-40" fmla="*/ 430750 h 474737"/>
+              <a:gd name="connsiteX3-41" fmla="*/ 1156225 w 1949713"/>
+              <a:gd name="connsiteY3-42" fmla="*/ 430750 h 474737"/>
+              <a:gd name="connsiteX4-43" fmla="*/ 1488734 w 1949713"/>
+              <a:gd name="connsiteY4-44" fmla="*/ 445864 h 474737"/>
+              <a:gd name="connsiteX5-45" fmla="*/ 1775901 w 1949713"/>
+              <a:gd name="connsiteY5-46" fmla="*/ 0 h 474737"/>
+              <a:gd name="connsiteX6-47" fmla="*/ 1949713 w 1949713"/>
+              <a:gd name="connsiteY6-48" fmla="*/ 0 h 474737"/>
+              <a:gd name="connsiteX0-49" fmla="*/ 0 w 1949713"/>
+              <a:gd name="connsiteY0-50" fmla="*/ 423193 h 474973"/>
+              <a:gd name="connsiteX1-51" fmla="*/ 0 w 1949713"/>
+              <a:gd name="connsiteY1-52" fmla="*/ 423193 h 474973"/>
+              <a:gd name="connsiteX2-53" fmla="*/ 733032 w 1949713"/>
+              <a:gd name="connsiteY2-54" fmla="*/ 430750 h 474973"/>
+              <a:gd name="connsiteX3-55" fmla="*/ 1488734 w 1949713"/>
+              <a:gd name="connsiteY3-56" fmla="*/ 445864 h 474973"/>
+              <a:gd name="connsiteX4-57" fmla="*/ 1775901 w 1949713"/>
+              <a:gd name="connsiteY4-58" fmla="*/ 0 h 474973"/>
+              <a:gd name="connsiteX5-59" fmla="*/ 1949713 w 1949713"/>
+              <a:gd name="connsiteY5-60" fmla="*/ 0 h 474973"/>
+              <a:gd name="connsiteX0-61" fmla="*/ 0 w 1949713"/>
+              <a:gd name="connsiteY0-62" fmla="*/ 423193 h 445864"/>
+              <a:gd name="connsiteX1-63" fmla="*/ 0 w 1949713"/>
+              <a:gd name="connsiteY1-64" fmla="*/ 423193 h 445864"/>
+              <a:gd name="connsiteX2-65" fmla="*/ 1488734 w 1949713"/>
+              <a:gd name="connsiteY2-66" fmla="*/ 445864 h 445864"/>
+              <a:gd name="connsiteX3-67" fmla="*/ 1775901 w 1949713"/>
+              <a:gd name="connsiteY3-68" fmla="*/ 0 h 445864"/>
+              <a:gd name="connsiteX4-69" fmla="*/ 1949713 w 1949713"/>
+              <a:gd name="connsiteY4-70" fmla="*/ 0 h 445864"/>
+              <a:gd name="connsiteX0-71" fmla="*/ 0 w 1949713"/>
+              <a:gd name="connsiteY0-72" fmla="*/ 423193 h 423193"/>
+              <a:gd name="connsiteX1-73" fmla="*/ 0 w 1949713"/>
+              <a:gd name="connsiteY1-74" fmla="*/ 423193 h 423193"/>
+              <a:gd name="connsiteX2-75" fmla="*/ 1511405 w 1949713"/>
+              <a:gd name="connsiteY2-76" fmla="*/ 408079 h 423193"/>
+              <a:gd name="connsiteX3-77" fmla="*/ 1775901 w 1949713"/>
+              <a:gd name="connsiteY3-78" fmla="*/ 0 h 423193"/>
+              <a:gd name="connsiteX4-79" fmla="*/ 1949713 w 1949713"/>
+              <a:gd name="connsiteY4-80" fmla="*/ 0 h 423193"/>
+            </a:gdLst>
+            <a:ahLst/>
+            <a:cxnLst>
+              <a:cxn ang="0">
+                <a:pos x="connsiteX0-1" y="connsiteY0-2"/>
+              </a:cxn>
+              <a:cxn ang="0">
+                <a:pos x="connsiteX1-3" y="connsiteY1-4"/>
+              </a:cxn>
+              <a:cxn ang="0">
+                <a:pos x="connsiteX2-5" y="connsiteY2-6"/>
+              </a:cxn>
+              <a:cxn ang="0">
+                <a:pos x="connsiteX3-7" y="connsiteY3-8"/>
+              </a:cxn>
+              <a:cxn ang="0">
+                <a:pos x="connsiteX4-9" y="connsiteY4-10"/>
+              </a:cxn>
+            </a:cxnLst>
+            <a:rect l="l" t="t" r="r" b="b"/>
+            <a:pathLst>
+              <a:path w="1949713" h="423193">
+                <a:moveTo>
+                  <a:pt x="0" y="423193"/>
+                </a:moveTo>
+                <a:lnTo>
+                  <a:pt x="0" y="423193"/>
+                </a:lnTo>
+                <a:lnTo>
+                  <a:pt x="1511405" y="408079"/>
+                </a:lnTo>
+                <a:lnTo>
+                  <a:pt x="1775901" y="0"/>
+                </a:lnTo>
+                <a:lnTo>
+                  <a:pt x="1949713" y="0"/>
+                </a:lnTo>
+              </a:path>
+            </a:pathLst>
+          </a:custGeom>
+          <a:noFill/>
+          <a:ln w="9525">
+            <a:solidFill>
+              <a:schemeClr val="accent4">
+                <a:lumMod val="60000"/>
+                <a:lumOff val="40000"/>
+              </a:schemeClr>
+            </a:solidFill>
+          </a:ln>
+        </p:spPr>
+        <p:style>
+          <a:lnRef idx="2">
+            <a:schemeClr val="accent1">
+              <a:shade val="15000"/>
+            </a:schemeClr>
+          </a:lnRef>
+          <a:fillRef idx="1">
+            <a:schemeClr val="accent1"/>
+          </a:fillRef>
+          <a:effectRef idx="0">
+            <a:schemeClr val="accent1"/>
+          </a:effectRef>
+          <a:fontRef idx="minor">
+            <a:schemeClr val="lt1"/>
+          </a:fontRef>
+        </p:style>
+        <p:txBody>
+          <a:bodyPr rtlCol="0" anchor="ctr"/>
+          <a:lstStyle/>
+          <a:p>
+            <a:pPr algn="ctr"/>
+            <a:endParaRPr lang="zh-CN" altLang="en-US"/>
+          </a:p>
+        </p:txBody>
+      </p:sp>
+      <p:sp>
+        <p:nvSpPr>
+          <p:cNvPr id="45" name="任意多边形 44"/>
+          <p:cNvSpPr/>
+          <p:nvPr>
+            <p:custDataLst>
+              <p:tags r:id="rId3"/>
+            </p:custDataLst>
+          </p:nvPr>
+        </p:nvSpPr>
+        <p:spPr>
+          <a:xfrm>
+            <a:off x="3903980" y="3431540"/>
+            <a:ext cx="594995" cy="382905"/>
+          </a:xfrm>
+          <a:custGeom>
+            <a:avLst/>
+            <a:gdLst>
+              <a:gd name="connsiteX0" fmla="*/ 0 w 937"/>
+              <a:gd name="connsiteY0" fmla="*/ 0 h 333"/>
+              <a:gd name="connsiteX1" fmla="*/ 487 w 937"/>
+              <a:gd name="connsiteY1" fmla="*/ 3 h 333"/>
+              <a:gd name="connsiteX2" fmla="*/ 937 w 937"/>
+              <a:gd name="connsiteY2" fmla="*/ 333 h 333"/>
+            </a:gdLst>
+            <a:ahLst/>
+            <a:cxnLst>
+              <a:cxn ang="0">
+                <a:pos x="connsiteX0" y="connsiteY0"/>
+              </a:cxn>
+              <a:cxn ang="0">
+                <a:pos x="connsiteX1" y="connsiteY1"/>
+              </a:cxn>
+              <a:cxn ang="0">
+                <a:pos x="connsiteX2" y="connsiteY2"/>
+              </a:cxn>
+            </a:cxnLst>
+            <a:rect l="l" t="t" r="r" b="b"/>
+            <a:pathLst>
+              <a:path w="937" h="333">
+                <a:moveTo>
+                  <a:pt x="0" y="0"/>
+                </a:moveTo>
+                <a:cubicBezTo>
+                  <a:pt x="488" y="3"/>
+                  <a:pt x="297" y="-2"/>
+                  <a:pt x="487" y="3"/>
+                </a:cubicBezTo>
+                <a:lnTo>
+                  <a:pt x="937" y="333"/>
+                </a:lnTo>
+              </a:path>
+            </a:pathLst>
+          </a:custGeom>
+          <a:noFill/>
+          <a:ln w="9525">
+            <a:solidFill>
+              <a:schemeClr val="accent6">
+                <a:lumMod val="60000"/>
+                <a:lumOff val="40000"/>
+              </a:schemeClr>
+            </a:solidFill>
+          </a:ln>
+        </p:spPr>
+        <p:style>
+          <a:lnRef idx="2">
+            <a:schemeClr val="accent1">
+              <a:lumMod val="75000"/>
+            </a:schemeClr>
+          </a:lnRef>
+          <a:fillRef idx="1">
+            <a:schemeClr val="accent1"/>
+          </a:fillRef>
+          <a:effectRef idx="0">
+            <a:srgbClr val="FFFFFF"/>
+          </a:effectRef>
+          <a:fontRef idx="minor">
+            <a:schemeClr val="lt1"/>
+          </a:fontRef>
+        </p:style>
+        <p:txBody>
+          <a:bodyPr vertOverflow="overflow" horzOverflow="overflow" vert="horz" wrap="square" numCol="1" spcCol="0" rtlCol="0" fromWordArt="0" anchor="ctr" anchorCtr="0" forceAA="0" compatLnSpc="1">
+            <a:noAutofit/>
+          </a:bodyPr>
+          <a:lstStyle/>
+          <a:p>
+            <a:pPr lvl="0" algn="ctr">
+              <a:buClrTx/>
+              <a:buSzTx/>
+              <a:buFontTx/>
+            </a:pPr>
+            <a:endParaRPr lang="zh-CN" altLang="en-US">
+              <a:sym typeface="+mn-ea"/>
+            </a:endParaRPr>
+          </a:p>
+        </p:txBody>
+      </p:sp>
+      <p:sp>
+        <p:nvSpPr>
+          <p:cNvPr id="44" name="任意多边形 43"/>
+          <p:cNvSpPr/>
+          <p:nvPr>
+            <p:custDataLst>
+              <p:tags r:id="rId4"/>
+            </p:custDataLst>
+          </p:nvPr>
+        </p:nvSpPr>
+        <p:spPr>
+          <a:xfrm flipH="1">
+            <a:off x="7729220" y="3431540"/>
+            <a:ext cx="527050" cy="847090"/>
+          </a:xfrm>
+          <a:custGeom>
+            <a:avLst/>
+            <a:gdLst>
+              <a:gd name="connsiteX0" fmla="*/ 0 w 937"/>
+              <a:gd name="connsiteY0" fmla="*/ 0 h 333"/>
+              <a:gd name="connsiteX1" fmla="*/ 487 w 937"/>
+              <a:gd name="connsiteY1" fmla="*/ 3 h 333"/>
+              <a:gd name="connsiteX2" fmla="*/ 937 w 937"/>
+              <a:gd name="connsiteY2" fmla="*/ 333 h 333"/>
+              <a:gd name="connsiteX0-1" fmla="*/ 0 w 10000"/>
+              <a:gd name="connsiteY0-2" fmla="*/ 54 h 10054"/>
+              <a:gd name="connsiteX1-3" fmla="*/ 3800 w 10000"/>
+              <a:gd name="connsiteY1-4" fmla="*/ 50 h 10054"/>
+              <a:gd name="connsiteX2-5" fmla="*/ 10000 w 10000"/>
+              <a:gd name="connsiteY2-6" fmla="*/ 10054 h 10054"/>
+              <a:gd name="connsiteX0-7" fmla="*/ 0 w 10000"/>
+              <a:gd name="connsiteY0-8" fmla="*/ 54 h 10054"/>
+              <a:gd name="connsiteX1-9" fmla="*/ 3419 w 10000"/>
+              <a:gd name="connsiteY1-10" fmla="*/ 50 h 10054"/>
+              <a:gd name="connsiteX2-11" fmla="*/ 10000 w 10000"/>
+              <a:gd name="connsiteY2-12" fmla="*/ 10054 h 10054"/>
+              <a:gd name="connsiteX0-13" fmla="*/ 0 w 10000"/>
+              <a:gd name="connsiteY0-14" fmla="*/ 54 h 10054"/>
+              <a:gd name="connsiteX1-15" fmla="*/ 3419 w 10000"/>
+              <a:gd name="connsiteY1-16" fmla="*/ 50 h 10054"/>
+              <a:gd name="connsiteX2-17" fmla="*/ 10000 w 10000"/>
+              <a:gd name="connsiteY2-18" fmla="*/ 10054 h 10054"/>
+              <a:gd name="connsiteX0-19" fmla="*/ 0 w 8603"/>
+              <a:gd name="connsiteY0-20" fmla="*/ 54 h 10620"/>
+              <a:gd name="connsiteX1-21" fmla="*/ 3419 w 8603"/>
+              <a:gd name="connsiteY1-22" fmla="*/ 50 h 10620"/>
+              <a:gd name="connsiteX2-23" fmla="*/ 8603 w 8603"/>
+              <a:gd name="connsiteY2-24" fmla="*/ 10620 h 10620"/>
+              <a:gd name="connsiteX0-25" fmla="*/ 0 w 10000"/>
+              <a:gd name="connsiteY0-26" fmla="*/ 51 h 10000"/>
+              <a:gd name="connsiteX1-27" fmla="*/ 3974 w 10000"/>
+              <a:gd name="connsiteY1-28" fmla="*/ 47 h 10000"/>
+              <a:gd name="connsiteX2-29" fmla="*/ 10000 w 10000"/>
+              <a:gd name="connsiteY2-30" fmla="*/ 10000 h 10000"/>
+              <a:gd name="connsiteX0-31" fmla="*/ 0 w 10295"/>
+              <a:gd name="connsiteY0-32" fmla="*/ 0 h 10215"/>
+              <a:gd name="connsiteX1-33" fmla="*/ 4269 w 10295"/>
+              <a:gd name="connsiteY1-34" fmla="*/ 262 h 10215"/>
+              <a:gd name="connsiteX2-35" fmla="*/ 10295 w 10295"/>
+              <a:gd name="connsiteY2-36" fmla="*/ 10215 h 10215"/>
+              <a:gd name="connsiteX0-37" fmla="*/ 0 w 10295"/>
+              <a:gd name="connsiteY0-38" fmla="*/ 51 h 10000"/>
+              <a:gd name="connsiteX1-39" fmla="*/ 4269 w 10295"/>
+              <a:gd name="connsiteY1-40" fmla="*/ 47 h 10000"/>
+              <a:gd name="connsiteX2-41" fmla="*/ 10295 w 10295"/>
+              <a:gd name="connsiteY2-42" fmla="*/ 10000 h 10000"/>
+              <a:gd name="connsiteX0-43" fmla="*/ 0 w 10295"/>
+              <a:gd name="connsiteY0-44" fmla="*/ 895 h 10844"/>
+              <a:gd name="connsiteX1-45" fmla="*/ 4269 w 10295"/>
+              <a:gd name="connsiteY1-46" fmla="*/ 891 h 10844"/>
+              <a:gd name="connsiteX2-47" fmla="*/ 10295 w 10295"/>
+              <a:gd name="connsiteY2-48" fmla="*/ 10844 h 10844"/>
+              <a:gd name="connsiteX0-49" fmla="*/ 0 w 10295"/>
+              <a:gd name="connsiteY0-50" fmla="*/ 895 h 10844"/>
+              <a:gd name="connsiteX1-51" fmla="*/ 4269 w 10295"/>
+              <a:gd name="connsiteY1-52" fmla="*/ 891 h 10844"/>
+              <a:gd name="connsiteX2-53" fmla="*/ 10295 w 10295"/>
+              <a:gd name="connsiteY2-54" fmla="*/ 10844 h 10844"/>
+              <a:gd name="connsiteX0-55" fmla="*/ 0 w 10295"/>
+              <a:gd name="connsiteY0-56" fmla="*/ 6 h 9955"/>
+              <a:gd name="connsiteX1-57" fmla="*/ 4269 w 10295"/>
+              <a:gd name="connsiteY1-58" fmla="*/ 2 h 9955"/>
+              <a:gd name="connsiteX2-59" fmla="*/ 10295 w 10295"/>
+              <a:gd name="connsiteY2-60" fmla="*/ 9955 h 9955"/>
+              <a:gd name="connsiteX0-61" fmla="*/ 0 w 10000"/>
+              <a:gd name="connsiteY0-62" fmla="*/ 6 h 10000"/>
+              <a:gd name="connsiteX1-63" fmla="*/ 4147 w 10000"/>
+              <a:gd name="connsiteY1-64" fmla="*/ 2 h 10000"/>
+              <a:gd name="connsiteX2-65" fmla="*/ 10000 w 10000"/>
+              <a:gd name="connsiteY2-66" fmla="*/ 10000 h 10000"/>
+              <a:gd name="connsiteX0-67" fmla="*/ 0 w 10000"/>
+              <a:gd name="connsiteY0-68" fmla="*/ 1084 h 11078"/>
+              <a:gd name="connsiteX1-69" fmla="*/ 4147 w 10000"/>
+              <a:gd name="connsiteY1-70" fmla="*/ 1080 h 11078"/>
+              <a:gd name="connsiteX2-71" fmla="*/ 10000 w 10000"/>
+              <a:gd name="connsiteY2-72" fmla="*/ 11078 h 11078"/>
+              <a:gd name="connsiteX0-73" fmla="*/ 0 w 10000"/>
+              <a:gd name="connsiteY0-74" fmla="*/ 1084 h 11078"/>
+              <a:gd name="connsiteX1-75" fmla="*/ 4147 w 10000"/>
+              <a:gd name="connsiteY1-76" fmla="*/ 1080 h 11078"/>
+              <a:gd name="connsiteX2-77" fmla="*/ 10000 w 10000"/>
+              <a:gd name="connsiteY2-78" fmla="*/ 11078 h 11078"/>
+              <a:gd name="connsiteX0-79" fmla="*/ 0 w 10000"/>
+              <a:gd name="connsiteY0-80" fmla="*/ 1084 h 11078"/>
+              <a:gd name="connsiteX1-81" fmla="*/ 4147 w 10000"/>
+              <a:gd name="connsiteY1-82" fmla="*/ 1080 h 11078"/>
+              <a:gd name="connsiteX2-83" fmla="*/ 10000 w 10000"/>
+              <a:gd name="connsiteY2-84" fmla="*/ 11078 h 11078"/>
+              <a:gd name="connsiteX0-85" fmla="*/ 0 w 10000"/>
+              <a:gd name="connsiteY0-86" fmla="*/ 4 h 9998"/>
+              <a:gd name="connsiteX1-87" fmla="*/ 4147 w 10000"/>
+              <a:gd name="connsiteY1-88" fmla="*/ 0 h 9998"/>
+              <a:gd name="connsiteX2-89" fmla="*/ 10000 w 10000"/>
+              <a:gd name="connsiteY2-90" fmla="*/ 9998 h 9998"/>
+            </a:gdLst>
+            <a:ahLst/>
+            <a:cxnLst>
+              <a:cxn ang="0">
+                <a:pos x="connsiteX0-1" y="connsiteY0-2"/>
+              </a:cxn>
+              <a:cxn ang="0">
+                <a:pos x="connsiteX1-3" y="connsiteY1-4"/>
+              </a:cxn>
+              <a:cxn ang="0">
+                <a:pos x="connsiteX2-5" y="connsiteY2-6"/>
+              </a:cxn>
+            </a:cxnLst>
+            <a:rect l="l" t="t" r="r" b="b"/>
+            <a:pathLst>
+              <a:path w="10000" h="9998">
+                <a:moveTo>
+                  <a:pt x="0" y="4"/>
+                </a:moveTo>
+                <a:cubicBezTo>
+                  <a:pt x="5881" y="89"/>
+                  <a:pt x="75" y="23"/>
+                  <a:pt x="4147" y="0"/>
+                </a:cubicBezTo>
+                <a:cubicBezTo>
+                  <a:pt x="6049" y="2953"/>
+                  <a:pt x="5181" y="2235"/>
+                  <a:pt x="10000" y="9998"/>
+                </a:cubicBezTo>
+              </a:path>
+            </a:pathLst>
+          </a:custGeom>
+          <a:noFill/>
+          <a:ln w="9525">
+            <a:solidFill>
+              <a:schemeClr val="accent3">
+                <a:lumMod val="60000"/>
+                <a:lumOff val="40000"/>
+              </a:schemeClr>
+            </a:solidFill>
+          </a:ln>
+        </p:spPr>
+        <p:style>
+          <a:lnRef idx="2">
+            <a:schemeClr val="accent1">
+              <a:lumMod val="75000"/>
+            </a:schemeClr>
+          </a:lnRef>
+          <a:fillRef idx="1">
+            <a:schemeClr val="accent1"/>
+          </a:fillRef>
+          <a:effectRef idx="0">
+            <a:srgbClr val="FFFFFF"/>
+          </a:effectRef>
+          <a:fontRef idx="minor">
+            <a:schemeClr val="lt1"/>
+          </a:fontRef>
+        </p:style>
+        <p:txBody>
+          <a:bodyPr vertOverflow="overflow" horzOverflow="overflow" vert="horz" wrap="square" numCol="1" spcCol="0" rtlCol="0" fromWordArt="0" anchor="ctr" anchorCtr="0" forceAA="0" compatLnSpc="1">
+            <a:noAutofit/>
+          </a:bodyPr>
+          <a:lstStyle/>
+          <a:p>
+            <a:pPr lvl="0" algn="ctr">
+              <a:buClrTx/>
+              <a:buSzTx/>
+              <a:buFontTx/>
+            </a:pPr>
+            <a:endParaRPr lang="zh-CN" altLang="en-US">
+              <a:sym typeface="+mn-ea"/>
+            </a:endParaRPr>
+          </a:p>
+        </p:txBody>
+      </p:sp>
+      <p:sp>
+        <p:nvSpPr>
+          <p:cNvPr id="28" name="任意多边形 27"/>
+          <p:cNvSpPr/>
+          <p:nvPr>
+            <p:custDataLst>
+              <p:tags r:id="rId5"/>
+            </p:custDataLst>
+          </p:nvPr>
+        </p:nvSpPr>
+        <p:spPr>
+          <a:xfrm>
+            <a:off x="3979545" y="5150485"/>
+            <a:ext cx="911860" cy="118110"/>
+          </a:xfrm>
+          <a:custGeom>
+            <a:avLst/>
+            <a:gdLst>
+              <a:gd name="connsiteX0" fmla="*/ 0 w 1174"/>
+              <a:gd name="connsiteY0" fmla="*/ 0 h 662"/>
+              <a:gd name="connsiteX1" fmla="*/ 480 w 1174"/>
+              <a:gd name="connsiteY1" fmla="*/ 480 h 662"/>
+              <a:gd name="connsiteX2" fmla="*/ 1174 w 1174"/>
+              <a:gd name="connsiteY2" fmla="*/ 662 h 662"/>
+              <a:gd name="connsiteX0-1" fmla="*/ 0 w 10000"/>
+              <a:gd name="connsiteY0-2" fmla="*/ 469 h 10469"/>
+              <a:gd name="connsiteX1-3" fmla="*/ 8549 w 10000"/>
+              <a:gd name="connsiteY1-4" fmla="*/ 0 h 10469"/>
+              <a:gd name="connsiteX2-5" fmla="*/ 10000 w 10000"/>
+              <a:gd name="connsiteY2-6" fmla="*/ 10469 h 10469"/>
+              <a:gd name="connsiteX0-7" fmla="*/ 0 w 12230"/>
+              <a:gd name="connsiteY0-8" fmla="*/ 469 h 4464"/>
+              <a:gd name="connsiteX1-9" fmla="*/ 8549 w 12230"/>
+              <a:gd name="connsiteY1-10" fmla="*/ 0 h 4464"/>
+              <a:gd name="connsiteX2-11" fmla="*/ 12230 w 12230"/>
+              <a:gd name="connsiteY2-12" fmla="*/ 4464 h 4464"/>
+            </a:gdLst>
+            <a:ahLst/>
+            <a:cxnLst>
+              <a:cxn ang="0">
+                <a:pos x="connsiteX0-1" y="connsiteY0-2"/>
+              </a:cxn>
+              <a:cxn ang="0">
+                <a:pos x="connsiteX1-3" y="connsiteY1-4"/>
+              </a:cxn>
+              <a:cxn ang="0">
+                <a:pos x="connsiteX2-5" y="connsiteY2-6"/>
+              </a:cxn>
+            </a:cxnLst>
+            <a:rect l="l" t="t" r="r" b="b"/>
+            <a:pathLst>
+              <a:path w="12230" h="4464">
+                <a:moveTo>
+                  <a:pt x="0" y="469"/>
+                </a:moveTo>
+                <a:lnTo>
+                  <a:pt x="8549" y="0"/>
+                </a:lnTo>
+                <a:cubicBezTo>
+                  <a:pt x="10519" y="916"/>
+                  <a:pt x="10260" y="3548"/>
+                  <a:pt x="12230" y="4464"/>
+                </a:cubicBezTo>
+              </a:path>
+            </a:pathLst>
+          </a:custGeom>
+          <a:noFill/>
+          <a:ln w="9525">
+            <a:solidFill>
+              <a:schemeClr val="accent5">
+                <a:lumMod val="60000"/>
+                <a:lumOff val="40000"/>
+              </a:schemeClr>
+            </a:solidFill>
+          </a:ln>
+        </p:spPr>
+        <p:style>
+          <a:lnRef idx="2">
+            <a:schemeClr val="accent1">
+              <a:lumMod val="75000"/>
+            </a:schemeClr>
+          </a:lnRef>
+          <a:fillRef idx="1">
+            <a:schemeClr val="accent1"/>
+          </a:fillRef>
+          <a:effectRef idx="0">
+            <a:srgbClr val="FFFFFF"/>
+          </a:effectRef>
+          <a:fontRef idx="minor">
+            <a:schemeClr val="lt1"/>
+          </a:fontRef>
+        </p:style>
+        <p:txBody>
+          <a:bodyPr vertOverflow="overflow" horzOverflow="overflow" vert="horz" wrap="square" numCol="1" spcCol="0" rtlCol="0" fromWordArt="0" anchor="ctr" anchorCtr="0" forceAA="0" compatLnSpc="1">
+            <a:noAutofit/>
+          </a:bodyPr>
+          <a:lstStyle/>
+          <a:p>
+            <a:pPr lvl="0" algn="ctr">
+              <a:buClrTx/>
+              <a:buSzTx/>
+              <a:buFontTx/>
+            </a:pPr>
+            <a:endParaRPr lang="zh-CN" altLang="en-US">
+              <a:sym typeface="+mn-ea"/>
+            </a:endParaRPr>
+          </a:p>
+        </p:txBody>
+      </p:sp>
+      <p:sp>
+        <p:nvSpPr>
+          <p:cNvPr id="22" name="任意多边形 21"/>
+          <p:cNvSpPr/>
+          <p:nvPr>
+            <p:custDataLst>
+              <p:tags r:id="rId6"/>
+            </p:custDataLst>
+          </p:nvPr>
+        </p:nvSpPr>
+        <p:spPr>
+          <a:xfrm>
+            <a:off x="4001770" y="1720850"/>
+            <a:ext cx="1637030" cy="758825"/>
+          </a:xfrm>
+          <a:custGeom>
+            <a:avLst/>
+            <a:gdLst>
+              <a:gd name="connsiteX0" fmla="*/ 0 w 1790"/>
+              <a:gd name="connsiteY0" fmla="*/ 0 h 193"/>
+              <a:gd name="connsiteX1" fmla="*/ 1096 w 1790"/>
+              <a:gd name="connsiteY1" fmla="*/ 11 h 193"/>
+              <a:gd name="connsiteX2" fmla="*/ 1790 w 1790"/>
+              <a:gd name="connsiteY2" fmla="*/ 193 h 193"/>
+              <a:gd name="connsiteX0-1" fmla="*/ 0 w 10000"/>
+              <a:gd name="connsiteY0-2" fmla="*/ 29 h 10029"/>
+              <a:gd name="connsiteX1-3" fmla="*/ 5658 w 10000"/>
+              <a:gd name="connsiteY1-4" fmla="*/ 0 h 10029"/>
+              <a:gd name="connsiteX2-5" fmla="*/ 10000 w 10000"/>
+              <a:gd name="connsiteY2-6" fmla="*/ 10029 h 10029"/>
+            </a:gdLst>
+            <a:ahLst/>
+            <a:cxnLst>
+              <a:cxn ang="0">
+                <a:pos x="connsiteX0-1" y="connsiteY0-2"/>
+              </a:cxn>
+              <a:cxn ang="0">
+                <a:pos x="connsiteX1-3" y="connsiteY1-4"/>
+              </a:cxn>
+              <a:cxn ang="0">
+                <a:pos x="connsiteX2-5" y="connsiteY2-6"/>
+              </a:cxn>
+            </a:cxnLst>
+            <a:rect l="l" t="t" r="r" b="b"/>
+            <a:pathLst>
+              <a:path w="10000" h="10029">
+                <a:moveTo>
+                  <a:pt x="0" y="29"/>
+                </a:moveTo>
+                <a:lnTo>
+                  <a:pt x="5658" y="0"/>
+                </a:lnTo>
+                <a:cubicBezTo>
+                  <a:pt x="6950" y="3143"/>
+                  <a:pt x="8708" y="6886"/>
+                  <a:pt x="10000" y="10029"/>
+                </a:cubicBezTo>
+              </a:path>
+            </a:pathLst>
+          </a:custGeom>
+          <a:noFill/>
+          <a:ln w="9525">
+            <a:solidFill>
+              <a:schemeClr val="accent1">
+                <a:lumMod val="60000"/>
+                <a:lumOff val="40000"/>
+              </a:schemeClr>
+            </a:solidFill>
+          </a:ln>
+        </p:spPr>
+        <p:style>
+          <a:lnRef idx="2">
+            <a:schemeClr val="accent1">
+              <a:lumMod val="75000"/>
+            </a:schemeClr>
+          </a:lnRef>
+          <a:fillRef idx="1">
+            <a:schemeClr val="accent1"/>
+          </a:fillRef>
+          <a:effectRef idx="0">
+            <a:srgbClr val="FFFFFF"/>
+          </a:effectRef>
+          <a:fontRef idx="minor">
+            <a:schemeClr val="lt1"/>
+          </a:fontRef>
+        </p:style>
+        <p:txBody>
+          <a:bodyPr rtlCol="0" anchor="ctr"/>
+          <a:lstStyle/>
+          <a:p>
+            <a:pPr algn="ctr"/>
+            <a:endParaRPr lang="zh-CN" altLang="en-US"/>
+          </a:p>
+        </p:txBody>
+      </p:sp>
+      <p:sp>
+        <p:nvSpPr>
+          <p:cNvPr id="24" name="任意多边形 23"/>
+          <p:cNvSpPr/>
+          <p:nvPr>
+            <p:custDataLst>
+              <p:tags r:id="rId7"/>
+            </p:custDataLst>
+          </p:nvPr>
+        </p:nvSpPr>
+        <p:spPr>
+          <a:xfrm flipH="1">
+            <a:off x="7412990" y="1723390"/>
+            <a:ext cx="828675" cy="922020"/>
+          </a:xfrm>
+          <a:custGeom>
+            <a:avLst/>
+            <a:gdLst>
+              <a:gd name="connsiteX0" fmla="*/ 0 w 1305"/>
+              <a:gd name="connsiteY0" fmla="*/ 0 h 450"/>
+              <a:gd name="connsiteX1" fmla="*/ 870 w 1305"/>
+              <a:gd name="connsiteY1" fmla="*/ 15 h 450"/>
+              <a:gd name="connsiteX2" fmla="*/ 1305 w 1305"/>
+              <a:gd name="connsiteY2" fmla="*/ 450 h 450"/>
+              <a:gd name="connsiteX0-1" fmla="*/ 0 w 10000"/>
+              <a:gd name="connsiteY0-2" fmla="*/ 0 h 10000"/>
+              <a:gd name="connsiteX1-3" fmla="*/ 6576 w 10000"/>
+              <a:gd name="connsiteY1-4" fmla="*/ 5 h 10000"/>
+              <a:gd name="connsiteX2-5" fmla="*/ 10000 w 10000"/>
+              <a:gd name="connsiteY2-6" fmla="*/ 10000 h 10000"/>
+            </a:gdLst>
+            <a:ahLst/>
+            <a:cxnLst>
+              <a:cxn ang="0">
+                <a:pos x="connsiteX0-1" y="connsiteY0-2"/>
+              </a:cxn>
+              <a:cxn ang="0">
+                <a:pos x="connsiteX1-3" y="connsiteY1-4"/>
+              </a:cxn>
+              <a:cxn ang="0">
+                <a:pos x="connsiteX2-5" y="connsiteY2-6"/>
+              </a:cxn>
+            </a:cxnLst>
+            <a:rect l="l" t="t" r="r" b="b"/>
+            <a:pathLst>
+              <a:path w="10000" h="10000">
+                <a:moveTo>
+                  <a:pt x="0" y="0"/>
+                </a:moveTo>
+                <a:lnTo>
+                  <a:pt x="6576" y="5"/>
+                </a:lnTo>
+                <a:cubicBezTo>
+                  <a:pt x="7687" y="3227"/>
+                  <a:pt x="8889" y="6778"/>
+                  <a:pt x="10000" y="10000"/>
+                </a:cubicBezTo>
+              </a:path>
+            </a:pathLst>
+          </a:custGeom>
+          <a:noFill/>
+          <a:ln w="9525">
+            <a:solidFill>
+              <a:schemeClr val="accent2">
+                <a:lumMod val="60000"/>
+                <a:lumOff val="40000"/>
+              </a:schemeClr>
+            </a:solidFill>
+          </a:ln>
+        </p:spPr>
+        <p:style>
+          <a:lnRef idx="2">
+            <a:schemeClr val="accent1">
+              <a:lumMod val="75000"/>
+            </a:schemeClr>
+          </a:lnRef>
+          <a:fillRef idx="1">
+            <a:schemeClr val="accent1"/>
+          </a:fillRef>
+          <a:effectRef idx="0">
+            <a:srgbClr val="FFFFFF"/>
+          </a:effectRef>
+          <a:fontRef idx="minor">
+            <a:schemeClr val="lt1"/>
+          </a:fontRef>
+        </p:style>
+        <p:txBody>
+          <a:bodyPr vertOverflow="overflow" horzOverflow="overflow" vert="horz" wrap="square" numCol="1" spcCol="0" rtlCol="0" fromWordArt="0" anchor="ctr" anchorCtr="0" forceAA="0" compatLnSpc="1">
+            <a:noAutofit/>
+          </a:bodyPr>
+          <a:lstStyle/>
+          <a:p>
+            <a:pPr lvl="0" algn="ctr">
+              <a:buClrTx/>
+              <a:buSzTx/>
+              <a:buFontTx/>
+            </a:pPr>
+            <a:endParaRPr lang="zh-CN" altLang="en-US">
+              <a:sym typeface="+mn-ea"/>
+            </a:endParaRPr>
+          </a:p>
+        </p:txBody>
+      </p:sp>
+      <p:sp>
+        <p:nvSpPr>
+          <p:cNvPr id="3" name="矩形 2"/>
+          <p:cNvSpPr/>
+          <p:nvPr>
+            <p:custDataLst>
+              <p:tags r:id="rId8"/>
+            </p:custDataLst>
+          </p:nvPr>
+        </p:nvSpPr>
+        <p:spPr>
+          <a:xfrm>
+            <a:off x="8707755" y="5310505"/>
+            <a:ext cx="2790825" cy="1014730"/>
+          </a:xfrm>
+          <a:prstGeom prst="rect">
+            <a:avLst/>
+          </a:prstGeom>
+          <a:noFill/>
+        </p:spPr>
+        <p:txBody>
+          <a:bodyPr wrap="square" lIns="0" tIns="0" rIns="0" bIns="0" rtlCol="0" anchor="t" anchorCtr="0">
+            <a:noAutofit/>
+          </a:bodyPr>
+          <a:lstStyle/>
+          <a:p>
+            <a:pPr marL="285750" indent="-285750">
+              <a:lnSpc>
+                <a:spcPct val="150000"/>
+              </a:lnSpc>
+              <a:spcBef>
+                <a:spcPct val="0"/>
+              </a:spcBef>
+              <a:spcAft>
+                <a:spcPct val="0"/>
+              </a:spcAft>
+              <a:buFont typeface="Wingdings" panose="05000000000000000000" charset="0"/>
+              <a:buChar char="Ø"/>
+            </a:pPr>
+            <a:r>
+              <a:rPr lang="en-US" altLang="zh-CN" sz="1600">
+                <a:ln>
+                  <a:noFill/>
+                  <a:prstDash val="sysDot"/>
+                </a:ln>
+                <a:solidFill>
+                  <a:schemeClr val="tx1">
+                    <a:lumMod val="85000"/>
+                    <a:lumOff val="15000"/>
+                  </a:schemeClr>
+                </a:solidFill>
+                <a:latin typeface="Arial" panose="020B0604020202020204" pitchFamily="34" charset="0"/>
+                <a:cs typeface="Arial" panose="020B0604020202020204" pitchFamily="34" charset="0"/>
+                <a:sym typeface="+mn-ea"/>
+              </a:rPr>
+              <a:t>Lightweight BI endpoint for book count &amp; average rating</a:t>
+            </a:r>
+            <a:endParaRPr lang="en-US" altLang="zh-CN" sz="1600">
+              <a:ln>
+                <a:noFill/>
+                <a:prstDash val="sysDot"/>
+              </a:ln>
+              <a:solidFill>
+                <a:schemeClr val="tx1">
+                  <a:lumMod val="85000"/>
+                  <a:lumOff val="15000"/>
+                </a:schemeClr>
+              </a:solidFill>
+              <a:latin typeface="Arial" panose="020B0604020202020204" pitchFamily="34" charset="0"/>
+              <a:cs typeface="Arial" panose="020B0604020202020204" pitchFamily="34" charset="0"/>
+              <a:sym typeface="+mn-ea"/>
+            </a:endParaRPr>
+          </a:p>
+        </p:txBody>
+      </p:sp>
+      <p:sp>
+        <p:nvSpPr>
+          <p:cNvPr id="4" name="矩形 3"/>
+          <p:cNvSpPr/>
+          <p:nvPr>
+            <p:custDataLst>
+              <p:tags r:id="rId9"/>
+            </p:custDataLst>
+          </p:nvPr>
+        </p:nvSpPr>
+        <p:spPr>
+          <a:xfrm>
+            <a:off x="8711565" y="4902835"/>
+            <a:ext cx="2784475" cy="382905"/>
+          </a:xfrm>
+          <a:prstGeom prst="rect">
+            <a:avLst/>
+          </a:prstGeom>
+          <a:noFill/>
+        </p:spPr>
+        <p:txBody>
+          <a:bodyPr wrap="square" lIns="0" tIns="0" rIns="0" bIns="0" rtlCol="0" anchor="b" anchorCtr="0">
+            <a:noAutofit/>
+          </a:bodyPr>
+          <a:lstStyle/>
+          <a:p>
+            <a:pPr>
+              <a:spcBef>
+                <a:spcPct val="0"/>
+              </a:spcBef>
+              <a:spcAft>
+                <a:spcPct val="0"/>
+              </a:spcAft>
+            </a:pPr>
+            <a:r>
+              <a:rPr lang="en-US" altLang="zh-CN" sz="2000" b="1">
+                <a:solidFill>
+                  <a:schemeClr val="accent4"/>
+                </a:solidFill>
+                <a:latin typeface="+mn-ea"/>
+                <a:cs typeface="+mn-ea"/>
+                <a:sym typeface="+mn-ea"/>
+              </a:rPr>
+              <a:t>Real‑time genre analytics</a:t>
+            </a:r>
+            <a:endParaRPr lang="en-US" altLang="zh-CN" sz="2000" b="1">
+              <a:solidFill>
+                <a:schemeClr val="accent4"/>
+              </a:solidFill>
+              <a:latin typeface="+mn-ea"/>
+              <a:cs typeface="+mn-ea"/>
+              <a:sym typeface="+mn-ea"/>
+            </a:endParaRPr>
+          </a:p>
+        </p:txBody>
+      </p:sp>
+      <p:sp>
+        <p:nvSpPr>
+          <p:cNvPr id="13" name="矩形 12"/>
+          <p:cNvSpPr/>
+          <p:nvPr>
+            <p:custDataLst>
+              <p:tags r:id="rId10"/>
+            </p:custDataLst>
+          </p:nvPr>
+        </p:nvSpPr>
+        <p:spPr>
+          <a:xfrm>
+            <a:off x="8007985" y="1883410"/>
+            <a:ext cx="3490595" cy="1014730"/>
+          </a:xfrm>
+          <a:prstGeom prst="rect">
+            <a:avLst/>
+          </a:prstGeom>
+          <a:noFill/>
+        </p:spPr>
+        <p:txBody>
+          <a:bodyPr wrap="square" lIns="0" tIns="0" rIns="0" bIns="0" rtlCol="0" anchor="t" anchorCtr="0">
+            <a:noAutofit/>
+          </a:bodyPr>
+          <a:lstStyle/>
+          <a:p>
+            <a:pPr marL="285750" indent="-285750">
+              <a:lnSpc>
+                <a:spcPct val="150000"/>
+              </a:lnSpc>
+              <a:spcBef>
+                <a:spcPct val="0"/>
+              </a:spcBef>
+              <a:spcAft>
+                <a:spcPct val="0"/>
+              </a:spcAft>
+              <a:buFont typeface="Wingdings" panose="05000000000000000000" charset="0"/>
+              <a:buChar char="Ø"/>
+            </a:pPr>
+            <a:r>
+              <a:rPr lang="en-US" altLang="zh-CN" sz="1400">
+                <a:ln>
+                  <a:noFill/>
+                  <a:prstDash val="sysDot"/>
+                </a:ln>
+                <a:solidFill>
+                  <a:schemeClr val="tx1">
+                    <a:lumMod val="85000"/>
+                    <a:lumOff val="15000"/>
+                  </a:schemeClr>
+                </a:solidFill>
+                <a:latin typeface="Arial" panose="020B0604020202020204" pitchFamily="34" charset="0"/>
+                <a:cs typeface="Arial" panose="020B0604020202020204" pitchFamily="34" charset="0"/>
+                <a:sym typeface="+mn-ea"/>
+              </a:rPr>
+              <a:t>Boundary validation via Pydantic ensures data integrity</a:t>
+            </a:r>
+            <a:endParaRPr lang="en-US" altLang="zh-CN" sz="1400">
+              <a:ln>
+                <a:noFill/>
+                <a:prstDash val="sysDot"/>
+              </a:ln>
+              <a:solidFill>
+                <a:schemeClr val="tx1">
+                  <a:lumMod val="85000"/>
+                  <a:lumOff val="15000"/>
+                </a:schemeClr>
+              </a:solidFill>
+              <a:latin typeface="Arial" panose="020B0604020202020204" pitchFamily="34" charset="0"/>
+              <a:cs typeface="Arial" panose="020B0604020202020204" pitchFamily="34" charset="0"/>
+              <a:sym typeface="+mn-ea"/>
+            </a:endParaRPr>
+          </a:p>
+        </p:txBody>
+      </p:sp>
+      <p:sp>
+        <p:nvSpPr>
+          <p:cNvPr id="23" name="矩形 22"/>
+          <p:cNvSpPr/>
+          <p:nvPr>
+            <p:custDataLst>
+              <p:tags r:id="rId11"/>
+            </p:custDataLst>
+          </p:nvPr>
+        </p:nvSpPr>
+        <p:spPr>
+          <a:xfrm>
+            <a:off x="8710930" y="1478280"/>
+            <a:ext cx="2784475" cy="382905"/>
+          </a:xfrm>
+          <a:prstGeom prst="rect">
+            <a:avLst/>
+          </a:prstGeom>
+          <a:noFill/>
+        </p:spPr>
+        <p:txBody>
+          <a:bodyPr wrap="square" lIns="0" tIns="0" rIns="0" bIns="0" rtlCol="0" anchor="b" anchorCtr="0">
+            <a:noAutofit/>
+          </a:bodyPr>
+          <a:lstStyle/>
+          <a:p>
+            <a:pPr>
+              <a:spcBef>
+                <a:spcPct val="0"/>
+              </a:spcBef>
+              <a:spcAft>
+                <a:spcPct val="0"/>
+              </a:spcAft>
+            </a:pPr>
+            <a:r>
+              <a:rPr lang="en-US" altLang="zh-CN" sz="2000" b="1">
+                <a:solidFill>
+                  <a:schemeClr val="accent2"/>
+                </a:solidFill>
+                <a:latin typeface="+mn-ea"/>
+                <a:cs typeface="+mn-ea"/>
+                <a:sym typeface="+mn-ea"/>
+              </a:rPr>
+              <a:t>Zero invalid writes</a:t>
+            </a:r>
+            <a:endParaRPr lang="en-US" altLang="zh-CN" sz="2000" b="1">
+              <a:solidFill>
+                <a:schemeClr val="accent2"/>
+              </a:solidFill>
+              <a:latin typeface="+mn-ea"/>
+              <a:cs typeface="+mn-ea"/>
+              <a:sym typeface="+mn-ea"/>
+            </a:endParaRPr>
+          </a:p>
+        </p:txBody>
+      </p:sp>
+      <p:sp>
+        <p:nvSpPr>
+          <p:cNvPr id="25" name="矩形 24"/>
+          <p:cNvSpPr/>
+          <p:nvPr>
+            <p:custDataLst>
+              <p:tags r:id="rId12"/>
+            </p:custDataLst>
+          </p:nvPr>
+        </p:nvSpPr>
+        <p:spPr>
+          <a:xfrm>
+            <a:off x="8707755" y="3608070"/>
+            <a:ext cx="2790825" cy="1014730"/>
+          </a:xfrm>
+          <a:prstGeom prst="rect">
+            <a:avLst/>
+          </a:prstGeom>
+          <a:noFill/>
+        </p:spPr>
+        <p:txBody>
+          <a:bodyPr wrap="square" lIns="0" tIns="0" rIns="0" bIns="0" rtlCol="0" anchor="t" anchorCtr="0">
+            <a:noAutofit/>
+          </a:bodyPr>
+          <a:lstStyle/>
+          <a:p>
+            <a:pPr marL="285750" indent="-285750">
+              <a:lnSpc>
+                <a:spcPct val="150000"/>
+              </a:lnSpc>
+              <a:spcBef>
+                <a:spcPct val="0"/>
+              </a:spcBef>
+              <a:spcAft>
+                <a:spcPct val="0"/>
+              </a:spcAft>
+              <a:buFont typeface="Wingdings" panose="05000000000000000000" charset="0"/>
+              <a:buChar char="Ø"/>
+            </a:pPr>
+            <a:r>
+              <a:rPr lang="en-US" altLang="zh-CN" sz="1400">
+                <a:ln>
+                  <a:noFill/>
+                  <a:prstDash val="sysDot"/>
+                </a:ln>
+                <a:solidFill>
+                  <a:schemeClr val="tx1">
+                    <a:lumMod val="85000"/>
+                    <a:lumOff val="15000"/>
+                  </a:schemeClr>
+                </a:solidFill>
+                <a:latin typeface="Arial" panose="020B0604020202020204" pitchFamily="34" charset="0"/>
+                <a:cs typeface="Arial" panose="020B0604020202020204" pitchFamily="34" charset="0"/>
+                <a:sym typeface="+mn-ea"/>
+              </a:rPr>
+              <a:t>Mutating endpoints protected, follows Twelve-Factor App</a:t>
+            </a:r>
+            <a:endParaRPr lang="en-US" altLang="zh-CN" sz="1400">
+              <a:ln>
+                <a:noFill/>
+                <a:prstDash val="sysDot"/>
+              </a:ln>
+              <a:solidFill>
+                <a:schemeClr val="tx1">
+                  <a:lumMod val="85000"/>
+                  <a:lumOff val="15000"/>
+                </a:schemeClr>
+              </a:solidFill>
+              <a:latin typeface="Arial" panose="020B0604020202020204" pitchFamily="34" charset="0"/>
+              <a:cs typeface="Arial" panose="020B0604020202020204" pitchFamily="34" charset="0"/>
+              <a:sym typeface="+mn-ea"/>
+            </a:endParaRPr>
+          </a:p>
+        </p:txBody>
+      </p:sp>
+      <p:sp>
+        <p:nvSpPr>
+          <p:cNvPr id="27" name="矩形 26"/>
+          <p:cNvSpPr/>
+          <p:nvPr>
+            <p:custDataLst>
+              <p:tags r:id="rId13"/>
+            </p:custDataLst>
+          </p:nvPr>
+        </p:nvSpPr>
+        <p:spPr>
+          <a:xfrm>
+            <a:off x="8623935" y="3191510"/>
+            <a:ext cx="2872105" cy="382905"/>
+          </a:xfrm>
+          <a:prstGeom prst="rect">
+            <a:avLst/>
+          </a:prstGeom>
+          <a:noFill/>
+        </p:spPr>
+        <p:txBody>
+          <a:bodyPr wrap="square" lIns="0" tIns="0" rIns="0" bIns="0" rtlCol="0" anchor="b" anchorCtr="0">
+            <a:noAutofit/>
+          </a:bodyPr>
+          <a:lstStyle/>
+          <a:p>
+            <a:pPr>
+              <a:spcBef>
+                <a:spcPct val="0"/>
+              </a:spcBef>
+              <a:spcAft>
+                <a:spcPct val="0"/>
+              </a:spcAft>
+            </a:pPr>
+            <a:r>
+              <a:rPr lang="en-US" altLang="zh-CN" sz="2000" b="1">
+                <a:solidFill>
+                  <a:schemeClr val="accent3"/>
+                </a:solidFill>
+                <a:latin typeface="+mn-ea"/>
+                <a:cs typeface="+mn-ea"/>
+                <a:sym typeface="+mn-ea"/>
+              </a:rPr>
+              <a:t>API Key security + .env config</a:t>
+            </a:r>
+            <a:endParaRPr lang="zh-CN" altLang="en-US" sz="2000" b="1">
+              <a:solidFill>
+                <a:schemeClr val="accent3"/>
+              </a:solidFill>
+              <a:latin typeface="+mn-ea"/>
+              <a:cs typeface="+mn-ea"/>
+              <a:sym typeface="+mn-ea"/>
+            </a:endParaRPr>
+          </a:p>
+        </p:txBody>
+      </p:sp>
+      <p:sp>
+        <p:nvSpPr>
+          <p:cNvPr id="30" name="矩形 29"/>
+          <p:cNvSpPr/>
+          <p:nvPr>
+            <p:custDataLst>
+              <p:tags r:id="rId14"/>
+            </p:custDataLst>
+          </p:nvPr>
+        </p:nvSpPr>
+        <p:spPr>
+          <a:xfrm>
+            <a:off x="335280" y="5319395"/>
+            <a:ext cx="3830955" cy="1014730"/>
+          </a:xfrm>
+          <a:prstGeom prst="rect">
+            <a:avLst/>
+          </a:prstGeom>
+          <a:noFill/>
+        </p:spPr>
+        <p:txBody>
+          <a:bodyPr wrap="square" lIns="0" tIns="0" rIns="0" bIns="0" rtlCol="0" anchor="t" anchorCtr="0">
+            <a:noAutofit/>
+          </a:bodyPr>
+          <a:lstStyle/>
+          <a:p>
+            <a:pPr marL="285750" indent="-285750" algn="l">
+              <a:lnSpc>
+                <a:spcPct val="150000"/>
+              </a:lnSpc>
+              <a:spcBef>
+                <a:spcPct val="0"/>
+              </a:spcBef>
+              <a:spcAft>
+                <a:spcPct val="0"/>
+              </a:spcAft>
+              <a:buFont typeface="Wingdings" panose="05000000000000000000" charset="0"/>
+              <a:buChar char="Ø"/>
+            </a:pPr>
+            <a:r>
+              <a:rPr lang="en-US" altLang="zh-CN" sz="1600">
+                <a:ln>
+                  <a:noFill/>
+                  <a:prstDash val="sysDot"/>
+                </a:ln>
+                <a:solidFill>
+                  <a:schemeClr val="tx1">
+                    <a:lumMod val="85000"/>
+                    <a:lumOff val="15000"/>
+                  </a:schemeClr>
+                </a:solidFill>
+                <a:latin typeface="Arial" panose="020B0604020202020204" pitchFamily="34" charset="0"/>
+                <a:cs typeface="Arial" panose="020B0604020202020204" pitchFamily="34" charset="0"/>
+                <a:sym typeface="+mn-ea"/>
+              </a:rPr>
+              <a:t>Cursor &amp; DeepSeek used for code, </a:t>
+            </a:r>
+            <a:endParaRPr lang="en-US" altLang="zh-CN" sz="1600">
+              <a:ln>
+                <a:noFill/>
+                <a:prstDash val="sysDot"/>
+              </a:ln>
+              <a:solidFill>
+                <a:schemeClr val="tx1">
+                  <a:lumMod val="85000"/>
+                  <a:lumOff val="15000"/>
+                </a:schemeClr>
+              </a:solidFill>
+              <a:latin typeface="Arial" panose="020B0604020202020204" pitchFamily="34" charset="0"/>
+              <a:cs typeface="Arial" panose="020B0604020202020204" pitchFamily="34" charset="0"/>
+              <a:sym typeface="+mn-ea"/>
+            </a:endParaRPr>
+          </a:p>
+          <a:p>
+            <a:pPr marL="285750" indent="-285750" algn="l">
+              <a:lnSpc>
+                <a:spcPct val="150000"/>
+              </a:lnSpc>
+              <a:spcBef>
+                <a:spcPct val="0"/>
+              </a:spcBef>
+              <a:spcAft>
+                <a:spcPct val="0"/>
+              </a:spcAft>
+              <a:buFont typeface="Wingdings" panose="05000000000000000000" charset="0"/>
+              <a:buChar char="Ø"/>
+            </a:pPr>
+            <a:r>
+              <a:rPr lang="en-US" altLang="zh-CN" sz="1600">
+                <a:ln>
+                  <a:noFill/>
+                  <a:prstDash val="sysDot"/>
+                </a:ln>
+                <a:solidFill>
+                  <a:schemeClr val="tx1">
+                    <a:lumMod val="85000"/>
+                    <a:lumOff val="15000"/>
+                  </a:schemeClr>
+                </a:solidFill>
+                <a:latin typeface="Arial" panose="020B0604020202020204" pitchFamily="34" charset="0"/>
+                <a:cs typeface="Arial" panose="020B0604020202020204" pitchFamily="34" charset="0"/>
+                <a:sym typeface="+mn-ea"/>
+              </a:rPr>
+              <a:t>testing, </a:t>
+            </a:r>
+            <a:endParaRPr lang="en-US" altLang="zh-CN" sz="1600">
+              <a:ln>
+                <a:noFill/>
+                <a:prstDash val="sysDot"/>
+              </a:ln>
+              <a:solidFill>
+                <a:schemeClr val="tx1">
+                  <a:lumMod val="85000"/>
+                  <a:lumOff val="15000"/>
+                </a:schemeClr>
+              </a:solidFill>
+              <a:latin typeface="Arial" panose="020B0604020202020204" pitchFamily="34" charset="0"/>
+              <a:cs typeface="Arial" panose="020B0604020202020204" pitchFamily="34" charset="0"/>
+              <a:sym typeface="+mn-ea"/>
+            </a:endParaRPr>
+          </a:p>
+          <a:p>
+            <a:pPr marL="285750" indent="-285750" algn="l">
+              <a:lnSpc>
+                <a:spcPct val="150000"/>
+              </a:lnSpc>
+              <a:spcBef>
+                <a:spcPct val="0"/>
+              </a:spcBef>
+              <a:spcAft>
+                <a:spcPct val="0"/>
+              </a:spcAft>
+              <a:buFont typeface="Wingdings" panose="05000000000000000000" charset="0"/>
+              <a:buChar char="Ø"/>
+            </a:pPr>
+            <a:r>
+              <a:rPr lang="en-US" altLang="zh-CN" sz="1600">
+                <a:ln>
+                  <a:noFill/>
+                  <a:prstDash val="sysDot"/>
+                </a:ln>
+                <a:solidFill>
+                  <a:schemeClr val="tx1">
+                    <a:lumMod val="85000"/>
+                    <a:lumOff val="15000"/>
+                  </a:schemeClr>
+                </a:solidFill>
+                <a:latin typeface="Arial" panose="020B0604020202020204" pitchFamily="34" charset="0"/>
+                <a:cs typeface="Arial" panose="020B0604020202020204" pitchFamily="34" charset="0"/>
+                <a:sym typeface="+mn-ea"/>
+              </a:rPr>
+              <a:t>writing (human review essential)</a:t>
+            </a:r>
+            <a:endParaRPr lang="en-US" altLang="zh-CN" sz="1600">
+              <a:ln>
+                <a:noFill/>
+                <a:prstDash val="sysDot"/>
+              </a:ln>
+              <a:solidFill>
+                <a:schemeClr val="tx1">
+                  <a:lumMod val="85000"/>
+                  <a:lumOff val="15000"/>
+                </a:schemeClr>
+              </a:solidFill>
+              <a:latin typeface="Arial" panose="020B0604020202020204" pitchFamily="34" charset="0"/>
+              <a:cs typeface="Arial" panose="020B0604020202020204" pitchFamily="34" charset="0"/>
+              <a:sym typeface="+mn-ea"/>
+            </a:endParaRPr>
+          </a:p>
+        </p:txBody>
+      </p:sp>
+      <p:sp>
+        <p:nvSpPr>
+          <p:cNvPr id="35" name="矩形 34"/>
+          <p:cNvSpPr/>
+          <p:nvPr>
+            <p:custDataLst>
+              <p:tags r:id="rId15"/>
+            </p:custDataLst>
+          </p:nvPr>
+        </p:nvSpPr>
+        <p:spPr>
+          <a:xfrm>
+            <a:off x="267970" y="4933315"/>
+            <a:ext cx="4592320" cy="248920"/>
+          </a:xfrm>
+          <a:prstGeom prst="rect">
+            <a:avLst/>
+          </a:prstGeom>
+          <a:noFill/>
+        </p:spPr>
+        <p:txBody>
+          <a:bodyPr wrap="square" lIns="0" tIns="0" rIns="0" bIns="0" rtlCol="0" anchor="b" anchorCtr="0">
+            <a:noAutofit/>
+          </a:bodyPr>
+          <a:lstStyle/>
+          <a:p>
+            <a:pPr algn="l">
+              <a:spcBef>
+                <a:spcPct val="0"/>
+              </a:spcBef>
+              <a:spcAft>
+                <a:spcPct val="0"/>
+              </a:spcAft>
+            </a:pPr>
+            <a:r>
+              <a:rPr lang="en-US" altLang="zh-CN" sz="2000" b="1">
+                <a:solidFill>
+                  <a:schemeClr val="accent5"/>
+                </a:solidFill>
+                <a:latin typeface="+mn-ea"/>
+                <a:cs typeface="+mn-ea"/>
+                <a:sym typeface="+mn-ea"/>
+              </a:rPr>
+              <a:t>AI: productivity accelerator</a:t>
+            </a:r>
+            <a:endParaRPr lang="en-US" altLang="zh-CN" sz="2000" b="1">
+              <a:solidFill>
+                <a:schemeClr val="accent5"/>
+              </a:solidFill>
+              <a:latin typeface="+mn-ea"/>
+              <a:cs typeface="+mn-ea"/>
+              <a:sym typeface="+mn-ea"/>
+            </a:endParaRPr>
+          </a:p>
+        </p:txBody>
+      </p:sp>
+      <p:sp>
+        <p:nvSpPr>
+          <p:cNvPr id="36" name="矩形 35"/>
+          <p:cNvSpPr/>
+          <p:nvPr>
+            <p:custDataLst>
+              <p:tags r:id="rId16"/>
+            </p:custDataLst>
+          </p:nvPr>
+        </p:nvSpPr>
+        <p:spPr>
+          <a:xfrm>
+            <a:off x="694055" y="1883410"/>
+            <a:ext cx="2885440" cy="1014730"/>
+          </a:xfrm>
+          <a:prstGeom prst="rect">
+            <a:avLst/>
+          </a:prstGeom>
+          <a:noFill/>
+        </p:spPr>
+        <p:txBody>
+          <a:bodyPr wrap="square" lIns="0" tIns="0" rIns="0" bIns="0" rtlCol="0" anchor="t" anchorCtr="0">
+            <a:noAutofit/>
+          </a:bodyPr>
+          <a:lstStyle/>
+          <a:p>
+            <a:pPr algn="r">
+              <a:lnSpc>
+                <a:spcPct val="150000"/>
+              </a:lnSpc>
+              <a:spcBef>
+                <a:spcPct val="0"/>
+              </a:spcBef>
+              <a:spcAft>
+                <a:spcPct val="0"/>
+              </a:spcAft>
+            </a:pPr>
+            <a:r>
+              <a:rPr lang="en-US" altLang="zh-CN" sz="1400">
+                <a:ln>
+                  <a:noFill/>
+                  <a:prstDash val="sysDot"/>
+                </a:ln>
+                <a:solidFill>
+                  <a:schemeClr val="tx1">
+                    <a:lumMod val="85000"/>
+                    <a:lumOff val="15000"/>
+                  </a:schemeClr>
+                </a:solidFill>
+                <a:latin typeface="Arial" panose="020B0604020202020204" pitchFamily="34" charset="0"/>
+                <a:cs typeface="Arial" panose="020B0604020202020204" pitchFamily="34" charset="0"/>
+                <a:sym typeface="+mn-ea"/>
+              </a:rPr>
+              <a:t>单击此处添加文本，简明扼要地阐述您的观点。根据需要可酌情增减文字，以便观者准确地理解</a:t>
+            </a:r>
+            <a:endParaRPr lang="en-US" altLang="zh-CN" sz="1400">
+              <a:ln>
+                <a:noFill/>
+                <a:prstDash val="sysDot"/>
+              </a:ln>
+              <a:solidFill>
+                <a:schemeClr val="tx1">
+                  <a:lumMod val="85000"/>
+                  <a:lumOff val="15000"/>
+                </a:schemeClr>
+              </a:solidFill>
+              <a:latin typeface="Arial" panose="020B0604020202020204" pitchFamily="34" charset="0"/>
+              <a:cs typeface="Arial" panose="020B0604020202020204" pitchFamily="34" charset="0"/>
+              <a:sym typeface="+mn-ea"/>
+            </a:endParaRPr>
+          </a:p>
+        </p:txBody>
+      </p:sp>
+      <p:sp>
+        <p:nvSpPr>
+          <p:cNvPr id="43" name="矩形 42"/>
+          <p:cNvSpPr/>
+          <p:nvPr>
+            <p:custDataLst>
+              <p:tags r:id="rId17"/>
+            </p:custDataLst>
+          </p:nvPr>
+        </p:nvSpPr>
+        <p:spPr>
+          <a:xfrm>
+            <a:off x="697230" y="1478280"/>
+            <a:ext cx="2784475" cy="382905"/>
+          </a:xfrm>
+          <a:prstGeom prst="rect">
+            <a:avLst/>
+          </a:prstGeom>
+          <a:noFill/>
+        </p:spPr>
+        <p:txBody>
+          <a:bodyPr wrap="square" lIns="0" tIns="0" rIns="0" bIns="0" rtlCol="0" anchor="b" anchorCtr="0">
+            <a:noAutofit/>
+          </a:bodyPr>
+          <a:lstStyle/>
+          <a:p>
+            <a:pPr algn="r">
+              <a:spcBef>
+                <a:spcPct val="0"/>
+              </a:spcBef>
+              <a:spcAft>
+                <a:spcPct val="0"/>
+              </a:spcAft>
+            </a:pPr>
+            <a:r>
+              <a:rPr lang="zh-CN" altLang="en-US" sz="2000" b="1">
+                <a:gradFill>
+                  <a:gsLst>
+                    <a:gs pos="0">
+                      <a:schemeClr val="accent1">
+                        <a:lumMod val="80000"/>
+                        <a:lumOff val="20000"/>
+                      </a:schemeClr>
+                    </a:gs>
+                    <a:gs pos="100000">
+                      <a:schemeClr val="accent1">
+                        <a:lumMod val="80000"/>
+                        <a:lumOff val="20000"/>
+                      </a:schemeClr>
+                    </a:gs>
+                  </a:gsLst>
+                  <a:lin ang="5400000" scaled="0"/>
+                </a:gradFill>
+                <a:latin typeface="+mn-ea"/>
+                <a:cs typeface="+mn-ea"/>
+                <a:sym typeface="+mn-ea"/>
+              </a:rPr>
+              <a:t> </a:t>
+            </a:r>
+            <a:endParaRPr lang="en-US" altLang="zh-CN" sz="2000" b="1">
+              <a:gradFill>
+                <a:gsLst>
+                  <a:gs pos="0">
+                    <a:schemeClr val="accent1">
+                      <a:lumMod val="80000"/>
+                      <a:lumOff val="20000"/>
+                    </a:schemeClr>
+                  </a:gs>
+                  <a:gs pos="100000">
+                    <a:schemeClr val="accent1">
+                      <a:lumMod val="80000"/>
+                      <a:lumOff val="20000"/>
+                    </a:schemeClr>
+                  </a:gs>
+                </a:gsLst>
+                <a:lin ang="5400000" scaled="0"/>
+              </a:gradFill>
+              <a:latin typeface="+mn-ea"/>
+              <a:cs typeface="+mn-ea"/>
+              <a:sym typeface="+mn-ea"/>
+            </a:endParaRPr>
+          </a:p>
+        </p:txBody>
+      </p:sp>
+      <p:sp>
+        <p:nvSpPr>
+          <p:cNvPr id="14" name="椭圆 13"/>
+          <p:cNvSpPr/>
+          <p:nvPr>
+            <p:custDataLst>
+              <p:tags r:id="rId18"/>
+            </p:custDataLst>
+          </p:nvPr>
+        </p:nvSpPr>
+        <p:spPr>
+          <a:xfrm>
+            <a:off x="3714115" y="1662430"/>
+            <a:ext cx="149860" cy="149860"/>
+          </a:xfrm>
+          <a:prstGeom prst="ellipse">
+            <a:avLst/>
+          </a:prstGeom>
+          <a:gradFill>
+            <a:gsLst>
+              <a:gs pos="0">
+                <a:schemeClr val="accent1">
+                  <a:lumMod val="75000"/>
+                  <a:lumOff val="25000"/>
+                </a:schemeClr>
+              </a:gs>
+              <a:gs pos="100000">
+                <a:schemeClr val="accent1">
+                  <a:lumMod val="85000"/>
+                  <a:lumOff val="15000"/>
+                </a:schemeClr>
+              </a:gs>
+            </a:gsLst>
+            <a:lin ang="2700000" scaled="0"/>
+          </a:gradFill>
+          <a:ln w="31750">
+            <a:noFill/>
+          </a:ln>
+          <a:effectLst/>
+        </p:spPr>
+        <p:style>
+          <a:lnRef idx="2">
+            <a:schemeClr val="accent1">
+              <a:shade val="50000"/>
+            </a:schemeClr>
+          </a:lnRef>
+          <a:fillRef idx="1">
+            <a:schemeClr val="accent1"/>
+          </a:fillRef>
+          <a:effectRef idx="0">
+            <a:schemeClr val="accent1"/>
+          </a:effectRef>
+          <a:fontRef idx="minor">
+            <a:schemeClr val="lt1"/>
+          </a:fontRef>
+        </p:style>
+        <p:txBody>
+          <a:bodyPr rot="0" spcFirstLastPara="0" vertOverflow="overflow" horzOverflow="overflow" vert="horz" wrap="square" lIns="91440" tIns="45720" rIns="91440" bIns="45720" numCol="1" spcCol="0" rtlCol="0" fromWordArt="0" anchor="ctr" anchorCtr="0" forceAA="0" compatLnSpc="1">
+            <a:noAutofit/>
+          </a:bodyPr>
+          <a:lstStyle>
+            <a:defPPr>
+              <a:defRPr lang="zh-CN"/>
+            </a:defPPr>
+            <a:lvl1pPr marL="0" algn="l" defTabSz="914400" rtl="0" eaLnBrk="1" latinLnBrk="0" hangingPunct="1">
+              <a:defRPr sz="1800" kern="1200">
+                <a:solidFill>
+                  <a:schemeClr val="tx1"/>
+                </a:solidFill>
+                <a:latin typeface="+mn-lt"/>
+                <a:ea typeface="+mn-ea"/>
+                <a:cs typeface="+mn-cs"/>
+              </a:defRPr>
+            </a:lvl1pPr>
+            <a:lvl2pPr marL="457200" algn="l" defTabSz="914400" rtl="0" eaLnBrk="1" latinLnBrk="0" hangingPunct="1">
+              <a:defRPr sz="1800" kern="1200">
+                <a:solidFill>
+                  <a:schemeClr val="tx1"/>
+                </a:solidFill>
+                <a:latin typeface="+mn-lt"/>
+                <a:ea typeface="+mn-ea"/>
+                <a:cs typeface="+mn-cs"/>
+              </a:defRPr>
+            </a:lvl2pPr>
+            <a:lvl3pPr marL="914400" algn="l" defTabSz="914400" rtl="0" eaLnBrk="1" latinLnBrk="0" hangingPunct="1">
+              <a:defRPr sz="1800" kern="1200">
+                <a:solidFill>
+                  <a:schemeClr val="tx1"/>
+                </a:solidFill>
+                <a:latin typeface="+mn-lt"/>
+                <a:ea typeface="+mn-ea"/>
+                <a:cs typeface="+mn-cs"/>
+              </a:defRPr>
+            </a:lvl3pPr>
+            <a:lvl4pPr marL="1371600" algn="l" defTabSz="914400" rtl="0" eaLnBrk="1" latinLnBrk="0" hangingPunct="1">
+              <a:defRPr sz="1800" kern="1200">
+                <a:solidFill>
+                  <a:schemeClr val="tx1"/>
+                </a:solidFill>
+                <a:latin typeface="+mn-lt"/>
+                <a:ea typeface="+mn-ea"/>
+                <a:cs typeface="+mn-cs"/>
+              </a:defRPr>
+            </a:lvl4pPr>
+            <a:lvl5pPr marL="1828800" algn="l" defTabSz="914400" rtl="0" eaLnBrk="1" latinLnBrk="0" hangingPunct="1">
+              <a:defRPr sz="1800" kern="1200">
+                <a:solidFill>
+                  <a:schemeClr val="tx1"/>
+                </a:solidFill>
+                <a:latin typeface="+mn-lt"/>
+                <a:ea typeface="+mn-ea"/>
+                <a:cs typeface="+mn-cs"/>
+              </a:defRPr>
+            </a:lvl5pPr>
+            <a:lvl6pPr marL="2286000" algn="l" defTabSz="914400" rtl="0" eaLnBrk="1" latinLnBrk="0" hangingPunct="1">
+              <a:defRPr sz="1800" kern="1200">
+                <a:solidFill>
+                  <a:schemeClr val="tx1"/>
+                </a:solidFill>
+                <a:latin typeface="+mn-lt"/>
+                <a:ea typeface="+mn-ea"/>
+                <a:cs typeface="+mn-cs"/>
+              </a:defRPr>
+            </a:lvl6pPr>
+            <a:lvl7pPr marL="2743200" algn="l" defTabSz="914400" rtl="0" eaLnBrk="1" latinLnBrk="0" hangingPunct="1">
+              <a:defRPr sz="1800" kern="1200">
+                <a:solidFill>
+                  <a:schemeClr val="tx1"/>
+                </a:solidFill>
+                <a:latin typeface="+mn-lt"/>
+                <a:ea typeface="+mn-ea"/>
+                <a:cs typeface="+mn-cs"/>
+              </a:defRPr>
+            </a:lvl7pPr>
+            <a:lvl8pPr marL="3200400" algn="l" defTabSz="914400" rtl="0" eaLnBrk="1" latinLnBrk="0" hangingPunct="1">
+              <a:defRPr sz="1800" kern="1200">
+                <a:solidFill>
+                  <a:schemeClr val="tx1"/>
+                </a:solidFill>
+                <a:latin typeface="+mn-lt"/>
+                <a:ea typeface="+mn-ea"/>
+                <a:cs typeface="+mn-cs"/>
+              </a:defRPr>
+            </a:lvl8pPr>
+            <a:lvl9pPr marL="3657600" algn="l" defTabSz="914400" rtl="0" eaLnBrk="1" latinLnBrk="0" hangingPunct="1">
+              <a:defRPr sz="1800" kern="1200">
+                <a:solidFill>
+                  <a:schemeClr val="tx1"/>
+                </a:solidFill>
+                <a:latin typeface="+mn-lt"/>
+                <a:ea typeface="+mn-ea"/>
+                <a:cs typeface="+mn-cs"/>
+              </a:defRPr>
+            </a:lvl9pPr>
+          </a:lstStyle>
+          <a:p>
+            <a:pPr lvl="0" algn="ctr">
+              <a:buClrTx/>
+              <a:buSzTx/>
+              <a:buFontTx/>
+            </a:pPr>
+            <a:endParaRPr lang="zh-CN" altLang="en-US">
+              <a:solidFill>
+                <a:schemeClr val="lt1"/>
+              </a:solidFill>
+              <a:sym typeface="+mn-ea"/>
+            </a:endParaRPr>
+          </a:p>
+        </p:txBody>
+      </p:sp>
+      <p:sp>
+        <p:nvSpPr>
+          <p:cNvPr id="18" name="椭圆 17"/>
+          <p:cNvSpPr/>
+          <p:nvPr>
+            <p:custDataLst>
+              <p:tags r:id="rId19"/>
+            </p:custDataLst>
+          </p:nvPr>
+        </p:nvSpPr>
+        <p:spPr>
+          <a:xfrm>
+            <a:off x="3707765" y="5087620"/>
+            <a:ext cx="149860" cy="149860"/>
+          </a:xfrm>
+          <a:prstGeom prst="ellipse">
+            <a:avLst/>
+          </a:prstGeom>
+          <a:gradFill>
+            <a:gsLst>
+              <a:gs pos="100000">
+                <a:schemeClr val="accent5"/>
+              </a:gs>
+              <a:gs pos="0">
+                <a:schemeClr val="accent5">
+                  <a:lumMod val="85000"/>
+                  <a:lumOff val="15000"/>
+                </a:schemeClr>
+              </a:gs>
+            </a:gsLst>
+            <a:lin ang="2700000" scaled="0"/>
+          </a:gradFill>
+          <a:ln w="19050">
+            <a:noFill/>
+          </a:ln>
+          <a:effectLst/>
+        </p:spPr>
+        <p:style>
+          <a:lnRef idx="1">
+            <a:schemeClr val="accent1"/>
+          </a:lnRef>
+          <a:fillRef idx="2">
+            <a:schemeClr val="accent1"/>
+          </a:fillRef>
+          <a:effectRef idx="1">
+            <a:schemeClr val="accent1"/>
+          </a:effectRef>
+          <a:fontRef idx="minor">
+            <a:schemeClr val="dk1"/>
+          </a:fontRef>
+        </p:style>
+        <p:txBody>
+          <a:bodyPr vertOverflow="overflow" horzOverflow="overflow" vert="horz" wrap="square" numCol="1" spcCol="0" rtlCol="0" fromWordArt="0" anchor="ctr" anchorCtr="0" forceAA="0" compatLnSpc="1">
+            <a:noAutofit/>
+          </a:bodyPr>
+          <a:lstStyle>
+            <a:defPPr>
+              <a:defRPr lang="zh-CN">
+                <a:solidFill>
+                  <a:schemeClr val="lt1"/>
+                </a:solidFill>
+              </a:defRPr>
+            </a:defPPr>
+            <a:lvl1pPr marL="0" algn="l" defTabSz="914400" rtl="0" eaLnBrk="1" latinLnBrk="0" hangingPunct="1">
+              <a:defRPr sz="1800" kern="1200">
+                <a:solidFill>
+                  <a:schemeClr val="lt1"/>
+                </a:solidFill>
+                <a:latin typeface="+mn-lt"/>
+                <a:ea typeface="+mn-ea"/>
+                <a:cs typeface="+mn-cs"/>
+              </a:defRPr>
+            </a:lvl1pPr>
+            <a:lvl2pPr marL="457200" algn="l" defTabSz="914400" rtl="0" eaLnBrk="1" latinLnBrk="0" hangingPunct="1">
+              <a:defRPr sz="1800" kern="1200">
+                <a:solidFill>
+                  <a:schemeClr val="lt1"/>
+                </a:solidFill>
+                <a:latin typeface="+mn-lt"/>
+                <a:ea typeface="+mn-ea"/>
+                <a:cs typeface="+mn-cs"/>
+              </a:defRPr>
+            </a:lvl2pPr>
+            <a:lvl3pPr marL="914400" algn="l" defTabSz="914400" rtl="0" eaLnBrk="1" latinLnBrk="0" hangingPunct="1">
+              <a:defRPr sz="1800" kern="1200">
+                <a:solidFill>
+                  <a:schemeClr val="lt1"/>
+                </a:solidFill>
+                <a:latin typeface="+mn-lt"/>
+                <a:ea typeface="+mn-ea"/>
+                <a:cs typeface="+mn-cs"/>
+              </a:defRPr>
+            </a:lvl3pPr>
+            <a:lvl4pPr marL="1371600" algn="l" defTabSz="914400" rtl="0" eaLnBrk="1" latinLnBrk="0" hangingPunct="1">
+              <a:defRPr sz="1800" kern="1200">
+                <a:solidFill>
+                  <a:schemeClr val="lt1"/>
+                </a:solidFill>
+                <a:latin typeface="+mn-lt"/>
+                <a:ea typeface="+mn-ea"/>
+                <a:cs typeface="+mn-cs"/>
+              </a:defRPr>
+            </a:lvl4pPr>
+            <a:lvl5pPr marL="1828800" algn="l" defTabSz="914400" rtl="0" eaLnBrk="1" latinLnBrk="0" hangingPunct="1">
+              <a:defRPr sz="1800" kern="1200">
+                <a:solidFill>
+                  <a:schemeClr val="lt1"/>
+                </a:solidFill>
+                <a:latin typeface="+mn-lt"/>
+                <a:ea typeface="+mn-ea"/>
+                <a:cs typeface="+mn-cs"/>
+              </a:defRPr>
+            </a:lvl5pPr>
+            <a:lvl6pPr marL="2286000" algn="l" defTabSz="914400" rtl="0" eaLnBrk="1" latinLnBrk="0" hangingPunct="1">
+              <a:defRPr sz="1800" kern="1200">
+                <a:solidFill>
+                  <a:schemeClr val="lt1"/>
+                </a:solidFill>
+                <a:latin typeface="+mn-lt"/>
+                <a:ea typeface="+mn-ea"/>
+                <a:cs typeface="+mn-cs"/>
+              </a:defRPr>
+            </a:lvl6pPr>
+            <a:lvl7pPr marL="2743200" algn="l" defTabSz="914400" rtl="0" eaLnBrk="1" latinLnBrk="0" hangingPunct="1">
+              <a:defRPr sz="1800" kern="1200">
+                <a:solidFill>
+                  <a:schemeClr val="lt1"/>
+                </a:solidFill>
+                <a:latin typeface="+mn-lt"/>
+                <a:ea typeface="+mn-ea"/>
+                <a:cs typeface="+mn-cs"/>
+              </a:defRPr>
+            </a:lvl7pPr>
+            <a:lvl8pPr marL="3200400" algn="l" defTabSz="914400" rtl="0" eaLnBrk="1" latinLnBrk="0" hangingPunct="1">
+              <a:defRPr sz="1800" kern="1200">
+                <a:solidFill>
+                  <a:schemeClr val="lt1"/>
+                </a:solidFill>
+                <a:latin typeface="+mn-lt"/>
+                <a:ea typeface="+mn-ea"/>
+                <a:cs typeface="+mn-cs"/>
+              </a:defRPr>
+            </a:lvl8pPr>
+            <a:lvl9pPr marL="3657600" algn="l" defTabSz="914400" rtl="0" eaLnBrk="1" latinLnBrk="0" hangingPunct="1">
+              <a:defRPr sz="1800" kern="1200">
+                <a:solidFill>
+                  <a:schemeClr val="lt1"/>
+                </a:solidFill>
+                <a:latin typeface="+mn-lt"/>
+                <a:ea typeface="+mn-ea"/>
+                <a:cs typeface="+mn-cs"/>
+              </a:defRPr>
+            </a:lvl9pPr>
+          </a:lstStyle>
+          <a:p>
+            <a:pPr lvl="0" algn="ctr">
+              <a:buClrTx/>
+              <a:buSzTx/>
+              <a:buFontTx/>
+            </a:pPr>
+            <a:endParaRPr lang="zh-CN" altLang="en-US">
+              <a:solidFill>
+                <a:schemeClr val="dk1"/>
+              </a:solidFill>
+              <a:cs typeface="微软雅黑" panose="020B0503020204020204" charset="-122"/>
+              <a:sym typeface="+mn-ea"/>
+            </a:endParaRPr>
+          </a:p>
+        </p:txBody>
+      </p:sp>
+      <p:sp>
+        <p:nvSpPr>
+          <p:cNvPr id="46" name="矩形 45"/>
+          <p:cNvSpPr/>
+          <p:nvPr>
+            <p:custDataLst>
+              <p:tags r:id="rId20"/>
+            </p:custDataLst>
+          </p:nvPr>
+        </p:nvSpPr>
+        <p:spPr>
+          <a:xfrm>
+            <a:off x="694055" y="3612515"/>
+            <a:ext cx="2790825" cy="1014730"/>
+          </a:xfrm>
+          <a:prstGeom prst="rect">
+            <a:avLst/>
+          </a:prstGeom>
+          <a:noFill/>
+        </p:spPr>
+        <p:txBody>
+          <a:bodyPr wrap="square" lIns="0" tIns="0" rIns="0" bIns="0" rtlCol="0" anchor="t" anchorCtr="0">
+            <a:noAutofit/>
+          </a:bodyPr>
+          <a:lstStyle/>
+          <a:p>
+            <a:pPr marL="285750" indent="-285750" algn="l">
+              <a:lnSpc>
+                <a:spcPct val="150000"/>
+              </a:lnSpc>
+              <a:spcBef>
+                <a:spcPct val="0"/>
+              </a:spcBef>
+              <a:spcAft>
+                <a:spcPct val="0"/>
+              </a:spcAft>
+              <a:buFont typeface="Wingdings" panose="05000000000000000000" charset="0"/>
+              <a:buChar char="Ø"/>
+            </a:pPr>
+            <a:r>
+              <a:rPr lang="en-US" altLang="zh-CN" sz="1600">
+                <a:ln>
+                  <a:noFill/>
+                  <a:prstDash val="sysDot"/>
+                </a:ln>
+                <a:solidFill>
+                  <a:schemeClr val="tx1">
+                    <a:lumMod val="85000"/>
+                    <a:lumOff val="15000"/>
+                  </a:schemeClr>
+                </a:solidFill>
+                <a:latin typeface="Arial" panose="020B0604020202020204" pitchFamily="34" charset="0"/>
+                <a:cs typeface="Arial" panose="020B0604020202020204" pitchFamily="34" charset="0"/>
+                <a:sym typeface="+mn-ea"/>
+              </a:rPr>
+              <a:t>In-memory DB, </a:t>
+            </a:r>
+            <a:endParaRPr lang="en-US" altLang="zh-CN" sz="1600">
+              <a:ln>
+                <a:noFill/>
+                <a:prstDash val="sysDot"/>
+              </a:ln>
+              <a:solidFill>
+                <a:schemeClr val="tx1">
+                  <a:lumMod val="85000"/>
+                  <a:lumOff val="15000"/>
+                </a:schemeClr>
+              </a:solidFill>
+              <a:latin typeface="Arial" panose="020B0604020202020204" pitchFamily="34" charset="0"/>
+              <a:cs typeface="Arial" panose="020B0604020202020204" pitchFamily="34" charset="0"/>
+              <a:sym typeface="+mn-ea"/>
+            </a:endParaRPr>
+          </a:p>
+          <a:p>
+            <a:pPr marL="285750" indent="-285750" algn="l">
+              <a:lnSpc>
+                <a:spcPct val="150000"/>
+              </a:lnSpc>
+              <a:spcBef>
+                <a:spcPct val="0"/>
+              </a:spcBef>
+              <a:spcAft>
+                <a:spcPct val="0"/>
+              </a:spcAft>
+              <a:buFont typeface="Wingdings" panose="05000000000000000000" charset="0"/>
+              <a:buChar char="Ø"/>
+            </a:pPr>
+            <a:r>
+              <a:rPr lang="en-US" altLang="zh-CN" sz="1600">
+                <a:ln>
+                  <a:noFill/>
+                  <a:prstDash val="sysDot"/>
+                </a:ln>
+                <a:solidFill>
+                  <a:schemeClr val="tx1">
+                    <a:lumMod val="85000"/>
+                    <a:lumOff val="15000"/>
+                  </a:schemeClr>
+                </a:solidFill>
+                <a:latin typeface="Arial" panose="020B0604020202020204" pitchFamily="34" charset="0"/>
+                <a:cs typeface="Arial" panose="020B0604020202020204" pitchFamily="34" charset="0"/>
+                <a:sym typeface="+mn-ea"/>
+              </a:rPr>
+              <a:t>dependency overrides, </a:t>
+            </a:r>
+            <a:endParaRPr lang="en-US" altLang="zh-CN" sz="1600">
+              <a:ln>
+                <a:noFill/>
+                <a:prstDash val="sysDot"/>
+              </a:ln>
+              <a:solidFill>
+                <a:schemeClr val="tx1">
+                  <a:lumMod val="85000"/>
+                  <a:lumOff val="15000"/>
+                </a:schemeClr>
+              </a:solidFill>
+              <a:latin typeface="Arial" panose="020B0604020202020204" pitchFamily="34" charset="0"/>
+              <a:cs typeface="Arial" panose="020B0604020202020204" pitchFamily="34" charset="0"/>
+              <a:sym typeface="+mn-ea"/>
+            </a:endParaRPr>
+          </a:p>
+          <a:p>
+            <a:pPr marL="285750" indent="-285750" algn="l">
+              <a:lnSpc>
+                <a:spcPct val="150000"/>
+              </a:lnSpc>
+              <a:spcBef>
+                <a:spcPct val="0"/>
+              </a:spcBef>
+              <a:spcAft>
+                <a:spcPct val="0"/>
+              </a:spcAft>
+              <a:buFont typeface="Wingdings" panose="05000000000000000000" charset="0"/>
+              <a:buChar char="Ø"/>
+            </a:pPr>
+            <a:r>
+              <a:rPr lang="en-US" altLang="zh-CN" sz="1600">
+                <a:ln>
+                  <a:noFill/>
+                  <a:prstDash val="sysDot"/>
+                </a:ln>
+                <a:solidFill>
+                  <a:schemeClr val="tx1">
+                    <a:lumMod val="85000"/>
+                    <a:lumOff val="15000"/>
+                  </a:schemeClr>
+                </a:solidFill>
+                <a:latin typeface="Arial" panose="020B0604020202020204" pitchFamily="34" charset="0"/>
+                <a:cs typeface="Arial" panose="020B0604020202020204" pitchFamily="34" charset="0"/>
+                <a:sym typeface="+mn-ea"/>
+              </a:rPr>
+              <a:t>fully isolated tests</a:t>
+            </a:r>
+            <a:endParaRPr lang="en-US" altLang="zh-CN" sz="1600">
+              <a:ln>
+                <a:noFill/>
+                <a:prstDash val="sysDot"/>
+              </a:ln>
+              <a:solidFill>
+                <a:schemeClr val="tx1">
+                  <a:lumMod val="85000"/>
+                  <a:lumOff val="15000"/>
+                </a:schemeClr>
+              </a:solidFill>
+              <a:latin typeface="Arial" panose="020B0604020202020204" pitchFamily="34" charset="0"/>
+              <a:cs typeface="Arial" panose="020B0604020202020204" pitchFamily="34" charset="0"/>
+              <a:sym typeface="+mn-ea"/>
+            </a:endParaRPr>
+          </a:p>
+        </p:txBody>
+      </p:sp>
+      <p:sp>
+        <p:nvSpPr>
+          <p:cNvPr id="47" name="矩形 46"/>
+          <p:cNvSpPr/>
+          <p:nvPr>
+            <p:custDataLst>
+              <p:tags r:id="rId21"/>
+            </p:custDataLst>
+          </p:nvPr>
+        </p:nvSpPr>
+        <p:spPr>
+          <a:xfrm>
+            <a:off x="1138555" y="3229610"/>
+            <a:ext cx="2317750" cy="382905"/>
+          </a:xfrm>
+          <a:prstGeom prst="rect">
+            <a:avLst/>
+          </a:prstGeom>
+          <a:noFill/>
+        </p:spPr>
+        <p:txBody>
+          <a:bodyPr wrap="square" lIns="0" tIns="0" rIns="0" bIns="0" rtlCol="0" anchor="b" anchorCtr="0">
+            <a:noAutofit/>
+          </a:bodyPr>
+          <a:lstStyle/>
+          <a:p>
+            <a:pPr algn="r">
+              <a:spcBef>
+                <a:spcPct val="0"/>
+              </a:spcBef>
+              <a:spcAft>
+                <a:spcPct val="0"/>
+              </a:spcAft>
+            </a:pPr>
+            <a:r>
+              <a:rPr lang="en-US" altLang="zh-CN" sz="2000" b="1">
+                <a:solidFill>
+                  <a:schemeClr val="accent6"/>
+                </a:solidFill>
+                <a:latin typeface="+mn-ea"/>
+                <a:cs typeface="+mn-ea"/>
+                <a:sym typeface="+mn-ea"/>
+              </a:rPr>
+              <a:t>High-coverage testing strategy</a:t>
+            </a:r>
+            <a:endParaRPr lang="en-US" altLang="zh-CN" sz="2000" b="1">
+              <a:solidFill>
+                <a:schemeClr val="accent6"/>
+              </a:solidFill>
+              <a:latin typeface="+mn-ea"/>
+              <a:cs typeface="+mn-ea"/>
+              <a:sym typeface="+mn-ea"/>
+            </a:endParaRPr>
+          </a:p>
+        </p:txBody>
+      </p:sp>
+      <p:sp>
+        <p:nvSpPr>
+          <p:cNvPr id="34" name="椭圆 33"/>
+          <p:cNvSpPr/>
+          <p:nvPr>
+            <p:custDataLst>
+              <p:tags r:id="rId22"/>
+            </p:custDataLst>
+          </p:nvPr>
+        </p:nvSpPr>
+        <p:spPr>
+          <a:xfrm>
+            <a:off x="3707765" y="3376295"/>
+            <a:ext cx="149860" cy="149860"/>
+          </a:xfrm>
+          <a:prstGeom prst="ellipse">
+            <a:avLst/>
+          </a:prstGeom>
+          <a:gradFill>
+            <a:gsLst>
+              <a:gs pos="100000">
+                <a:schemeClr val="accent6"/>
+              </a:gs>
+              <a:gs pos="0">
+                <a:schemeClr val="accent6">
+                  <a:lumMod val="85000"/>
+                  <a:lumOff val="15000"/>
+                </a:schemeClr>
+              </a:gs>
+            </a:gsLst>
+            <a:lin ang="2700000" scaled="0"/>
+          </a:gradFill>
+          <a:ln w="19050">
+            <a:noFill/>
+          </a:ln>
+          <a:effectLst/>
+        </p:spPr>
+        <p:style>
+          <a:lnRef idx="1">
+            <a:schemeClr val="accent1"/>
+          </a:lnRef>
+          <a:fillRef idx="2">
+            <a:schemeClr val="accent1"/>
+          </a:fillRef>
+          <a:effectRef idx="1">
+            <a:schemeClr val="accent1"/>
+          </a:effectRef>
+          <a:fontRef idx="minor">
+            <a:schemeClr val="dk1"/>
+          </a:fontRef>
+        </p:style>
+        <p:txBody>
+          <a:bodyPr vertOverflow="overflow" horzOverflow="overflow" vert="horz" wrap="square" numCol="1" spcCol="0" rtlCol="0" fromWordArt="0" anchor="ctr" anchorCtr="0" forceAA="0" compatLnSpc="1">
+            <a:noAutofit/>
+          </a:bodyPr>
+          <a:lstStyle>
+            <a:defPPr>
+              <a:defRPr lang="zh-CN">
+                <a:solidFill>
+                  <a:schemeClr val="lt1"/>
+                </a:solidFill>
+              </a:defRPr>
+            </a:defPPr>
+            <a:lvl1pPr marL="0" algn="l" defTabSz="914400" rtl="0" eaLnBrk="1" latinLnBrk="0" hangingPunct="1">
+              <a:defRPr sz="1800" kern="1200">
+                <a:solidFill>
+                  <a:schemeClr val="lt1"/>
+                </a:solidFill>
+                <a:latin typeface="+mn-lt"/>
+                <a:ea typeface="+mn-ea"/>
+                <a:cs typeface="+mn-cs"/>
+              </a:defRPr>
+            </a:lvl1pPr>
+            <a:lvl2pPr marL="457200" algn="l" defTabSz="914400" rtl="0" eaLnBrk="1" latinLnBrk="0" hangingPunct="1">
+              <a:defRPr sz="1800" kern="1200">
+                <a:solidFill>
+                  <a:schemeClr val="lt1"/>
+                </a:solidFill>
+                <a:latin typeface="+mn-lt"/>
+                <a:ea typeface="+mn-ea"/>
+                <a:cs typeface="+mn-cs"/>
+              </a:defRPr>
+            </a:lvl2pPr>
+            <a:lvl3pPr marL="914400" algn="l" defTabSz="914400" rtl="0" eaLnBrk="1" latinLnBrk="0" hangingPunct="1">
+              <a:defRPr sz="1800" kern="1200">
+                <a:solidFill>
+                  <a:schemeClr val="lt1"/>
+                </a:solidFill>
+                <a:latin typeface="+mn-lt"/>
+                <a:ea typeface="+mn-ea"/>
+                <a:cs typeface="+mn-cs"/>
+              </a:defRPr>
+            </a:lvl3pPr>
+            <a:lvl4pPr marL="1371600" algn="l" defTabSz="914400" rtl="0" eaLnBrk="1" latinLnBrk="0" hangingPunct="1">
+              <a:defRPr sz="1800" kern="1200">
+                <a:solidFill>
+                  <a:schemeClr val="lt1"/>
+                </a:solidFill>
+                <a:latin typeface="+mn-lt"/>
+                <a:ea typeface="+mn-ea"/>
+                <a:cs typeface="+mn-cs"/>
+              </a:defRPr>
+            </a:lvl4pPr>
+            <a:lvl5pPr marL="1828800" algn="l" defTabSz="914400" rtl="0" eaLnBrk="1" latinLnBrk="0" hangingPunct="1">
+              <a:defRPr sz="1800" kern="1200">
+                <a:solidFill>
+                  <a:schemeClr val="lt1"/>
+                </a:solidFill>
+                <a:latin typeface="+mn-lt"/>
+                <a:ea typeface="+mn-ea"/>
+                <a:cs typeface="+mn-cs"/>
+              </a:defRPr>
+            </a:lvl5pPr>
+            <a:lvl6pPr marL="2286000" algn="l" defTabSz="914400" rtl="0" eaLnBrk="1" latinLnBrk="0" hangingPunct="1">
+              <a:defRPr sz="1800" kern="1200">
+                <a:solidFill>
+                  <a:schemeClr val="lt1"/>
+                </a:solidFill>
+                <a:latin typeface="+mn-lt"/>
+                <a:ea typeface="+mn-ea"/>
+                <a:cs typeface="+mn-cs"/>
+              </a:defRPr>
+            </a:lvl6pPr>
+            <a:lvl7pPr marL="2743200" algn="l" defTabSz="914400" rtl="0" eaLnBrk="1" latinLnBrk="0" hangingPunct="1">
+              <a:defRPr sz="1800" kern="1200">
+                <a:solidFill>
+                  <a:schemeClr val="lt1"/>
+                </a:solidFill>
+                <a:latin typeface="+mn-lt"/>
+                <a:ea typeface="+mn-ea"/>
+                <a:cs typeface="+mn-cs"/>
+              </a:defRPr>
+            </a:lvl7pPr>
+            <a:lvl8pPr marL="3200400" algn="l" defTabSz="914400" rtl="0" eaLnBrk="1" latinLnBrk="0" hangingPunct="1">
+              <a:defRPr sz="1800" kern="1200">
+                <a:solidFill>
+                  <a:schemeClr val="lt1"/>
+                </a:solidFill>
+                <a:latin typeface="+mn-lt"/>
+                <a:ea typeface="+mn-ea"/>
+                <a:cs typeface="+mn-cs"/>
+              </a:defRPr>
+            </a:lvl8pPr>
+            <a:lvl9pPr marL="3657600" algn="l" defTabSz="914400" rtl="0" eaLnBrk="1" latinLnBrk="0" hangingPunct="1">
+              <a:defRPr sz="1800" kern="1200">
+                <a:solidFill>
+                  <a:schemeClr val="lt1"/>
+                </a:solidFill>
+                <a:latin typeface="+mn-lt"/>
+                <a:ea typeface="+mn-ea"/>
+                <a:cs typeface="+mn-cs"/>
+              </a:defRPr>
+            </a:lvl9pPr>
+          </a:lstStyle>
+          <a:p>
+            <a:pPr lvl="0" algn="ctr">
+              <a:buClrTx/>
+              <a:buSzTx/>
+              <a:buFontTx/>
+            </a:pPr>
+            <a:endParaRPr lang="zh-CN" altLang="en-US">
+              <a:solidFill>
+                <a:schemeClr val="dk1"/>
+              </a:solidFill>
+              <a:cs typeface="微软雅黑" panose="020B0503020204020204" charset="-122"/>
+              <a:sym typeface="+mn-ea"/>
+            </a:endParaRPr>
+          </a:p>
+        </p:txBody>
+      </p:sp>
+      <p:sp>
+        <p:nvSpPr>
+          <p:cNvPr id="41" name="椭圆 40"/>
+          <p:cNvSpPr/>
+          <p:nvPr>
+            <p:custDataLst>
+              <p:tags r:id="rId23"/>
+            </p:custDataLst>
+          </p:nvPr>
+        </p:nvSpPr>
+        <p:spPr>
+          <a:xfrm>
+            <a:off x="4257675" y="2553970"/>
+            <a:ext cx="1673225" cy="1673225"/>
+          </a:xfrm>
+          <a:prstGeom prst="ellipse">
+            <a:avLst/>
+          </a:prstGeom>
+          <a:gradFill>
+            <a:gsLst>
+              <a:gs pos="100000">
+                <a:schemeClr val="accent6">
+                  <a:lumMod val="80000"/>
+                  <a:lumOff val="20000"/>
+                </a:schemeClr>
+              </a:gs>
+              <a:gs pos="0">
+                <a:schemeClr val="accent6"/>
+              </a:gs>
+            </a:gsLst>
+            <a:lin ang="10800000" scaled="0"/>
+          </a:gradFill>
+          <a:ln w="44450">
+            <a:solidFill>
+              <a:schemeClr val="lt1">
+                <a:lumMod val="100000"/>
+              </a:schemeClr>
+            </a:solidFill>
+          </a:ln>
+          <a:effectLst/>
+        </p:spPr>
+        <p:style>
+          <a:lnRef idx="2">
+            <a:schemeClr val="accent1">
+              <a:shade val="50000"/>
+            </a:schemeClr>
+          </a:lnRef>
+          <a:fillRef idx="1">
+            <a:schemeClr val="accent1"/>
+          </a:fillRef>
+          <a:effectRef idx="0">
+            <a:schemeClr val="accent1"/>
+          </a:effectRef>
+          <a:fontRef idx="minor">
+            <a:schemeClr val="lt1"/>
+          </a:fontRef>
+        </p:style>
+        <p:txBody>
+          <a:bodyPr rot="0" spcFirstLastPara="0" vertOverflow="overflow" horzOverflow="overflow" vert="horz" wrap="square" lIns="91440" tIns="45720" rIns="91440" bIns="45720" numCol="1" spcCol="0" rtlCol="0" fromWordArt="0" anchor="ctr" anchorCtr="0" forceAA="0" compatLnSpc="1">
+            <a:noAutofit/>
+          </a:bodyPr>
+          <a:lstStyle>
+            <a:defPPr>
+              <a:defRPr lang="zh-CN">
+                <a:solidFill>
+                  <a:schemeClr val="lt1"/>
+                </a:solidFill>
+              </a:defRPr>
+            </a:defPPr>
+            <a:lvl1pPr marL="0" algn="l" defTabSz="914400" rtl="0" eaLnBrk="1" latinLnBrk="0" hangingPunct="1">
+              <a:defRPr sz="1800" kern="1200">
+                <a:solidFill>
+                  <a:schemeClr val="lt1"/>
+                </a:solidFill>
+                <a:latin typeface="+mn-lt"/>
+                <a:ea typeface="+mn-ea"/>
+                <a:cs typeface="+mn-cs"/>
+              </a:defRPr>
+            </a:lvl1pPr>
+            <a:lvl2pPr marL="457200" algn="l" defTabSz="914400" rtl="0" eaLnBrk="1" latinLnBrk="0" hangingPunct="1">
+              <a:defRPr sz="1800" kern="1200">
+                <a:solidFill>
+                  <a:schemeClr val="lt1"/>
+                </a:solidFill>
+                <a:latin typeface="+mn-lt"/>
+                <a:ea typeface="+mn-ea"/>
+                <a:cs typeface="+mn-cs"/>
+              </a:defRPr>
+            </a:lvl2pPr>
+            <a:lvl3pPr marL="914400" algn="l" defTabSz="914400" rtl="0" eaLnBrk="1" latinLnBrk="0" hangingPunct="1">
+              <a:defRPr sz="1800" kern="1200">
+                <a:solidFill>
+                  <a:schemeClr val="lt1"/>
+                </a:solidFill>
+                <a:latin typeface="+mn-lt"/>
+                <a:ea typeface="+mn-ea"/>
+                <a:cs typeface="+mn-cs"/>
+              </a:defRPr>
+            </a:lvl3pPr>
+            <a:lvl4pPr marL="1371600" algn="l" defTabSz="914400" rtl="0" eaLnBrk="1" latinLnBrk="0" hangingPunct="1">
+              <a:defRPr sz="1800" kern="1200">
+                <a:solidFill>
+                  <a:schemeClr val="lt1"/>
+                </a:solidFill>
+                <a:latin typeface="+mn-lt"/>
+                <a:ea typeface="+mn-ea"/>
+                <a:cs typeface="+mn-cs"/>
+              </a:defRPr>
+            </a:lvl4pPr>
+            <a:lvl5pPr marL="1828800" algn="l" defTabSz="914400" rtl="0" eaLnBrk="1" latinLnBrk="0" hangingPunct="1">
+              <a:defRPr sz="1800" kern="1200">
+                <a:solidFill>
+                  <a:schemeClr val="lt1"/>
+                </a:solidFill>
+                <a:latin typeface="+mn-lt"/>
+                <a:ea typeface="+mn-ea"/>
+                <a:cs typeface="+mn-cs"/>
+              </a:defRPr>
+            </a:lvl5pPr>
+            <a:lvl6pPr marL="2286000" algn="l" defTabSz="914400" rtl="0" eaLnBrk="1" latinLnBrk="0" hangingPunct="1">
+              <a:defRPr sz="1800" kern="1200">
+                <a:solidFill>
+                  <a:schemeClr val="lt1"/>
+                </a:solidFill>
+                <a:latin typeface="+mn-lt"/>
+                <a:ea typeface="+mn-ea"/>
+                <a:cs typeface="+mn-cs"/>
+              </a:defRPr>
+            </a:lvl6pPr>
+            <a:lvl7pPr marL="2743200" algn="l" defTabSz="914400" rtl="0" eaLnBrk="1" latinLnBrk="0" hangingPunct="1">
+              <a:defRPr sz="1800" kern="1200">
+                <a:solidFill>
+                  <a:schemeClr val="lt1"/>
+                </a:solidFill>
+                <a:latin typeface="+mn-lt"/>
+                <a:ea typeface="+mn-ea"/>
+                <a:cs typeface="+mn-cs"/>
+              </a:defRPr>
+            </a:lvl7pPr>
+            <a:lvl8pPr marL="3200400" algn="l" defTabSz="914400" rtl="0" eaLnBrk="1" latinLnBrk="0" hangingPunct="1">
+              <a:defRPr sz="1800" kern="1200">
+                <a:solidFill>
+                  <a:schemeClr val="lt1"/>
+                </a:solidFill>
+                <a:latin typeface="+mn-lt"/>
+                <a:ea typeface="+mn-ea"/>
+                <a:cs typeface="+mn-cs"/>
+              </a:defRPr>
+            </a:lvl8pPr>
+            <a:lvl9pPr marL="3657600" algn="l" defTabSz="914400" rtl="0" eaLnBrk="1" latinLnBrk="0" hangingPunct="1">
+              <a:defRPr sz="1800" kern="1200">
+                <a:solidFill>
+                  <a:schemeClr val="lt1"/>
+                </a:solidFill>
+                <a:latin typeface="+mn-lt"/>
+                <a:ea typeface="+mn-ea"/>
+                <a:cs typeface="+mn-cs"/>
+              </a:defRPr>
+            </a:lvl9pPr>
+          </a:lstStyle>
+          <a:p>
+            <a:pPr lvl="0" algn="ctr">
+              <a:buClrTx/>
+              <a:buSzTx/>
+              <a:buFontTx/>
+            </a:pPr>
+            <a:endParaRPr lang="zh-CN" altLang="en-US">
+              <a:sym typeface="+mn-ea"/>
+            </a:endParaRPr>
+          </a:p>
+        </p:txBody>
+      </p:sp>
+      <p:sp>
+        <p:nvSpPr>
+          <p:cNvPr id="51" name="椭圆 50"/>
+          <p:cNvSpPr/>
+          <p:nvPr>
+            <p:custDataLst>
+              <p:tags r:id="rId24"/>
+            </p:custDataLst>
+          </p:nvPr>
+        </p:nvSpPr>
+        <p:spPr>
+          <a:xfrm>
+            <a:off x="4257675" y="3696970"/>
+            <a:ext cx="1673225" cy="1673225"/>
+          </a:xfrm>
+          <a:prstGeom prst="ellipse">
+            <a:avLst/>
+          </a:prstGeom>
+          <a:gradFill>
+            <a:gsLst>
+              <a:gs pos="100000">
+                <a:schemeClr val="accent5">
+                  <a:lumMod val="80000"/>
+                  <a:lumOff val="20000"/>
+                </a:schemeClr>
+              </a:gs>
+              <a:gs pos="0">
+                <a:schemeClr val="accent5"/>
+              </a:gs>
+            </a:gsLst>
+            <a:lin ang="10800000" scaled="0"/>
+          </a:gradFill>
+          <a:ln w="44450">
+            <a:solidFill>
+              <a:schemeClr val="lt1">
+                <a:lumMod val="100000"/>
+              </a:schemeClr>
+            </a:solidFill>
+          </a:ln>
+          <a:effectLst/>
+        </p:spPr>
+        <p:style>
+          <a:lnRef idx="2">
+            <a:schemeClr val="accent1">
+              <a:shade val="50000"/>
+            </a:schemeClr>
+          </a:lnRef>
+          <a:fillRef idx="1">
+            <a:schemeClr val="accent1"/>
+          </a:fillRef>
+          <a:effectRef idx="0">
+            <a:schemeClr val="accent1"/>
+          </a:effectRef>
+          <a:fontRef idx="minor">
+            <a:schemeClr val="lt1"/>
+          </a:fontRef>
+        </p:style>
+        <p:txBody>
+          <a:bodyPr rot="0" spcFirstLastPara="0" vertOverflow="overflow" horzOverflow="overflow" vert="horz" wrap="square" lIns="91440" tIns="45720" rIns="91440" bIns="45720" numCol="1" spcCol="0" rtlCol="0" fromWordArt="0" anchor="ctr" anchorCtr="0" forceAA="0" compatLnSpc="1">
+            <a:noAutofit/>
+          </a:bodyPr>
+          <a:lstStyle>
+            <a:defPPr>
+              <a:defRPr lang="zh-CN">
+                <a:solidFill>
+                  <a:schemeClr val="lt1"/>
+                </a:solidFill>
+              </a:defRPr>
+            </a:defPPr>
+            <a:lvl1pPr marL="0" algn="l" defTabSz="914400" rtl="0" eaLnBrk="1" latinLnBrk="0" hangingPunct="1">
+              <a:defRPr sz="1800" kern="1200">
+                <a:solidFill>
+                  <a:schemeClr val="lt1"/>
+                </a:solidFill>
+                <a:latin typeface="+mn-lt"/>
+                <a:ea typeface="+mn-ea"/>
+                <a:cs typeface="+mn-cs"/>
+              </a:defRPr>
+            </a:lvl1pPr>
+            <a:lvl2pPr marL="457200" algn="l" defTabSz="914400" rtl="0" eaLnBrk="1" latinLnBrk="0" hangingPunct="1">
+              <a:defRPr sz="1800" kern="1200">
+                <a:solidFill>
+                  <a:schemeClr val="lt1"/>
+                </a:solidFill>
+                <a:latin typeface="+mn-lt"/>
+                <a:ea typeface="+mn-ea"/>
+                <a:cs typeface="+mn-cs"/>
+              </a:defRPr>
+            </a:lvl2pPr>
+            <a:lvl3pPr marL="914400" algn="l" defTabSz="914400" rtl="0" eaLnBrk="1" latinLnBrk="0" hangingPunct="1">
+              <a:defRPr sz="1800" kern="1200">
+                <a:solidFill>
+                  <a:schemeClr val="lt1"/>
+                </a:solidFill>
+                <a:latin typeface="+mn-lt"/>
+                <a:ea typeface="+mn-ea"/>
+                <a:cs typeface="+mn-cs"/>
+              </a:defRPr>
+            </a:lvl3pPr>
+            <a:lvl4pPr marL="1371600" algn="l" defTabSz="914400" rtl="0" eaLnBrk="1" latinLnBrk="0" hangingPunct="1">
+              <a:defRPr sz="1800" kern="1200">
+                <a:solidFill>
+                  <a:schemeClr val="lt1"/>
+                </a:solidFill>
+                <a:latin typeface="+mn-lt"/>
+                <a:ea typeface="+mn-ea"/>
+                <a:cs typeface="+mn-cs"/>
+              </a:defRPr>
+            </a:lvl4pPr>
+            <a:lvl5pPr marL="1828800" algn="l" defTabSz="914400" rtl="0" eaLnBrk="1" latinLnBrk="0" hangingPunct="1">
+              <a:defRPr sz="1800" kern="1200">
+                <a:solidFill>
+                  <a:schemeClr val="lt1"/>
+                </a:solidFill>
+                <a:latin typeface="+mn-lt"/>
+                <a:ea typeface="+mn-ea"/>
+                <a:cs typeface="+mn-cs"/>
+              </a:defRPr>
+            </a:lvl5pPr>
+            <a:lvl6pPr marL="2286000" algn="l" defTabSz="914400" rtl="0" eaLnBrk="1" latinLnBrk="0" hangingPunct="1">
+              <a:defRPr sz="1800" kern="1200">
+                <a:solidFill>
+                  <a:schemeClr val="lt1"/>
+                </a:solidFill>
+                <a:latin typeface="+mn-lt"/>
+                <a:ea typeface="+mn-ea"/>
+                <a:cs typeface="+mn-cs"/>
+              </a:defRPr>
+            </a:lvl6pPr>
+            <a:lvl7pPr marL="2743200" algn="l" defTabSz="914400" rtl="0" eaLnBrk="1" latinLnBrk="0" hangingPunct="1">
+              <a:defRPr sz="1800" kern="1200">
+                <a:solidFill>
+                  <a:schemeClr val="lt1"/>
+                </a:solidFill>
+                <a:latin typeface="+mn-lt"/>
+                <a:ea typeface="+mn-ea"/>
+                <a:cs typeface="+mn-cs"/>
+              </a:defRPr>
+            </a:lvl7pPr>
+            <a:lvl8pPr marL="3200400" algn="l" defTabSz="914400" rtl="0" eaLnBrk="1" latinLnBrk="0" hangingPunct="1">
+              <a:defRPr sz="1800" kern="1200">
+                <a:solidFill>
+                  <a:schemeClr val="lt1"/>
+                </a:solidFill>
+                <a:latin typeface="+mn-lt"/>
+                <a:ea typeface="+mn-ea"/>
+                <a:cs typeface="+mn-cs"/>
+              </a:defRPr>
+            </a:lvl8pPr>
+            <a:lvl9pPr marL="3657600" algn="l" defTabSz="914400" rtl="0" eaLnBrk="1" latinLnBrk="0" hangingPunct="1">
+              <a:defRPr sz="1800" kern="1200">
+                <a:solidFill>
+                  <a:schemeClr val="lt1"/>
+                </a:solidFill>
+                <a:latin typeface="+mn-lt"/>
+                <a:ea typeface="+mn-ea"/>
+                <a:cs typeface="+mn-cs"/>
+              </a:defRPr>
+            </a:lvl9pPr>
+          </a:lstStyle>
+          <a:p>
+            <a:pPr lvl="0" algn="ctr">
+              <a:buClrTx/>
+              <a:buSzTx/>
+              <a:buFontTx/>
+            </a:pPr>
+            <a:endParaRPr lang="zh-CN" altLang="en-US">
+              <a:sym typeface="+mn-ea"/>
+            </a:endParaRPr>
+          </a:p>
+        </p:txBody>
+      </p:sp>
+      <p:sp>
+        <p:nvSpPr>
+          <p:cNvPr id="40" name="椭圆 39"/>
+          <p:cNvSpPr/>
+          <p:nvPr>
+            <p:custDataLst>
+              <p:tags r:id="rId25"/>
+            </p:custDataLst>
+          </p:nvPr>
+        </p:nvSpPr>
+        <p:spPr>
+          <a:xfrm>
+            <a:off x="5247640" y="4268470"/>
+            <a:ext cx="1673225" cy="1673225"/>
+          </a:xfrm>
+          <a:prstGeom prst="ellipse">
+            <a:avLst/>
+          </a:prstGeom>
+          <a:gradFill>
+            <a:gsLst>
+              <a:gs pos="100000">
+                <a:schemeClr val="accent4">
+                  <a:lumMod val="80000"/>
+                  <a:lumOff val="20000"/>
+                </a:schemeClr>
+              </a:gs>
+              <a:gs pos="0">
+                <a:schemeClr val="accent4"/>
+              </a:gs>
+            </a:gsLst>
+            <a:lin ang="10800000" scaled="0"/>
+          </a:gradFill>
+          <a:ln w="44450">
+            <a:solidFill>
+              <a:schemeClr val="lt1">
+                <a:lumMod val="100000"/>
+              </a:schemeClr>
+            </a:solidFill>
+          </a:ln>
+          <a:effectLst/>
+        </p:spPr>
+        <p:style>
+          <a:lnRef idx="2">
+            <a:schemeClr val="accent1">
+              <a:shade val="50000"/>
+            </a:schemeClr>
+          </a:lnRef>
+          <a:fillRef idx="1">
+            <a:schemeClr val="accent1"/>
+          </a:fillRef>
+          <a:effectRef idx="0">
+            <a:schemeClr val="accent1"/>
+          </a:effectRef>
+          <a:fontRef idx="minor">
+            <a:schemeClr val="lt1"/>
+          </a:fontRef>
+        </p:style>
+        <p:txBody>
+          <a:bodyPr rot="0" spcFirstLastPara="0" vertOverflow="overflow" horzOverflow="overflow" vert="horz" wrap="square" lIns="91440" tIns="45720" rIns="91440" bIns="45720" numCol="1" spcCol="0" rtlCol="0" fromWordArt="0" anchor="ctr" anchorCtr="0" forceAA="0" compatLnSpc="1">
+            <a:noAutofit/>
+          </a:bodyPr>
+          <a:lstStyle>
+            <a:defPPr>
+              <a:defRPr lang="zh-CN">
+                <a:solidFill>
+                  <a:schemeClr val="lt1"/>
+                </a:solidFill>
+              </a:defRPr>
+            </a:defPPr>
+            <a:lvl1pPr marL="0" algn="l" defTabSz="914400" rtl="0" eaLnBrk="1" latinLnBrk="0" hangingPunct="1">
+              <a:defRPr sz="1800" kern="1200">
+                <a:solidFill>
+                  <a:schemeClr val="lt1"/>
+                </a:solidFill>
+                <a:latin typeface="+mn-lt"/>
+                <a:ea typeface="+mn-ea"/>
+                <a:cs typeface="+mn-cs"/>
+              </a:defRPr>
+            </a:lvl1pPr>
+            <a:lvl2pPr marL="457200" algn="l" defTabSz="914400" rtl="0" eaLnBrk="1" latinLnBrk="0" hangingPunct="1">
+              <a:defRPr sz="1800" kern="1200">
+                <a:solidFill>
+                  <a:schemeClr val="lt1"/>
+                </a:solidFill>
+                <a:latin typeface="+mn-lt"/>
+                <a:ea typeface="+mn-ea"/>
+                <a:cs typeface="+mn-cs"/>
+              </a:defRPr>
+            </a:lvl2pPr>
+            <a:lvl3pPr marL="914400" algn="l" defTabSz="914400" rtl="0" eaLnBrk="1" latinLnBrk="0" hangingPunct="1">
+              <a:defRPr sz="1800" kern="1200">
+                <a:solidFill>
+                  <a:schemeClr val="lt1"/>
+                </a:solidFill>
+                <a:latin typeface="+mn-lt"/>
+                <a:ea typeface="+mn-ea"/>
+                <a:cs typeface="+mn-cs"/>
+              </a:defRPr>
+            </a:lvl3pPr>
+            <a:lvl4pPr marL="1371600" algn="l" defTabSz="914400" rtl="0" eaLnBrk="1" latinLnBrk="0" hangingPunct="1">
+              <a:defRPr sz="1800" kern="1200">
+                <a:solidFill>
+                  <a:schemeClr val="lt1"/>
+                </a:solidFill>
+                <a:latin typeface="+mn-lt"/>
+                <a:ea typeface="+mn-ea"/>
+                <a:cs typeface="+mn-cs"/>
+              </a:defRPr>
+            </a:lvl4pPr>
+            <a:lvl5pPr marL="1828800" algn="l" defTabSz="914400" rtl="0" eaLnBrk="1" latinLnBrk="0" hangingPunct="1">
+              <a:defRPr sz="1800" kern="1200">
+                <a:solidFill>
+                  <a:schemeClr val="lt1"/>
+                </a:solidFill>
+                <a:latin typeface="+mn-lt"/>
+                <a:ea typeface="+mn-ea"/>
+                <a:cs typeface="+mn-cs"/>
+              </a:defRPr>
+            </a:lvl5pPr>
+            <a:lvl6pPr marL="2286000" algn="l" defTabSz="914400" rtl="0" eaLnBrk="1" latinLnBrk="0" hangingPunct="1">
+              <a:defRPr sz="1800" kern="1200">
+                <a:solidFill>
+                  <a:schemeClr val="lt1"/>
+                </a:solidFill>
+                <a:latin typeface="+mn-lt"/>
+                <a:ea typeface="+mn-ea"/>
+                <a:cs typeface="+mn-cs"/>
+              </a:defRPr>
+            </a:lvl6pPr>
+            <a:lvl7pPr marL="2743200" algn="l" defTabSz="914400" rtl="0" eaLnBrk="1" latinLnBrk="0" hangingPunct="1">
+              <a:defRPr sz="1800" kern="1200">
+                <a:solidFill>
+                  <a:schemeClr val="lt1"/>
+                </a:solidFill>
+                <a:latin typeface="+mn-lt"/>
+                <a:ea typeface="+mn-ea"/>
+                <a:cs typeface="+mn-cs"/>
+              </a:defRPr>
+            </a:lvl7pPr>
+            <a:lvl8pPr marL="3200400" algn="l" defTabSz="914400" rtl="0" eaLnBrk="1" latinLnBrk="0" hangingPunct="1">
+              <a:defRPr sz="1800" kern="1200">
+                <a:solidFill>
+                  <a:schemeClr val="lt1"/>
+                </a:solidFill>
+                <a:latin typeface="+mn-lt"/>
+                <a:ea typeface="+mn-ea"/>
+                <a:cs typeface="+mn-cs"/>
+              </a:defRPr>
+            </a:lvl8pPr>
+            <a:lvl9pPr marL="3657600" algn="l" defTabSz="914400" rtl="0" eaLnBrk="1" latinLnBrk="0" hangingPunct="1">
+              <a:defRPr sz="1800" kern="1200">
+                <a:solidFill>
+                  <a:schemeClr val="lt1"/>
+                </a:solidFill>
+                <a:latin typeface="+mn-lt"/>
+                <a:ea typeface="+mn-ea"/>
+                <a:cs typeface="+mn-cs"/>
+              </a:defRPr>
+            </a:lvl9pPr>
+          </a:lstStyle>
+          <a:p>
+            <a:pPr lvl="0" algn="ctr">
+              <a:buClrTx/>
+              <a:buSzTx/>
+              <a:buFontTx/>
+            </a:pPr>
+            <a:endParaRPr lang="zh-CN" altLang="en-US">
+              <a:sym typeface="+mn-ea"/>
+            </a:endParaRPr>
+          </a:p>
+        </p:txBody>
+      </p:sp>
+      <p:sp>
+        <p:nvSpPr>
+          <p:cNvPr id="39" name="椭圆 38"/>
+          <p:cNvSpPr/>
+          <p:nvPr>
+            <p:custDataLst>
+              <p:tags r:id="rId26"/>
+            </p:custDataLst>
+          </p:nvPr>
+        </p:nvSpPr>
+        <p:spPr>
+          <a:xfrm>
+            <a:off x="6237605" y="3696970"/>
+            <a:ext cx="1673225" cy="1673225"/>
+          </a:xfrm>
+          <a:prstGeom prst="ellipse">
+            <a:avLst/>
+          </a:prstGeom>
+          <a:gradFill>
+            <a:gsLst>
+              <a:gs pos="0">
+                <a:schemeClr val="accent3"/>
+              </a:gs>
+              <a:gs pos="100000">
+                <a:schemeClr val="accent3">
+                  <a:lumMod val="80000"/>
+                  <a:lumOff val="20000"/>
+                </a:schemeClr>
+              </a:gs>
+            </a:gsLst>
+            <a:lin ang="10800000" scaled="0"/>
+          </a:gradFill>
+          <a:ln w="44450">
+            <a:solidFill>
+              <a:schemeClr val="lt1">
+                <a:lumMod val="100000"/>
+              </a:schemeClr>
+            </a:solidFill>
+          </a:ln>
+          <a:effectLst/>
+        </p:spPr>
+        <p:style>
+          <a:lnRef idx="2">
+            <a:schemeClr val="accent1">
+              <a:shade val="50000"/>
+            </a:schemeClr>
+          </a:lnRef>
+          <a:fillRef idx="1">
+            <a:schemeClr val="accent1"/>
+          </a:fillRef>
+          <a:effectRef idx="0">
+            <a:schemeClr val="accent1"/>
+          </a:effectRef>
+          <a:fontRef idx="minor">
+            <a:schemeClr val="lt1"/>
+          </a:fontRef>
+        </p:style>
+        <p:txBody>
+          <a:bodyPr rot="0" spcFirstLastPara="0" vertOverflow="overflow" horzOverflow="overflow" vert="horz" wrap="square" lIns="91440" tIns="45720" rIns="91440" bIns="45720" numCol="1" spcCol="0" rtlCol="0" fromWordArt="0" anchor="ctr" anchorCtr="0" forceAA="0" compatLnSpc="1">
+            <a:noAutofit/>
+          </a:bodyPr>
+          <a:lstStyle>
+            <a:defPPr>
+              <a:defRPr lang="zh-CN">
+                <a:solidFill>
+                  <a:schemeClr val="lt1"/>
+                </a:solidFill>
+              </a:defRPr>
+            </a:defPPr>
+            <a:lvl1pPr marL="0" algn="l" defTabSz="914400" rtl="0" eaLnBrk="1" latinLnBrk="0" hangingPunct="1">
+              <a:defRPr sz="1800" kern="1200">
+                <a:solidFill>
+                  <a:schemeClr val="lt1"/>
+                </a:solidFill>
+                <a:latin typeface="+mn-lt"/>
+                <a:ea typeface="+mn-ea"/>
+                <a:cs typeface="+mn-cs"/>
+              </a:defRPr>
+            </a:lvl1pPr>
+            <a:lvl2pPr marL="457200" algn="l" defTabSz="914400" rtl="0" eaLnBrk="1" latinLnBrk="0" hangingPunct="1">
+              <a:defRPr sz="1800" kern="1200">
+                <a:solidFill>
+                  <a:schemeClr val="lt1"/>
+                </a:solidFill>
+                <a:latin typeface="+mn-lt"/>
+                <a:ea typeface="+mn-ea"/>
+                <a:cs typeface="+mn-cs"/>
+              </a:defRPr>
+            </a:lvl2pPr>
+            <a:lvl3pPr marL="914400" algn="l" defTabSz="914400" rtl="0" eaLnBrk="1" latinLnBrk="0" hangingPunct="1">
+              <a:defRPr sz="1800" kern="1200">
+                <a:solidFill>
+                  <a:schemeClr val="lt1"/>
+                </a:solidFill>
+                <a:latin typeface="+mn-lt"/>
+                <a:ea typeface="+mn-ea"/>
+                <a:cs typeface="+mn-cs"/>
+              </a:defRPr>
+            </a:lvl3pPr>
+            <a:lvl4pPr marL="1371600" algn="l" defTabSz="914400" rtl="0" eaLnBrk="1" latinLnBrk="0" hangingPunct="1">
+              <a:defRPr sz="1800" kern="1200">
+                <a:solidFill>
+                  <a:schemeClr val="lt1"/>
+                </a:solidFill>
+                <a:latin typeface="+mn-lt"/>
+                <a:ea typeface="+mn-ea"/>
+                <a:cs typeface="+mn-cs"/>
+              </a:defRPr>
+            </a:lvl4pPr>
+            <a:lvl5pPr marL="1828800" algn="l" defTabSz="914400" rtl="0" eaLnBrk="1" latinLnBrk="0" hangingPunct="1">
+              <a:defRPr sz="1800" kern="1200">
+                <a:solidFill>
+                  <a:schemeClr val="lt1"/>
+                </a:solidFill>
+                <a:latin typeface="+mn-lt"/>
+                <a:ea typeface="+mn-ea"/>
+                <a:cs typeface="+mn-cs"/>
+              </a:defRPr>
+            </a:lvl5pPr>
+            <a:lvl6pPr marL="2286000" algn="l" defTabSz="914400" rtl="0" eaLnBrk="1" latinLnBrk="0" hangingPunct="1">
+              <a:defRPr sz="1800" kern="1200">
+                <a:solidFill>
+                  <a:schemeClr val="lt1"/>
+                </a:solidFill>
+                <a:latin typeface="+mn-lt"/>
+                <a:ea typeface="+mn-ea"/>
+                <a:cs typeface="+mn-cs"/>
+              </a:defRPr>
+            </a:lvl6pPr>
+            <a:lvl7pPr marL="2743200" algn="l" defTabSz="914400" rtl="0" eaLnBrk="1" latinLnBrk="0" hangingPunct="1">
+              <a:defRPr sz="1800" kern="1200">
+                <a:solidFill>
+                  <a:schemeClr val="lt1"/>
+                </a:solidFill>
+                <a:latin typeface="+mn-lt"/>
+                <a:ea typeface="+mn-ea"/>
+                <a:cs typeface="+mn-cs"/>
+              </a:defRPr>
+            </a:lvl7pPr>
+            <a:lvl8pPr marL="3200400" algn="l" defTabSz="914400" rtl="0" eaLnBrk="1" latinLnBrk="0" hangingPunct="1">
+              <a:defRPr sz="1800" kern="1200">
+                <a:solidFill>
+                  <a:schemeClr val="lt1"/>
+                </a:solidFill>
+                <a:latin typeface="+mn-lt"/>
+                <a:ea typeface="+mn-ea"/>
+                <a:cs typeface="+mn-cs"/>
+              </a:defRPr>
+            </a:lvl8pPr>
+            <a:lvl9pPr marL="3657600" algn="l" defTabSz="914400" rtl="0" eaLnBrk="1" latinLnBrk="0" hangingPunct="1">
+              <a:defRPr sz="1800" kern="1200">
+                <a:solidFill>
+                  <a:schemeClr val="lt1"/>
+                </a:solidFill>
+                <a:latin typeface="+mn-lt"/>
+                <a:ea typeface="+mn-ea"/>
+                <a:cs typeface="+mn-cs"/>
+              </a:defRPr>
+            </a:lvl9pPr>
+          </a:lstStyle>
+          <a:p>
+            <a:pPr lvl="0" algn="ctr">
+              <a:buClrTx/>
+              <a:buSzTx/>
+              <a:buFontTx/>
+            </a:pPr>
+            <a:endParaRPr lang="zh-CN" altLang="en-US">
+              <a:sym typeface="+mn-ea"/>
+            </a:endParaRPr>
+          </a:p>
+        </p:txBody>
+      </p:sp>
+      <p:sp>
+        <p:nvSpPr>
+          <p:cNvPr id="38" name="椭圆 37"/>
+          <p:cNvSpPr/>
+          <p:nvPr>
+            <p:custDataLst>
+              <p:tags r:id="rId27"/>
+            </p:custDataLst>
+          </p:nvPr>
+        </p:nvSpPr>
+        <p:spPr>
+          <a:xfrm>
+            <a:off x="6237605" y="2553970"/>
+            <a:ext cx="1673225" cy="1673225"/>
+          </a:xfrm>
+          <a:prstGeom prst="ellipse">
+            <a:avLst/>
+          </a:prstGeom>
+          <a:gradFill>
+            <a:gsLst>
+              <a:gs pos="100000">
+                <a:schemeClr val="accent2">
+                  <a:lumMod val="80000"/>
+                  <a:lumOff val="20000"/>
+                </a:schemeClr>
+              </a:gs>
+              <a:gs pos="0">
+                <a:schemeClr val="accent2"/>
+              </a:gs>
+            </a:gsLst>
+            <a:lin ang="10800000" scaled="0"/>
+          </a:gradFill>
+          <a:ln w="44450">
+            <a:solidFill>
+              <a:schemeClr val="lt1">
+                <a:lumMod val="100000"/>
+              </a:schemeClr>
+            </a:solidFill>
+          </a:ln>
+          <a:effectLst/>
+        </p:spPr>
+        <p:style>
+          <a:lnRef idx="2">
+            <a:schemeClr val="accent1">
+              <a:shade val="50000"/>
+            </a:schemeClr>
+          </a:lnRef>
+          <a:fillRef idx="1">
+            <a:schemeClr val="accent1"/>
+          </a:fillRef>
+          <a:effectRef idx="0">
+            <a:schemeClr val="accent1"/>
+          </a:effectRef>
+          <a:fontRef idx="minor">
+            <a:schemeClr val="lt1"/>
+          </a:fontRef>
+        </p:style>
+        <p:txBody>
+          <a:bodyPr rot="0" spcFirstLastPara="0" vertOverflow="overflow" horzOverflow="overflow" vert="horz" wrap="square" lIns="91440" tIns="45720" rIns="91440" bIns="45720" numCol="1" spcCol="0" rtlCol="0" fromWordArt="0" anchor="ctr" anchorCtr="0" forceAA="0" compatLnSpc="1">
+            <a:noAutofit/>
+          </a:bodyPr>
+          <a:lstStyle>
+            <a:defPPr>
+              <a:defRPr lang="zh-CN">
+                <a:solidFill>
+                  <a:schemeClr val="lt1"/>
+                </a:solidFill>
+              </a:defRPr>
+            </a:defPPr>
+            <a:lvl1pPr marL="0" algn="l" defTabSz="914400" rtl="0" eaLnBrk="1" latinLnBrk="0" hangingPunct="1">
+              <a:defRPr sz="1800" kern="1200">
+                <a:solidFill>
+                  <a:schemeClr val="lt1"/>
+                </a:solidFill>
+                <a:latin typeface="+mn-lt"/>
+                <a:ea typeface="+mn-ea"/>
+                <a:cs typeface="+mn-cs"/>
+              </a:defRPr>
+            </a:lvl1pPr>
+            <a:lvl2pPr marL="457200" algn="l" defTabSz="914400" rtl="0" eaLnBrk="1" latinLnBrk="0" hangingPunct="1">
+              <a:defRPr sz="1800" kern="1200">
+                <a:solidFill>
+                  <a:schemeClr val="lt1"/>
+                </a:solidFill>
+                <a:latin typeface="+mn-lt"/>
+                <a:ea typeface="+mn-ea"/>
+                <a:cs typeface="+mn-cs"/>
+              </a:defRPr>
+            </a:lvl2pPr>
+            <a:lvl3pPr marL="914400" algn="l" defTabSz="914400" rtl="0" eaLnBrk="1" latinLnBrk="0" hangingPunct="1">
+              <a:defRPr sz="1800" kern="1200">
+                <a:solidFill>
+                  <a:schemeClr val="lt1"/>
+                </a:solidFill>
+                <a:latin typeface="+mn-lt"/>
+                <a:ea typeface="+mn-ea"/>
+                <a:cs typeface="+mn-cs"/>
+              </a:defRPr>
+            </a:lvl3pPr>
+            <a:lvl4pPr marL="1371600" algn="l" defTabSz="914400" rtl="0" eaLnBrk="1" latinLnBrk="0" hangingPunct="1">
+              <a:defRPr sz="1800" kern="1200">
+                <a:solidFill>
+                  <a:schemeClr val="lt1"/>
+                </a:solidFill>
+                <a:latin typeface="+mn-lt"/>
+                <a:ea typeface="+mn-ea"/>
+                <a:cs typeface="+mn-cs"/>
+              </a:defRPr>
+            </a:lvl4pPr>
+            <a:lvl5pPr marL="1828800" algn="l" defTabSz="914400" rtl="0" eaLnBrk="1" latinLnBrk="0" hangingPunct="1">
+              <a:defRPr sz="1800" kern="1200">
+                <a:solidFill>
+                  <a:schemeClr val="lt1"/>
+                </a:solidFill>
+                <a:latin typeface="+mn-lt"/>
+                <a:ea typeface="+mn-ea"/>
+                <a:cs typeface="+mn-cs"/>
+              </a:defRPr>
+            </a:lvl5pPr>
+            <a:lvl6pPr marL="2286000" algn="l" defTabSz="914400" rtl="0" eaLnBrk="1" latinLnBrk="0" hangingPunct="1">
+              <a:defRPr sz="1800" kern="1200">
+                <a:solidFill>
+                  <a:schemeClr val="lt1"/>
+                </a:solidFill>
+                <a:latin typeface="+mn-lt"/>
+                <a:ea typeface="+mn-ea"/>
+                <a:cs typeface="+mn-cs"/>
+              </a:defRPr>
+            </a:lvl6pPr>
+            <a:lvl7pPr marL="2743200" algn="l" defTabSz="914400" rtl="0" eaLnBrk="1" latinLnBrk="0" hangingPunct="1">
+              <a:defRPr sz="1800" kern="1200">
+                <a:solidFill>
+                  <a:schemeClr val="lt1"/>
+                </a:solidFill>
+                <a:latin typeface="+mn-lt"/>
+                <a:ea typeface="+mn-ea"/>
+                <a:cs typeface="+mn-cs"/>
+              </a:defRPr>
+            </a:lvl7pPr>
+            <a:lvl8pPr marL="3200400" algn="l" defTabSz="914400" rtl="0" eaLnBrk="1" latinLnBrk="0" hangingPunct="1">
+              <a:defRPr sz="1800" kern="1200">
+                <a:solidFill>
+                  <a:schemeClr val="lt1"/>
+                </a:solidFill>
+                <a:latin typeface="+mn-lt"/>
+                <a:ea typeface="+mn-ea"/>
+                <a:cs typeface="+mn-cs"/>
+              </a:defRPr>
+            </a:lvl8pPr>
+            <a:lvl9pPr marL="3657600" algn="l" defTabSz="914400" rtl="0" eaLnBrk="1" latinLnBrk="0" hangingPunct="1">
+              <a:defRPr sz="1800" kern="1200">
+                <a:solidFill>
+                  <a:schemeClr val="lt1"/>
+                </a:solidFill>
+                <a:latin typeface="+mn-lt"/>
+                <a:ea typeface="+mn-ea"/>
+                <a:cs typeface="+mn-cs"/>
+              </a:defRPr>
+            </a:lvl9pPr>
+          </a:lstStyle>
+          <a:p>
+            <a:pPr lvl="0" algn="ctr">
+              <a:buClrTx/>
+              <a:buSzTx/>
+              <a:buFontTx/>
+            </a:pPr>
+            <a:endParaRPr lang="zh-CN" altLang="en-US">
+              <a:sym typeface="+mn-ea"/>
+            </a:endParaRPr>
+          </a:p>
+        </p:txBody>
+      </p:sp>
+      <p:sp>
+        <p:nvSpPr>
+          <p:cNvPr id="31" name="任意多边形 30"/>
+          <p:cNvSpPr/>
+          <p:nvPr>
+            <p:custDataLst>
+              <p:tags r:id="rId28"/>
+            </p:custDataLst>
+          </p:nvPr>
+        </p:nvSpPr>
+        <p:spPr>
+          <a:xfrm>
+            <a:off x="5283200" y="1982470"/>
+            <a:ext cx="1637030" cy="1673225"/>
+          </a:xfrm>
+          <a:custGeom>
+            <a:avLst/>
+            <a:gdLst>
+              <a:gd name="idx" fmla="cos wd2 2700000"/>
+              <a:gd name="idy" fmla="sin hd2 2700000"/>
+              <a:gd name="il" fmla="+- hc 0 idx"/>
+              <a:gd name="ir" fmla="+- hc idx 0"/>
+              <a:gd name="it" fmla="+- vc 0 idy"/>
+              <a:gd name="ib" fmla="+- vc idy 0"/>
+            </a:gdLst>
+            <a:ahLst/>
+            <a:cxnLst>
+              <a:cxn ang="3">
+                <a:pos x="hc" y="t"/>
+              </a:cxn>
+              <a:cxn ang="3">
+                <a:pos x="il" y="it"/>
+              </a:cxn>
+              <a:cxn ang="cd2">
+                <a:pos x="l" y="vc"/>
+              </a:cxn>
+              <a:cxn ang="cd4">
+                <a:pos x="il" y="ib"/>
+              </a:cxn>
+              <a:cxn ang="cd4">
+                <a:pos x="hc" y="b"/>
+              </a:cxn>
+              <a:cxn ang="cd4">
+                <a:pos x="ir" y="ib"/>
+              </a:cxn>
+              <a:cxn ang="0">
+                <a:pos x="r" y="vc"/>
+              </a:cxn>
+              <a:cxn ang="3">
+                <a:pos x="ir" y="it"/>
+              </a:cxn>
+            </a:cxnLst>
+            <a:rect l="l" t="t" r="r" b="b"/>
+            <a:pathLst>
+              <a:path w="2578" h="2635">
+                <a:moveTo>
+                  <a:pt x="1261" y="0"/>
+                </a:moveTo>
+                <a:cubicBezTo>
+                  <a:pt x="1988" y="0"/>
+                  <a:pt x="2578" y="590"/>
+                  <a:pt x="2578" y="1318"/>
+                </a:cubicBezTo>
+                <a:cubicBezTo>
+                  <a:pt x="2578" y="2045"/>
+                  <a:pt x="1988" y="2635"/>
+                  <a:pt x="1261" y="2635"/>
+                </a:cubicBezTo>
+                <a:cubicBezTo>
+                  <a:pt x="1158" y="2635"/>
+                  <a:pt x="1059" y="2623"/>
+                  <a:pt x="963" y="2601"/>
+                </a:cubicBezTo>
+                <a:lnTo>
+                  <a:pt x="962" y="2601"/>
+                </a:lnTo>
+                <a:lnTo>
+                  <a:pt x="969" y="2578"/>
+                </a:lnTo>
+                <a:cubicBezTo>
+                  <a:pt x="1002" y="2464"/>
+                  <a:pt x="1019" y="2343"/>
+                  <a:pt x="1019" y="2218"/>
+                </a:cubicBezTo>
+                <a:cubicBezTo>
+                  <a:pt x="1019" y="1604"/>
+                  <a:pt x="599" y="1088"/>
+                  <a:pt x="31" y="941"/>
+                </a:cubicBezTo>
+                <a:lnTo>
+                  <a:pt x="0" y="934"/>
+                </a:lnTo>
+                <a:lnTo>
+                  <a:pt x="2" y="926"/>
+                </a:lnTo>
+                <a:cubicBezTo>
+                  <a:pt x="169" y="389"/>
+                  <a:pt x="670" y="0"/>
+                  <a:pt x="1261" y="0"/>
+                </a:cubicBezTo>
+                <a:close/>
+              </a:path>
+            </a:pathLst>
+          </a:custGeom>
+          <a:gradFill>
+            <a:gsLst>
+              <a:gs pos="100000">
+                <a:schemeClr val="accent1">
+                  <a:lumMod val="80000"/>
+                  <a:lumOff val="20000"/>
+                </a:schemeClr>
+              </a:gs>
+              <a:gs pos="0">
+                <a:schemeClr val="accent1"/>
+              </a:gs>
+            </a:gsLst>
+            <a:lin ang="10800000" scaled="0"/>
+          </a:gradFill>
+          <a:ln w="44450">
+            <a:solidFill>
+              <a:schemeClr val="lt1">
+                <a:lumMod val="100000"/>
+              </a:schemeClr>
+            </a:solidFill>
+          </a:ln>
+          <a:effectLst/>
+        </p:spPr>
+        <p:style>
+          <a:lnRef idx="2">
+            <a:schemeClr val="accent1">
+              <a:shade val="50000"/>
+            </a:schemeClr>
+          </a:lnRef>
+          <a:fillRef idx="1">
+            <a:schemeClr val="accent1"/>
+          </a:fillRef>
+          <a:effectRef idx="0">
+            <a:schemeClr val="accent1"/>
+          </a:effectRef>
+          <a:fontRef idx="minor">
+            <a:schemeClr val="lt1"/>
+          </a:fontRef>
+        </p:style>
+        <p:txBody>
+          <a:bodyPr rot="0" spcFirstLastPara="0" vertOverflow="overflow" horzOverflow="overflow" vert="horz" wrap="square" lIns="91440" tIns="45720" rIns="91440" bIns="45720" numCol="1" spcCol="0" rtlCol="0" fromWordArt="0" anchor="ctr" anchorCtr="0" forceAA="0" compatLnSpc="1">
+            <a:noAutofit/>
+          </a:bodyPr>
+          <a:lstStyle>
+            <a:defPPr>
+              <a:defRPr lang="zh-CN">
+                <a:solidFill>
+                  <a:schemeClr val="lt1"/>
+                </a:solidFill>
+              </a:defRPr>
+            </a:defPPr>
+            <a:lvl1pPr marL="0" algn="l" defTabSz="914400" rtl="0" eaLnBrk="1" latinLnBrk="0" hangingPunct="1">
+              <a:defRPr sz="1800" kern="1200">
+                <a:solidFill>
+                  <a:schemeClr val="lt1"/>
+                </a:solidFill>
+                <a:latin typeface="+mn-lt"/>
+                <a:ea typeface="+mn-ea"/>
+                <a:cs typeface="+mn-cs"/>
+              </a:defRPr>
+            </a:lvl1pPr>
+            <a:lvl2pPr marL="457200" algn="l" defTabSz="914400" rtl="0" eaLnBrk="1" latinLnBrk="0" hangingPunct="1">
+              <a:defRPr sz="1800" kern="1200">
+                <a:solidFill>
+                  <a:schemeClr val="lt1"/>
+                </a:solidFill>
+                <a:latin typeface="+mn-lt"/>
+                <a:ea typeface="+mn-ea"/>
+                <a:cs typeface="+mn-cs"/>
+              </a:defRPr>
+            </a:lvl2pPr>
+            <a:lvl3pPr marL="914400" algn="l" defTabSz="914400" rtl="0" eaLnBrk="1" latinLnBrk="0" hangingPunct="1">
+              <a:defRPr sz="1800" kern="1200">
+                <a:solidFill>
+                  <a:schemeClr val="lt1"/>
+                </a:solidFill>
+                <a:latin typeface="+mn-lt"/>
+                <a:ea typeface="+mn-ea"/>
+                <a:cs typeface="+mn-cs"/>
+              </a:defRPr>
+            </a:lvl3pPr>
+            <a:lvl4pPr marL="1371600" algn="l" defTabSz="914400" rtl="0" eaLnBrk="1" latinLnBrk="0" hangingPunct="1">
+              <a:defRPr sz="1800" kern="1200">
+                <a:solidFill>
+                  <a:schemeClr val="lt1"/>
+                </a:solidFill>
+                <a:latin typeface="+mn-lt"/>
+                <a:ea typeface="+mn-ea"/>
+                <a:cs typeface="+mn-cs"/>
+              </a:defRPr>
+            </a:lvl4pPr>
+            <a:lvl5pPr marL="1828800" algn="l" defTabSz="914400" rtl="0" eaLnBrk="1" latinLnBrk="0" hangingPunct="1">
+              <a:defRPr sz="1800" kern="1200">
+                <a:solidFill>
+                  <a:schemeClr val="lt1"/>
+                </a:solidFill>
+                <a:latin typeface="+mn-lt"/>
+                <a:ea typeface="+mn-ea"/>
+                <a:cs typeface="+mn-cs"/>
+              </a:defRPr>
+            </a:lvl5pPr>
+            <a:lvl6pPr marL="2286000" algn="l" defTabSz="914400" rtl="0" eaLnBrk="1" latinLnBrk="0" hangingPunct="1">
+              <a:defRPr sz="1800" kern="1200">
+                <a:solidFill>
+                  <a:schemeClr val="lt1"/>
+                </a:solidFill>
+                <a:latin typeface="+mn-lt"/>
+                <a:ea typeface="+mn-ea"/>
+                <a:cs typeface="+mn-cs"/>
+              </a:defRPr>
+            </a:lvl6pPr>
+            <a:lvl7pPr marL="2743200" algn="l" defTabSz="914400" rtl="0" eaLnBrk="1" latinLnBrk="0" hangingPunct="1">
+              <a:defRPr sz="1800" kern="1200">
+                <a:solidFill>
+                  <a:schemeClr val="lt1"/>
+                </a:solidFill>
+                <a:latin typeface="+mn-lt"/>
+                <a:ea typeface="+mn-ea"/>
+                <a:cs typeface="+mn-cs"/>
+              </a:defRPr>
+            </a:lvl7pPr>
+            <a:lvl8pPr marL="3200400" algn="l" defTabSz="914400" rtl="0" eaLnBrk="1" latinLnBrk="0" hangingPunct="1">
+              <a:defRPr sz="1800" kern="1200">
+                <a:solidFill>
+                  <a:schemeClr val="lt1"/>
+                </a:solidFill>
+                <a:latin typeface="+mn-lt"/>
+                <a:ea typeface="+mn-ea"/>
+                <a:cs typeface="+mn-cs"/>
+              </a:defRPr>
+            </a:lvl8pPr>
+            <a:lvl9pPr marL="3657600" algn="l" defTabSz="914400" rtl="0" eaLnBrk="1" latinLnBrk="0" hangingPunct="1">
+              <a:defRPr sz="1800" kern="1200">
+                <a:solidFill>
+                  <a:schemeClr val="lt1"/>
+                </a:solidFill>
+                <a:latin typeface="+mn-lt"/>
+                <a:ea typeface="+mn-ea"/>
+                <a:cs typeface="+mn-cs"/>
+              </a:defRPr>
+            </a:lvl9pPr>
+          </a:lstStyle>
+          <a:p>
+            <a:pPr lvl="0" algn="ctr">
+              <a:buClrTx/>
+              <a:buSzTx/>
+              <a:buFontTx/>
+            </a:pPr>
+            <a:endParaRPr lang="zh-CN" altLang="en-US">
+              <a:sym typeface="+mn-ea"/>
+            </a:endParaRPr>
+          </a:p>
+        </p:txBody>
+      </p:sp>
+      <p:sp>
+        <p:nvSpPr>
+          <p:cNvPr id="42" name="椭圆 41"/>
+          <p:cNvSpPr/>
+          <p:nvPr>
+            <p:custDataLst>
+              <p:tags r:id="rId29"/>
+            </p:custDataLst>
+          </p:nvPr>
+        </p:nvSpPr>
+        <p:spPr>
+          <a:xfrm>
+            <a:off x="5189220" y="3091180"/>
+            <a:ext cx="1741170" cy="1741170"/>
+          </a:xfrm>
+          <a:prstGeom prst="ellipse">
+            <a:avLst/>
+          </a:prstGeom>
+          <a:solidFill>
+            <a:srgbClr val="FFFFFF"/>
+          </a:solidFill>
+          <a:ln>
+            <a:noFill/>
+          </a:ln>
+        </p:spPr>
+        <p:style>
+          <a:lnRef idx="2">
+            <a:schemeClr val="accent1">
+              <a:lumMod val="75000"/>
+            </a:schemeClr>
+          </a:lnRef>
+          <a:fillRef idx="1">
+            <a:schemeClr val="accent1"/>
+          </a:fillRef>
+          <a:effectRef idx="0">
+            <a:srgbClr val="FFFFFF"/>
+          </a:effectRef>
+          <a:fontRef idx="minor">
+            <a:schemeClr val="lt1"/>
+          </a:fontRef>
+        </p:style>
+        <p:txBody>
+          <a:bodyPr wrap="square" lIns="0" tIns="0" rIns="0" bIns="0" rtlCol="0" anchor="ctr">
+            <a:noAutofit/>
+          </a:bodyPr>
+          <a:lstStyle/>
+          <a:p>
+            <a:pPr algn="ctr">
+              <a:spcBef>
+                <a:spcPct val="0"/>
+              </a:spcBef>
+              <a:spcAft>
+                <a:spcPct val="0"/>
+              </a:spcAft>
+            </a:pPr>
+            <a:r>
+              <a:rPr lang="en-US" altLang="zh-CN">
+                <a:latin typeface="Noto Sans SC" panose="020B0200000000000000" charset="-122"/>
+                <a:ea typeface="Noto Sans SC" panose="020B0200000000000000" charset="-122"/>
+                <a:sym typeface="+mn-ea"/>
+              </a:rPr>
+              <a:t>HHighighlights</a:t>
+            </a:r>
+            <a:endParaRPr lang="zh-CN" altLang="en-US" b="1" dirty="0">
+              <a:solidFill>
+                <a:srgbClr val="262626"/>
+              </a:solidFill>
+              <a:latin typeface="+mn-ea"/>
+              <a:cs typeface="+mn-ea"/>
+              <a:sym typeface="+mn-ea"/>
+            </a:endParaRPr>
+          </a:p>
+        </p:txBody>
+      </p:sp>
+      <p:sp>
+        <p:nvSpPr>
+          <p:cNvPr id="11" name="椭圆 10"/>
+          <p:cNvSpPr/>
+          <p:nvPr>
+            <p:custDataLst>
+              <p:tags r:id="rId30"/>
+            </p:custDataLst>
+          </p:nvPr>
+        </p:nvSpPr>
+        <p:spPr>
+          <a:xfrm flipH="1">
+            <a:off x="8319135" y="1670050"/>
+            <a:ext cx="149860" cy="149860"/>
+          </a:xfrm>
+          <a:prstGeom prst="ellipse">
+            <a:avLst/>
+          </a:prstGeom>
+          <a:gradFill>
+            <a:gsLst>
+              <a:gs pos="100000">
+                <a:schemeClr val="accent2">
+                  <a:lumMod val="85000"/>
+                  <a:lumOff val="15000"/>
+                </a:schemeClr>
+              </a:gs>
+              <a:gs pos="0">
+                <a:schemeClr val="accent2">
+                  <a:lumMod val="75000"/>
+                  <a:lumOff val="25000"/>
+                </a:schemeClr>
+              </a:gs>
+            </a:gsLst>
+            <a:lin ang="2700000" scaled="0"/>
+          </a:gradFill>
+          <a:ln w="19050">
+            <a:noFill/>
+          </a:ln>
+          <a:effectLst/>
+        </p:spPr>
+        <p:style>
+          <a:lnRef idx="1">
+            <a:schemeClr val="accent1"/>
+          </a:lnRef>
+          <a:fillRef idx="2">
+            <a:schemeClr val="accent1"/>
+          </a:fillRef>
+          <a:effectRef idx="1">
+            <a:schemeClr val="accent1"/>
+          </a:effectRef>
+          <a:fontRef idx="minor">
+            <a:schemeClr val="dk1"/>
+          </a:fontRef>
+        </p:style>
+        <p:txBody>
+          <a:bodyPr rot="0" spcFirstLastPara="0" vertOverflow="overflow" horzOverflow="overflow" vert="horz" wrap="square" lIns="91440" tIns="45720" rIns="91440" bIns="45720" numCol="1" spcCol="0" rtlCol="0" fromWordArt="0" anchor="ctr" anchorCtr="0" forceAA="0" compatLnSpc="1">
+            <a:noAutofit/>
+          </a:bodyPr>
+          <a:lstStyle>
+            <a:defPPr>
+              <a:defRPr lang="zh-CN">
+                <a:solidFill>
+                  <a:schemeClr val="lt1"/>
+                </a:solidFill>
+              </a:defRPr>
+            </a:defPPr>
+            <a:lvl1pPr marL="0" algn="l" defTabSz="914400" rtl="0" eaLnBrk="1" latinLnBrk="0" hangingPunct="1">
+              <a:defRPr sz="1800" kern="1200">
+                <a:solidFill>
+                  <a:schemeClr val="lt1"/>
+                </a:solidFill>
+                <a:latin typeface="+mn-lt"/>
+                <a:ea typeface="+mn-ea"/>
+                <a:cs typeface="+mn-cs"/>
+              </a:defRPr>
+            </a:lvl1pPr>
+            <a:lvl2pPr marL="457200" algn="l" defTabSz="914400" rtl="0" eaLnBrk="1" latinLnBrk="0" hangingPunct="1">
+              <a:defRPr sz="1800" kern="1200">
+                <a:solidFill>
+                  <a:schemeClr val="lt1"/>
+                </a:solidFill>
+                <a:latin typeface="+mn-lt"/>
+                <a:ea typeface="+mn-ea"/>
+                <a:cs typeface="+mn-cs"/>
+              </a:defRPr>
+            </a:lvl2pPr>
+            <a:lvl3pPr marL="914400" algn="l" defTabSz="914400" rtl="0" eaLnBrk="1" latinLnBrk="0" hangingPunct="1">
+              <a:defRPr sz="1800" kern="1200">
+                <a:solidFill>
+                  <a:schemeClr val="lt1"/>
+                </a:solidFill>
+                <a:latin typeface="+mn-lt"/>
+                <a:ea typeface="+mn-ea"/>
+                <a:cs typeface="+mn-cs"/>
+              </a:defRPr>
+            </a:lvl3pPr>
+            <a:lvl4pPr marL="1371600" algn="l" defTabSz="914400" rtl="0" eaLnBrk="1" latinLnBrk="0" hangingPunct="1">
+              <a:defRPr sz="1800" kern="1200">
+                <a:solidFill>
+                  <a:schemeClr val="lt1"/>
+                </a:solidFill>
+                <a:latin typeface="+mn-lt"/>
+                <a:ea typeface="+mn-ea"/>
+                <a:cs typeface="+mn-cs"/>
+              </a:defRPr>
+            </a:lvl4pPr>
+            <a:lvl5pPr marL="1828800" algn="l" defTabSz="914400" rtl="0" eaLnBrk="1" latinLnBrk="0" hangingPunct="1">
+              <a:defRPr sz="1800" kern="1200">
+                <a:solidFill>
+                  <a:schemeClr val="lt1"/>
+                </a:solidFill>
+                <a:latin typeface="+mn-lt"/>
+                <a:ea typeface="+mn-ea"/>
+                <a:cs typeface="+mn-cs"/>
+              </a:defRPr>
+            </a:lvl5pPr>
+            <a:lvl6pPr marL="2286000" algn="l" defTabSz="914400" rtl="0" eaLnBrk="1" latinLnBrk="0" hangingPunct="1">
+              <a:defRPr sz="1800" kern="1200">
+                <a:solidFill>
+                  <a:schemeClr val="lt1"/>
+                </a:solidFill>
+                <a:latin typeface="+mn-lt"/>
+                <a:ea typeface="+mn-ea"/>
+                <a:cs typeface="+mn-cs"/>
+              </a:defRPr>
+            </a:lvl6pPr>
+            <a:lvl7pPr marL="2743200" algn="l" defTabSz="914400" rtl="0" eaLnBrk="1" latinLnBrk="0" hangingPunct="1">
+              <a:defRPr sz="1800" kern="1200">
+                <a:solidFill>
+                  <a:schemeClr val="lt1"/>
+                </a:solidFill>
+                <a:latin typeface="+mn-lt"/>
+                <a:ea typeface="+mn-ea"/>
+                <a:cs typeface="+mn-cs"/>
+              </a:defRPr>
+            </a:lvl7pPr>
+            <a:lvl8pPr marL="3200400" algn="l" defTabSz="914400" rtl="0" eaLnBrk="1" latinLnBrk="0" hangingPunct="1">
+              <a:defRPr sz="1800" kern="1200">
+                <a:solidFill>
+                  <a:schemeClr val="lt1"/>
+                </a:solidFill>
+                <a:latin typeface="+mn-lt"/>
+                <a:ea typeface="+mn-ea"/>
+                <a:cs typeface="+mn-cs"/>
+              </a:defRPr>
+            </a:lvl8pPr>
+            <a:lvl9pPr marL="3657600" algn="l" defTabSz="914400" rtl="0" eaLnBrk="1" latinLnBrk="0" hangingPunct="1">
+              <a:defRPr sz="1800" kern="1200">
+                <a:solidFill>
+                  <a:schemeClr val="lt1"/>
+                </a:solidFill>
+                <a:latin typeface="+mn-lt"/>
+                <a:ea typeface="+mn-ea"/>
+                <a:cs typeface="+mn-cs"/>
+              </a:defRPr>
+            </a:lvl9pPr>
+          </a:lstStyle>
+          <a:p>
+            <a:pPr lvl="0" algn="ctr">
+              <a:buClrTx/>
+              <a:buSzTx/>
+              <a:buFontTx/>
+            </a:pPr>
+            <a:endParaRPr lang="zh-CN" altLang="en-US">
+              <a:solidFill>
+                <a:schemeClr val="dk1"/>
+              </a:solidFill>
+              <a:cs typeface="微软雅黑" panose="020B0503020204020204" charset="-122"/>
+              <a:sym typeface="+mn-ea"/>
+            </a:endParaRPr>
+          </a:p>
+        </p:txBody>
+      </p:sp>
+      <p:pic>
+        <p:nvPicPr>
+          <p:cNvPr id="53" name="图片 12" descr="343439383331313b343532303032383bbfcdbba7b9dcc0ed"/>
+          <p:cNvPicPr>
+            <a:picLocks noChangeAspect="1"/>
+          </p:cNvPicPr>
+          <p:nvPr>
+            <p:custDataLst>
+              <p:tags r:id="rId31"/>
+            </p:custDataLst>
+          </p:nvPr>
+        </p:nvPicPr>
+        <p:blipFill>
+          <a:blip r:embed="rId32">
+            <a:extLst>
+              <a:ext uri="{96DAC541-7B7A-43D3-8B79-37D633B846F1}">
+                <asvg:svgBlip xmlns:asvg="http://schemas.microsoft.com/office/drawing/2016/SVG/main" r:embed="rId33"/>
+              </a:ext>
+            </a:extLst>
+          </a:blip>
+          <a:stretch>
+            <a:fillRect/>
+          </a:stretch>
+        </p:blipFill>
+        <p:spPr>
+          <a:xfrm>
+            <a:off x="7054850" y="4573270"/>
+            <a:ext cx="252095" cy="252095"/>
+          </a:xfrm>
+          <a:prstGeom prst="rect">
+            <a:avLst/>
+          </a:prstGeom>
+        </p:spPr>
+      </p:pic>
+      <p:sp>
+        <p:nvSpPr>
+          <p:cNvPr id="12" name="椭圆 11"/>
+          <p:cNvSpPr/>
+          <p:nvPr>
+            <p:custDataLst>
+              <p:tags r:id="rId34"/>
+            </p:custDataLst>
+          </p:nvPr>
+        </p:nvSpPr>
+        <p:spPr>
+          <a:xfrm flipH="1">
+            <a:off x="8319135" y="5095240"/>
+            <a:ext cx="149860" cy="149860"/>
+          </a:xfrm>
+          <a:prstGeom prst="ellipse">
+            <a:avLst/>
+          </a:prstGeom>
+          <a:gradFill>
+            <a:gsLst>
+              <a:gs pos="100000">
+                <a:schemeClr val="accent4">
+                  <a:lumMod val="85000"/>
+                  <a:lumOff val="15000"/>
+                </a:schemeClr>
+              </a:gs>
+              <a:gs pos="0">
+                <a:schemeClr val="accent4">
+                  <a:lumMod val="75000"/>
+                  <a:lumOff val="25000"/>
+                </a:schemeClr>
+              </a:gs>
+            </a:gsLst>
+            <a:lin ang="2700000" scaled="0"/>
+          </a:gradFill>
+          <a:ln w="19050">
+            <a:noFill/>
+          </a:ln>
+          <a:effectLst/>
+        </p:spPr>
+        <p:style>
+          <a:lnRef idx="1">
+            <a:schemeClr val="accent1"/>
+          </a:lnRef>
+          <a:fillRef idx="2">
+            <a:schemeClr val="accent1"/>
+          </a:fillRef>
+          <a:effectRef idx="1">
+            <a:schemeClr val="accent1"/>
+          </a:effectRef>
+          <a:fontRef idx="minor">
+            <a:schemeClr val="dk1"/>
+          </a:fontRef>
+        </p:style>
+        <p:txBody>
+          <a:bodyPr vertOverflow="overflow" horzOverflow="overflow" vert="horz" wrap="square" numCol="1" spcCol="0" rtlCol="0" fromWordArt="0" anchor="ctr" anchorCtr="0" forceAA="0" compatLnSpc="1">
+            <a:noAutofit/>
+          </a:bodyPr>
+          <a:lstStyle/>
+          <a:p>
+            <a:pPr lvl="0" algn="ctr">
+              <a:buClrTx/>
+              <a:buSzTx/>
+              <a:buFontTx/>
+            </a:pPr>
+            <a:endParaRPr lang="zh-CN" altLang="en-US">
+              <a:cs typeface="微软雅黑" panose="020B0503020204020204" charset="-122"/>
+              <a:sym typeface="+mn-ea"/>
+            </a:endParaRPr>
+          </a:p>
+        </p:txBody>
+      </p:sp>
+      <p:pic>
+        <p:nvPicPr>
+          <p:cNvPr id="54" name="图片 15" descr="343439383331313b343532303033313bd3a6d3c3c9ccb3c7"/>
+          <p:cNvPicPr>
+            <a:picLocks noChangeAspect="1"/>
+          </p:cNvPicPr>
+          <p:nvPr>
+            <p:custDataLst>
+              <p:tags r:id="rId35"/>
+            </p:custDataLst>
+          </p:nvPr>
+        </p:nvPicPr>
+        <p:blipFill>
+          <a:blip r:embed="rId36">
+            <a:extLst>
+              <a:ext uri="{96DAC541-7B7A-43D3-8B79-37D633B846F1}">
+                <asvg:svgBlip xmlns:asvg="http://schemas.microsoft.com/office/drawing/2016/SVG/main" r:embed="rId37"/>
+              </a:ext>
+            </a:extLst>
+          </a:blip>
+          <a:stretch>
+            <a:fillRect/>
+          </a:stretch>
+        </p:blipFill>
+        <p:spPr>
+          <a:xfrm>
+            <a:off x="7239000" y="3246755"/>
+            <a:ext cx="252095" cy="252095"/>
+          </a:xfrm>
+          <a:prstGeom prst="rect">
+            <a:avLst/>
+          </a:prstGeom>
+        </p:spPr>
+      </p:pic>
+      <p:sp>
+        <p:nvSpPr>
+          <p:cNvPr id="21" name="椭圆 20"/>
+          <p:cNvSpPr/>
+          <p:nvPr>
+            <p:custDataLst>
+              <p:tags r:id="rId38"/>
+            </p:custDataLst>
+          </p:nvPr>
+        </p:nvSpPr>
+        <p:spPr>
+          <a:xfrm flipH="1">
+            <a:off x="8321040" y="3383915"/>
+            <a:ext cx="149860" cy="149860"/>
+          </a:xfrm>
+          <a:prstGeom prst="ellipse">
+            <a:avLst/>
+          </a:prstGeom>
+          <a:gradFill>
+            <a:gsLst>
+              <a:gs pos="100000">
+                <a:schemeClr val="accent3">
+                  <a:lumMod val="85000"/>
+                  <a:lumOff val="15000"/>
+                </a:schemeClr>
+              </a:gs>
+              <a:gs pos="0">
+                <a:schemeClr val="accent3">
+                  <a:lumMod val="75000"/>
+                  <a:lumOff val="25000"/>
+                </a:schemeClr>
+              </a:gs>
+            </a:gsLst>
+            <a:lin ang="2700000" scaled="0"/>
+          </a:gradFill>
+          <a:ln w="19050">
+            <a:noFill/>
+          </a:ln>
+          <a:effectLst/>
+        </p:spPr>
+        <p:style>
+          <a:lnRef idx="1">
+            <a:schemeClr val="accent1"/>
+          </a:lnRef>
+          <a:fillRef idx="2">
+            <a:schemeClr val="accent1"/>
+          </a:fillRef>
+          <a:effectRef idx="1">
+            <a:schemeClr val="accent1"/>
+          </a:effectRef>
+          <a:fontRef idx="minor">
+            <a:schemeClr val="dk1"/>
+          </a:fontRef>
+        </p:style>
+        <p:txBody>
+          <a:bodyPr vertOverflow="overflow" horzOverflow="overflow" vert="horz" wrap="square" numCol="1" spcCol="0" rtlCol="0" fromWordArt="0" anchor="ctr" anchorCtr="0" forceAA="0" compatLnSpc="1">
+            <a:noAutofit/>
+          </a:bodyPr>
+          <a:lstStyle>
+            <a:defPPr>
+              <a:defRPr lang="zh-CN">
+                <a:solidFill>
+                  <a:schemeClr val="lt1"/>
+                </a:solidFill>
+              </a:defRPr>
+            </a:defPPr>
+            <a:lvl1pPr marL="0" algn="l" defTabSz="914400" rtl="0" eaLnBrk="1" latinLnBrk="0" hangingPunct="1">
+              <a:defRPr sz="1800" kern="1200">
+                <a:solidFill>
+                  <a:schemeClr val="lt1"/>
+                </a:solidFill>
+                <a:latin typeface="+mn-lt"/>
+                <a:ea typeface="+mn-ea"/>
+                <a:cs typeface="+mn-cs"/>
+              </a:defRPr>
+            </a:lvl1pPr>
+            <a:lvl2pPr marL="457200" algn="l" defTabSz="914400" rtl="0" eaLnBrk="1" latinLnBrk="0" hangingPunct="1">
+              <a:defRPr sz="1800" kern="1200">
+                <a:solidFill>
+                  <a:schemeClr val="lt1"/>
+                </a:solidFill>
+                <a:latin typeface="+mn-lt"/>
+                <a:ea typeface="+mn-ea"/>
+                <a:cs typeface="+mn-cs"/>
+              </a:defRPr>
+            </a:lvl2pPr>
+            <a:lvl3pPr marL="914400" algn="l" defTabSz="914400" rtl="0" eaLnBrk="1" latinLnBrk="0" hangingPunct="1">
+              <a:defRPr sz="1800" kern="1200">
+                <a:solidFill>
+                  <a:schemeClr val="lt1"/>
+                </a:solidFill>
+                <a:latin typeface="+mn-lt"/>
+                <a:ea typeface="+mn-ea"/>
+                <a:cs typeface="+mn-cs"/>
+              </a:defRPr>
+            </a:lvl3pPr>
+            <a:lvl4pPr marL="1371600" algn="l" defTabSz="914400" rtl="0" eaLnBrk="1" latinLnBrk="0" hangingPunct="1">
+              <a:defRPr sz="1800" kern="1200">
+                <a:solidFill>
+                  <a:schemeClr val="lt1"/>
+                </a:solidFill>
+                <a:latin typeface="+mn-lt"/>
+                <a:ea typeface="+mn-ea"/>
+                <a:cs typeface="+mn-cs"/>
+              </a:defRPr>
+            </a:lvl4pPr>
+            <a:lvl5pPr marL="1828800" algn="l" defTabSz="914400" rtl="0" eaLnBrk="1" latinLnBrk="0" hangingPunct="1">
+              <a:defRPr sz="1800" kern="1200">
+                <a:solidFill>
+                  <a:schemeClr val="lt1"/>
+                </a:solidFill>
+                <a:latin typeface="+mn-lt"/>
+                <a:ea typeface="+mn-ea"/>
+                <a:cs typeface="+mn-cs"/>
+              </a:defRPr>
+            </a:lvl5pPr>
+            <a:lvl6pPr marL="2286000" algn="l" defTabSz="914400" rtl="0" eaLnBrk="1" latinLnBrk="0" hangingPunct="1">
+              <a:defRPr sz="1800" kern="1200">
+                <a:solidFill>
+                  <a:schemeClr val="lt1"/>
+                </a:solidFill>
+                <a:latin typeface="+mn-lt"/>
+                <a:ea typeface="+mn-ea"/>
+                <a:cs typeface="+mn-cs"/>
+              </a:defRPr>
+            </a:lvl6pPr>
+            <a:lvl7pPr marL="2743200" algn="l" defTabSz="914400" rtl="0" eaLnBrk="1" latinLnBrk="0" hangingPunct="1">
+              <a:defRPr sz="1800" kern="1200">
+                <a:solidFill>
+                  <a:schemeClr val="lt1"/>
+                </a:solidFill>
+                <a:latin typeface="+mn-lt"/>
+                <a:ea typeface="+mn-ea"/>
+                <a:cs typeface="+mn-cs"/>
+              </a:defRPr>
+            </a:lvl7pPr>
+            <a:lvl8pPr marL="3200400" algn="l" defTabSz="914400" rtl="0" eaLnBrk="1" latinLnBrk="0" hangingPunct="1">
+              <a:defRPr sz="1800" kern="1200">
+                <a:solidFill>
+                  <a:schemeClr val="lt1"/>
+                </a:solidFill>
+                <a:latin typeface="+mn-lt"/>
+                <a:ea typeface="+mn-ea"/>
+                <a:cs typeface="+mn-cs"/>
+              </a:defRPr>
+            </a:lvl8pPr>
+            <a:lvl9pPr marL="3657600" algn="l" defTabSz="914400" rtl="0" eaLnBrk="1" latinLnBrk="0" hangingPunct="1">
+              <a:defRPr sz="1800" kern="1200">
+                <a:solidFill>
+                  <a:schemeClr val="lt1"/>
+                </a:solidFill>
+                <a:latin typeface="+mn-lt"/>
+                <a:ea typeface="+mn-ea"/>
+                <a:cs typeface="+mn-cs"/>
+              </a:defRPr>
+            </a:lvl9pPr>
+          </a:lstStyle>
+          <a:p>
+            <a:pPr lvl="0" algn="ctr">
+              <a:buClrTx/>
+              <a:buSzTx/>
+              <a:buFontTx/>
+            </a:pPr>
+            <a:endParaRPr lang="zh-CN" altLang="en-US">
+              <a:solidFill>
+                <a:schemeClr val="dk1"/>
+              </a:solidFill>
+              <a:cs typeface="微软雅黑" panose="020B0503020204020204" charset="-122"/>
+              <a:sym typeface="+mn-ea"/>
+            </a:endParaRPr>
+          </a:p>
+        </p:txBody>
+      </p:sp>
+      <p:pic>
+        <p:nvPicPr>
+          <p:cNvPr id="57" name="图片 19" descr="343435383038363b343532323339393bd6b4d0d0d5aad2aa"/>
+          <p:cNvPicPr>
+            <a:picLocks noChangeAspect="1"/>
+          </p:cNvPicPr>
+          <p:nvPr>
+            <p:custDataLst>
+              <p:tags r:id="rId39"/>
+            </p:custDataLst>
+          </p:nvPr>
+        </p:nvPicPr>
+        <p:blipFill>
+          <a:blip r:embed="rId40">
+            <a:extLst>
+              <a:ext uri="{96DAC541-7B7A-43D3-8B79-37D633B846F1}">
+                <asvg:svgBlip xmlns:asvg="http://schemas.microsoft.com/office/drawing/2016/SVG/main" r:embed="rId41"/>
+              </a:ext>
+            </a:extLst>
+          </a:blip>
+          <a:stretch>
+            <a:fillRect/>
+          </a:stretch>
+        </p:blipFill>
+        <p:spPr>
+          <a:xfrm>
+            <a:off x="5895975" y="5173980"/>
+            <a:ext cx="252095" cy="252095"/>
+          </a:xfrm>
+          <a:prstGeom prst="rect">
+            <a:avLst/>
+          </a:prstGeom>
+        </p:spPr>
+      </p:pic>
+      <p:pic>
+        <p:nvPicPr>
+          <p:cNvPr id="52" name="图片 5" descr="343435383036303b343532343134393bcdb7c4d4b7e7b1a9"/>
+          <p:cNvPicPr>
+            <a:picLocks noChangeAspect="1"/>
+          </p:cNvPicPr>
+          <p:nvPr>
+            <p:custDataLst>
+              <p:tags r:id="rId42"/>
+            </p:custDataLst>
+          </p:nvPr>
+        </p:nvPicPr>
+        <p:blipFill>
+          <a:blip r:embed="rId43">
+            <a:extLst>
+              <a:ext uri="{96DAC541-7B7A-43D3-8B79-37D633B846F1}">
+                <asvg:svgBlip xmlns:asvg="http://schemas.microsoft.com/office/drawing/2016/SVG/main" r:embed="rId44"/>
+              </a:ext>
+            </a:extLst>
+          </a:blip>
+          <a:stretch>
+            <a:fillRect/>
+          </a:stretch>
+        </p:blipFill>
+        <p:spPr>
+          <a:xfrm>
+            <a:off x="6017895" y="2407920"/>
+            <a:ext cx="252095" cy="252095"/>
+          </a:xfrm>
+          <a:prstGeom prst="rect">
+            <a:avLst/>
+          </a:prstGeom>
+        </p:spPr>
+      </p:pic>
+      <p:pic>
+        <p:nvPicPr>
+          <p:cNvPr id="58" name="图片 16" descr="343439383331313b343532303033323bd3a6d3c3b9dcc0ed"/>
+          <p:cNvPicPr>
+            <a:picLocks noChangeAspect="1"/>
+          </p:cNvPicPr>
+          <p:nvPr>
+            <p:custDataLst>
+              <p:tags r:id="rId45"/>
+            </p:custDataLst>
+          </p:nvPr>
+        </p:nvPicPr>
+        <p:blipFill>
+          <a:blip r:embed="rId46">
+            <a:extLst>
+              <a:ext uri="{96DAC541-7B7A-43D3-8B79-37D633B846F1}">
+                <asvg:svgBlip xmlns:asvg="http://schemas.microsoft.com/office/drawing/2016/SVG/main" r:embed="rId47"/>
+              </a:ext>
+            </a:extLst>
+          </a:blip>
+          <a:stretch>
+            <a:fillRect/>
+          </a:stretch>
+        </p:blipFill>
+        <p:spPr>
+          <a:xfrm>
+            <a:off x="4812665" y="4418330"/>
+            <a:ext cx="252095" cy="252095"/>
+          </a:xfrm>
+          <a:prstGeom prst="rect">
+            <a:avLst/>
+          </a:prstGeom>
+        </p:spPr>
+      </p:pic>
+      <p:pic>
+        <p:nvPicPr>
+          <p:cNvPr id="59" name="图片 20" descr="343435383038363b343532323339383bd6b4d0d0cad6b6ce"/>
+          <p:cNvPicPr>
+            <a:picLocks noChangeAspect="1"/>
+          </p:cNvPicPr>
+          <p:nvPr>
+            <p:custDataLst>
+              <p:tags r:id="rId48"/>
+            </p:custDataLst>
+          </p:nvPr>
+        </p:nvPicPr>
+        <p:blipFill>
+          <a:blip r:embed="rId49">
+            <a:extLst>
+              <a:ext uri="{96DAC541-7B7A-43D3-8B79-37D633B846F1}">
+                <asvg:svgBlip xmlns:asvg="http://schemas.microsoft.com/office/drawing/2016/SVG/main" r:embed="rId50"/>
+              </a:ext>
+            </a:extLst>
+          </a:blip>
+          <a:stretch>
+            <a:fillRect/>
+          </a:stretch>
+        </p:blipFill>
+        <p:spPr>
+          <a:xfrm>
+            <a:off x="4860290" y="3082290"/>
+            <a:ext cx="252095" cy="252095"/>
+          </a:xfrm>
+          <a:prstGeom prst="rect">
+            <a:avLst/>
+          </a:prstGeom>
+        </p:spPr>
+      </p:pic>
+      <p:sp>
+        <p:nvSpPr>
+          <p:cNvPr id="6" name="文本框 5"/>
+          <p:cNvSpPr txBox="1"/>
+          <p:nvPr/>
+        </p:nvSpPr>
+        <p:spPr>
+          <a:xfrm>
+            <a:off x="193675" y="1525905"/>
+            <a:ext cx="4064000" cy="368300"/>
+          </a:xfrm>
+          <a:prstGeom prst="rect">
+            <a:avLst/>
+          </a:prstGeom>
+          <a:noFill/>
+        </p:spPr>
+        <p:txBody>
+          <a:bodyPr wrap="square" rtlCol="0">
+            <a:spAutoFit/>
+          </a:bodyPr>
+          <a:p>
+            <a:r>
+              <a:rPr lang="en-US" altLang="zh-CN" sz="1800">
+                <a:solidFill>
+                  <a:schemeClr val="accent1"/>
+                </a:solidFill>
+              </a:rPr>
+              <a:t>Three-tier decoupled architecture</a:t>
+            </a:r>
+            <a:endParaRPr lang="en-US" altLang="zh-CN" sz="1800">
+              <a:solidFill>
+                <a:schemeClr val="accent1"/>
+              </a:solidFill>
+            </a:endParaRPr>
+          </a:p>
+        </p:txBody>
+      </p:sp>
+      <p:sp>
+        <p:nvSpPr>
+          <p:cNvPr id="7" name="文本框 6"/>
+          <p:cNvSpPr txBox="1"/>
+          <p:nvPr/>
+        </p:nvSpPr>
+        <p:spPr>
+          <a:xfrm>
+            <a:off x="726440" y="1946275"/>
+            <a:ext cx="4064000" cy="829945"/>
+          </a:xfrm>
+          <a:prstGeom prst="rect">
+            <a:avLst/>
+          </a:prstGeom>
+          <a:noFill/>
+        </p:spPr>
+        <p:txBody>
+          <a:bodyPr wrap="square" rtlCol="0">
+            <a:spAutoFit/>
+          </a:bodyPr>
+          <a:p>
+            <a:pPr marL="285750" indent="-285750">
+              <a:buFont typeface="Wingdings" panose="05000000000000000000" charset="0"/>
+              <a:buChar char="Ø"/>
+            </a:pPr>
+            <a:r>
+              <a:rPr lang="en-US" altLang="zh-CN" sz="1600"/>
+              <a:t>Separation of concerns, </a:t>
+            </a:r>
+            <a:endParaRPr lang="en-US" altLang="zh-CN" sz="1600"/>
+          </a:p>
+          <a:p>
+            <a:pPr marL="285750" indent="-285750">
+              <a:buFont typeface="Wingdings" panose="05000000000000000000" charset="0"/>
+              <a:buChar char="Ø"/>
+            </a:pPr>
+            <a:r>
+              <a:rPr lang="en-US" altLang="zh-CN" sz="1600"/>
+              <a:t>dependency injection, </a:t>
+            </a:r>
+            <a:endParaRPr lang="en-US" altLang="zh-CN" sz="1600"/>
+          </a:p>
+          <a:p>
+            <a:pPr marL="285750" indent="-285750">
+              <a:buFont typeface="Wingdings" panose="05000000000000000000" charset="0"/>
+              <a:buChar char="Ø"/>
+            </a:pPr>
+            <a:r>
+              <a:rPr lang="en-US" altLang="zh-CN" sz="1600"/>
+              <a:t>OpenAPI - first design</a:t>
+            </a:r>
+            <a:endParaRPr lang="en-US" altLang="zh-CN" sz="1600"/>
+          </a:p>
+        </p:txBody>
+      </p:sp>
+      <p:sp>
+        <p:nvSpPr>
+          <p:cNvPr id="8" name="文本框 7"/>
+          <p:cNvSpPr txBox="1"/>
+          <p:nvPr/>
+        </p:nvSpPr>
+        <p:spPr>
+          <a:xfrm>
+            <a:off x="5332730" y="3814445"/>
+            <a:ext cx="4064000" cy="398780"/>
+          </a:xfrm>
+          <a:prstGeom prst="rect">
+            <a:avLst/>
+          </a:prstGeom>
+          <a:noFill/>
+        </p:spPr>
+        <p:txBody>
+          <a:bodyPr wrap="square" rtlCol="0">
+            <a:spAutoFit/>
+          </a:bodyPr>
+          <a:p>
+            <a:r>
+              <a:rPr lang="en-US" altLang="zh-CN" sz="2000"/>
+              <a:t>Highlights</a:t>
+            </a:r>
+            <a:endParaRPr lang="en-US" altLang="zh-CN" sz="2000"/>
+          </a:p>
+        </p:txBody>
+      </p:sp>
+    </p:spTree>
+    <p:custDataLst>
+      <p:tags r:id="rId51"/>
+    </p:custDataLst>
+  </p:cSld>
+  <p:clrMapOvr>
+    <a:masterClrMapping/>
+  </p:clrMapOvr>
+</p:sld>
+</file>
+
+<file path=ppt/slides/slide22.xml><?xml version="1.0" encoding="utf-8"?>
+<p:sld xmlns:a="http://schemas.openxmlformats.org/drawingml/2006/main" xmlns:r="http://schemas.openxmlformats.org/officeDocument/2006/relationships" xmlns:p="http://schemas.openxmlformats.org/presentationml/2006/main">
+  <p:cSld>
+    <p:spTree>
+      <p:nvGrpSpPr>
+        <p:cNvPr id="1" name=""/>
+        <p:cNvGrpSpPr/>
+        <p:nvPr/>
+      </p:nvGrpSpPr>
+      <p:grpSpPr>
+        <a:xfrm>
+          <a:off x="0" y="0"/>
+          <a:ext cx="0" cy="0"/>
+          <a:chOff x="0" y="0"/>
+          <a:chExt cx="0" cy="0"/>
+        </a:xfrm>
+      </p:grpSpPr>
+      <p:sp>
+        <p:nvSpPr>
+          <p:cNvPr id="38" name="任意多边形: 形状 37"/>
+          <p:cNvSpPr/>
+          <p:nvPr>
+            <p:custDataLst>
+              <p:tags r:id="rId1"/>
+            </p:custDataLst>
+          </p:nvPr>
+        </p:nvSpPr>
+        <p:spPr>
+          <a:xfrm>
+            <a:off x="461959" y="1662579"/>
+            <a:ext cx="3172579" cy="4176000"/>
+          </a:xfrm>
+          <a:custGeom>
+            <a:avLst/>
+            <a:gdLst>
+              <a:gd name="connsiteX0" fmla="*/ 1084579 w 3172579"/>
+              <a:gd name="connsiteY0" fmla="*/ 0 h 4176000"/>
+              <a:gd name="connsiteX1" fmla="*/ 3172579 w 3172579"/>
+              <a:gd name="connsiteY1" fmla="*/ 2088000 h 4176000"/>
+              <a:gd name="connsiteX2" fmla="*/ 1084579 w 3172579"/>
+              <a:gd name="connsiteY2" fmla="*/ 4176000 h 4176000"/>
+              <a:gd name="connsiteX3" fmla="*/ 89315 w 3172579"/>
+              <a:gd name="connsiteY3" fmla="*/ 3923990 h 4176000"/>
+              <a:gd name="connsiteX4" fmla="*/ 0 w 3172579"/>
+              <a:gd name="connsiteY4" fmla="*/ 3869730 h 4176000"/>
+              <a:gd name="connsiteX5" fmla="*/ 0 w 3172579"/>
+              <a:gd name="connsiteY5" fmla="*/ 306270 h 4176000"/>
+              <a:gd name="connsiteX6" fmla="*/ 89315 w 3172579"/>
+              <a:gd name="connsiteY6" fmla="*/ 252010 h 4176000"/>
+              <a:gd name="connsiteX7" fmla="*/ 1084579 w 3172579"/>
+              <a:gd name="connsiteY7" fmla="*/ 0 h 4176000"/>
+            </a:gdLst>
+            <a:ahLst/>
+            <a:cxnLst>
+              <a:cxn ang="0">
+                <a:pos x="connsiteX0" y="connsiteY0"/>
+              </a:cxn>
+              <a:cxn ang="0">
+                <a:pos x="connsiteX1" y="connsiteY1"/>
+              </a:cxn>
+              <a:cxn ang="0">
+                <a:pos x="connsiteX2" y="connsiteY2"/>
+              </a:cxn>
+              <a:cxn ang="0">
+                <a:pos x="connsiteX3" y="connsiteY3"/>
+              </a:cxn>
+              <a:cxn ang="0">
+                <a:pos x="connsiteX4" y="connsiteY4"/>
+              </a:cxn>
+              <a:cxn ang="0">
+                <a:pos x="connsiteX5" y="connsiteY5"/>
+              </a:cxn>
+              <a:cxn ang="0">
+                <a:pos x="connsiteX6" y="connsiteY6"/>
+              </a:cxn>
+              <a:cxn ang="0">
+                <a:pos x="connsiteX7" y="connsiteY7"/>
+              </a:cxn>
+            </a:cxnLst>
+            <a:rect l="l" t="t" r="r" b="b"/>
+            <a:pathLst>
+              <a:path w="3172579" h="4176000">
+                <a:moveTo>
+                  <a:pt x="1084579" y="0"/>
+                </a:moveTo>
+                <a:cubicBezTo>
+                  <a:pt x="2237750" y="0"/>
+                  <a:pt x="3172579" y="934829"/>
+                  <a:pt x="3172579" y="2088000"/>
+                </a:cubicBezTo>
+                <a:cubicBezTo>
+                  <a:pt x="3172579" y="3241171"/>
+                  <a:pt x="2237750" y="4176000"/>
+                  <a:pt x="1084579" y="4176000"/>
+                </a:cubicBezTo>
+                <a:cubicBezTo>
+                  <a:pt x="724213" y="4176000"/>
+                  <a:pt x="385170" y="4084708"/>
+                  <a:pt x="89315" y="3923990"/>
+                </a:cubicBezTo>
+                <a:lnTo>
+                  <a:pt x="0" y="3869730"/>
+                </a:lnTo>
+                <a:lnTo>
+                  <a:pt x="0" y="306270"/>
+                </a:lnTo>
+                <a:lnTo>
+                  <a:pt x="89315" y="252010"/>
+                </a:lnTo>
+                <a:cubicBezTo>
+                  <a:pt x="385170" y="91292"/>
+                  <a:pt x="724213" y="0"/>
+                  <a:pt x="1084579" y="0"/>
+                </a:cubicBezTo>
+                <a:close/>
+              </a:path>
+            </a:pathLst>
+          </a:custGeom>
+          <a:noFill/>
+          <a:ln>
+            <a:gradFill>
+              <a:gsLst>
+                <a:gs pos="100000">
+                  <a:schemeClr val="tx1">
+                    <a:lumMod val="50000"/>
+                    <a:lumOff val="50000"/>
+                    <a:alpha val="30000"/>
+                  </a:schemeClr>
+                </a:gs>
+                <a:gs pos="15000">
+                  <a:srgbClr val="FFFFFF">
+                    <a:lumMod val="20000"/>
+                    <a:lumOff val="80000"/>
+                    <a:alpha val="0"/>
+                  </a:srgbClr>
+                </a:gs>
+              </a:gsLst>
+              <a:lin ang="0" scaled="0"/>
+            </a:gradFill>
+          </a:ln>
+        </p:spPr>
+        <p:style>
+          <a:lnRef idx="2">
+            <a:schemeClr val="accent1">
+              <a:shade val="50000"/>
+            </a:schemeClr>
+          </a:lnRef>
+          <a:fillRef idx="1">
+            <a:schemeClr val="accent1"/>
+          </a:fillRef>
+          <a:effectRef idx="0">
+            <a:schemeClr val="accent1"/>
+          </a:effectRef>
+          <a:fontRef idx="minor">
+            <a:schemeClr val="lt1"/>
+          </a:fontRef>
+        </p:style>
+        <p:txBody>
+          <a:bodyPr vertOverflow="overflow" horzOverflow="overflow" vert="horz" wrap="square" numCol="1" spcCol="0" rtlCol="0" fromWordArt="0" anchor="ctr" anchorCtr="0" forceAA="0" compatLnSpc="1">
+            <a:noAutofit/>
+          </a:bodyPr>
+          <a:lstStyle/>
+          <a:p>
+            <a:pPr lvl="0" algn="ctr">
+              <a:buClrTx/>
+              <a:buSzTx/>
+              <a:buFontTx/>
+            </a:pPr>
+            <a:endParaRPr lang="zh-CN" altLang="en-US">
+              <a:sym typeface="+mn-ea"/>
+            </a:endParaRPr>
+          </a:p>
+        </p:txBody>
+      </p:sp>
+      <p:sp>
+        <p:nvSpPr>
+          <p:cNvPr id="39" name="椭圆 38"/>
+          <p:cNvSpPr/>
+          <p:nvPr>
+            <p:custDataLst>
+              <p:tags r:id="rId2"/>
+            </p:custDataLst>
+          </p:nvPr>
+        </p:nvSpPr>
+        <p:spPr>
+          <a:xfrm>
+            <a:off x="739452" y="2687442"/>
+            <a:ext cx="2169160" cy="2169160"/>
+          </a:xfrm>
+          <a:prstGeom prst="ellipse">
+            <a:avLst/>
+          </a:prstGeom>
+          <a:solidFill>
+            <a:schemeClr val="accent1"/>
+          </a:solidFill>
+          <a:ln>
+            <a:gradFill>
+              <a:gsLst>
+                <a:gs pos="37000">
+                  <a:srgbClr val="FFFFFF"/>
+                </a:gs>
+                <a:gs pos="0">
+                  <a:schemeClr val="accent1">
+                    <a:lumMod val="45000"/>
+                    <a:lumOff val="55000"/>
+                  </a:schemeClr>
+                </a:gs>
+                <a:gs pos="100000">
+                  <a:srgbClr val="FFFFFF"/>
+                </a:gs>
+                <a:gs pos="71000">
+                  <a:schemeClr val="accent1">
+                    <a:lumMod val="30000"/>
+                    <a:lumOff val="70000"/>
+                  </a:schemeClr>
+                </a:gs>
+              </a:gsLst>
+              <a:lin ang="16200000" scaled="0"/>
+            </a:gradFill>
+          </a:ln>
+          <a:effectLst/>
+        </p:spPr>
+        <p:style>
+          <a:lnRef idx="2">
+            <a:schemeClr val="accent1">
+              <a:shade val="50000"/>
+            </a:schemeClr>
+          </a:lnRef>
+          <a:fillRef idx="1">
+            <a:schemeClr val="accent1"/>
+          </a:fillRef>
+          <a:effectRef idx="0">
+            <a:schemeClr val="accent1"/>
+          </a:effectRef>
+          <a:fontRef idx="minor">
+            <a:schemeClr val="lt1"/>
+          </a:fontRef>
+        </p:style>
+        <p:txBody>
+          <a:bodyPr vertOverflow="overflow" horzOverflow="overflow" vert="horz" wrap="square" lIns="0" tIns="0" rIns="0" bIns="0" numCol="1" spcCol="0" rtlCol="0" fromWordArt="0" anchor="ctr" anchorCtr="0" forceAA="0" compatLnSpc="1">
+            <a:noAutofit/>
+          </a:bodyPr>
+          <a:lstStyle/>
+          <a:p>
+            <a:pPr algn="ctr">
+              <a:spcBef>
+                <a:spcPct val="0"/>
+              </a:spcBef>
+              <a:spcAft>
+                <a:spcPct val="0"/>
+              </a:spcAft>
+            </a:pPr>
+            <a:r>
+              <a:rPr lang="en-US" altLang="zh-CN" sz="2000" dirty="0">
+                <a:sym typeface="+mn-ea"/>
+              </a:rPr>
+              <a:t>Deliverables</a:t>
+            </a:r>
+            <a:endParaRPr lang="zh-CN" altLang="en-US" sz="2000" b="1" spc="150" dirty="0">
+              <a:solidFill>
+                <a:srgbClr val="FFFFFF"/>
+              </a:solidFill>
+              <a:latin typeface="+mn-ea"/>
+              <a:cs typeface="+mn-ea"/>
+              <a:sym typeface="+mn-ea"/>
+            </a:endParaRPr>
+          </a:p>
+        </p:txBody>
+      </p:sp>
+      <p:sp>
+        <p:nvSpPr>
+          <p:cNvPr id="17" name="标题 16"/>
+          <p:cNvSpPr>
+            <a:spLocks noGrp="1"/>
+          </p:cNvSpPr>
+          <p:nvPr>
+            <p:ph type="title"/>
+            <p:custDataLst>
+              <p:tags r:id="rId3"/>
+            </p:custDataLst>
+          </p:nvPr>
+        </p:nvSpPr>
+        <p:spPr/>
+        <p:txBody>
+          <a:bodyPr/>
+          <a:lstStyle/>
+          <a:p>
+            <a:r>
+              <a:rPr lang="en-US" altLang="zh-CN" dirty="0"/>
+              <a:t>A</a:t>
+            </a:r>
+            <a:r>
+              <a:rPr lang="en-US" altLang="zh-CN" dirty="0"/>
+              <a:t>ll Deliverables</a:t>
+            </a:r>
+            <a:endParaRPr lang="en-US" altLang="zh-CN" dirty="0"/>
+          </a:p>
+        </p:txBody>
+      </p:sp>
+      <p:sp>
+        <p:nvSpPr>
+          <p:cNvPr id="19" name="矩形 18"/>
+          <p:cNvSpPr/>
+          <p:nvPr>
+            <p:custDataLst>
+              <p:tags r:id="rId4"/>
+            </p:custDataLst>
+          </p:nvPr>
+        </p:nvSpPr>
+        <p:spPr>
+          <a:xfrm>
+            <a:off x="3435985" y="5624195"/>
+            <a:ext cx="7878445" cy="543560"/>
+          </a:xfrm>
+          <a:prstGeom prst="rect">
+            <a:avLst/>
+          </a:prstGeom>
+          <a:noFill/>
+        </p:spPr>
+        <p:txBody>
+          <a:bodyPr wrap="square" lIns="0" tIns="0" rIns="0" bIns="0" rtlCol="0" anchor="t" anchorCtr="0">
+            <a:noAutofit/>
+          </a:bodyPr>
+          <a:lstStyle/>
+          <a:p>
+            <a:pPr>
+              <a:lnSpc>
+                <a:spcPct val="130000"/>
+              </a:lnSpc>
+              <a:spcBef>
+                <a:spcPct val="0"/>
+              </a:spcBef>
+              <a:spcAft>
+                <a:spcPct val="0"/>
+              </a:spcAft>
+            </a:pPr>
+            <a:r>
+              <a:rPr lang="zh-CN" altLang="en-US" sz="1200" dirty="0">
+                <a:solidFill>
+                  <a:schemeClr val="tx1">
+                    <a:lumMod val="85000"/>
+                    <a:lumOff val="15000"/>
+                  </a:schemeClr>
+                </a:solidFill>
+                <a:latin typeface="+mn-ea"/>
+                <a:cs typeface="+mn-ea"/>
+              </a:rPr>
+              <a:t>单击此处输入你的智能图形项正文，文字是您思想的提炼，请尽量言简意赅的阐述观点。单击此处输入你的智能图形项正文，文字是您思想的提炼。单击此处输入你的智能图形项正文，文字是您思想的提炼。</a:t>
+            </a:r>
+            <a:endParaRPr lang="zh-CN" altLang="en-US" sz="1200" dirty="0">
+              <a:solidFill>
+                <a:schemeClr val="tx1">
+                  <a:lumMod val="85000"/>
+                  <a:lumOff val="15000"/>
+                </a:schemeClr>
+              </a:solidFill>
+              <a:latin typeface="+mn-ea"/>
+              <a:cs typeface="+mn-ea"/>
+            </a:endParaRPr>
+          </a:p>
+        </p:txBody>
+      </p:sp>
+      <p:sp>
+        <p:nvSpPr>
+          <p:cNvPr id="20" name="矩形 19"/>
+          <p:cNvSpPr/>
+          <p:nvPr>
+            <p:custDataLst>
+              <p:tags r:id="rId5"/>
+            </p:custDataLst>
+          </p:nvPr>
+        </p:nvSpPr>
+        <p:spPr>
+          <a:xfrm>
+            <a:off x="2773952" y="5258265"/>
+            <a:ext cx="6208393" cy="410844"/>
+          </a:xfrm>
+          <a:prstGeom prst="rect">
+            <a:avLst/>
+          </a:prstGeom>
+          <a:noFill/>
+        </p:spPr>
+        <p:txBody>
+          <a:bodyPr wrap="square" lIns="0" tIns="0" rIns="0" bIns="36000" rtlCol="0" anchor="b">
+            <a:noAutofit/>
+          </a:bodyPr>
+          <a:lstStyle/>
+          <a:p>
+            <a:pPr>
+              <a:spcBef>
+                <a:spcPct val="0"/>
+              </a:spcBef>
+              <a:spcAft>
+                <a:spcPct val="0"/>
+              </a:spcAft>
+            </a:pPr>
+            <a:r>
+              <a:rPr lang="en-US" altLang="zh-CN" b="1" dirty="0">
+                <a:solidFill>
+                  <a:schemeClr val="accent1"/>
+                </a:solidFill>
+                <a:latin typeface="+mn-ea"/>
+                <a:cs typeface="+mn-ea"/>
+              </a:rPr>
+              <a:t>   </a:t>
+            </a:r>
+            <a:r>
+              <a:rPr lang="en-US" altLang="zh-CN" sz="1600" b="1" dirty="0">
+                <a:solidFill>
+                  <a:schemeClr val="accent1"/>
+                </a:solidFill>
+                <a:latin typeface="+mn-ea"/>
+                <a:cs typeface="+mn-ea"/>
+              </a:rPr>
+              <a:t> </a:t>
+            </a:r>
+            <a:r>
+              <a:rPr lang="en-US" altLang="zh-CN" sz="2400" b="1" dirty="0">
+                <a:solidFill>
+                  <a:schemeClr val="accent1"/>
+                </a:solidFill>
+                <a:latin typeface="+mn-ea"/>
+                <a:cs typeface="+mn-ea"/>
+              </a:rPr>
+              <a:t>Powerpoint</a:t>
+            </a:r>
+            <a:endParaRPr lang="en-US" altLang="zh-CN" sz="2400" b="1" dirty="0">
+              <a:solidFill>
+                <a:schemeClr val="accent1"/>
+              </a:solidFill>
+              <a:latin typeface="+mn-ea"/>
+              <a:cs typeface="+mn-ea"/>
+            </a:endParaRPr>
+          </a:p>
+        </p:txBody>
+      </p:sp>
+      <p:sp>
+        <p:nvSpPr>
+          <p:cNvPr id="21" name="矩形 20"/>
+          <p:cNvSpPr/>
+          <p:nvPr>
+            <p:custDataLst>
+              <p:tags r:id="rId6"/>
+            </p:custDataLst>
+          </p:nvPr>
+        </p:nvSpPr>
+        <p:spPr>
+          <a:xfrm>
+            <a:off x="4032250" y="4464685"/>
+            <a:ext cx="7919720" cy="358140"/>
+          </a:xfrm>
+          <a:prstGeom prst="rect">
+            <a:avLst/>
+          </a:prstGeom>
+          <a:noFill/>
+        </p:spPr>
+        <p:txBody>
+          <a:bodyPr wrap="square" lIns="0" tIns="0" rIns="0" bIns="0" rtlCol="0" anchor="t" anchorCtr="0">
+            <a:noAutofit/>
+          </a:bodyPr>
+          <a:lstStyle/>
+          <a:p>
+            <a:pPr>
+              <a:lnSpc>
+                <a:spcPct val="130000"/>
+              </a:lnSpc>
+              <a:spcBef>
+                <a:spcPct val="0"/>
+              </a:spcBef>
+              <a:spcAft>
+                <a:spcPct val="0"/>
+              </a:spcAft>
+            </a:pPr>
+            <a:r>
+              <a:rPr lang="en-US" altLang="zh-CN" sz="1600" dirty="0">
+                <a:solidFill>
+                  <a:schemeClr val="tx1">
+                    <a:lumMod val="85000"/>
+                    <a:lumOff val="15000"/>
+                  </a:schemeClr>
+                </a:solidFill>
+                <a:latin typeface="+mn-ea"/>
+                <a:cs typeface="+mn-ea"/>
+              </a:rPr>
+              <a:t>https://github.com/youzixiaobai/WebServiceWebData/blob/main/API%20Report.pdf</a:t>
+            </a:r>
+            <a:endParaRPr lang="en-US" altLang="zh-CN" sz="1600" dirty="0">
+              <a:solidFill>
+                <a:schemeClr val="tx1">
+                  <a:lumMod val="85000"/>
+                  <a:lumOff val="15000"/>
+                </a:schemeClr>
+              </a:solidFill>
+              <a:latin typeface="+mn-ea"/>
+              <a:cs typeface="+mn-ea"/>
+            </a:endParaRPr>
+          </a:p>
+          <a:p>
+            <a:pPr>
+              <a:lnSpc>
+                <a:spcPct val="130000"/>
+              </a:lnSpc>
+              <a:spcBef>
+                <a:spcPct val="0"/>
+              </a:spcBef>
+              <a:spcAft>
+                <a:spcPct val="0"/>
+              </a:spcAft>
+            </a:pPr>
+            <a:endParaRPr lang="en-US" altLang="zh-CN" sz="1600" dirty="0">
+              <a:solidFill>
+                <a:schemeClr val="tx1">
+                  <a:lumMod val="85000"/>
+                  <a:lumOff val="15000"/>
+                </a:schemeClr>
+              </a:solidFill>
+              <a:latin typeface="+mn-ea"/>
+              <a:cs typeface="+mn-ea"/>
+            </a:endParaRPr>
+          </a:p>
+        </p:txBody>
+      </p:sp>
+      <p:sp>
+        <p:nvSpPr>
+          <p:cNvPr id="23" name="矩形 22"/>
+          <p:cNvSpPr/>
+          <p:nvPr>
+            <p:custDataLst>
+              <p:tags r:id="rId7"/>
+            </p:custDataLst>
+          </p:nvPr>
+        </p:nvSpPr>
+        <p:spPr>
+          <a:xfrm>
+            <a:off x="3680732" y="4002872"/>
+            <a:ext cx="6208393" cy="410844"/>
+          </a:xfrm>
+          <a:prstGeom prst="rect">
+            <a:avLst/>
+          </a:prstGeom>
+          <a:noFill/>
+        </p:spPr>
+        <p:txBody>
+          <a:bodyPr wrap="square" lIns="0" tIns="0" rIns="0" bIns="36000" rtlCol="0" anchor="b">
+            <a:noAutofit/>
+          </a:bodyPr>
+          <a:lstStyle/>
+          <a:p>
+            <a:pPr>
+              <a:spcBef>
+                <a:spcPct val="0"/>
+              </a:spcBef>
+              <a:spcAft>
+                <a:spcPct val="0"/>
+              </a:spcAft>
+            </a:pPr>
+            <a:r>
+              <a:rPr lang="en-US" altLang="zh-CN" b="1" dirty="0">
+                <a:solidFill>
+                  <a:schemeClr val="accent3"/>
+                </a:solidFill>
+                <a:latin typeface="+mn-ea"/>
+                <a:cs typeface="+mn-ea"/>
+              </a:rPr>
+              <a:t>   </a:t>
+            </a:r>
+            <a:r>
+              <a:rPr lang="en-US" altLang="zh-CN" sz="2400" b="1" dirty="0">
+                <a:solidFill>
+                  <a:schemeClr val="accent3"/>
+                </a:solidFill>
+                <a:latin typeface="+mn-ea"/>
+                <a:cs typeface="+mn-ea"/>
+              </a:rPr>
+              <a:t>API Report</a:t>
+            </a:r>
+            <a:endParaRPr lang="en-US" altLang="zh-CN" sz="2400" b="1" dirty="0">
+              <a:solidFill>
+                <a:schemeClr val="accent3"/>
+              </a:solidFill>
+              <a:latin typeface="+mn-ea"/>
+              <a:cs typeface="+mn-ea"/>
+            </a:endParaRPr>
+          </a:p>
+        </p:txBody>
+      </p:sp>
+      <p:sp>
+        <p:nvSpPr>
+          <p:cNvPr id="25" name="矩形 24"/>
+          <p:cNvSpPr/>
+          <p:nvPr>
+            <p:custDataLst>
+              <p:tags r:id="rId8"/>
+            </p:custDataLst>
+          </p:nvPr>
+        </p:nvSpPr>
+        <p:spPr>
+          <a:xfrm>
+            <a:off x="3906520" y="3018790"/>
+            <a:ext cx="6410325" cy="810895"/>
+          </a:xfrm>
+          <a:prstGeom prst="rect">
+            <a:avLst/>
+          </a:prstGeom>
+          <a:noFill/>
+        </p:spPr>
+        <p:txBody>
+          <a:bodyPr wrap="square" lIns="0" tIns="0" rIns="0" bIns="0" rtlCol="0" anchor="t" anchorCtr="0">
+            <a:noAutofit/>
+          </a:bodyPr>
+          <a:lstStyle/>
+          <a:p>
+            <a:pPr>
+              <a:lnSpc>
+                <a:spcPct val="130000"/>
+              </a:lnSpc>
+              <a:spcBef>
+                <a:spcPct val="0"/>
+              </a:spcBef>
+              <a:spcAft>
+                <a:spcPct val="0"/>
+              </a:spcAft>
+            </a:pPr>
+            <a:endParaRPr lang="en-US" altLang="zh-CN" sz="1200" dirty="0">
+              <a:solidFill>
+                <a:schemeClr val="tx1">
+                  <a:lumMod val="85000"/>
+                  <a:lumOff val="15000"/>
+                </a:schemeClr>
+              </a:solidFill>
+              <a:latin typeface="+mn-ea"/>
+              <a:cs typeface="+mn-ea"/>
+            </a:endParaRPr>
+          </a:p>
+        </p:txBody>
+      </p:sp>
+      <p:sp>
+        <p:nvSpPr>
+          <p:cNvPr id="26" name="矩形 25"/>
+          <p:cNvSpPr/>
+          <p:nvPr>
+            <p:custDataLst>
+              <p:tags r:id="rId9"/>
+            </p:custDataLst>
+          </p:nvPr>
+        </p:nvSpPr>
+        <p:spPr>
+          <a:xfrm>
+            <a:off x="3777887" y="2602700"/>
+            <a:ext cx="6208393" cy="410844"/>
+          </a:xfrm>
+          <a:prstGeom prst="rect">
+            <a:avLst/>
+          </a:prstGeom>
+          <a:noFill/>
+        </p:spPr>
+        <p:txBody>
+          <a:bodyPr wrap="square" lIns="0" tIns="0" rIns="0" bIns="36000" rtlCol="0" anchor="b">
+            <a:noAutofit/>
+          </a:bodyPr>
+          <a:lstStyle/>
+          <a:p>
+            <a:pPr lvl="0" algn="l">
+              <a:buClrTx/>
+              <a:buSzTx/>
+              <a:buFontTx/>
+            </a:pPr>
+            <a:r>
+              <a:rPr lang="en-US" altLang="zh-CN" b="1" dirty="0">
+                <a:solidFill>
+                  <a:schemeClr val="accent2"/>
+                </a:solidFill>
+                <a:latin typeface="+mn-ea"/>
+                <a:cs typeface="+mn-ea"/>
+                <a:sym typeface="+mn-ea"/>
+              </a:rPr>
+              <a:t>  </a:t>
+            </a:r>
+            <a:r>
+              <a:rPr lang="en-US" altLang="zh-CN" sz="2400" b="1" dirty="0">
+                <a:solidFill>
+                  <a:schemeClr val="accent2"/>
+                </a:solidFill>
+                <a:latin typeface="+mn-ea"/>
+                <a:cs typeface="+mn-ea"/>
+                <a:sym typeface="+mn-ea"/>
+              </a:rPr>
+              <a:t>Technical Report</a:t>
+            </a:r>
+            <a:endParaRPr lang="en-US" altLang="zh-CN" sz="2400" b="1" dirty="0">
+              <a:solidFill>
+                <a:schemeClr val="accent2"/>
+              </a:solidFill>
+              <a:latin typeface="+mn-ea"/>
+              <a:cs typeface="+mn-ea"/>
+              <a:sym typeface="+mn-ea"/>
+            </a:endParaRPr>
+          </a:p>
+        </p:txBody>
+      </p:sp>
+      <p:sp>
+        <p:nvSpPr>
+          <p:cNvPr id="27" name="矩形 26"/>
+          <p:cNvSpPr/>
+          <p:nvPr>
+            <p:custDataLst>
+              <p:tags r:id="rId10"/>
+            </p:custDataLst>
+          </p:nvPr>
+        </p:nvSpPr>
+        <p:spPr>
+          <a:xfrm>
+            <a:off x="3517265" y="1983105"/>
+            <a:ext cx="8550910" cy="400685"/>
+          </a:xfrm>
+          <a:prstGeom prst="rect">
+            <a:avLst/>
+          </a:prstGeom>
+          <a:noFill/>
+        </p:spPr>
+        <p:txBody>
+          <a:bodyPr wrap="square" lIns="0" tIns="0" rIns="0" bIns="0" rtlCol="0" anchor="t" anchorCtr="0">
+            <a:noAutofit/>
+          </a:bodyPr>
+          <a:lstStyle/>
+          <a:p>
+            <a:pPr>
+              <a:lnSpc>
+                <a:spcPct val="130000"/>
+              </a:lnSpc>
+              <a:spcBef>
+                <a:spcPct val="0"/>
+              </a:spcBef>
+              <a:spcAft>
+                <a:spcPct val="0"/>
+              </a:spcAft>
+            </a:pPr>
+            <a:r>
+              <a:rPr lang="en-US" altLang="zh-CN" sz="1600" dirty="0">
+                <a:solidFill>
+                  <a:schemeClr val="accent1"/>
+                </a:solidFill>
+                <a:latin typeface="+mn-ea"/>
+                <a:cs typeface="+mn-ea"/>
+              </a:rPr>
+              <a:t>https://github.com/youzixiaobai/WebServiceWebData/blob/main/WebServiceWebData_1.zip</a:t>
+            </a:r>
+            <a:endParaRPr lang="en-US" altLang="zh-CN" sz="1600" dirty="0">
+              <a:solidFill>
+                <a:schemeClr val="accent1"/>
+              </a:solidFill>
+              <a:latin typeface="+mn-ea"/>
+              <a:cs typeface="+mn-ea"/>
+            </a:endParaRPr>
+          </a:p>
+        </p:txBody>
+      </p:sp>
+      <p:sp>
+        <p:nvSpPr>
+          <p:cNvPr id="28" name="矩形 27"/>
+          <p:cNvSpPr/>
+          <p:nvPr>
+            <p:custDataLst>
+              <p:tags r:id="rId11"/>
+            </p:custDataLst>
+          </p:nvPr>
+        </p:nvSpPr>
+        <p:spPr>
+          <a:xfrm>
+            <a:off x="3061335" y="1565275"/>
+            <a:ext cx="2056130" cy="410845"/>
+          </a:xfrm>
+          <a:prstGeom prst="rect">
+            <a:avLst/>
+          </a:prstGeom>
+          <a:noFill/>
+        </p:spPr>
+        <p:txBody>
+          <a:bodyPr wrap="square" lIns="0" tIns="0" rIns="0" bIns="36000" rtlCol="0" anchor="b">
+            <a:noAutofit/>
+          </a:bodyPr>
+          <a:lstStyle/>
+          <a:p>
+            <a:pPr>
+              <a:spcBef>
+                <a:spcPct val="0"/>
+              </a:spcBef>
+              <a:spcAft>
+                <a:spcPct val="0"/>
+              </a:spcAft>
+            </a:pPr>
+            <a:r>
+              <a:rPr lang="en-US" altLang="zh-CN" sz="2000" b="1" dirty="0">
+                <a:solidFill>
+                  <a:schemeClr val="accent1"/>
+                </a:solidFill>
+                <a:latin typeface="+mn-ea"/>
+                <a:cs typeface="+mn-ea"/>
+              </a:rPr>
+              <a:t> </a:t>
+            </a:r>
+            <a:r>
+              <a:rPr lang="en-US" altLang="zh-CN" sz="2400" b="1" dirty="0">
+                <a:solidFill>
+                  <a:schemeClr val="accent1"/>
+                </a:solidFill>
+                <a:latin typeface="+mn-ea"/>
+                <a:cs typeface="+mn-ea"/>
+              </a:rPr>
+              <a:t>Project code</a:t>
+            </a:r>
+            <a:endParaRPr lang="en-US" altLang="zh-CN" sz="2400" b="1" dirty="0">
+              <a:solidFill>
+                <a:schemeClr val="accent1"/>
+              </a:solidFill>
+              <a:latin typeface="+mn-ea"/>
+              <a:cs typeface="+mn-ea"/>
+            </a:endParaRPr>
+          </a:p>
+        </p:txBody>
+      </p:sp>
+      <p:sp>
+        <p:nvSpPr>
+          <p:cNvPr id="30" name="椭圆 29"/>
+          <p:cNvSpPr/>
+          <p:nvPr>
+            <p:custDataLst>
+              <p:tags r:id="rId12"/>
+            </p:custDataLst>
+          </p:nvPr>
+        </p:nvSpPr>
+        <p:spPr>
+          <a:xfrm>
+            <a:off x="3169903" y="2727091"/>
+            <a:ext cx="607695" cy="607695"/>
+          </a:xfrm>
+          <a:prstGeom prst="ellipse">
+            <a:avLst/>
+          </a:prstGeom>
+          <a:solidFill>
+            <a:schemeClr val="accent2"/>
+          </a:solidFill>
+          <a:ln>
+            <a:gradFill>
+              <a:gsLst>
+                <a:gs pos="37000">
+                  <a:srgbClr val="FFFFFF"/>
+                </a:gs>
+                <a:gs pos="0">
+                  <a:schemeClr val="accent2">
+                    <a:lumMod val="20000"/>
+                    <a:lumOff val="80000"/>
+                  </a:schemeClr>
+                </a:gs>
+                <a:gs pos="100000">
+                  <a:srgbClr val="FFFFFF"/>
+                </a:gs>
+                <a:gs pos="71000">
+                  <a:schemeClr val="accent2">
+                    <a:lumMod val="20000"/>
+                    <a:lumOff val="80000"/>
+                  </a:schemeClr>
+                </a:gs>
+              </a:gsLst>
+              <a:lin ang="15780000" scaled="0"/>
+            </a:gradFill>
+          </a:ln>
+          <a:effectLst/>
+        </p:spPr>
+        <p:style>
+          <a:lnRef idx="2">
+            <a:schemeClr val="accent1">
+              <a:shade val="50000"/>
+            </a:schemeClr>
+          </a:lnRef>
+          <a:fillRef idx="1">
+            <a:schemeClr val="accent1"/>
+          </a:fillRef>
+          <a:effectRef idx="0">
+            <a:schemeClr val="accent1"/>
+          </a:effectRef>
+          <a:fontRef idx="minor">
+            <a:schemeClr val="lt1"/>
+          </a:fontRef>
+        </p:style>
+        <p:txBody>
+          <a:bodyPr vertOverflow="overflow" horzOverflow="overflow" vert="horz" wrap="none" numCol="1" spcCol="0" rtlCol="0" fromWordArt="0" anchor="ctr" anchorCtr="0" forceAA="0" compatLnSpc="1">
+            <a:noAutofit/>
+          </a:bodyPr>
+          <a:lstStyle/>
+          <a:p>
+            <a:pPr lvl="0" algn="ctr">
+              <a:buClrTx/>
+              <a:buSzTx/>
+              <a:buFontTx/>
+            </a:pPr>
+            <a:r>
+              <a:rPr lang="en-US" altLang="zh-CN" sz="1400" b="1" dirty="0">
+                <a:solidFill>
+                  <a:srgbClr val="FFFFFF"/>
+                </a:solidFill>
+                <a:latin typeface="+mn-ea"/>
+                <a:cs typeface="+mn-ea"/>
+                <a:sym typeface="+mn-ea"/>
+              </a:rPr>
+              <a:t>02</a:t>
+            </a:r>
+            <a:endParaRPr lang="en-US" altLang="zh-CN" sz="1400" b="1" dirty="0">
+              <a:solidFill>
+                <a:srgbClr val="FFFFFF"/>
+              </a:solidFill>
+              <a:latin typeface="+mn-ea"/>
+              <a:cs typeface="+mn-ea"/>
+              <a:sym typeface="+mn-ea"/>
+            </a:endParaRPr>
+          </a:p>
+        </p:txBody>
+      </p:sp>
+      <p:sp>
+        <p:nvSpPr>
+          <p:cNvPr id="31" name="椭圆 30"/>
+          <p:cNvSpPr/>
+          <p:nvPr>
+            <p:custDataLst>
+              <p:tags r:id="rId13"/>
+            </p:custDataLst>
+          </p:nvPr>
+        </p:nvSpPr>
+        <p:spPr>
+          <a:xfrm>
+            <a:off x="2300442" y="5061505"/>
+            <a:ext cx="607695" cy="607695"/>
+          </a:xfrm>
+          <a:prstGeom prst="ellipse">
+            <a:avLst/>
+          </a:prstGeom>
+          <a:solidFill>
+            <a:schemeClr val="accent1"/>
+          </a:solidFill>
+          <a:ln>
+            <a:gradFill>
+              <a:gsLst>
+                <a:gs pos="37000">
+                  <a:srgbClr val="FFFFFF"/>
+                </a:gs>
+                <a:gs pos="0">
+                  <a:schemeClr val="accent1">
+                    <a:lumMod val="20000"/>
+                    <a:lumOff val="80000"/>
+                  </a:schemeClr>
+                </a:gs>
+                <a:gs pos="100000">
+                  <a:srgbClr val="FFFFFF"/>
+                </a:gs>
+                <a:gs pos="71000">
+                  <a:schemeClr val="accent1">
+                    <a:lumMod val="20000"/>
+                    <a:lumOff val="80000"/>
+                  </a:schemeClr>
+                </a:gs>
+              </a:gsLst>
+              <a:lin ang="15780000" scaled="0"/>
+            </a:gradFill>
+          </a:ln>
+          <a:effectLst/>
+        </p:spPr>
+        <p:style>
+          <a:lnRef idx="2">
+            <a:schemeClr val="accent1">
+              <a:shade val="50000"/>
+            </a:schemeClr>
+          </a:lnRef>
+          <a:fillRef idx="1">
+            <a:schemeClr val="accent1"/>
+          </a:fillRef>
+          <a:effectRef idx="0">
+            <a:schemeClr val="accent1"/>
+          </a:effectRef>
+          <a:fontRef idx="minor">
+            <a:schemeClr val="lt1"/>
+          </a:fontRef>
+        </p:style>
+        <p:txBody>
+          <a:bodyPr vertOverflow="overflow" horzOverflow="overflow" vert="horz" wrap="none" tIns="45720" bIns="45720" numCol="1" spcCol="0" rtlCol="0" fromWordArt="0" anchor="ctr" anchorCtr="0" forceAA="0" compatLnSpc="1">
+            <a:noAutofit/>
+          </a:bodyPr>
+          <a:lstStyle/>
+          <a:p>
+            <a:pPr lvl="0" algn="ctr">
+              <a:spcBef>
+                <a:spcPct val="0"/>
+              </a:spcBef>
+              <a:spcAft>
+                <a:spcPct val="0"/>
+              </a:spcAft>
+              <a:buClrTx/>
+              <a:buSzTx/>
+              <a:buFontTx/>
+            </a:pPr>
+            <a:r>
+              <a:rPr lang="en-US" altLang="zh-CN" sz="1400" b="1">
+                <a:solidFill>
+                  <a:srgbClr val="FFFFFF"/>
+                </a:solidFill>
+                <a:latin typeface="+mn-ea"/>
+                <a:cs typeface="+mn-ea"/>
+                <a:sym typeface="+mn-ea"/>
+              </a:rPr>
+              <a:t>04</a:t>
+            </a:r>
+            <a:endParaRPr lang="en-US" altLang="zh-CN" sz="1400" b="1">
+              <a:solidFill>
+                <a:srgbClr val="FFFFFF"/>
+              </a:solidFill>
+              <a:latin typeface="+mn-ea"/>
+              <a:cs typeface="+mn-ea"/>
+              <a:sym typeface="+mn-ea"/>
+            </a:endParaRPr>
+          </a:p>
+        </p:txBody>
+      </p:sp>
+      <p:sp>
+        <p:nvSpPr>
+          <p:cNvPr id="32" name="椭圆 31"/>
+          <p:cNvSpPr/>
+          <p:nvPr>
+            <p:custDataLst>
+              <p:tags r:id="rId14"/>
+            </p:custDataLst>
+          </p:nvPr>
+        </p:nvSpPr>
+        <p:spPr>
+          <a:xfrm>
+            <a:off x="2453477" y="1693234"/>
+            <a:ext cx="607695" cy="607695"/>
+          </a:xfrm>
+          <a:prstGeom prst="ellipse">
+            <a:avLst/>
+          </a:prstGeom>
+          <a:solidFill>
+            <a:schemeClr val="accent1"/>
+          </a:solidFill>
+          <a:ln>
+            <a:gradFill>
+              <a:gsLst>
+                <a:gs pos="37000">
+                  <a:srgbClr val="FFFFFF"/>
+                </a:gs>
+                <a:gs pos="0">
+                  <a:schemeClr val="accent1">
+                    <a:lumMod val="20000"/>
+                    <a:lumOff val="80000"/>
+                  </a:schemeClr>
+                </a:gs>
+                <a:gs pos="100000">
+                  <a:srgbClr val="FFFFFF"/>
+                </a:gs>
+                <a:gs pos="71000">
+                  <a:schemeClr val="accent1">
+                    <a:lumMod val="20000"/>
+                    <a:lumOff val="80000"/>
+                  </a:schemeClr>
+                </a:gs>
+              </a:gsLst>
+              <a:lin ang="15780000" scaled="0"/>
+            </a:gradFill>
+          </a:ln>
+          <a:effectLst/>
+        </p:spPr>
+        <p:style>
+          <a:lnRef idx="2">
+            <a:schemeClr val="accent1">
+              <a:shade val="50000"/>
+            </a:schemeClr>
+          </a:lnRef>
+          <a:fillRef idx="1">
+            <a:schemeClr val="accent1"/>
+          </a:fillRef>
+          <a:effectRef idx="0">
+            <a:schemeClr val="accent1"/>
+          </a:effectRef>
+          <a:fontRef idx="minor">
+            <a:schemeClr val="lt1"/>
+          </a:fontRef>
+        </p:style>
+        <p:txBody>
+          <a:bodyPr vertOverflow="overflow" horzOverflow="overflow" vert="horz" wrap="none" tIns="45720" bIns="45720" numCol="1" spcCol="0" rtlCol="0" fromWordArt="0" anchor="ctr" anchorCtr="0" forceAA="0" compatLnSpc="1">
+            <a:noAutofit/>
+          </a:bodyPr>
+          <a:lstStyle/>
+          <a:p>
+            <a:pPr lvl="0" algn="ctr">
+              <a:spcBef>
+                <a:spcPct val="0"/>
+              </a:spcBef>
+              <a:spcAft>
+                <a:spcPct val="0"/>
+              </a:spcAft>
+              <a:buClrTx/>
+              <a:buSzTx/>
+              <a:buFontTx/>
+            </a:pPr>
+            <a:r>
+              <a:rPr lang="en-US" altLang="zh-CN" sz="1400" b="1" dirty="0">
+                <a:solidFill>
+                  <a:srgbClr val="FFFFFF"/>
+                </a:solidFill>
+                <a:latin typeface="+mn-ea"/>
+                <a:cs typeface="+mn-ea"/>
+                <a:sym typeface="+mn-ea"/>
+              </a:rPr>
+              <a:t>01</a:t>
+            </a:r>
+            <a:endParaRPr lang="en-US" altLang="zh-CN" sz="1400" b="1" dirty="0">
+              <a:solidFill>
+                <a:srgbClr val="FFFFFF"/>
+              </a:solidFill>
+              <a:latin typeface="+mn-ea"/>
+              <a:cs typeface="+mn-ea"/>
+              <a:sym typeface="+mn-ea"/>
+            </a:endParaRPr>
+          </a:p>
+        </p:txBody>
+      </p:sp>
+      <p:sp>
+        <p:nvSpPr>
+          <p:cNvPr id="36" name="椭圆 35"/>
+          <p:cNvSpPr/>
+          <p:nvPr>
+            <p:custDataLst>
+              <p:tags r:id="rId15"/>
+            </p:custDataLst>
+          </p:nvPr>
+        </p:nvSpPr>
+        <p:spPr>
+          <a:xfrm>
+            <a:off x="3190858" y="4002883"/>
+            <a:ext cx="607695" cy="607695"/>
+          </a:xfrm>
+          <a:prstGeom prst="ellipse">
+            <a:avLst/>
+          </a:prstGeom>
+          <a:solidFill>
+            <a:schemeClr val="accent3"/>
+          </a:solidFill>
+          <a:ln>
+            <a:gradFill>
+              <a:gsLst>
+                <a:gs pos="37000">
+                  <a:srgbClr val="FFFFFF"/>
+                </a:gs>
+                <a:gs pos="0">
+                  <a:schemeClr val="accent6">
+                    <a:lumMod val="20000"/>
+                    <a:lumOff val="80000"/>
+                  </a:schemeClr>
+                </a:gs>
+                <a:gs pos="100000">
+                  <a:srgbClr val="FFFFFF"/>
+                </a:gs>
+                <a:gs pos="71000">
+                  <a:schemeClr val="accent3">
+                    <a:lumMod val="20000"/>
+                    <a:lumOff val="80000"/>
+                  </a:schemeClr>
+                </a:gs>
+              </a:gsLst>
+              <a:lin ang="16200000" scaled="0"/>
+            </a:gradFill>
+          </a:ln>
+          <a:effectLst/>
+        </p:spPr>
+        <p:style>
+          <a:lnRef idx="2">
+            <a:schemeClr val="accent1">
+              <a:shade val="50000"/>
+            </a:schemeClr>
+          </a:lnRef>
+          <a:fillRef idx="1">
+            <a:schemeClr val="accent1"/>
+          </a:fillRef>
+          <a:effectRef idx="0">
+            <a:schemeClr val="accent1"/>
+          </a:effectRef>
+          <a:fontRef idx="minor">
+            <a:schemeClr val="lt1"/>
+          </a:fontRef>
+        </p:style>
+        <p:txBody>
+          <a:bodyPr vertOverflow="overflow" horzOverflow="overflow" vert="horz" wrap="none" numCol="1" spcCol="0" rtlCol="0" fromWordArt="0" anchor="ctr" anchorCtr="0" forceAA="0" compatLnSpc="1">
+            <a:noAutofit/>
+          </a:bodyPr>
+          <a:lstStyle/>
+          <a:p>
+            <a:pPr lvl="0" algn="ctr">
+              <a:buClrTx/>
+              <a:buSzTx/>
+              <a:buFontTx/>
+            </a:pPr>
+            <a:r>
+              <a:rPr lang="en-US" altLang="zh-CN" sz="1400" b="1">
+                <a:solidFill>
+                  <a:srgbClr val="FFFFFF"/>
+                </a:solidFill>
+                <a:latin typeface="+mn-ea"/>
+                <a:cs typeface="+mn-ea"/>
+                <a:sym typeface="+mn-ea"/>
+              </a:rPr>
+              <a:t>03</a:t>
+            </a:r>
+            <a:endParaRPr lang="en-US" altLang="zh-CN" sz="1400" b="1">
+              <a:solidFill>
+                <a:srgbClr val="FFFFFF"/>
+              </a:solidFill>
+              <a:latin typeface="+mn-ea"/>
+              <a:cs typeface="+mn-ea"/>
+              <a:sym typeface="+mn-ea"/>
+            </a:endParaRPr>
+          </a:p>
+        </p:txBody>
+      </p:sp>
+      <p:sp>
+        <p:nvSpPr>
+          <p:cNvPr id="2" name="文本框 1"/>
+          <p:cNvSpPr txBox="1"/>
+          <p:nvPr/>
+        </p:nvSpPr>
+        <p:spPr>
+          <a:xfrm>
+            <a:off x="3992880" y="3039745"/>
+            <a:ext cx="6764020" cy="737235"/>
+          </a:xfrm>
+          <a:prstGeom prst="rect">
+            <a:avLst/>
+          </a:prstGeom>
+          <a:noFill/>
+        </p:spPr>
+        <p:txBody>
+          <a:bodyPr wrap="square" rtlCol="0">
+            <a:spAutoFit/>
+          </a:bodyPr>
+          <a:p>
+            <a:r>
+              <a:rPr lang="en-US" altLang="zh-CN" dirty="0">
+                <a:solidFill>
+                  <a:schemeClr val="accent1"/>
+                </a:solidFill>
+                <a:latin typeface="+mn-ea"/>
+                <a:cs typeface="+mn-ea"/>
+                <a:sym typeface="+mn-ea"/>
+              </a:rPr>
+              <a:t>https://github.com/youzixiaobai/WebServiceWebData/</a:t>
+            </a:r>
+            <a:endParaRPr lang="en-US" altLang="zh-CN" dirty="0">
+              <a:solidFill>
+                <a:schemeClr val="accent1"/>
+              </a:solidFill>
+              <a:latin typeface="+mn-ea"/>
+              <a:cs typeface="+mn-ea"/>
+              <a:sym typeface="+mn-ea"/>
+            </a:endParaRPr>
+          </a:p>
+          <a:p>
+            <a:endParaRPr lang="zh-CN" altLang="en-US"/>
+          </a:p>
+          <a:p>
+            <a:r>
+              <a:rPr lang="en-US" altLang="zh-CN">
+                <a:gradFill>
+                  <a:gsLst>
+                    <a:gs pos="50000">
+                      <a:schemeClr val="accent1"/>
+                    </a:gs>
+                    <a:gs pos="0">
+                      <a:schemeClr val="accent1">
+                        <a:lumMod val="25000"/>
+                        <a:lumOff val="75000"/>
+                      </a:schemeClr>
+                    </a:gs>
+                    <a:gs pos="100000">
+                      <a:schemeClr val="accent1">
+                        <a:lumMod val="85000"/>
+                      </a:schemeClr>
+                    </a:gs>
+                  </a:gsLst>
+                  <a:lin ang="5400000" scaled="1"/>
+                </a:gradFill>
+              </a:rPr>
+              <a:t>the .</a:t>
+            </a:r>
+            <a:r>
+              <a:rPr lang="en-US" altLang="zh-CN">
+                <a:gradFill>
+                  <a:gsLst>
+                    <a:gs pos="50000">
+                      <a:schemeClr val="accent1"/>
+                    </a:gs>
+                    <a:gs pos="0">
+                      <a:schemeClr val="accent1">
+                        <a:lumMod val="25000"/>
+                        <a:lumOff val="75000"/>
+                      </a:schemeClr>
+                    </a:gs>
+                    <a:gs pos="100000">
+                      <a:schemeClr val="accent1">
+                        <a:lumMod val="85000"/>
+                      </a:schemeClr>
+                    </a:gs>
+                  </a:gsLst>
+                  <a:lin ang="5400000" scaled="1"/>
+                </a:gradFill>
+                <a:ea typeface="宋体" panose="02010600030101010101" pitchFamily="2" charset="-122"/>
+              </a:rPr>
+              <a:t>pdf document</a:t>
+            </a:r>
+            <a:endParaRPr lang="en-US" altLang="zh-CN">
+              <a:gradFill>
+                <a:gsLst>
+                  <a:gs pos="50000">
+                    <a:schemeClr val="accent1"/>
+                  </a:gs>
+                  <a:gs pos="0">
+                    <a:schemeClr val="accent1">
+                      <a:lumMod val="25000"/>
+                      <a:lumOff val="75000"/>
+                    </a:schemeClr>
+                  </a:gs>
+                  <a:gs pos="100000">
+                    <a:schemeClr val="accent1">
+                      <a:lumMod val="85000"/>
+                    </a:schemeClr>
+                  </a:gs>
+                </a:gsLst>
+                <a:lin ang="5400000" scaled="1"/>
+              </a:gradFill>
+              <a:ea typeface="宋体" panose="02010600030101010101" pitchFamily="2" charset="-122"/>
+            </a:endParaRPr>
+          </a:p>
+        </p:txBody>
+      </p:sp>
+    </p:spTree>
+    <p:custDataLst>
+      <p:tags r:id="rId16"/>
+    </p:custDataLst>
+  </p:cSld>
+  <p:clrMapOvr>
+    <a:masterClrMapping/>
+  </p:clrMapOvr>
+</p:sld>
+</file>
+
+<file path=ppt/slides/slide23.xml><?xml version="1.0" encoding="utf-8"?>
+<p:sld xmlns:a="http://schemas.openxmlformats.org/drawingml/2006/main" xmlns:r="http://schemas.openxmlformats.org/officeDocument/2006/relationships" xmlns:p="http://schemas.openxmlformats.org/presentationml/2006/main">
+  <p:cSld>
     <p:bg>
       <p:bgPr>
         <a:solidFill>
@@ -41239,7 +47756,21 @@
 
 <file path=ppt/tags/tag1.xml><?xml version="1.0" encoding="utf-8"?>
 <p:tagLst xmlns:p="http://schemas.openxmlformats.org/presentationml/2006/main">
-  <p:tag name="KSO_WM_DIAGRAM_VIRTUALLY_FRAME" val="{&quot;height&quot;:340,&quot;left&quot;:60,&quot;top&quot;:140,&quot;width&quot;:840}"/>
+  <p:tag name="KSO_WM_UNIT_HIGHLIGHT" val="0"/>
+  <p:tag name="KSO_WM_UNIT_COMPATIBLE" val="0"/>
+  <p:tag name="KSO_WM_UNIT_DIAGRAM_ISNUMVISUAL" val="0"/>
+  <p:tag name="KSO_WM_UNIT_DIAGRAM_ISREFERUNIT" val="0"/>
+  <p:tag name="KSO_WM_UNIT_ID" val="_1*a*1"/>
+  <p:tag name="KSO_WM_UNIT_LAYERLEVEL" val="1"/>
+  <p:tag name="KSO_WM_TAG_VERSION" val="3.0"/>
+  <p:tag name="KSO_WM_BEAUTIFY_FLAG" val="#wm#"/>
+  <p:tag name="KSO_WM_UNIT_ISCONTENTSTITLE" val="0"/>
+  <p:tag name="KSO_WM_UNIT_ISNUMDGMTITLE" val="0"/>
+  <p:tag name="KSO_WM_UNIT_PRESET_TEXT" val="单击此处编辑母版标题样式"/>
+  <p:tag name="KSO_WM_UNIT_NOCLEAR" val="0"/>
+  <p:tag name="KSO_WM_UNIT_VALUE" val="20"/>
+  <p:tag name="KSO_WM_UNIT_TYPE" val="a"/>
+  <p:tag name="KSO_WM_UNIT_INDEX" val="1"/>
 </p:tagLst>
 </file>
 
@@ -41287,25 +47818,25 @@
 
 <file path=ppt/tags/tag106.xml><?xml version="1.0" encoding="utf-8"?>
 <p:tagLst xmlns:p="http://schemas.openxmlformats.org/presentationml/2006/main">
-  <p:tag name="KSO_WM_DIAGRAM_VIRTUALLY_FRAME" val="{&quot;height&quot;:340,&quot;left&quot;:60,&quot;top&quot;:140,&quot;width&quot;:840}"/>
+  <p:tag name="KSO_WM_DIAGRAM_VIRTUALLY_FRAME" val="{&quot;height&quot;:270,&quot;left&quot;:60,&quot;top&quot;:150,&quot;width&quot;:840}"/>
 </p:tagLst>
 </file>
 
 <file path=ppt/tags/tag107.xml><?xml version="1.0" encoding="utf-8"?>
 <p:tagLst xmlns:p="http://schemas.openxmlformats.org/presentationml/2006/main">
-  <p:tag name="KSO_WM_DIAGRAM_VIRTUALLY_FRAME" val="{&quot;height&quot;:340,&quot;left&quot;:60,&quot;top&quot;:140,&quot;width&quot;:840}"/>
+  <p:tag name="KSO_WM_DIAGRAM_VIRTUALLY_FRAME" val="{&quot;height&quot;:270,&quot;left&quot;:60,&quot;top&quot;:150,&quot;width&quot;:840}"/>
 </p:tagLst>
 </file>
 
 <file path=ppt/tags/tag108.xml><?xml version="1.0" encoding="utf-8"?>
 <p:tagLst xmlns:p="http://schemas.openxmlformats.org/presentationml/2006/main">
-  <p:tag name="KSO_WM_DIAGRAM_VIRTUALLY_FRAME" val="{&quot;height&quot;:340,&quot;left&quot;:60,&quot;top&quot;:140,&quot;width&quot;:840}"/>
+  <p:tag name="KSO_WM_DIAGRAM_VIRTUALLY_FRAME" val="{&quot;height&quot;:270,&quot;left&quot;:60,&quot;top&quot;:150,&quot;width&quot;:840}"/>
 </p:tagLst>
 </file>
 
 <file path=ppt/tags/tag109.xml><?xml version="1.0" encoding="utf-8"?>
 <p:tagLst xmlns:p="http://schemas.openxmlformats.org/presentationml/2006/main">
-  <p:tag name="KSO_WM_DIAGRAM_VIRTUALLY_FRAME" val="{&quot;height&quot;:340,&quot;left&quot;:60,&quot;top&quot;:140,&quot;width&quot;:840}"/>
+  <p:tag name="KSO_WM_DIAGRAM_VIRTUALLY_FRAME" val="{&quot;height&quot;:270,&quot;left&quot;:60,&quot;top&quot;:150,&quot;width&quot;:840}"/>
 </p:tagLst>
 </file>
 
@@ -41317,25 +47848,25 @@
 
 <file path=ppt/tags/tag110.xml><?xml version="1.0" encoding="utf-8"?>
 <p:tagLst xmlns:p="http://schemas.openxmlformats.org/presentationml/2006/main">
-  <p:tag name="KSO_WM_DIAGRAM_VIRTUALLY_FRAME" val="{&quot;height&quot;:340,&quot;left&quot;:60,&quot;top&quot;:140,&quot;width&quot;:840}"/>
+  <p:tag name="KSO_WM_DIAGRAM_VIRTUALLY_FRAME" val="{&quot;height&quot;:270,&quot;left&quot;:60,&quot;top&quot;:150,&quot;width&quot;:840}"/>
 </p:tagLst>
 </file>
 
 <file path=ppt/tags/tag111.xml><?xml version="1.0" encoding="utf-8"?>
 <p:tagLst xmlns:p="http://schemas.openxmlformats.org/presentationml/2006/main">
-  <p:tag name="KSO_WM_DIAGRAM_VIRTUALLY_FRAME" val="{&quot;height&quot;:340,&quot;left&quot;:60,&quot;top&quot;:140,&quot;width&quot;:840}"/>
+  <p:tag name="KSO_WM_DIAGRAM_VIRTUALLY_FRAME" val="{&quot;height&quot;:270,&quot;left&quot;:60,&quot;top&quot;:150,&quot;width&quot;:840}"/>
 </p:tagLst>
 </file>
 
 <file path=ppt/tags/tag112.xml><?xml version="1.0" encoding="utf-8"?>
 <p:tagLst xmlns:p="http://schemas.openxmlformats.org/presentationml/2006/main">
-  <p:tag name="KSO_WM_DIAGRAM_VIRTUALLY_FRAME" val="{&quot;height&quot;:340,&quot;left&quot;:60,&quot;top&quot;:140,&quot;width&quot;:840}"/>
+  <p:tag name="KSO_WM_DIAGRAM_VIRTUALLY_FRAME" val="{&quot;height&quot;:270,&quot;left&quot;:60,&quot;top&quot;:150,&quot;width&quot;:840}"/>
 </p:tagLst>
 </file>
 
 <file path=ppt/tags/tag113.xml><?xml version="1.0" encoding="utf-8"?>
 <p:tagLst xmlns:p="http://schemas.openxmlformats.org/presentationml/2006/main">
-  <p:tag name="KSO_WM_DIAGRAM_VIRTUALLY_FRAME" val="{&quot;height&quot;:340,&quot;left&quot;:60,&quot;top&quot;:140,&quot;width&quot;:840}"/>
+  <p:tag name="KSO_WM_DIAGRAM_VIRTUALLY_FRAME" val="{&quot;height&quot;:270,&quot;left&quot;:60,&quot;top&quot;:150,&quot;width&quot;:840}"/>
 </p:tagLst>
 </file>
 
@@ -41363,9 +47894,135 @@
 </p:tagLst>
 </file>
 
+<file path=ppt/tags/tag118.xml><?xml version="1.0" encoding="utf-8"?>
+<p:tagLst xmlns:p="http://schemas.openxmlformats.org/presentationml/2006/main">
+  <p:tag name="KSO_WM_DIAGRAM_VIRTUALLY_FRAME" val="{&quot;height&quot;:340,&quot;left&quot;:60,&quot;top&quot;:140,&quot;width&quot;:840}"/>
+</p:tagLst>
+</file>
+
+<file path=ppt/tags/tag119.xml><?xml version="1.0" encoding="utf-8"?>
+<p:tagLst xmlns:p="http://schemas.openxmlformats.org/presentationml/2006/main">
+  <p:tag name="KSO_WM_DIAGRAM_VIRTUALLY_FRAME" val="{&quot;height&quot;:340,&quot;left&quot;:60,&quot;top&quot;:140,&quot;width&quot;:840}"/>
+</p:tagLst>
+</file>
+
 <file path=ppt/tags/tag12.xml><?xml version="1.0" encoding="utf-8"?>
 <p:tagLst xmlns:p="http://schemas.openxmlformats.org/presentationml/2006/main">
   <p:tag name="KSO_WM_DIAGRAM_VIRTUALLY_FRAME" val="{&quot;height&quot;:340,&quot;left&quot;:60,&quot;top&quot;:140,&quot;width&quot;:840}"/>
+</p:tagLst>
+</file>
+
+<file path=ppt/tags/tag120.xml><?xml version="1.0" encoding="utf-8"?>
+<p:tagLst xmlns:p="http://schemas.openxmlformats.org/presentationml/2006/main">
+  <p:tag name="KSO_WM_DIAGRAM_VIRTUALLY_FRAME" val="{&quot;height&quot;:340,&quot;left&quot;:60,&quot;top&quot;:140,&quot;width&quot;:840}"/>
+</p:tagLst>
+</file>
+
+<file path=ppt/tags/tag121.xml><?xml version="1.0" encoding="utf-8"?>
+<p:tagLst xmlns:p="http://schemas.openxmlformats.org/presentationml/2006/main">
+  <p:tag name="KSO_WM_DIAGRAM_VIRTUALLY_FRAME" val="{&quot;height&quot;:340,&quot;left&quot;:60,&quot;top&quot;:140,&quot;width&quot;:840}"/>
+</p:tagLst>
+</file>
+
+<file path=ppt/tags/tag122.xml><?xml version="1.0" encoding="utf-8"?>
+<p:tagLst xmlns:p="http://schemas.openxmlformats.org/presentationml/2006/main">
+  <p:tag name="KSO_WM_DIAGRAM_VIRTUALLY_FRAME" val="{&quot;height&quot;:340,&quot;left&quot;:60,&quot;top&quot;:140,&quot;width&quot;:840}"/>
+</p:tagLst>
+</file>
+
+<file path=ppt/tags/tag123.xml><?xml version="1.0" encoding="utf-8"?>
+<p:tagLst xmlns:p="http://schemas.openxmlformats.org/presentationml/2006/main">
+  <p:tag name="KSO_WM_DIAGRAM_VIRTUALLY_FRAME" val="{&quot;height&quot;:340,&quot;left&quot;:60,&quot;top&quot;:140,&quot;width&quot;:840}"/>
+</p:tagLst>
+</file>
+
+<file path=ppt/tags/tag124.xml><?xml version="1.0" encoding="utf-8"?>
+<p:tagLst xmlns:p="http://schemas.openxmlformats.org/presentationml/2006/main">
+  <p:tag name="KSO_WM_DIAGRAM_VIRTUALLY_FRAME" val="{&quot;height&quot;:340,&quot;left&quot;:60,&quot;top&quot;:140,&quot;width&quot;:840}"/>
+</p:tagLst>
+</file>
+
+<file path=ppt/tags/tag125.xml><?xml version="1.0" encoding="utf-8"?>
+<p:tagLst xmlns:p="http://schemas.openxmlformats.org/presentationml/2006/main">
+  <p:tag name="KSO_WM_DIAGRAM_VIRTUALLY_FRAME" val="{&quot;height&quot;:340,&quot;left&quot;:60,&quot;top&quot;:140,&quot;width&quot;:840}"/>
+</p:tagLst>
+</file>
+
+<file path=ppt/tags/tag126.xml><?xml version="1.0" encoding="utf-8"?>
+<p:tagLst xmlns:p="http://schemas.openxmlformats.org/presentationml/2006/main">
+  <p:tag name="KSO_WM_UNIT_ISCONTENTSTITLE" val="0"/>
+  <p:tag name="KSO_WM_UNIT_ISNUMDGMTITLE" val="0"/>
+  <p:tag name="KSO_WM_UNIT_NOCLEAR" val="0"/>
+  <p:tag name="KSO_WM_UNIT_HIGHLIGHT" val="0"/>
+  <p:tag name="KSO_WM_UNIT_COMPATIBLE" val="0"/>
+  <p:tag name="KSO_WM_UNIT_DIAGRAM_ISNUMVISUAL" val="0"/>
+  <p:tag name="KSO_WM_UNIT_DIAGRAM_ISREFERUNIT" val="0"/>
+  <p:tag name="KSO_WM_UNIT_TYPE" val="a"/>
+  <p:tag name="KSO_WM_UNIT_INDEX" val="1"/>
+  <p:tag name="KSO_WM_UNIT_ID" val="custom20238441_1*a*1"/>
+  <p:tag name="KSO_WM_TEMPLATE_CATEGORY" val="custom"/>
+  <p:tag name="KSO_WM_TEMPLATE_INDEX" val="20238441"/>
+  <p:tag name="KSO_WM_UNIT_LAYERLEVEL" val="1"/>
+  <p:tag name="KSO_WM_TAG_VERSION" val="3.0"/>
+  <p:tag name="KSO_WM_BEAUTIFY_FLAG" val="#wm#"/>
+  <p:tag name="KSO_WM_UNIT_TEXT_TYPE" val="1"/>
+  <p:tag name="KSO_WM_UNIT_PRESET_TEXT" val="单击此处添加标题"/>
+</p:tagLst>
+</file>
+
+<file path=ppt/tags/tag127.xml><?xml version="1.0" encoding="utf-8"?>
+<p:tagLst xmlns:p="http://schemas.openxmlformats.org/presentationml/2006/main">
+  <p:tag name="KSO_WM_UNIT_HIGHLIGHT" val="0"/>
+  <p:tag name="KSO_WM_UNIT_COMPATIBLE" val="0"/>
+  <p:tag name="KSO_WM_UNIT_DIAGRAM_ISNUMVISUAL" val="0"/>
+  <p:tag name="KSO_WM_UNIT_DIAGRAM_ISREFERUNIT" val="0"/>
+  <p:tag name="KSO_WM_UNIT_ID" val="custom20238441_1*i*1"/>
+  <p:tag name="KSO_WM_TEMPLATE_CATEGORY" val="custom"/>
+  <p:tag name="KSO_WM_TEMPLATE_INDEX" val="20238441"/>
+  <p:tag name="KSO_WM_UNIT_LAYERLEVEL" val="1"/>
+  <p:tag name="KSO_WM_TAG_VERSION" val="3.0"/>
+  <p:tag name="KSO_WM_BEAUTIFY_FLAG" val="#wm#"/>
+  <p:tag name="KSO_WM_UNIT_TYPE" val="i"/>
+  <p:tag name="KSO_WM_UNIT_INDEX" val="1"/>
+</p:tagLst>
+</file>
+
+<file path=ppt/tags/tag128.xml><?xml version="1.0" encoding="utf-8"?>
+<p:tagLst xmlns:p="http://schemas.openxmlformats.org/presentationml/2006/main">
+  <p:tag name="KSO_WM_UNIT_HIGHLIGHT" val="0"/>
+  <p:tag name="KSO_WM_UNIT_COMPATIBLE" val="0"/>
+  <p:tag name="KSO_WM_UNIT_DIAGRAM_ISNUMVISUAL" val="0"/>
+  <p:tag name="KSO_WM_UNIT_DIAGRAM_ISREFERUNIT" val="0"/>
+  <p:tag name="KSO_WM_UNIT_ID" val="custom20238441_1*i*2"/>
+  <p:tag name="KSO_WM_TEMPLATE_CATEGORY" val="custom"/>
+  <p:tag name="KSO_WM_TEMPLATE_INDEX" val="20238441"/>
+  <p:tag name="KSO_WM_UNIT_LAYERLEVEL" val="1"/>
+  <p:tag name="KSO_WM_TAG_VERSION" val="3.0"/>
+  <p:tag name="KSO_WM_BEAUTIFY_FLAG" val="#wm#"/>
+  <p:tag name="KSO_WM_UNIT_TYPE" val="i"/>
+  <p:tag name="KSO_WM_UNIT_INDEX" val="2"/>
+</p:tagLst>
+</file>
+
+<file path=ppt/tags/tag129.xml><?xml version="1.0" encoding="utf-8"?>
+<p:tagLst xmlns:p="http://schemas.openxmlformats.org/presentationml/2006/main">
+  <p:tag name="KSO_WM_UNIT_SUBTYPE" val="a"/>
+  <p:tag name="KSO_WM_UNIT_TEXT_LAYER_COUNT" val="1"/>
+  <p:tag name="KSO_WM_UNIT_NOCLEAR" val="0"/>
+  <p:tag name="KSO_WM_UNIT_HIGHLIGHT" val="0"/>
+  <p:tag name="KSO_WM_UNIT_COMPATIBLE" val="0"/>
+  <p:tag name="KSO_WM_UNIT_DIAGRAM_ISNUMVISUAL" val="0"/>
+  <p:tag name="KSO_WM_UNIT_DIAGRAM_ISREFERUNIT" val="0"/>
+  <p:tag name="KSO_WM_UNIT_TYPE" val="f"/>
+  <p:tag name="KSO_WM_UNIT_INDEX" val="1"/>
+  <p:tag name="KSO_WM_UNIT_ID" val="custom20238441_1*f*1"/>
+  <p:tag name="KSO_WM_TEMPLATE_CATEGORY" val="custom"/>
+  <p:tag name="KSO_WM_TEMPLATE_INDEX" val="20238441"/>
+  <p:tag name="KSO_WM_UNIT_LAYERLEVEL" val="1"/>
+  <p:tag name="KSO_WM_TAG_VERSION" val="3.0"/>
+  <p:tag name="KSO_WM_BEAUTIFY_FLAG" val="#wm#"/>
+  <p:tag name="KSO_WM_UNIT_TEXT_TYPE" val="1"/>
+  <p:tag name="KSO_WM_UNIT_PRESET_TEXT" val="单击此处添加文本具体内容，简明扼要地阐述您的观点。根据需要可酌情增减文字，以便观者准确地理解您传达的思想。单击此处添加文本具体内容，简明扼要地阐述您的观点。根据需要可酌情增减文字，以便观者准确地理解您传达的思想。单击此处添加文本具体内容，简明扼要地阐述您的观点。根据需要可酌情增减文字，以便观者准确地理解您传达的思想。单击此处添加文本具体内容，简明扼要地阐述您的观点。根据需要可酌情增减文字，以便观者准确地理解您传达的思想"/>
 </p:tagLst>
 </file>
 
@@ -41375,9 +48032,635 @@
 </p:tagLst>
 </file>
 
+<file path=ppt/tags/tag130.xml><?xml version="1.0" encoding="utf-8"?>
+<p:tagLst xmlns:p="http://schemas.openxmlformats.org/presentationml/2006/main">
+  <p:tag name="KSO_WM_SLIDE_ID" val="custom20238441_1"/>
+  <p:tag name="KSO_WM_TEMPLATE_SUBCATEGORY" val="0"/>
+  <p:tag name="KSO_WM_TEMPLATE_MASTER_TYPE" val="0"/>
+  <p:tag name="KSO_WM_TEMPLATE_COLOR_TYPE" val="0"/>
+  <p:tag name="KSO_WM_SLIDE_TYPE" val="text"/>
+  <p:tag name="KSO_WM_SLIDE_SUBTYPE" val="picTxt"/>
+  <p:tag name="KSO_WM_SLIDE_ITEM_CNT" val="0"/>
+  <p:tag name="KSO_WM_SLIDE_INDEX" val="1"/>
+  <p:tag name="KSO_WM_SLIDE_SIZE" val="801*391"/>
+  <p:tag name="KSO_WM_SLIDE_POSITION" val="41*74"/>
+  <p:tag name="KSO_WM_TAG_VERSION" val="3.0"/>
+  <p:tag name="KSO_WM_BEAUTIFY_FLAG" val="#wm#"/>
+  <p:tag name="KSO_WM_TEMPLATE_CATEGORY" val="custom"/>
+  <p:tag name="KSO_WM_TEMPLATE_INDEX" val="20238441"/>
+  <p:tag name="KSO_WM_SLIDE_LAYOUT" val="a_f"/>
+  <p:tag name="KSO_WM_SLIDE_LAYOUT_CNT" val="1_1"/>
+</p:tagLst>
+</file>
+
+<file path=ppt/tags/tag131.xml><?xml version="1.0" encoding="utf-8"?>
+<p:tagLst xmlns:p="http://schemas.openxmlformats.org/presentationml/2006/main">
+  <p:tag name="KSO_WM_UNIT_ISCONTENTSTITLE" val="0"/>
+  <p:tag name="KSO_WM_UNIT_ISNUMDGMTITLE" val="0"/>
+  <p:tag name="KSO_WM_UNIT_NOCLEAR" val="0"/>
+  <p:tag name="KSO_WM_UNIT_VALUE" val="30"/>
+  <p:tag name="KSO_WM_UNIT_HIGHLIGHT" val="0"/>
+  <p:tag name="KSO_WM_UNIT_COMPATIBLE" val="0"/>
+  <p:tag name="KSO_WM_UNIT_DIAGRAM_ISNUMVISUAL" val="0"/>
+  <p:tag name="KSO_WM_UNIT_DIAGRAM_ISREFERUNIT" val="0"/>
+  <p:tag name="KSO_WM_UNIT_TYPE" val="a"/>
+  <p:tag name="KSO_WM_UNIT_INDEX" val="1"/>
+  <p:tag name="KSO_WM_UNIT_ID" val="diagram20231090_4*a*1"/>
+  <p:tag name="KSO_WM_TEMPLATE_CATEGORY" val="diagram"/>
+  <p:tag name="KSO_WM_TEMPLATE_INDEX" val="20231090"/>
+  <p:tag name="KSO_WM_UNIT_LAYERLEVEL" val="1"/>
+  <p:tag name="KSO_WM_TAG_VERSION" val="3.0"/>
+  <p:tag name="KSO_WM_BEAUTIFY_FLAG" val="#wm#"/>
+  <p:tag name="KSO_WM_DIAGRAM_GROUP_CODE" val="n1-1"/>
+  <p:tag name="KSO_WM_UNIT_PRESET_TEXT" val="单击此处添加标题"/>
+  <p:tag name="KSO_WM_UNIT_TEXT_TYPE" val="1"/>
+  <p:tag name="KSO_WM_UNIT_TEXT_FILL_FORE_SCHEMECOLOR_INDEX" val="13"/>
+  <p:tag name="KSO_WM_UNIT_TEXT_FILL_TYPE" val="1"/>
+  <p:tag name="KSO_WM_UNIT_USESOURCEFORMAT_APPLY" val="0"/>
+</p:tagLst>
+</file>
+
+<file path=ppt/tags/tag132.xml><?xml version="1.0" encoding="utf-8"?>
+<p:tagLst xmlns:p="http://schemas.openxmlformats.org/presentationml/2006/main">
+  <p:tag name="KSO_WM_UNIT_HIGHLIGHT" val="0"/>
+  <p:tag name="KSO_WM_UNIT_COMPATIBLE" val="0"/>
+  <p:tag name="KSO_WM_UNIT_DIAGRAM_ISNUMVISUAL" val="0"/>
+  <p:tag name="KSO_WM_UNIT_DIAGRAM_ISREFERUNIT" val="0"/>
+  <p:tag name="KSO_WM_DIAGRAM_GROUP_CODE" val="n1-1"/>
+  <p:tag name="KSO_WM_UNIT_ID" val="diagram20231090_4*n_h_h_i*1_2_4_2"/>
+  <p:tag name="KSO_WM_TEMPLATE_CATEGORY" val="diagram"/>
+  <p:tag name="KSO_WM_TEMPLATE_INDEX" val="20231090"/>
+  <p:tag name="KSO_WM_UNIT_LAYERLEVEL" val="1_1_1_1"/>
+  <p:tag name="KSO_WM_TAG_VERSION" val="3.0"/>
+  <p:tag name="KSO_WM_UNIT_TYPE" val="n_h_h_i"/>
+  <p:tag name="KSO_WM_UNIT_INDEX" val="1_2_4_2"/>
+  <p:tag name="KSO_WM_DIAGRAM_VERSION" val="3"/>
+  <p:tag name="KSO_WM_DIAGRAM_COLOR_TRICK" val="4"/>
+  <p:tag name="KSO_WM_DIAGRAM_COLOR_TEXT_CAN_REMOVE" val="n"/>
+  <p:tag name="KSO_WM_DIAGRAM_MAX_ITEMCNT" val="6"/>
+  <p:tag name="KSO_WM_DIAGRAM_MIN_ITEMCNT" val="3"/>
+  <p:tag name="KSO_WM_DIAGRAM_VIRTUALLY_FRAME" val="{&quot;height&quot;:382.3500061035156,&quot;left&quot;:21.1,&quot;top&quot;:116.39999694824219,&quot;width&quot;:884.3}"/>
+  <p:tag name="KSO_WM_DIAGRAM_COLOR_MATCH_VALUE" val="{&quot;shape&quot;:{&quot;fill&quot;:{&quot;type&quot;:0},&quot;glow&quot;:{&quot;colorType&quot;:0},&quot;line&quot;:{&quot;solidLine&quot;:{&quot;brightness&quot;:0.4000000059604645,&quot;colorType&quot;:1,&quot;foreColorIndex&quot;:8,&quot;transparency&quot;:0},&quot;type&quot;:1},&quot;shadow&quot;:{&quot;colorType&quot;:0},&quot;threeD&quot;:{&quot;curvedSurface&quot;:{&quot;brightness&quot;:0,&quot;colorType&quot;:2,&quot;rgb&quot;:&quot;#000000&quot;},&quot;depth&quot;:{&quot;colorType&quot;:0}}},&quot;text&quot;:{&quot;fill&quot;:{&quot;solid&quot;:{&quot;brightness&quot;:0,&quot;colorType&quot;:1,&quot;foreColorIndex&quot;:2,&quot;transparency&quot;:0},&quot;type&quot;:1},&quot;glow&quot;:{&quot;colorType&quot;:0},&quot;line&quot;:{&quot;type&quot;:0},&quot;shadow&quot;:{&quot;colorType&quot;:0},&quot;threeD&quot;:{&quot;curvedSurface&quot;:{&quot;brightness&quot;:0,&quot;colorType&quot;:2,&quot;rgb&quot;:&quot;#000000&quot;},&quot;depth&quot;:{&quot;colorType&quot;:0}}}}"/>
+  <p:tag name="KSO_WM_BEAUTIFY_FLAG" val="#wm#"/>
+  <p:tag name="KSO_WM_UNIT_LINE_FORE_SCHEMECOLOR_INDEX" val="8"/>
+  <p:tag name="KSO_WM_UNIT_LINE_FILL_TYPE" val="2"/>
+  <p:tag name="KSO_WM_UNIT_TEXT_FILL_FORE_SCHEMECOLOR_INDEX" val="2"/>
+  <p:tag name="KSO_WM_UNIT_TEXT_FILL_TYPE" val="1"/>
+  <p:tag name="KSO_WM_UNIT_USESOURCEFORMAT_APPLY" val="0"/>
+</p:tagLst>
+</file>
+
+<file path=ppt/tags/tag133.xml><?xml version="1.0" encoding="utf-8"?>
+<p:tagLst xmlns:p="http://schemas.openxmlformats.org/presentationml/2006/main">
+  <p:tag name="KSO_WM_UNIT_HIGHLIGHT" val="0"/>
+  <p:tag name="KSO_WM_UNIT_COMPATIBLE" val="0"/>
+  <p:tag name="KSO_WM_UNIT_DIAGRAM_ISNUMVISUAL" val="0"/>
+  <p:tag name="KSO_WM_UNIT_DIAGRAM_ISREFERUNIT" val="0"/>
+  <p:tag name="KSO_WM_UNIT_ID" val="diagram20231090_4*n_h_h_i*1_2_6_2"/>
+  <p:tag name="KSO_WM_TEMPLATE_CATEGORY" val="diagram"/>
+  <p:tag name="KSO_WM_TEMPLATE_INDEX" val="20231090"/>
+  <p:tag name="KSO_WM_UNIT_LAYERLEVEL" val="1_1_1_1"/>
+  <p:tag name="KSO_WM_TAG_VERSION" val="3.0"/>
+  <p:tag name="KSO_WM_DIAGRAM_GROUP_CODE" val="n1-1"/>
+  <p:tag name="KSO_WM_UNIT_TYPE" val="n_h_h_i"/>
+  <p:tag name="KSO_WM_UNIT_INDEX" val="1_2_6_2"/>
+  <p:tag name="KSO_WM_DIAGRAM_VERSION" val="3"/>
+  <p:tag name="KSO_WM_DIAGRAM_COLOR_TRICK" val="4"/>
+  <p:tag name="KSO_WM_DIAGRAM_COLOR_TEXT_CAN_REMOVE" val="n"/>
+  <p:tag name="KSO_WM_DIAGRAM_MAX_ITEMCNT" val="6"/>
+  <p:tag name="KSO_WM_DIAGRAM_MIN_ITEMCNT" val="3"/>
+  <p:tag name="KSO_WM_DIAGRAM_VIRTUALLY_FRAME" val="{&quot;height&quot;:382.3500061035156,&quot;left&quot;:21.1,&quot;top&quot;:116.39999694824219,&quot;width&quot;:884.3}"/>
+  <p:tag name="KSO_WM_DIAGRAM_COLOR_MATCH_VALUE" val="{&quot;shape&quot;:{&quot;fill&quot;:{&quot;type&quot;:0},&quot;glow&quot;:{&quot;colorType&quot;:0},&quot;line&quot;:{&quot;solidLine&quot;:{&quot;brightness&quot;:0.4000000059604645,&quot;colorType&quot;:1,&quot;foreColorIndex&quot;:10,&quot;transparency&quot;:0},&quot;type&quot;:1},&quot;shadow&quot;:{&quot;colorType&quot;:0},&quot;threeD&quot;:{&quot;curvedSurface&quot;:{&quot;brightness&quot;:0,&quot;colorType&quot;:2,&quot;rgb&quot;:&quot;#000000&quot;},&quot;depth&quot;:{&quot;colorType&quot;:0}}},&quot;text&quot;:{&quot;fill&quot;:{&quot;solid&quot;:{&quot;brightness&quot;:0,&quot;colorType&quot;:1,&quot;foreColorIndex&quot;:2,&quot;transparency&quot;:0},&quot;type&quot;:1},&quot;glow&quot;:{&quot;colorType&quot;:0},&quot;line&quot;:{&quot;type&quot;:0},&quot;shadow&quot;:{&quot;colorType&quot;:0},&quot;threeD&quot;:{&quot;curvedSurface&quot;:{&quot;brightness&quot;:0,&quot;colorType&quot;:2,&quot;rgb&quot;:&quot;#000000&quot;},&quot;depth&quot;:{&quot;colorType&quot;:0}}}}"/>
+  <p:tag name="KSO_WM_BEAUTIFY_FLAG" val="#wm#"/>
+  <p:tag name="KSO_WM_UNIT_LINE_FORE_SCHEMECOLOR_INDEX" val="10"/>
+  <p:tag name="KSO_WM_UNIT_LINE_FILL_TYPE" val="2"/>
+  <p:tag name="KSO_WM_UNIT_TEXT_FILL_FORE_SCHEMECOLOR_INDEX" val="2"/>
+  <p:tag name="KSO_WM_UNIT_TEXT_FILL_TYPE" val="1"/>
+  <p:tag name="KSO_WM_UNIT_USESOURCEFORMAT_APPLY" val="0"/>
+</p:tagLst>
+</file>
+
+<file path=ppt/tags/tag134.xml><?xml version="1.0" encoding="utf-8"?>
+<p:tagLst xmlns:p="http://schemas.openxmlformats.org/presentationml/2006/main">
+  <p:tag name="KSO_WM_UNIT_HIGHLIGHT" val="0"/>
+  <p:tag name="KSO_WM_UNIT_COMPATIBLE" val="0"/>
+  <p:tag name="KSO_WM_UNIT_DIAGRAM_ISNUMVISUAL" val="0"/>
+  <p:tag name="KSO_WM_UNIT_DIAGRAM_ISREFERUNIT" val="0"/>
+  <p:tag name="KSO_WM_UNIT_ID" val="diagram20231090_4*n_h_h_i*1_2_3_2"/>
+  <p:tag name="KSO_WM_TEMPLATE_CATEGORY" val="diagram"/>
+  <p:tag name="KSO_WM_TEMPLATE_INDEX" val="20231090"/>
+  <p:tag name="KSO_WM_UNIT_LAYERLEVEL" val="1_1_1_1"/>
+  <p:tag name="KSO_WM_TAG_VERSION" val="3.0"/>
+  <p:tag name="KSO_WM_DIAGRAM_GROUP_CODE" val="n1-1"/>
+  <p:tag name="KSO_WM_UNIT_TYPE" val="n_h_h_i"/>
+  <p:tag name="KSO_WM_UNIT_INDEX" val="1_2_3_2"/>
+  <p:tag name="KSO_WM_DIAGRAM_VERSION" val="3"/>
+  <p:tag name="KSO_WM_DIAGRAM_COLOR_TRICK" val="4"/>
+  <p:tag name="KSO_WM_DIAGRAM_COLOR_TEXT_CAN_REMOVE" val="n"/>
+  <p:tag name="KSO_WM_DIAGRAM_MAX_ITEMCNT" val="6"/>
+  <p:tag name="KSO_WM_DIAGRAM_MIN_ITEMCNT" val="3"/>
+  <p:tag name="KSO_WM_DIAGRAM_VIRTUALLY_FRAME" val="{&quot;height&quot;:382.3500061035156,&quot;left&quot;:21.1,&quot;top&quot;:116.39999694824219,&quot;width&quot;:884.3}"/>
+  <p:tag name="KSO_WM_DIAGRAM_COLOR_MATCH_VALUE" val="{&quot;shape&quot;:{&quot;fill&quot;:{&quot;type&quot;:0},&quot;glow&quot;:{&quot;colorType&quot;:0},&quot;line&quot;:{&quot;solidLine&quot;:{&quot;brightness&quot;:0.4000000059604645,&quot;colorType&quot;:1,&quot;foreColorIndex&quot;:7,&quot;transparency&quot;:0},&quot;type&quot;:1},&quot;shadow&quot;:{&quot;colorType&quot;:0},&quot;threeD&quot;:{&quot;curvedSurface&quot;:{&quot;brightness&quot;:0,&quot;colorType&quot;:2,&quot;rgb&quot;:&quot;#000000&quot;},&quot;depth&quot;:{&quot;colorType&quot;:0}}},&quot;text&quot;:{&quot;fill&quot;:{&quot;solid&quot;:{&quot;brightness&quot;:0,&quot;colorType&quot;:1,&quot;foreColorIndex&quot;:2,&quot;transparency&quot;:0},&quot;type&quot;:1},&quot;glow&quot;:{&quot;colorType&quot;:0},&quot;line&quot;:{&quot;type&quot;:0},&quot;shadow&quot;:{&quot;colorType&quot;:0},&quot;threeD&quot;:{&quot;curvedSurface&quot;:{&quot;brightness&quot;:0,&quot;colorType&quot;:2,&quot;rgb&quot;:&quot;#000000&quot;},&quot;depth&quot;:{&quot;colorType&quot;:0}}}}"/>
+  <p:tag name="KSO_WM_BEAUTIFY_FLAG" val="#wm#"/>
+  <p:tag name="KSO_WM_UNIT_LINE_FORE_SCHEMECOLOR_INDEX" val="7"/>
+  <p:tag name="KSO_WM_UNIT_LINE_FILL_TYPE" val="2"/>
+  <p:tag name="KSO_WM_UNIT_TEXT_FILL_FORE_SCHEMECOLOR_INDEX" val="2"/>
+  <p:tag name="KSO_WM_UNIT_TEXT_FILL_TYPE" val="1"/>
+  <p:tag name="KSO_WM_UNIT_USESOURCEFORMAT_APPLY" val="0"/>
+</p:tagLst>
+</file>
+
+<file path=ppt/tags/tag135.xml><?xml version="1.0" encoding="utf-8"?>
+<p:tagLst xmlns:p="http://schemas.openxmlformats.org/presentationml/2006/main">
+  <p:tag name="KSO_WM_UNIT_HIGHLIGHT" val="0"/>
+  <p:tag name="KSO_WM_UNIT_COMPATIBLE" val="0"/>
+  <p:tag name="KSO_WM_UNIT_DIAGRAM_ISNUMVISUAL" val="0"/>
+  <p:tag name="KSO_WM_UNIT_DIAGRAM_ISREFERUNIT" val="0"/>
+  <p:tag name="KSO_WM_UNIT_ID" val="diagram20231090_4*n_h_h_i*1_2_5_2"/>
+  <p:tag name="KSO_WM_TEMPLATE_CATEGORY" val="diagram"/>
+  <p:tag name="KSO_WM_TEMPLATE_INDEX" val="20231090"/>
+  <p:tag name="KSO_WM_UNIT_LAYERLEVEL" val="1_1_1_1"/>
+  <p:tag name="KSO_WM_TAG_VERSION" val="3.0"/>
+  <p:tag name="KSO_WM_DIAGRAM_GROUP_CODE" val="n1-1"/>
+  <p:tag name="KSO_WM_UNIT_TYPE" val="n_h_h_i"/>
+  <p:tag name="KSO_WM_UNIT_INDEX" val="1_2_5_2"/>
+  <p:tag name="KSO_WM_DIAGRAM_VERSION" val="3"/>
+  <p:tag name="KSO_WM_DIAGRAM_COLOR_TRICK" val="4"/>
+  <p:tag name="KSO_WM_DIAGRAM_COLOR_TEXT_CAN_REMOVE" val="n"/>
+  <p:tag name="KSO_WM_DIAGRAM_MAX_ITEMCNT" val="6"/>
+  <p:tag name="KSO_WM_DIAGRAM_MIN_ITEMCNT" val="3"/>
+  <p:tag name="KSO_WM_DIAGRAM_VIRTUALLY_FRAME" val="{&quot;height&quot;:382.3500061035156,&quot;left&quot;:21.1,&quot;top&quot;:116.39999694824219,&quot;width&quot;:884.3}"/>
+  <p:tag name="KSO_WM_DIAGRAM_COLOR_MATCH_VALUE" val="{&quot;shape&quot;:{&quot;fill&quot;:{&quot;type&quot;:0},&quot;glow&quot;:{&quot;colorType&quot;:0},&quot;line&quot;:{&quot;solidLine&quot;:{&quot;brightness&quot;:0.4000000059604645,&quot;colorType&quot;:1,&quot;foreColorIndex&quot;:9,&quot;transparency&quot;:0},&quot;type&quot;:1},&quot;shadow&quot;:{&quot;colorType&quot;:0},&quot;threeD&quot;:{&quot;curvedSurface&quot;:{&quot;brightness&quot;:0,&quot;colorType&quot;:2,&quot;rgb&quot;:&quot;#000000&quot;},&quot;depth&quot;:{&quot;colorType&quot;:0}}},&quot;text&quot;:{&quot;fill&quot;:{&quot;solid&quot;:{&quot;brightness&quot;:0,&quot;colorType&quot;:1,&quot;foreColorIndex&quot;:2,&quot;transparency&quot;:0},&quot;type&quot;:1},&quot;glow&quot;:{&quot;colorType&quot;:0},&quot;line&quot;:{&quot;type&quot;:0},&quot;shadow&quot;:{&quot;colorType&quot;:0},&quot;threeD&quot;:{&quot;curvedSurface&quot;:{&quot;brightness&quot;:0,&quot;colorType&quot;:2,&quot;rgb&quot;:&quot;#000000&quot;},&quot;depth&quot;:{&quot;colorType&quot;:0}}}}"/>
+  <p:tag name="KSO_WM_BEAUTIFY_FLAG" val="#wm#"/>
+  <p:tag name="KSO_WM_UNIT_LINE_FORE_SCHEMECOLOR_INDEX" val="9"/>
+  <p:tag name="KSO_WM_UNIT_LINE_FILL_TYPE" val="2"/>
+  <p:tag name="KSO_WM_UNIT_TEXT_FILL_FORE_SCHEMECOLOR_INDEX" val="2"/>
+  <p:tag name="KSO_WM_UNIT_TEXT_FILL_TYPE" val="1"/>
+  <p:tag name="KSO_WM_UNIT_USESOURCEFORMAT_APPLY" val="0"/>
+</p:tagLst>
+</file>
+
+<file path=ppt/tags/tag136.xml><?xml version="1.0" encoding="utf-8"?>
+<p:tagLst xmlns:p="http://schemas.openxmlformats.org/presentationml/2006/main">
+  <p:tag name="KSO_WM_UNIT_HIGHLIGHT" val="0"/>
+  <p:tag name="KSO_WM_UNIT_COMPATIBLE" val="0"/>
+  <p:tag name="KSO_WM_UNIT_DIAGRAM_ISNUMVISUAL" val="0"/>
+  <p:tag name="KSO_WM_UNIT_DIAGRAM_ISREFERUNIT" val="0"/>
+  <p:tag name="KSO_WM_UNIT_ID" val="diagram20231090_4*n_h_h_i*1_2_1_2"/>
+  <p:tag name="KSO_WM_TEMPLATE_CATEGORY" val="diagram"/>
+  <p:tag name="KSO_WM_TEMPLATE_INDEX" val="20231090"/>
+  <p:tag name="KSO_WM_UNIT_LAYERLEVEL" val="1_1_1_1"/>
+  <p:tag name="KSO_WM_TAG_VERSION" val="3.0"/>
+  <p:tag name="KSO_WM_DIAGRAM_GROUP_CODE" val="n1-1"/>
+  <p:tag name="KSO_WM_UNIT_TYPE" val="n_h_h_i"/>
+  <p:tag name="KSO_WM_UNIT_INDEX" val="1_2_1_2"/>
+  <p:tag name="KSO_WM_DIAGRAM_VERSION" val="3"/>
+  <p:tag name="KSO_WM_DIAGRAM_COLOR_TRICK" val="4"/>
+  <p:tag name="KSO_WM_DIAGRAM_COLOR_TEXT_CAN_REMOVE" val="n"/>
+  <p:tag name="KSO_WM_DIAGRAM_MAX_ITEMCNT" val="6"/>
+  <p:tag name="KSO_WM_DIAGRAM_MIN_ITEMCNT" val="3"/>
+  <p:tag name="KSO_WM_DIAGRAM_VIRTUALLY_FRAME" val="{&quot;height&quot;:382.3500061035156,&quot;left&quot;:21.1,&quot;top&quot;:116.39999694824219,&quot;width&quot;:884.3}"/>
+  <p:tag name="KSO_WM_DIAGRAM_COLOR_MATCH_VALUE" val="{&quot;shape&quot;:{&quot;fill&quot;:{&quot;type&quot;:0},&quot;glow&quot;:{&quot;colorType&quot;:0},&quot;line&quot;:{&quot;solidLine&quot;:{&quot;brightness&quot;:0.4000000059604645,&quot;colorType&quot;:1,&quot;foreColorIndex&quot;:5,&quot;transparency&quot;:0},&quot;type&quot;:1},&quot;shadow&quot;:{&quot;colorType&quot;:0},&quot;threeD&quot;:{&quot;curvedSurface&quot;:{&quot;brightness&quot;:0,&quot;colorType&quot;:2,&quot;rgb&quot;:&quot;#000000&quot;},&quot;depth&quot;:{&quot;colorType&quot;:0}}},&quot;text&quot;:{&quot;fill&quot;:{&quot;solid&quot;:{&quot;brightness&quot;:0,&quot;colorType&quot;:1,&quot;foreColorIndex&quot;:2,&quot;transparency&quot;:0},&quot;type&quot;:1},&quot;glow&quot;:{&quot;colorType&quot;:0},&quot;line&quot;:{&quot;type&quot;:0},&quot;shadow&quot;:{&quot;colorType&quot;:0},&quot;threeD&quot;:{&quot;curvedSurface&quot;:{&quot;brightness&quot;:0,&quot;colorType&quot;:2,&quot;rgb&quot;:&quot;#000000&quot;},&quot;depth&quot;:{&quot;colorType&quot;:0}}}}"/>
+  <p:tag name="KSO_WM_BEAUTIFY_FLAG" val="#wm#"/>
+  <p:tag name="KSO_WM_UNIT_LINE_FORE_SCHEMECOLOR_INDEX" val="5"/>
+  <p:tag name="KSO_WM_UNIT_LINE_FILL_TYPE" val="2"/>
+  <p:tag name="KSO_WM_UNIT_TEXT_FILL_FORE_SCHEMECOLOR_INDEX" val="2"/>
+  <p:tag name="KSO_WM_UNIT_TEXT_FILL_TYPE" val="1"/>
+  <p:tag name="KSO_WM_UNIT_USESOURCEFORMAT_APPLY" val="0"/>
+</p:tagLst>
+</file>
+
+<file path=ppt/tags/tag137.xml><?xml version="1.0" encoding="utf-8"?>
+<p:tagLst xmlns:p="http://schemas.openxmlformats.org/presentationml/2006/main">
+  <p:tag name="KSO_WM_UNIT_HIGHLIGHT" val="0"/>
+  <p:tag name="KSO_WM_UNIT_COMPATIBLE" val="0"/>
+  <p:tag name="KSO_WM_UNIT_DIAGRAM_ISNUMVISUAL" val="0"/>
+  <p:tag name="KSO_WM_UNIT_DIAGRAM_ISREFERUNIT" val="0"/>
+  <p:tag name="KSO_WM_UNIT_ID" val="diagram20231090_4*n_h_h_i*1_2_2_2"/>
+  <p:tag name="KSO_WM_TEMPLATE_CATEGORY" val="diagram"/>
+  <p:tag name="KSO_WM_TEMPLATE_INDEX" val="20231090"/>
+  <p:tag name="KSO_WM_UNIT_LAYERLEVEL" val="1_1_1_1"/>
+  <p:tag name="KSO_WM_TAG_VERSION" val="3.0"/>
+  <p:tag name="KSO_WM_DIAGRAM_GROUP_CODE" val="n1-1"/>
+  <p:tag name="KSO_WM_UNIT_TYPE" val="n_h_h_i"/>
+  <p:tag name="KSO_WM_UNIT_INDEX" val="1_2_2_2"/>
+  <p:tag name="KSO_WM_DIAGRAM_VERSION" val="3"/>
+  <p:tag name="KSO_WM_DIAGRAM_COLOR_TRICK" val="4"/>
+  <p:tag name="KSO_WM_DIAGRAM_COLOR_TEXT_CAN_REMOVE" val="n"/>
+  <p:tag name="KSO_WM_DIAGRAM_MAX_ITEMCNT" val="6"/>
+  <p:tag name="KSO_WM_DIAGRAM_MIN_ITEMCNT" val="3"/>
+  <p:tag name="KSO_WM_DIAGRAM_VIRTUALLY_FRAME" val="{&quot;height&quot;:382.3500061035156,&quot;left&quot;:21.1,&quot;top&quot;:116.39999694824219,&quot;width&quot;:884.3}"/>
+  <p:tag name="KSO_WM_DIAGRAM_COLOR_MATCH_VALUE" val="{&quot;shape&quot;:{&quot;fill&quot;:{&quot;type&quot;:0},&quot;glow&quot;:{&quot;colorType&quot;:0},&quot;line&quot;:{&quot;solidLine&quot;:{&quot;brightness&quot;:0.4000000059604645,&quot;colorType&quot;:1,&quot;foreColorIndex&quot;:6,&quot;transparency&quot;:0},&quot;type&quot;:1},&quot;shadow&quot;:{&quot;colorType&quot;:0},&quot;threeD&quot;:{&quot;curvedSurface&quot;:{&quot;brightness&quot;:0,&quot;colorType&quot;:2,&quot;rgb&quot;:&quot;#000000&quot;},&quot;depth&quot;:{&quot;colorType&quot;:0}}},&quot;text&quot;:{&quot;fill&quot;:{&quot;solid&quot;:{&quot;brightness&quot;:0,&quot;colorType&quot;:1,&quot;foreColorIndex&quot;:2,&quot;transparency&quot;:0},&quot;type&quot;:1},&quot;glow&quot;:{&quot;colorType&quot;:0},&quot;line&quot;:{&quot;type&quot;:0},&quot;shadow&quot;:{&quot;colorType&quot;:0},&quot;threeD&quot;:{&quot;curvedSurface&quot;:{&quot;brightness&quot;:0,&quot;colorType&quot;:2,&quot;rgb&quot;:&quot;#000000&quot;},&quot;depth&quot;:{&quot;colorType&quot;:0}}}}"/>
+  <p:tag name="KSO_WM_BEAUTIFY_FLAG" val="#wm#"/>
+  <p:tag name="KSO_WM_UNIT_LINE_FORE_SCHEMECOLOR_INDEX" val="6"/>
+  <p:tag name="KSO_WM_UNIT_LINE_FILL_TYPE" val="2"/>
+  <p:tag name="KSO_WM_UNIT_TEXT_FILL_FORE_SCHEMECOLOR_INDEX" val="2"/>
+  <p:tag name="KSO_WM_UNIT_TEXT_FILL_TYPE" val="1"/>
+  <p:tag name="KSO_WM_UNIT_USESOURCEFORMAT_APPLY" val="0"/>
+</p:tagLst>
+</file>
+
+<file path=ppt/tags/tag138.xml><?xml version="1.0" encoding="utf-8"?>
+<p:tagLst xmlns:p="http://schemas.openxmlformats.org/presentationml/2006/main">
+  <p:tag name="KSO_WM_UNIT_SUBTYPE" val="a"/>
+  <p:tag name="KSO_WM_UNIT_NOCLEAR" val="0"/>
+  <p:tag name="KSO_WM_UNIT_VALUE" val="60"/>
+  <p:tag name="KSO_WM_UNIT_HIGHLIGHT" val="0"/>
+  <p:tag name="KSO_WM_UNIT_COMPATIBLE" val="0"/>
+  <p:tag name="KSO_WM_UNIT_DIAGRAM_ISNUMVISUAL" val="0"/>
+  <p:tag name="KSO_WM_UNIT_DIAGRAM_ISREFERUNIT" val="0"/>
+  <p:tag name="KSO_WM_UNIT_TYPE" val="n_h_h_f"/>
+  <p:tag name="KSO_WM_UNIT_INDEX" val="1_2_6_1"/>
+  <p:tag name="KSO_WM_UNIT_ID" val="diagram20231090_4*n_h_h_f*1_2_6_1"/>
+  <p:tag name="KSO_WM_TEMPLATE_CATEGORY" val="diagram"/>
+  <p:tag name="KSO_WM_TEMPLATE_INDEX" val="20231090"/>
+  <p:tag name="KSO_WM_UNIT_LAYERLEVEL" val="1_1_1_1"/>
+  <p:tag name="KSO_WM_TAG_VERSION" val="3.0"/>
+  <p:tag name="KSO_WM_DIAGRAM_GROUP_CODE" val="n1-1"/>
+  <p:tag name="KSO_WM_DIAGRAM_VERSION" val="3"/>
+  <p:tag name="KSO_WM_DIAGRAM_COLOR_TRICK" val="4"/>
+  <p:tag name="KSO_WM_DIAGRAM_COLOR_TEXT_CAN_REMOVE" val="n"/>
+  <p:tag name="KSO_WM_DIAGRAM_MAX_ITEMCNT" val="6"/>
+  <p:tag name="KSO_WM_DIAGRAM_MIN_ITEMCNT" val="3"/>
+  <p:tag name="KSO_WM_DIAGRAM_VIRTUALLY_FRAME" val="{&quot;height&quot;:382.3500061035156,&quot;left&quot;:21.1,&quot;top&quot;:116.39999694824219,&quot;width&quot;:884.3}"/>
+  <p:tag name="KSO_WM_DIAGRAM_COLOR_MATCH_VALUE" val="{&quot;shape&quot;:{&quot;fill&quot;:{&quot;type&quot;:0},&quot;glow&quot;:{&quot;colorType&quot;:0},&quot;line&quot;:{&quot;type&quot;:0},&quot;shadow&quot;:{&quot;colorType&quot;:0},&quot;threeD&quot;:{&quot;curvedSurface&quot;:{&quot;brightness&quot;:0,&quot;colorType&quot;:2,&quot;rgb&quot;:&quot;#000000&quot;},&quot;depth&quot;:{&quot;colorType&quot;:0}}},&quot;text&quot;:{&quot;fill&quot;:{&quot;solid&quot;:{&quot;brightness&quot;:0.15000000596046448,&quot;colorType&quot;:1,&quot;foreColorIndex&quot;:13,&quot;transparency&quot;:0},&quot;type&quot;:1},&quot;glow&quot;:{&quot;colorType&quot;:0},&quot;line&quot;:{&quot;type&quot;:0},&quot;shadow&quot;:{&quot;colorType&quot;:0},&quot;threeD&quot;:{&quot;curvedSurface&quot;:{&quot;brightness&quot;:0,&quot;colorType&quot;:2,&quot;rgb&quot;:&quot;#000000&quot;},&quot;depth&quot;:{&quot;colorType&quot;:0}}}}"/>
+  <p:tag name="KSO_WM_UNIT_TEXT_TYPE" val="1"/>
+  <p:tag name="KSO_WM_UNIT_TEXT_LAYER_COUNT" val="1"/>
+  <p:tag name="KSO_WM_BEAUTIFY_FLAG" val="#wm#"/>
+  <p:tag name="KSO_WM_UNIT_PRESET_TEXT" val="单击此处添加文本内容，简明扼要地阐述您的观点。可酌情增减文字，以便观者准确地理解"/>
+  <p:tag name="KSO_WM_UNIT_TEXT_FILL_FORE_SCHEMECOLOR_INDEX" val="1"/>
+  <p:tag name="KSO_WM_UNIT_TEXT_FILL_TYPE" val="1"/>
+  <p:tag name="KSO_WM_UNIT_USESOURCEFORMAT_APPLY" val="0"/>
+</p:tagLst>
+</file>
+
+<file path=ppt/tags/tag139.xml><?xml version="1.0" encoding="utf-8"?>
+<p:tagLst xmlns:p="http://schemas.openxmlformats.org/presentationml/2006/main">
+  <p:tag name="KSO_WM_UNIT_ISCONTENTSTITLE" val="0"/>
+  <p:tag name="KSO_WM_UNIT_ISNUMDGMTITLE" val="0"/>
+  <p:tag name="KSO_WM_UNIT_NOCLEAR" val="0"/>
+  <p:tag name="KSO_WM_UNIT_VALUE" val="10"/>
+  <p:tag name="KSO_WM_UNIT_HIGHLIGHT" val="0"/>
+  <p:tag name="KSO_WM_UNIT_COMPATIBLE" val="0"/>
+  <p:tag name="KSO_WM_UNIT_DIAGRAM_ISNUMVISUAL" val="0"/>
+  <p:tag name="KSO_WM_UNIT_DIAGRAM_ISREFERUNIT" val="0"/>
+  <p:tag name="KSO_WM_UNIT_TYPE" val="n_h_h_a"/>
+  <p:tag name="KSO_WM_UNIT_INDEX" val="1_2_6_1"/>
+  <p:tag name="KSO_WM_UNIT_ID" val="diagram20231090_4*n_h_h_a*1_2_6_1"/>
+  <p:tag name="KSO_WM_TEMPLATE_CATEGORY" val="diagram"/>
+  <p:tag name="KSO_WM_TEMPLATE_INDEX" val="20231090"/>
+  <p:tag name="KSO_WM_UNIT_LAYERLEVEL" val="1_1_1_1"/>
+  <p:tag name="KSO_WM_TAG_VERSION" val="3.0"/>
+  <p:tag name="KSO_WM_DIAGRAM_GROUP_CODE" val="n1-1"/>
+  <p:tag name="KSO_WM_DIAGRAM_VERSION" val="3"/>
+  <p:tag name="KSO_WM_DIAGRAM_COLOR_TRICK" val="4"/>
+  <p:tag name="KSO_WM_DIAGRAM_COLOR_TEXT_CAN_REMOVE" val="n"/>
+  <p:tag name="KSO_WM_DIAGRAM_MAX_ITEMCNT" val="6"/>
+  <p:tag name="KSO_WM_DIAGRAM_MIN_ITEMCNT" val="3"/>
+  <p:tag name="KSO_WM_DIAGRAM_VIRTUALLY_FRAME" val="{&quot;height&quot;:382.3500061035156,&quot;left&quot;:21.1,&quot;top&quot;:116.39999694824219,&quot;width&quot;:884.3}"/>
+  <p:tag name="KSO_WM_DIAGRAM_COLOR_MATCH_VALUE" val="{&quot;shape&quot;:{&quot;fill&quot;:{&quot;type&quot;:0},&quot;glow&quot;:{&quot;colorType&quot;:0},&quot;line&quot;:{&quot;type&quot;:0},&quot;shadow&quot;:{&quot;colorType&quot;:0},&quot;threeD&quot;:{&quot;curvedSurface&quot;:{&quot;brightness&quot;:0,&quot;colorType&quot;:2,&quot;rgb&quot;:&quot;#000000&quot;},&quot;depth&quot;:{&quot;colorType&quot;:0}}},&quot;text&quot;:{&quot;fill&quot;:{&quot;solid&quot;:{&quot;brightness&quot;:0,&quot;colorType&quot;:1,&quot;foreColorIndex&quot;:8,&quot;transparency&quot;:0},&quot;type&quot;:1},&quot;glow&quot;:{&quot;colorType&quot;:0},&quot;line&quot;:{&quot;type&quot;:0},&quot;shadow&quot;:{&quot;colorType&quot;:0},&quot;threeD&quot;:{&quot;curvedSurface&quot;:{&quot;brightness&quot;:0,&quot;colorType&quot;:2,&quot;rgb&quot;:&quot;#000000&quot;},&quot;depth&quot;:{&quot;colorType&quot;:0}}}}"/>
+  <p:tag name="KSO_WM_UNIT_TEXT_TYPE" val="1"/>
+  <p:tag name="KSO_WM_BEAUTIFY_FLAG" val="#wm#"/>
+  <p:tag name="KSO_WM_UNIT_PRESET_TEXT" val="此处添加项标题"/>
+  <p:tag name="KSO_WM_UNIT_TEXT_FILL_FORE_SCHEMECOLOR_INDEX" val="1"/>
+  <p:tag name="KSO_WM_UNIT_TEXT_FILL_TYPE" val="1"/>
+  <p:tag name="KSO_WM_UNIT_USESOURCEFORMAT_APPLY" val="0"/>
+</p:tagLst>
+</file>
+
 <file path=ppt/tags/tag14.xml><?xml version="1.0" encoding="utf-8"?>
 <p:tagLst xmlns:p="http://schemas.openxmlformats.org/presentationml/2006/main">
   <p:tag name="KSO_WM_DIAGRAM_VIRTUALLY_FRAME" val="{&quot;height&quot;:340,&quot;left&quot;:60,&quot;top&quot;:140,&quot;width&quot;:840}"/>
+</p:tagLst>
+</file>
+
+<file path=ppt/tags/tag140.xml><?xml version="1.0" encoding="utf-8"?>
+<p:tagLst xmlns:p="http://schemas.openxmlformats.org/presentationml/2006/main">
+  <p:tag name="KSO_WM_UNIT_SUBTYPE" val="a"/>
+  <p:tag name="KSO_WM_UNIT_NOCLEAR" val="0"/>
+  <p:tag name="KSO_WM_UNIT_VALUE" val="60"/>
+  <p:tag name="KSO_WM_UNIT_HIGHLIGHT" val="0"/>
+  <p:tag name="KSO_WM_UNIT_COMPATIBLE" val="0"/>
+  <p:tag name="KSO_WM_UNIT_DIAGRAM_ISNUMVISUAL" val="0"/>
+  <p:tag name="KSO_WM_UNIT_DIAGRAM_ISREFERUNIT" val="0"/>
+  <p:tag name="KSO_WM_UNIT_TYPE" val="n_h_h_f"/>
+  <p:tag name="KSO_WM_UNIT_INDEX" val="1_2_2_1"/>
+  <p:tag name="KSO_WM_UNIT_ID" val="diagram20231090_4*n_h_h_f*1_2_2_1"/>
+  <p:tag name="KSO_WM_TEMPLATE_CATEGORY" val="diagram"/>
+  <p:tag name="KSO_WM_TEMPLATE_INDEX" val="20231090"/>
+  <p:tag name="KSO_WM_UNIT_LAYERLEVEL" val="1_1_1_1"/>
+  <p:tag name="KSO_WM_TAG_VERSION" val="3.0"/>
+  <p:tag name="KSO_WM_DIAGRAM_GROUP_CODE" val="n1-1"/>
+  <p:tag name="KSO_WM_DIAGRAM_VERSION" val="3"/>
+  <p:tag name="KSO_WM_DIAGRAM_COLOR_TRICK" val="4"/>
+  <p:tag name="KSO_WM_DIAGRAM_COLOR_TEXT_CAN_REMOVE" val="n"/>
+  <p:tag name="KSO_WM_DIAGRAM_MAX_ITEMCNT" val="6"/>
+  <p:tag name="KSO_WM_DIAGRAM_MIN_ITEMCNT" val="3"/>
+  <p:tag name="KSO_WM_DIAGRAM_VIRTUALLY_FRAME" val="{&quot;height&quot;:382.3500061035156,&quot;left&quot;:21.1,&quot;top&quot;:116.39999694824219,&quot;width&quot;:884.3}"/>
+  <p:tag name="KSO_WM_DIAGRAM_COLOR_MATCH_VALUE" val="{&quot;shape&quot;:{&quot;fill&quot;:{&quot;type&quot;:0},&quot;glow&quot;:{&quot;colorType&quot;:0},&quot;line&quot;:{&quot;type&quot;:0},&quot;shadow&quot;:{&quot;colorType&quot;:0},&quot;threeD&quot;:{&quot;curvedSurface&quot;:{&quot;brightness&quot;:0,&quot;colorType&quot;:2,&quot;rgb&quot;:&quot;#000000&quot;},&quot;depth&quot;:{&quot;colorType&quot;:0}}},&quot;text&quot;:{&quot;fill&quot;:{&quot;solid&quot;:{&quot;brightness&quot;:0.15000000596046448,&quot;colorType&quot;:1,&quot;foreColorIndex&quot;:13,&quot;transparency&quot;:0},&quot;type&quot;:1},&quot;glow&quot;:{&quot;colorType&quot;:0},&quot;line&quot;:{&quot;type&quot;:0},&quot;shadow&quot;:{&quot;colorType&quot;:0},&quot;threeD&quot;:{&quot;curvedSurface&quot;:{&quot;brightness&quot;:0,&quot;colorType&quot;:2,&quot;rgb&quot;:&quot;#000000&quot;},&quot;depth&quot;:{&quot;colorType&quot;:0}}}}"/>
+  <p:tag name="KSO_WM_UNIT_TEXT_TYPE" val="1"/>
+  <p:tag name="KSO_WM_UNIT_TEXT_LAYER_COUNT" val="1"/>
+  <p:tag name="KSO_WM_BEAUTIFY_FLAG" val="#wm#"/>
+  <p:tag name="KSO_WM_UNIT_PRESET_TEXT" val="单击此处添加文本内容，简明扼要地阐述您的观点。根据需要可酌情增减文字，以便观者准确地理解"/>
+  <p:tag name="KSO_WM_UNIT_TEXT_FILL_FORE_SCHEMECOLOR_INDEX" val="1"/>
+  <p:tag name="KSO_WM_UNIT_TEXT_FILL_TYPE" val="1"/>
+  <p:tag name="KSO_WM_UNIT_USESOURCEFORMAT_APPLY" val="0"/>
+</p:tagLst>
+</file>
+
+<file path=ppt/tags/tag141.xml><?xml version="1.0" encoding="utf-8"?>
+<p:tagLst xmlns:p="http://schemas.openxmlformats.org/presentationml/2006/main">
+  <p:tag name="KSO_WM_UNIT_ISCONTENTSTITLE" val="0"/>
+  <p:tag name="KSO_WM_UNIT_ISNUMDGMTITLE" val="0"/>
+  <p:tag name="KSO_WM_UNIT_NOCLEAR" val="0"/>
+  <p:tag name="KSO_WM_UNIT_VALUE" val="10"/>
+  <p:tag name="KSO_WM_UNIT_HIGHLIGHT" val="0"/>
+  <p:tag name="KSO_WM_UNIT_COMPATIBLE" val="0"/>
+  <p:tag name="KSO_WM_UNIT_DIAGRAM_ISNUMVISUAL" val="0"/>
+  <p:tag name="KSO_WM_UNIT_DIAGRAM_ISREFERUNIT" val="0"/>
+  <p:tag name="KSO_WM_UNIT_TYPE" val="n_h_h_a"/>
+  <p:tag name="KSO_WM_UNIT_INDEX" val="1_2_2_1"/>
+  <p:tag name="KSO_WM_UNIT_ID" val="diagram20231090_4*n_h_h_a*1_2_2_1"/>
+  <p:tag name="KSO_WM_TEMPLATE_CATEGORY" val="diagram"/>
+  <p:tag name="KSO_WM_TEMPLATE_INDEX" val="20231090"/>
+  <p:tag name="KSO_WM_UNIT_LAYERLEVEL" val="1_1_1_1"/>
+  <p:tag name="KSO_WM_TAG_VERSION" val="3.0"/>
+  <p:tag name="KSO_WM_DIAGRAM_GROUP_CODE" val="n1-1"/>
+  <p:tag name="KSO_WM_DIAGRAM_VERSION" val="3"/>
+  <p:tag name="KSO_WM_DIAGRAM_COLOR_TRICK" val="4"/>
+  <p:tag name="KSO_WM_DIAGRAM_COLOR_TEXT_CAN_REMOVE" val="n"/>
+  <p:tag name="KSO_WM_DIAGRAM_MAX_ITEMCNT" val="6"/>
+  <p:tag name="KSO_WM_DIAGRAM_MIN_ITEMCNT" val="3"/>
+  <p:tag name="KSO_WM_DIAGRAM_VIRTUALLY_FRAME" val="{&quot;height&quot;:382.3500061035156,&quot;left&quot;:21.1,&quot;top&quot;:116.39999694824219,&quot;width&quot;:884.3}"/>
+  <p:tag name="KSO_WM_DIAGRAM_COLOR_MATCH_VALUE" val="{&quot;shape&quot;:{&quot;fill&quot;:{&quot;type&quot;:0},&quot;glow&quot;:{&quot;colorType&quot;:0},&quot;line&quot;:{&quot;type&quot;:0},&quot;shadow&quot;:{&quot;colorType&quot;:0},&quot;threeD&quot;:{&quot;curvedSurface&quot;:{&quot;brightness&quot;:0,&quot;colorType&quot;:2,&quot;rgb&quot;:&quot;#000000&quot;},&quot;depth&quot;:{&quot;colorType&quot;:0}}},&quot;text&quot;:{&quot;fill&quot;:{&quot;solid&quot;:{&quot;brightness&quot;:0,&quot;colorType&quot;:1,&quot;foreColorIndex&quot;:6,&quot;transparency&quot;:0},&quot;type&quot;:1},&quot;glow&quot;:{&quot;colorType&quot;:0},&quot;line&quot;:{&quot;type&quot;:0},&quot;shadow&quot;:{&quot;colorType&quot;:0},&quot;threeD&quot;:{&quot;curvedSurface&quot;:{&quot;brightness&quot;:0,&quot;colorType&quot;:2,&quot;rgb&quot;:&quot;#000000&quot;},&quot;depth&quot;:{&quot;colorType&quot;:0}}}}"/>
+  <p:tag name="KSO_WM_UNIT_TEXT_TYPE" val="1"/>
+  <p:tag name="KSO_WM_BEAUTIFY_FLAG" val="#wm#"/>
+  <p:tag name="KSO_WM_UNIT_PRESET_TEXT" val="此处添加项标题"/>
+  <p:tag name="KSO_WM_UNIT_TEXT_FILL_FORE_SCHEMECOLOR_INDEX" val="1"/>
+  <p:tag name="KSO_WM_UNIT_TEXT_FILL_TYPE" val="1"/>
+  <p:tag name="KSO_WM_UNIT_USESOURCEFORMAT_APPLY" val="0"/>
+</p:tagLst>
+</file>
+
+<file path=ppt/tags/tag142.xml><?xml version="1.0" encoding="utf-8"?>
+<p:tagLst xmlns:p="http://schemas.openxmlformats.org/presentationml/2006/main">
+  <p:tag name="KSO_WM_UNIT_SUBTYPE" val="a"/>
+  <p:tag name="KSO_WM_UNIT_NOCLEAR" val="0"/>
+  <p:tag name="KSO_WM_UNIT_VALUE" val="60"/>
+  <p:tag name="KSO_WM_UNIT_HIGHLIGHT" val="0"/>
+  <p:tag name="KSO_WM_UNIT_COMPATIBLE" val="0"/>
+  <p:tag name="KSO_WM_UNIT_DIAGRAM_ISNUMVISUAL" val="0"/>
+  <p:tag name="KSO_WM_UNIT_DIAGRAM_ISREFERUNIT" val="0"/>
+  <p:tag name="KSO_WM_UNIT_TYPE" val="n_h_h_f"/>
+  <p:tag name="KSO_WM_UNIT_INDEX" val="1_2_4_1"/>
+  <p:tag name="KSO_WM_UNIT_ID" val="diagram20231090_4*n_h_h_f*1_2_4_1"/>
+  <p:tag name="KSO_WM_TEMPLATE_CATEGORY" val="diagram"/>
+  <p:tag name="KSO_WM_TEMPLATE_INDEX" val="20231090"/>
+  <p:tag name="KSO_WM_UNIT_LAYERLEVEL" val="1_1_1_1"/>
+  <p:tag name="KSO_WM_TAG_VERSION" val="3.0"/>
+  <p:tag name="KSO_WM_DIAGRAM_GROUP_CODE" val="n1-1"/>
+  <p:tag name="KSO_WM_DIAGRAM_VERSION" val="3"/>
+  <p:tag name="KSO_WM_DIAGRAM_COLOR_TRICK" val="4"/>
+  <p:tag name="KSO_WM_DIAGRAM_COLOR_TEXT_CAN_REMOVE" val="n"/>
+  <p:tag name="KSO_WM_DIAGRAM_MAX_ITEMCNT" val="6"/>
+  <p:tag name="KSO_WM_DIAGRAM_MIN_ITEMCNT" val="3"/>
+  <p:tag name="KSO_WM_DIAGRAM_VIRTUALLY_FRAME" val="{&quot;height&quot;:382.3500061035156,&quot;left&quot;:21.1,&quot;top&quot;:116.39999694824219,&quot;width&quot;:884.3}"/>
+  <p:tag name="KSO_WM_DIAGRAM_COLOR_MATCH_VALUE" val="{&quot;shape&quot;:{&quot;fill&quot;:{&quot;type&quot;:0},&quot;glow&quot;:{&quot;colorType&quot;:0},&quot;line&quot;:{&quot;type&quot;:0},&quot;shadow&quot;:{&quot;colorType&quot;:0},&quot;threeD&quot;:{&quot;curvedSurface&quot;:{&quot;brightness&quot;:0,&quot;colorType&quot;:2,&quot;rgb&quot;:&quot;#000000&quot;},&quot;depth&quot;:{&quot;colorType&quot;:0}}},&quot;text&quot;:{&quot;fill&quot;:{&quot;solid&quot;:{&quot;brightness&quot;:0.15000000596046448,&quot;colorType&quot;:1,&quot;foreColorIndex&quot;:13,&quot;transparency&quot;:0},&quot;type&quot;:1},&quot;glow&quot;:{&quot;colorType&quot;:0},&quot;line&quot;:{&quot;type&quot;:0},&quot;shadow&quot;:{&quot;colorType&quot;:0},&quot;threeD&quot;:{&quot;curvedSurface&quot;:{&quot;brightness&quot;:0,&quot;colorType&quot;:2,&quot;rgb&quot;:&quot;#000000&quot;},&quot;depth&quot;:{&quot;colorType&quot;:0}}}}"/>
+  <p:tag name="KSO_WM_UNIT_TEXT_TYPE" val="1"/>
+  <p:tag name="KSO_WM_UNIT_TEXT_LAYER_COUNT" val="1"/>
+  <p:tag name="KSO_WM_BEAUTIFY_FLAG" val="#wm#"/>
+  <p:tag name="KSO_WM_UNIT_PRESET_TEXT" val="单击此处添加文本，简明扼要地阐述您的观点。根据需要可酌情增减文字，以便观者准确地理解"/>
+  <p:tag name="KSO_WM_UNIT_TEXT_FILL_FORE_SCHEMECOLOR_INDEX" val="1"/>
+  <p:tag name="KSO_WM_UNIT_TEXT_FILL_TYPE" val="1"/>
+  <p:tag name="KSO_WM_UNIT_USESOURCEFORMAT_APPLY" val="0"/>
+</p:tagLst>
+</file>
+
+<file path=ppt/tags/tag143.xml><?xml version="1.0" encoding="utf-8"?>
+<p:tagLst xmlns:p="http://schemas.openxmlformats.org/presentationml/2006/main">
+  <p:tag name="KSO_WM_UNIT_ISCONTENTSTITLE" val="0"/>
+  <p:tag name="KSO_WM_UNIT_ISNUMDGMTITLE" val="0"/>
+  <p:tag name="KSO_WM_UNIT_NOCLEAR" val="0"/>
+  <p:tag name="KSO_WM_UNIT_VALUE" val="10"/>
+  <p:tag name="KSO_WM_UNIT_HIGHLIGHT" val="0"/>
+  <p:tag name="KSO_WM_UNIT_COMPATIBLE" val="0"/>
+  <p:tag name="KSO_WM_UNIT_DIAGRAM_ISNUMVISUAL" val="0"/>
+  <p:tag name="KSO_WM_UNIT_DIAGRAM_ISREFERUNIT" val="0"/>
+  <p:tag name="KSO_WM_UNIT_TYPE" val="n_h_h_a"/>
+  <p:tag name="KSO_WM_UNIT_INDEX" val="1_2_4_1"/>
+  <p:tag name="KSO_WM_UNIT_ID" val="diagram20231090_4*n_h_h_a*1_2_4_1"/>
+  <p:tag name="KSO_WM_TEMPLATE_CATEGORY" val="diagram"/>
+  <p:tag name="KSO_WM_TEMPLATE_INDEX" val="20231090"/>
+  <p:tag name="KSO_WM_UNIT_LAYERLEVEL" val="1_1_1_1"/>
+  <p:tag name="KSO_WM_TAG_VERSION" val="3.0"/>
+  <p:tag name="KSO_WM_DIAGRAM_GROUP_CODE" val="n1-1"/>
+  <p:tag name="KSO_WM_DIAGRAM_VERSION" val="3"/>
+  <p:tag name="KSO_WM_DIAGRAM_COLOR_TRICK" val="4"/>
+  <p:tag name="KSO_WM_DIAGRAM_COLOR_TEXT_CAN_REMOVE" val="n"/>
+  <p:tag name="KSO_WM_DIAGRAM_MAX_ITEMCNT" val="6"/>
+  <p:tag name="KSO_WM_DIAGRAM_MIN_ITEMCNT" val="3"/>
+  <p:tag name="KSO_WM_DIAGRAM_VIRTUALLY_FRAME" val="{&quot;height&quot;:382.3500061035156,&quot;left&quot;:21.1,&quot;top&quot;:116.39999694824219,&quot;width&quot;:884.3}"/>
+  <p:tag name="KSO_WM_DIAGRAM_COLOR_MATCH_VALUE" val="{&quot;shape&quot;:{&quot;fill&quot;:{&quot;type&quot;:0},&quot;glow&quot;:{&quot;colorType&quot;:0},&quot;line&quot;:{&quot;type&quot;:0},&quot;shadow&quot;:{&quot;colorType&quot;:0},&quot;threeD&quot;:{&quot;curvedSurface&quot;:{&quot;brightness&quot;:0,&quot;colorType&quot;:2,&quot;rgb&quot;:&quot;#000000&quot;},&quot;depth&quot;:{&quot;colorType&quot;:0}}},&quot;text&quot;:{&quot;fill&quot;:{&quot;solid&quot;:{&quot;brightness&quot;:0,&quot;colorType&quot;:1,&quot;foreColorIndex&quot;:7,&quot;transparency&quot;:0},&quot;type&quot;:1},&quot;glow&quot;:{&quot;colorType&quot;:0},&quot;line&quot;:{&quot;type&quot;:0},&quot;shadow&quot;:{&quot;colorType&quot;:0},&quot;threeD&quot;:{&quot;curvedSurface&quot;:{&quot;brightness&quot;:0,&quot;colorType&quot;:2,&quot;rgb&quot;:&quot;#000000&quot;},&quot;depth&quot;:{&quot;colorType&quot;:0}}}}"/>
+  <p:tag name="KSO_WM_UNIT_TEXT_TYPE" val="1"/>
+  <p:tag name="KSO_WM_BEAUTIFY_FLAG" val="#wm#"/>
+  <p:tag name="KSO_WM_UNIT_PRESET_TEXT" val="此处添加项标题"/>
+  <p:tag name="KSO_WM_UNIT_TEXT_FILL_FORE_SCHEMECOLOR_INDEX" val="1"/>
+  <p:tag name="KSO_WM_UNIT_TEXT_FILL_TYPE" val="1"/>
+  <p:tag name="KSO_WM_UNIT_USESOURCEFORMAT_APPLY" val="0"/>
+</p:tagLst>
+</file>
+
+<file path=ppt/tags/tag144.xml><?xml version="1.0" encoding="utf-8"?>
+<p:tagLst xmlns:p="http://schemas.openxmlformats.org/presentationml/2006/main">
+  <p:tag name="KSO_WM_UNIT_SUBTYPE" val="a"/>
+  <p:tag name="KSO_WM_UNIT_NOCLEAR" val="0"/>
+  <p:tag name="KSO_WM_UNIT_VALUE" val="60"/>
+  <p:tag name="KSO_WM_UNIT_HIGHLIGHT" val="0"/>
+  <p:tag name="KSO_WM_UNIT_COMPATIBLE" val="0"/>
+  <p:tag name="KSO_WM_UNIT_DIAGRAM_ISNUMVISUAL" val="0"/>
+  <p:tag name="KSO_WM_UNIT_DIAGRAM_ISREFERUNIT" val="0"/>
+  <p:tag name="KSO_WM_UNIT_TYPE" val="n_h_h_f"/>
+  <p:tag name="KSO_WM_UNIT_INDEX" val="1_2_5_1"/>
+  <p:tag name="KSO_WM_UNIT_ID" val="diagram20231090_4*n_h_h_f*1_2_5_1"/>
+  <p:tag name="KSO_WM_TEMPLATE_CATEGORY" val="diagram"/>
+  <p:tag name="KSO_WM_TEMPLATE_INDEX" val="20231090"/>
+  <p:tag name="KSO_WM_UNIT_LAYERLEVEL" val="1_1_1_1"/>
+  <p:tag name="KSO_WM_TAG_VERSION" val="3.0"/>
+  <p:tag name="KSO_WM_DIAGRAM_GROUP_CODE" val="n1-1"/>
+  <p:tag name="KSO_WM_DIAGRAM_VERSION" val="3"/>
+  <p:tag name="KSO_WM_DIAGRAM_COLOR_TRICK" val="4"/>
+  <p:tag name="KSO_WM_DIAGRAM_COLOR_TEXT_CAN_REMOVE" val="n"/>
+  <p:tag name="KSO_WM_DIAGRAM_MAX_ITEMCNT" val="6"/>
+  <p:tag name="KSO_WM_DIAGRAM_MIN_ITEMCNT" val="3"/>
+  <p:tag name="KSO_WM_DIAGRAM_VIRTUALLY_FRAME" val="{&quot;height&quot;:382.3500061035156,&quot;left&quot;:21.1,&quot;top&quot;:116.39999694824219,&quot;width&quot;:884.3}"/>
+  <p:tag name="KSO_WM_DIAGRAM_COLOR_MATCH_VALUE" val="{&quot;shape&quot;:{&quot;fill&quot;:{&quot;type&quot;:0},&quot;glow&quot;:{&quot;colorType&quot;:0},&quot;line&quot;:{&quot;type&quot;:0},&quot;shadow&quot;:{&quot;colorType&quot;:0},&quot;threeD&quot;:{&quot;curvedSurface&quot;:{&quot;brightness&quot;:0,&quot;colorType&quot;:2,&quot;rgb&quot;:&quot;#000000&quot;},&quot;depth&quot;:{&quot;colorType&quot;:0}}},&quot;text&quot;:{&quot;fill&quot;:{&quot;solid&quot;:{&quot;brightness&quot;:0.15000000596046448,&quot;colorType&quot;:1,&quot;foreColorIndex&quot;:13,&quot;transparency&quot;:0},&quot;type&quot;:1},&quot;glow&quot;:{&quot;colorType&quot;:0},&quot;line&quot;:{&quot;type&quot;:0},&quot;shadow&quot;:{&quot;colorType&quot;:0},&quot;threeD&quot;:{&quot;curvedSurface&quot;:{&quot;brightness&quot;:0,&quot;colorType&quot;:2,&quot;rgb&quot;:&quot;#000000&quot;},&quot;depth&quot;:{&quot;colorType&quot;:0}}}}"/>
+  <p:tag name="KSO_WM_UNIT_TEXT_TYPE" val="1"/>
+  <p:tag name="KSO_WM_UNIT_TEXT_LAYER_COUNT" val="1"/>
+  <p:tag name="KSO_WM_BEAUTIFY_FLAG" val="#wm#"/>
+  <p:tag name="KSO_WM_UNIT_PRESET_TEXT" val="单击此处添加文本，简明扼要地阐述您的观点。根据需要可酌情增减文字，以便观者准确地理解"/>
+  <p:tag name="KSO_WM_UNIT_TEXT_FILL_FORE_SCHEMECOLOR_INDEX" val="1"/>
+  <p:tag name="KSO_WM_UNIT_TEXT_FILL_TYPE" val="1"/>
+  <p:tag name="KSO_WM_UNIT_USESOURCEFORMAT_APPLY" val="0"/>
+</p:tagLst>
+</file>
+
+<file path=ppt/tags/tag145.xml><?xml version="1.0" encoding="utf-8"?>
+<p:tagLst xmlns:p="http://schemas.openxmlformats.org/presentationml/2006/main">
+  <p:tag name="KSO_WM_UNIT_ISCONTENTSTITLE" val="0"/>
+  <p:tag name="KSO_WM_UNIT_ISNUMDGMTITLE" val="0"/>
+  <p:tag name="KSO_WM_UNIT_NOCLEAR" val="0"/>
+  <p:tag name="KSO_WM_UNIT_VALUE" val="10"/>
+  <p:tag name="KSO_WM_UNIT_HIGHLIGHT" val="0"/>
+  <p:tag name="KSO_WM_UNIT_COMPATIBLE" val="0"/>
+  <p:tag name="KSO_WM_UNIT_DIAGRAM_ISNUMVISUAL" val="0"/>
+  <p:tag name="KSO_WM_UNIT_DIAGRAM_ISREFERUNIT" val="0"/>
+  <p:tag name="KSO_WM_UNIT_TYPE" val="n_h_h_a"/>
+  <p:tag name="KSO_WM_UNIT_INDEX" val="1_2_5_1"/>
+  <p:tag name="KSO_WM_UNIT_ID" val="diagram20231090_4*n_h_h_a*1_2_5_1"/>
+  <p:tag name="KSO_WM_TEMPLATE_CATEGORY" val="diagram"/>
+  <p:tag name="KSO_WM_TEMPLATE_INDEX" val="20231090"/>
+  <p:tag name="KSO_WM_UNIT_LAYERLEVEL" val="1_1_1_1"/>
+  <p:tag name="KSO_WM_TAG_VERSION" val="3.0"/>
+  <p:tag name="KSO_WM_DIAGRAM_GROUP_CODE" val="n1-1"/>
+  <p:tag name="KSO_WM_DIAGRAM_VERSION" val="3"/>
+  <p:tag name="KSO_WM_DIAGRAM_COLOR_TRICK" val="4"/>
+  <p:tag name="KSO_WM_DIAGRAM_COLOR_TEXT_CAN_REMOVE" val="n"/>
+  <p:tag name="KSO_WM_DIAGRAM_MAX_ITEMCNT" val="6"/>
+  <p:tag name="KSO_WM_DIAGRAM_MIN_ITEMCNT" val="3"/>
+  <p:tag name="KSO_WM_DIAGRAM_VIRTUALLY_FRAME" val="{&quot;height&quot;:382.3500061035156,&quot;left&quot;:21.1,&quot;top&quot;:116.39999694824219,&quot;width&quot;:884.3}"/>
+  <p:tag name="KSO_WM_DIAGRAM_COLOR_MATCH_VALUE" val="{&quot;shape&quot;:{&quot;fill&quot;:{&quot;type&quot;:0},&quot;glow&quot;:{&quot;colorType&quot;:0},&quot;line&quot;:{&quot;type&quot;:0},&quot;shadow&quot;:{&quot;colorType&quot;:0},&quot;threeD&quot;:{&quot;curvedSurface&quot;:{&quot;brightness&quot;:0,&quot;colorType&quot;:2,&quot;rgb&quot;:&quot;#000000&quot;},&quot;depth&quot;:{&quot;colorType&quot;:0}}},&quot;text&quot;:{&quot;fill&quot;:{&quot;solid&quot;:{&quot;brightness&quot;:0,&quot;colorType&quot;:1,&quot;foreColorIndex&quot;:9,&quot;transparency&quot;:0},&quot;type&quot;:1},&quot;glow&quot;:{&quot;colorType&quot;:0},&quot;line&quot;:{&quot;type&quot;:0},&quot;shadow&quot;:{&quot;colorType&quot;:0},&quot;threeD&quot;:{&quot;curvedSurface&quot;:{&quot;brightness&quot;:0,&quot;colorType&quot;:2,&quot;rgb&quot;:&quot;#000000&quot;},&quot;depth&quot;:{&quot;colorType&quot;:0}}}}"/>
+  <p:tag name="KSO_WM_UNIT_TEXT_TYPE" val="1"/>
+  <p:tag name="KSO_WM_BEAUTIFY_FLAG" val="#wm#"/>
+  <p:tag name="KSO_WM_UNIT_PRESET_TEXT" val="此处添加项标题"/>
+  <p:tag name="KSO_WM_UNIT_TEXT_FILL_FORE_SCHEMECOLOR_INDEX" val="1"/>
+  <p:tag name="KSO_WM_UNIT_TEXT_FILL_TYPE" val="1"/>
+  <p:tag name="KSO_WM_UNIT_USESOURCEFORMAT_APPLY" val="0"/>
+</p:tagLst>
+</file>
+
+<file path=ppt/tags/tag146.xml><?xml version="1.0" encoding="utf-8"?>
+<p:tagLst xmlns:p="http://schemas.openxmlformats.org/presentationml/2006/main">
+  <p:tag name="KSO_WM_UNIT_SUBTYPE" val="a"/>
+  <p:tag name="KSO_WM_UNIT_NOCLEAR" val="0"/>
+  <p:tag name="KSO_WM_UNIT_VALUE" val="60"/>
+  <p:tag name="KSO_WM_UNIT_HIGHLIGHT" val="0"/>
+  <p:tag name="KSO_WM_UNIT_COMPATIBLE" val="0"/>
+  <p:tag name="KSO_WM_UNIT_DIAGRAM_ISNUMVISUAL" val="0"/>
+  <p:tag name="KSO_WM_UNIT_DIAGRAM_ISREFERUNIT" val="0"/>
+  <p:tag name="KSO_WM_UNIT_TYPE" val="n_h_h_f"/>
+  <p:tag name="KSO_WM_UNIT_INDEX" val="1_2_1_1"/>
+  <p:tag name="KSO_WM_UNIT_ID" val="diagram20231090_4*n_h_h_f*1_2_1_1"/>
+  <p:tag name="KSO_WM_TEMPLATE_CATEGORY" val="diagram"/>
+  <p:tag name="KSO_WM_TEMPLATE_INDEX" val="20231090"/>
+  <p:tag name="KSO_WM_UNIT_LAYERLEVEL" val="1_1_1_1"/>
+  <p:tag name="KSO_WM_TAG_VERSION" val="3.0"/>
+  <p:tag name="KSO_WM_DIAGRAM_GROUP_CODE" val="n1-1"/>
+  <p:tag name="KSO_WM_DIAGRAM_VERSION" val="3"/>
+  <p:tag name="KSO_WM_DIAGRAM_COLOR_TRICK" val="4"/>
+  <p:tag name="KSO_WM_DIAGRAM_COLOR_TEXT_CAN_REMOVE" val="n"/>
+  <p:tag name="KSO_WM_DIAGRAM_MAX_ITEMCNT" val="6"/>
+  <p:tag name="KSO_WM_DIAGRAM_MIN_ITEMCNT" val="3"/>
+  <p:tag name="KSO_WM_DIAGRAM_VIRTUALLY_FRAME" val="{&quot;height&quot;:382.3500061035156,&quot;left&quot;:21.1,&quot;top&quot;:116.39999694824219,&quot;width&quot;:884.3}"/>
+  <p:tag name="KSO_WM_DIAGRAM_COLOR_MATCH_VALUE" val="{&quot;shape&quot;:{&quot;fill&quot;:{&quot;type&quot;:0},&quot;glow&quot;:{&quot;colorType&quot;:0},&quot;line&quot;:{&quot;type&quot;:0},&quot;shadow&quot;:{&quot;colorType&quot;:0},&quot;threeD&quot;:{&quot;curvedSurface&quot;:{&quot;brightness&quot;:0,&quot;colorType&quot;:2,&quot;rgb&quot;:&quot;#000000&quot;},&quot;depth&quot;:{&quot;colorType&quot;:0}}},&quot;text&quot;:{&quot;fill&quot;:{&quot;solid&quot;:{&quot;brightness&quot;:0.15000000596046448,&quot;colorType&quot;:1,&quot;foreColorIndex&quot;:13,&quot;transparency&quot;:0},&quot;type&quot;:1},&quot;glow&quot;:{&quot;colorType&quot;:0},&quot;line&quot;:{&quot;type&quot;:0},&quot;shadow&quot;:{&quot;colorType&quot;:0},&quot;threeD&quot;:{&quot;curvedSurface&quot;:{&quot;brightness&quot;:0,&quot;colorType&quot;:2,&quot;rgb&quot;:&quot;#000000&quot;},&quot;depth&quot;:{&quot;colorType&quot;:0}}}}"/>
+  <p:tag name="KSO_WM_UNIT_TEXT_TYPE" val="1"/>
+  <p:tag name="KSO_WM_UNIT_TEXT_LAYER_COUNT" val="1"/>
+  <p:tag name="KSO_WM_BEAUTIFY_FLAG" val="#wm#"/>
+  <p:tag name="KSO_WM_UNIT_PRESET_TEXT" val="单击此处添加文本，简明扼要地阐述您的观点。根据需要可酌情增减文字，以便观者准确地理解"/>
+  <p:tag name="KSO_WM_UNIT_TEXT_FILL_FORE_SCHEMECOLOR_INDEX" val="1"/>
+  <p:tag name="KSO_WM_UNIT_TEXT_FILL_TYPE" val="1"/>
+  <p:tag name="KSO_WM_UNIT_USESOURCEFORMAT_APPLY" val="0"/>
+</p:tagLst>
+</file>
+
+<file path=ppt/tags/tag147.xml><?xml version="1.0" encoding="utf-8"?>
+<p:tagLst xmlns:p="http://schemas.openxmlformats.org/presentationml/2006/main">
+  <p:tag name="KSO_WM_UNIT_ISCONTENTSTITLE" val="0"/>
+  <p:tag name="KSO_WM_UNIT_ISNUMDGMTITLE" val="0"/>
+  <p:tag name="KSO_WM_UNIT_NOCLEAR" val="0"/>
+  <p:tag name="KSO_WM_UNIT_VALUE" val="10"/>
+  <p:tag name="KSO_WM_UNIT_HIGHLIGHT" val="0"/>
+  <p:tag name="KSO_WM_UNIT_COMPATIBLE" val="0"/>
+  <p:tag name="KSO_WM_UNIT_DIAGRAM_ISNUMVISUAL" val="0"/>
+  <p:tag name="KSO_WM_UNIT_DIAGRAM_ISREFERUNIT" val="0"/>
+  <p:tag name="KSO_WM_UNIT_TYPE" val="n_h_h_a"/>
+  <p:tag name="KSO_WM_UNIT_INDEX" val="1_2_1_1"/>
+  <p:tag name="KSO_WM_UNIT_ID" val="diagram20231090_4*n_h_h_a*1_2_1_1"/>
+  <p:tag name="KSO_WM_TEMPLATE_CATEGORY" val="diagram"/>
+  <p:tag name="KSO_WM_TEMPLATE_INDEX" val="20231090"/>
+  <p:tag name="KSO_WM_UNIT_LAYERLEVEL" val="1_1_1_1"/>
+  <p:tag name="KSO_WM_TAG_VERSION" val="3.0"/>
+  <p:tag name="KSO_WM_DIAGRAM_GROUP_CODE" val="n1-1"/>
+  <p:tag name="KSO_WM_DIAGRAM_VERSION" val="3"/>
+  <p:tag name="KSO_WM_DIAGRAM_COLOR_TRICK" val="4"/>
+  <p:tag name="KSO_WM_DIAGRAM_COLOR_TEXT_CAN_REMOVE" val="n"/>
+  <p:tag name="KSO_WM_DIAGRAM_MAX_ITEMCNT" val="6"/>
+  <p:tag name="KSO_WM_DIAGRAM_MIN_ITEMCNT" val="3"/>
+  <p:tag name="KSO_WM_DIAGRAM_VIRTUALLY_FRAME" val="{&quot;height&quot;:382.3500061035156,&quot;left&quot;:21.1,&quot;top&quot;:116.39999694824219,&quot;width&quot;:884.3}"/>
+  <p:tag name="KSO_WM_DIAGRAM_COLOR_MATCH_VALUE" val="{&quot;shape&quot;:{&quot;fill&quot;:{&quot;type&quot;:0},&quot;glow&quot;:{&quot;colorType&quot;:0},&quot;line&quot;:{&quot;type&quot;:0},&quot;shadow&quot;:{&quot;colorType&quot;:0},&quot;threeD&quot;:{&quot;curvedSurface&quot;:{&quot;brightness&quot;:0,&quot;colorType&quot;:2,&quot;rgb&quot;:&quot;#000000&quot;},&quot;depth&quot;:{&quot;colorType&quot;:0}}},&quot;text&quot;:{&quot;fill&quot;:{&quot;gradient&quot;:[{&quot;brightness&quot;:0.20000000298023224,&quot;colorType&quot;:1,&quot;foreColorIndex&quot;:5,&quot;pos&quot;:0,&quot;transparency&quot;:0},{&quot;brightness&quot;:0.20000000298023224,&quot;colorType&quot;:1,&quot;foreColorIndex&quot;:5,&quot;pos&quot;:1,&quot;transparency&quot;:0}],&quot;type&quot;:3},&quot;glow&quot;:{&quot;colorType&quot;:0},&quot;line&quot;:{&quot;type&quot;:0},&quot;shadow&quot;:{&quot;colorType&quot;:0},&quot;threeD&quot;:{&quot;curvedSurface&quot;:{&quot;brightness&quot;:0,&quot;colorType&quot;:2,&quot;rgb&quot;:&quot;#000000&quot;},&quot;depth&quot;:{&quot;colorType&quot;:0}}}}"/>
+  <p:tag name="KSO_WM_UNIT_TEXT_TYPE" val="1"/>
+  <p:tag name="KSO_WM_BEAUTIFY_FLAG" val="#wm#"/>
+  <p:tag name="KSO_WM_UNIT_PRESET_TEXT" val="此处添加项标题"/>
+  <p:tag name="KSO_WM_UNIT_TEXT_FILL_FORE_SCHEMECOLOR_INDEX" val="3"/>
+  <p:tag name="KSO_WM_UNIT_TEXT_FILL_TYPE" val="3"/>
+  <p:tag name="KSO_WM_UNIT_USESOURCEFORMAT_APPLY" val="0"/>
+</p:tagLst>
+</file>
+
+<file path=ppt/tags/tag148.xml><?xml version="1.0" encoding="utf-8"?>
+<p:tagLst xmlns:p="http://schemas.openxmlformats.org/presentationml/2006/main">
+  <p:tag name="KSO_WM_UNIT_HIGHLIGHT" val="0"/>
+  <p:tag name="KSO_WM_UNIT_COMPATIBLE" val="0"/>
+  <p:tag name="KSO_WM_UNIT_DIAGRAM_ISNUMVISUAL" val="0"/>
+  <p:tag name="KSO_WM_UNIT_DIAGRAM_ISREFERUNIT" val="0"/>
+  <p:tag name="KSO_WM_UNIT_ID" val="diagram20231090_4*n_h_h_i*1_2_1_1"/>
+  <p:tag name="KSO_WM_TEMPLATE_CATEGORY" val="diagram"/>
+  <p:tag name="KSO_WM_TEMPLATE_INDEX" val="20231090"/>
+  <p:tag name="KSO_WM_UNIT_LAYERLEVEL" val="1_1_1_1"/>
+  <p:tag name="KSO_WM_TAG_VERSION" val="3.0"/>
+  <p:tag name="KSO_WM_DIAGRAM_GROUP_CODE" val="n1-1"/>
+  <p:tag name="KSO_WM_UNIT_TYPE" val="n_h_h_i"/>
+  <p:tag name="KSO_WM_UNIT_INDEX" val="1_2_1_1"/>
+  <p:tag name="KSO_WM_DIAGRAM_VERSION" val="3"/>
+  <p:tag name="KSO_WM_DIAGRAM_COLOR_TRICK" val="4"/>
+  <p:tag name="KSO_WM_DIAGRAM_COLOR_TEXT_CAN_REMOVE" val="n"/>
+  <p:tag name="KSO_WM_DIAGRAM_MAX_ITEMCNT" val="6"/>
+  <p:tag name="KSO_WM_DIAGRAM_MIN_ITEMCNT" val="3"/>
+  <p:tag name="KSO_WM_DIAGRAM_VIRTUALLY_FRAME" val="{&quot;height&quot;:382.3500061035156,&quot;left&quot;:21.1,&quot;top&quot;:116.39999694824219,&quot;width&quot;:884.3}"/>
+  <p:tag name="KSO_WM_DIAGRAM_COLOR_MATCH_VALUE" val="{&quot;shape&quot;:{&quot;fill&quot;:{&quot;gradient&quot;:[{&quot;brightness&quot;:0.25,&quot;colorType&quot;:1,&quot;foreColorIndex&quot;:5,&quot;pos&quot;:0,&quot;transparency&quot;:0},{&quot;brightness&quot;:0.15000000596046448,&quot;colorType&quot;:1,&quot;foreColorIndex&quot;:5,&quot;pos&quot;:1,&quot;transparency&quot;:0}],&quot;type&quot;:3},&quot;glow&quot;:{&quot;colorType&quot;:0},&quot;line&quot;:{&quot;type&quot;:0},&quot;shadow&quot;:{&quot;colorType&quot;:0},&quot;threeD&quot;:{&quot;curvedSurface&quot;:{&quot;brightness&quot;:0,&quot;colorType&quot;:2,&quot;rgb&quot;:&quot;#000000&quot;},&quot;depth&quot;:{&quot;colorType&quot;:0}}},&quot;text&quot;:{&quot;fill&quot;:{&quot;solid&quot;:{&quot;brightness&quot;:0,&quot;colorType&quot;:1,&quot;foreColorIndex&quot;:2,&quot;transparency&quot;:0},&quot;type&quot;:1},&quot;glow&quot;:{&quot;colorType&quot;:0},&quot;line&quot;:{&quot;type&quot;:0},&quot;shadow&quot;:{&quot;colorType&quot;:0},&quot;threeD&quot;:{&quot;curvedSurface&quot;:{&quot;brightness&quot;:0,&quot;colorType&quot;:2,&quot;rgb&quot;:&quot;#000000&quot;},&quot;depth&quot;:{&quot;colorType&quot;:0}}}}"/>
+  <p:tag name="KSO_WM_BEAUTIFY_FLAG" val="#wm#"/>
+  <p:tag name="KSO_WM_UNIT_FILL_TYPE" val="3"/>
+  <p:tag name="KSO_WM_UNIT_TEXT_FILL_FORE_SCHEMECOLOR_INDEX" val="2"/>
+  <p:tag name="KSO_WM_UNIT_TEXT_FILL_TYPE" val="1"/>
+  <p:tag name="KSO_WM_UNIT_USESOURCEFORMAT_APPLY" val="0"/>
+</p:tagLst>
+</file>
+
+<file path=ppt/tags/tag149.xml><?xml version="1.0" encoding="utf-8"?>
+<p:tagLst xmlns:p="http://schemas.openxmlformats.org/presentationml/2006/main">
+  <p:tag name="KSO_WM_UNIT_HIGHLIGHT" val="0"/>
+  <p:tag name="KSO_WM_UNIT_COMPATIBLE" val="0"/>
+  <p:tag name="KSO_WM_UNIT_DIAGRAM_ISNUMVISUAL" val="0"/>
+  <p:tag name="KSO_WM_UNIT_DIAGRAM_ISREFERUNIT" val="0"/>
+  <p:tag name="KSO_WM_UNIT_ID" val="diagram20231090_4*n_h_h_i*1_2_5_1"/>
+  <p:tag name="KSO_WM_TEMPLATE_CATEGORY" val="diagram"/>
+  <p:tag name="KSO_WM_TEMPLATE_INDEX" val="20231090"/>
+  <p:tag name="KSO_WM_UNIT_LAYERLEVEL" val="1_1_1_1"/>
+  <p:tag name="KSO_WM_TAG_VERSION" val="3.0"/>
+  <p:tag name="KSO_WM_DIAGRAM_GROUP_CODE" val="n1-1"/>
+  <p:tag name="KSO_WM_UNIT_TYPE" val="n_h_h_i"/>
+  <p:tag name="KSO_WM_UNIT_INDEX" val="1_2_5_1"/>
+  <p:tag name="KSO_WM_DIAGRAM_VERSION" val="3"/>
+  <p:tag name="KSO_WM_DIAGRAM_COLOR_TRICK" val="4"/>
+  <p:tag name="KSO_WM_DIAGRAM_COLOR_TEXT_CAN_REMOVE" val="n"/>
+  <p:tag name="KSO_WM_DIAGRAM_MAX_ITEMCNT" val="6"/>
+  <p:tag name="KSO_WM_DIAGRAM_MIN_ITEMCNT" val="3"/>
+  <p:tag name="KSO_WM_DIAGRAM_VIRTUALLY_FRAME" val="{&quot;height&quot;:382.3500061035156,&quot;left&quot;:21.1,&quot;top&quot;:116.39999694824219,&quot;width&quot;:884.3}"/>
+  <p:tag name="KSO_WM_DIAGRAM_COLOR_MATCH_VALUE" val="{&quot;shape&quot;:{&quot;fill&quot;:{&quot;gradient&quot;:[{&quot;brightness&quot;:0,&quot;colorType&quot;:1,&quot;foreColorIndex&quot;:9,&quot;pos&quot;:1,&quot;transparency&quot;:0},{&quot;brightness&quot;:0.15000000596046448,&quot;colorType&quot;:1,&quot;foreColorIndex&quot;:9,&quot;pos&quot;:0,&quot;transparency&quot;:0}],&quot;type&quot;:3},&quot;glow&quot;:{&quot;colorType&quot;:0},&quot;line&quot;:{&quot;type&quot;:0},&quot;shadow&quot;:{&quot;colorType&quot;:0},&quot;threeD&quot;:{&quot;curvedSurface&quot;:{&quot;brightness&quot;:0,&quot;colorType&quot;:2,&quot;rgb&quot;:&quot;#000000&quot;},&quot;depth&quot;:{&quot;colorType&quot;:0}}},&quot;text&quot;:{&quot;fill&quot;:{&quot;solid&quot;:{&quot;brightness&quot;:0,&quot;colorType&quot;:1,&quot;foreColorIndex&quot;:1,&quot;transparency&quot;:0},&quot;type&quot;:1},&quot;glow&quot;:{&quot;colorType&quot;:0},&quot;line&quot;:{&quot;type&quot;:0},&quot;shadow&quot;:{&quot;colorType&quot;:0},&quot;threeD&quot;:{&quot;curvedSurface&quot;:{&quot;brightness&quot;:0,&quot;colorType&quot;:2,&quot;rgb&quot;:&quot;#000000&quot;},&quot;depth&quot;:{&quot;colorType&quot;:0}}}}"/>
+  <p:tag name="KSO_WM_BEAUTIFY_FLAG" val="#wm#"/>
+  <p:tag name="KSO_WM_UNIT_FILL_TYPE" val="3"/>
+  <p:tag name="KSO_WM_UNIT_TEXT_FILL_FORE_SCHEMECOLOR_INDEX" val="1"/>
+  <p:tag name="KSO_WM_UNIT_TEXT_FILL_TYPE" val="1"/>
+  <p:tag name="KSO_WM_UNIT_USESOURCEFORMAT_APPLY" val="0"/>
 </p:tagLst>
 </file>
 
@@ -41387,9 +48670,617 @@
 </p:tagLst>
 </file>
 
+<file path=ppt/tags/tag150.xml><?xml version="1.0" encoding="utf-8"?>
+<p:tagLst xmlns:p="http://schemas.openxmlformats.org/presentationml/2006/main">
+  <p:tag name="KSO_WM_UNIT_SUBTYPE" val="a"/>
+  <p:tag name="KSO_WM_UNIT_NOCLEAR" val="0"/>
+  <p:tag name="KSO_WM_UNIT_VALUE" val="60"/>
+  <p:tag name="KSO_WM_UNIT_HIGHLIGHT" val="0"/>
+  <p:tag name="KSO_WM_UNIT_COMPATIBLE" val="0"/>
+  <p:tag name="KSO_WM_UNIT_DIAGRAM_ISNUMVISUAL" val="0"/>
+  <p:tag name="KSO_WM_UNIT_DIAGRAM_ISREFERUNIT" val="0"/>
+  <p:tag name="KSO_WM_UNIT_TYPE" val="n_h_h_f"/>
+  <p:tag name="KSO_WM_UNIT_INDEX" val="1_2_3_1"/>
+  <p:tag name="KSO_WM_UNIT_ID" val="diagram20231090_4*n_h_h_f*1_2_3_1"/>
+  <p:tag name="KSO_WM_TEMPLATE_CATEGORY" val="diagram"/>
+  <p:tag name="KSO_WM_TEMPLATE_INDEX" val="20231090"/>
+  <p:tag name="KSO_WM_UNIT_LAYERLEVEL" val="1_1_1_1"/>
+  <p:tag name="KSO_WM_TAG_VERSION" val="3.0"/>
+  <p:tag name="KSO_WM_DIAGRAM_GROUP_CODE" val="n1-1"/>
+  <p:tag name="KSO_WM_DIAGRAM_VERSION" val="3"/>
+  <p:tag name="KSO_WM_DIAGRAM_COLOR_TRICK" val="4"/>
+  <p:tag name="KSO_WM_DIAGRAM_COLOR_TEXT_CAN_REMOVE" val="n"/>
+  <p:tag name="KSO_WM_DIAGRAM_MAX_ITEMCNT" val="6"/>
+  <p:tag name="KSO_WM_DIAGRAM_MIN_ITEMCNT" val="3"/>
+  <p:tag name="KSO_WM_DIAGRAM_VIRTUALLY_FRAME" val="{&quot;height&quot;:382.3500061035156,&quot;left&quot;:21.1,&quot;top&quot;:116.39999694824219,&quot;width&quot;:884.3}"/>
+  <p:tag name="KSO_WM_DIAGRAM_COLOR_MATCH_VALUE" val="{&quot;shape&quot;:{&quot;fill&quot;:{&quot;type&quot;:0},&quot;glow&quot;:{&quot;colorType&quot;:0},&quot;line&quot;:{&quot;type&quot;:0},&quot;shadow&quot;:{&quot;colorType&quot;:0},&quot;threeD&quot;:{&quot;curvedSurface&quot;:{&quot;brightness&quot;:0,&quot;colorType&quot;:2,&quot;rgb&quot;:&quot;#000000&quot;},&quot;depth&quot;:{&quot;colorType&quot;:0}}},&quot;text&quot;:{&quot;fill&quot;:{&quot;solid&quot;:{&quot;brightness&quot;:0.15000000596046448,&quot;colorType&quot;:1,&quot;foreColorIndex&quot;:13,&quot;transparency&quot;:0},&quot;type&quot;:1},&quot;glow&quot;:{&quot;colorType&quot;:0},&quot;line&quot;:{&quot;type&quot;:0},&quot;shadow&quot;:{&quot;colorType&quot;:0},&quot;threeD&quot;:{&quot;curvedSurface&quot;:{&quot;brightness&quot;:0,&quot;colorType&quot;:2,&quot;rgb&quot;:&quot;#000000&quot;},&quot;depth&quot;:{&quot;colorType&quot;:0}}}}"/>
+  <p:tag name="KSO_WM_UNIT_TEXT_TYPE" val="1"/>
+  <p:tag name="KSO_WM_UNIT_TEXT_LAYER_COUNT" val="1"/>
+  <p:tag name="KSO_WM_BEAUTIFY_FLAG" val="#wm#"/>
+  <p:tag name="KSO_WM_UNIT_PRESET_TEXT" val="单击此处添加文本内容，简明扼要地阐述您的观点。根据需要可酌情增减文字，以便观者准确地理解"/>
+  <p:tag name="KSO_WM_UNIT_TEXT_FILL_FORE_SCHEMECOLOR_INDEX" val="1"/>
+  <p:tag name="KSO_WM_UNIT_TEXT_FILL_TYPE" val="1"/>
+  <p:tag name="KSO_WM_UNIT_USESOURCEFORMAT_APPLY" val="0"/>
+</p:tagLst>
+</file>
+
+<file path=ppt/tags/tag151.xml><?xml version="1.0" encoding="utf-8"?>
+<p:tagLst xmlns:p="http://schemas.openxmlformats.org/presentationml/2006/main">
+  <p:tag name="KSO_WM_UNIT_ISCONTENTSTITLE" val="0"/>
+  <p:tag name="KSO_WM_UNIT_ISNUMDGMTITLE" val="0"/>
+  <p:tag name="KSO_WM_UNIT_NOCLEAR" val="0"/>
+  <p:tag name="KSO_WM_UNIT_VALUE" val="10"/>
+  <p:tag name="KSO_WM_UNIT_HIGHLIGHT" val="0"/>
+  <p:tag name="KSO_WM_UNIT_COMPATIBLE" val="0"/>
+  <p:tag name="KSO_WM_UNIT_DIAGRAM_ISNUMVISUAL" val="0"/>
+  <p:tag name="KSO_WM_UNIT_DIAGRAM_ISREFERUNIT" val="0"/>
+  <p:tag name="KSO_WM_UNIT_TYPE" val="n_h_h_a"/>
+  <p:tag name="KSO_WM_UNIT_INDEX" val="1_2_3_1"/>
+  <p:tag name="KSO_WM_UNIT_ID" val="diagram20231090_4*n_h_h_a*1_2_3_1"/>
+  <p:tag name="KSO_WM_TEMPLATE_CATEGORY" val="diagram"/>
+  <p:tag name="KSO_WM_TEMPLATE_INDEX" val="20231090"/>
+  <p:tag name="KSO_WM_UNIT_LAYERLEVEL" val="1_1_1_1"/>
+  <p:tag name="KSO_WM_TAG_VERSION" val="3.0"/>
+  <p:tag name="KSO_WM_DIAGRAM_GROUP_CODE" val="n1-1"/>
+  <p:tag name="KSO_WM_DIAGRAM_VERSION" val="3"/>
+  <p:tag name="KSO_WM_DIAGRAM_COLOR_TRICK" val="4"/>
+  <p:tag name="KSO_WM_DIAGRAM_COLOR_TEXT_CAN_REMOVE" val="n"/>
+  <p:tag name="KSO_WM_DIAGRAM_MAX_ITEMCNT" val="6"/>
+  <p:tag name="KSO_WM_DIAGRAM_MIN_ITEMCNT" val="3"/>
+  <p:tag name="KSO_WM_DIAGRAM_VIRTUALLY_FRAME" val="{&quot;height&quot;:382.3500061035156,&quot;left&quot;:21.1,&quot;top&quot;:116.39999694824219,&quot;width&quot;:884.3}"/>
+  <p:tag name="KSO_WM_DIAGRAM_COLOR_MATCH_VALUE" val="{&quot;shape&quot;:{&quot;fill&quot;:{&quot;type&quot;:0},&quot;glow&quot;:{&quot;colorType&quot;:0},&quot;line&quot;:{&quot;type&quot;:0},&quot;shadow&quot;:{&quot;colorType&quot;:0},&quot;threeD&quot;:{&quot;curvedSurface&quot;:{&quot;brightness&quot;:0,&quot;colorType&quot;:2,&quot;rgb&quot;:&quot;#000000&quot;},&quot;depth&quot;:{&quot;colorType&quot;:0}}},&quot;text&quot;:{&quot;fill&quot;:{&quot;solid&quot;:{&quot;brightness&quot;:0,&quot;colorType&quot;:1,&quot;foreColorIndex&quot;:10,&quot;transparency&quot;:0},&quot;type&quot;:1},&quot;glow&quot;:{&quot;colorType&quot;:0},&quot;line&quot;:{&quot;type&quot;:0},&quot;shadow&quot;:{&quot;colorType&quot;:0},&quot;threeD&quot;:{&quot;curvedSurface&quot;:{&quot;brightness&quot;:0,&quot;colorType&quot;:2,&quot;rgb&quot;:&quot;#000000&quot;},&quot;depth&quot;:{&quot;colorType&quot;:0}}}}"/>
+  <p:tag name="KSO_WM_UNIT_TEXT_TYPE" val="1"/>
+  <p:tag name="KSO_WM_BEAUTIFY_FLAG" val="#wm#"/>
+  <p:tag name="KSO_WM_UNIT_PRESET_TEXT" val="此处添加项标题"/>
+  <p:tag name="KSO_WM_UNIT_TEXT_FILL_FORE_SCHEMECOLOR_INDEX" val="1"/>
+  <p:tag name="KSO_WM_UNIT_TEXT_FILL_TYPE" val="1"/>
+  <p:tag name="KSO_WM_UNIT_USESOURCEFORMAT_APPLY" val="0"/>
+</p:tagLst>
+</file>
+
+<file path=ppt/tags/tag152.xml><?xml version="1.0" encoding="utf-8"?>
+<p:tagLst xmlns:p="http://schemas.openxmlformats.org/presentationml/2006/main">
+  <p:tag name="KSO_WM_UNIT_HIGHLIGHT" val="0"/>
+  <p:tag name="KSO_WM_UNIT_COMPATIBLE" val="0"/>
+  <p:tag name="KSO_WM_UNIT_DIAGRAM_ISNUMVISUAL" val="0"/>
+  <p:tag name="KSO_WM_UNIT_DIAGRAM_ISREFERUNIT" val="0"/>
+  <p:tag name="KSO_WM_UNIT_ID" val="diagram20231090_4*n_h_h_i*1_2_3_1"/>
+  <p:tag name="KSO_WM_TEMPLATE_CATEGORY" val="diagram"/>
+  <p:tag name="KSO_WM_TEMPLATE_INDEX" val="20231090"/>
+  <p:tag name="KSO_WM_UNIT_LAYERLEVEL" val="1_1_1_1"/>
+  <p:tag name="KSO_WM_TAG_VERSION" val="3.0"/>
+  <p:tag name="KSO_WM_DIAGRAM_GROUP_CODE" val="n1-1"/>
+  <p:tag name="KSO_WM_UNIT_TYPE" val="n_h_h_i"/>
+  <p:tag name="KSO_WM_UNIT_INDEX" val="1_2_3_1"/>
+  <p:tag name="KSO_WM_DIAGRAM_VERSION" val="3"/>
+  <p:tag name="KSO_WM_DIAGRAM_COLOR_TRICK" val="4"/>
+  <p:tag name="KSO_WM_DIAGRAM_COLOR_TEXT_CAN_REMOVE" val="n"/>
+  <p:tag name="KSO_WM_DIAGRAM_MAX_ITEMCNT" val="6"/>
+  <p:tag name="KSO_WM_DIAGRAM_MIN_ITEMCNT" val="3"/>
+  <p:tag name="KSO_WM_DIAGRAM_VIRTUALLY_FRAME" val="{&quot;height&quot;:382.3500061035156,&quot;left&quot;:21.1,&quot;top&quot;:116.39999694824219,&quot;width&quot;:884.3}"/>
+  <p:tag name="KSO_WM_DIAGRAM_COLOR_MATCH_VALUE" val="{&quot;shape&quot;:{&quot;fill&quot;:{&quot;gradient&quot;:[{&quot;brightness&quot;:0,&quot;colorType&quot;:1,&quot;foreColorIndex&quot;:10,&quot;pos&quot;:1,&quot;transparency&quot;:0},{&quot;brightness&quot;:0.15000000596046448,&quot;colorType&quot;:1,&quot;foreColorIndex&quot;:10,&quot;pos&quot;:0,&quot;transparency&quot;:0}],&quot;type&quot;:3},&quot;glow&quot;:{&quot;colorType&quot;:0},&quot;line&quot;:{&quot;type&quot;:0},&quot;shadow&quot;:{&quot;colorType&quot;:0},&quot;threeD&quot;:{&quot;curvedSurface&quot;:{&quot;brightness&quot;:0,&quot;colorType&quot;:2,&quot;rgb&quot;:&quot;#000000&quot;},&quot;depth&quot;:{&quot;colorType&quot;:0}}},&quot;text&quot;:{&quot;fill&quot;:{&quot;solid&quot;:{&quot;brightness&quot;:0,&quot;colorType&quot;:1,&quot;foreColorIndex&quot;:1,&quot;transparency&quot;:0},&quot;type&quot;:1},&quot;glow&quot;:{&quot;colorType&quot;:0},&quot;line&quot;:{&quot;type&quot;:0},&quot;shadow&quot;:{&quot;colorType&quot;:0},&quot;threeD&quot;:{&quot;curvedSurface&quot;:{&quot;brightness&quot;:0,&quot;colorType&quot;:2,&quot;rgb&quot;:&quot;#000000&quot;},&quot;depth&quot;:{&quot;colorType&quot;:0}}}}"/>
+  <p:tag name="KSO_WM_BEAUTIFY_FLAG" val="#wm#"/>
+  <p:tag name="KSO_WM_UNIT_FILL_TYPE" val="3"/>
+  <p:tag name="KSO_WM_UNIT_TEXT_FILL_FORE_SCHEMECOLOR_INDEX" val="1"/>
+  <p:tag name="KSO_WM_UNIT_TEXT_FILL_TYPE" val="1"/>
+  <p:tag name="KSO_WM_UNIT_USESOURCEFORMAT_APPLY" val="0"/>
+</p:tagLst>
+</file>
+
+<file path=ppt/tags/tag153.xml><?xml version="1.0" encoding="utf-8"?>
+<p:tagLst xmlns:p="http://schemas.openxmlformats.org/presentationml/2006/main">
+  <p:tag name="KSO_WM_UNIT_HIGHLIGHT" val="0"/>
+  <p:tag name="KSO_WM_UNIT_COMPATIBLE" val="0"/>
+  <p:tag name="KSO_WM_UNIT_DIAGRAM_ISNUMVISUAL" val="0"/>
+  <p:tag name="KSO_WM_UNIT_DIAGRAM_ISREFERUNIT" val="0"/>
+  <p:tag name="KSO_WM_UNIT_ID" val="diagram20231090_4*n_h_h_i*1_2_6_3"/>
+  <p:tag name="KSO_WM_TEMPLATE_CATEGORY" val="diagram"/>
+  <p:tag name="KSO_WM_TEMPLATE_INDEX" val="20231090"/>
+  <p:tag name="KSO_WM_UNIT_LAYERLEVEL" val="1_1_1_1"/>
+  <p:tag name="KSO_WM_TAG_VERSION" val="3.0"/>
+  <p:tag name="KSO_WM_DIAGRAM_GROUP_CODE" val="n1-1"/>
+  <p:tag name="KSO_WM_UNIT_TYPE" val="n_h_h_i"/>
+  <p:tag name="KSO_WM_UNIT_INDEX" val="1_2_6_3"/>
+  <p:tag name="KSO_WM_DIAGRAM_VERSION" val="3"/>
+  <p:tag name="KSO_WM_DIAGRAM_COLOR_TRICK" val="4"/>
+  <p:tag name="KSO_WM_DIAGRAM_COLOR_TEXT_CAN_REMOVE" val="n"/>
+  <p:tag name="KSO_WM_DIAGRAM_MAX_ITEMCNT" val="6"/>
+  <p:tag name="KSO_WM_DIAGRAM_MIN_ITEMCNT" val="3"/>
+  <p:tag name="KSO_WM_DIAGRAM_VIRTUALLY_FRAME" val="{&quot;height&quot;:382.3500061035156,&quot;left&quot;:21.1,&quot;top&quot;:116.39999694824219,&quot;width&quot;:884.3}"/>
+  <p:tag name="KSO_WM_DIAGRAM_COLOR_MATCH_VALUE" val="{&quot;shape&quot;:{&quot;fill&quot;:{&quot;gradient&quot;:[{&quot;brightness&quot;:0.20000000298023224,&quot;colorType&quot;:1,&quot;foreColorIndex&quot;:10,&quot;pos&quot;:1,&quot;transparency&quot;:0},{&quot;brightness&quot;:0,&quot;colorType&quot;:1,&quot;foreColorIndex&quot;:10,&quot;pos&quot;:0,&quot;transparency&quot;:0}],&quot;type&quot;:3},&quot;glow&quot;:{&quot;colorType&quot;:0},&quot;line&quot;:{&quot;solidLine&quot;:{&quot;brightness&quot;:0,&quot;colorType&quot;:1,&quot;foreColorIndex&quot;:2,&quot;transparency&quot;:0},&quot;type&quot;:1},&quot;shadow&quot;:{&quot;colorType&quot;:0},&quot;threeD&quot;:{&quot;curvedSurface&quot;:{&quot;brightness&quot;:0,&quot;colorType&quot;:2,&quot;rgb&quot;:&quot;#000000&quot;},&quot;depth&quot;:{&quot;colorType&quot;:0}}},&quot;text&quot;:{&quot;fill&quot;:{&quot;solid&quot;:{&quot;brightness&quot;:0,&quot;colorType&quot;:1,&quot;foreColorIndex&quot;:2,&quot;transparency&quot;:0},&quot;type&quot;:1},&quot;glow&quot;:{&quot;colorType&quot;:0},&quot;line&quot;:{&quot;type&quot;:0},&quot;shadow&quot;:{&quot;colorType&quot;:0},&quot;threeD&quot;:{&quot;curvedSurface&quot;:{&quot;brightness&quot;:0,&quot;colorType&quot;:2,&quot;rgb&quot;:&quot;#000000&quot;},&quot;depth&quot;:{&quot;colorType&quot;:0}}}}"/>
+  <p:tag name="KSO_WM_BEAUTIFY_FLAG" val="#wm#"/>
+  <p:tag name="KSO_WM_UNIT_FILL_TYPE" val="3"/>
+  <p:tag name="KSO_WM_UNIT_LINE_FORE_SCHEMECOLOR_INDEX" val="2"/>
+  <p:tag name="KSO_WM_UNIT_LINE_FILL_TYPE" val="2"/>
+  <p:tag name="KSO_WM_UNIT_TEXT_FILL_FORE_SCHEMECOLOR_INDEX" val="2"/>
+  <p:tag name="KSO_WM_UNIT_TEXT_FILL_TYPE" val="1"/>
+  <p:tag name="KSO_WM_UNIT_USESOURCEFORMAT_APPLY" val="0"/>
+</p:tagLst>
+</file>
+
+<file path=ppt/tags/tag154.xml><?xml version="1.0" encoding="utf-8"?>
+<p:tagLst xmlns:p="http://schemas.openxmlformats.org/presentationml/2006/main">
+  <p:tag name="KSO_WM_UNIT_HIGHLIGHT" val="0"/>
+  <p:tag name="KSO_WM_UNIT_COMPATIBLE" val="0"/>
+  <p:tag name="KSO_WM_UNIT_DIAGRAM_ISNUMVISUAL" val="0"/>
+  <p:tag name="KSO_WM_UNIT_DIAGRAM_ISREFERUNIT" val="0"/>
+  <p:tag name="KSO_WM_UNIT_ID" val="diagram20231090_4*n_h_h_i*1_2_5_3"/>
+  <p:tag name="KSO_WM_TEMPLATE_CATEGORY" val="diagram"/>
+  <p:tag name="KSO_WM_TEMPLATE_INDEX" val="20231090"/>
+  <p:tag name="KSO_WM_UNIT_LAYERLEVEL" val="1_1_1_1"/>
+  <p:tag name="KSO_WM_TAG_VERSION" val="3.0"/>
+  <p:tag name="KSO_WM_DIAGRAM_GROUP_CODE" val="n1-1"/>
+  <p:tag name="KSO_WM_UNIT_TYPE" val="n_h_h_i"/>
+  <p:tag name="KSO_WM_UNIT_INDEX" val="1_2_5_3"/>
+  <p:tag name="KSO_WM_DIAGRAM_VERSION" val="3"/>
+  <p:tag name="KSO_WM_DIAGRAM_COLOR_TRICK" val="4"/>
+  <p:tag name="KSO_WM_DIAGRAM_COLOR_TEXT_CAN_REMOVE" val="n"/>
+  <p:tag name="KSO_WM_DIAGRAM_MAX_ITEMCNT" val="6"/>
+  <p:tag name="KSO_WM_DIAGRAM_MIN_ITEMCNT" val="3"/>
+  <p:tag name="KSO_WM_DIAGRAM_VIRTUALLY_FRAME" val="{&quot;height&quot;:382.3500061035156,&quot;left&quot;:21.1,&quot;top&quot;:116.39999694824219,&quot;width&quot;:884.3}"/>
+  <p:tag name="KSO_WM_DIAGRAM_COLOR_MATCH_VALUE" val="{&quot;shape&quot;:{&quot;fill&quot;:{&quot;gradient&quot;:[{&quot;brightness&quot;:0.20000000298023224,&quot;colorType&quot;:1,&quot;foreColorIndex&quot;:9,&quot;pos&quot;:1,&quot;transparency&quot;:0},{&quot;brightness&quot;:0,&quot;colorType&quot;:1,&quot;foreColorIndex&quot;:9,&quot;pos&quot;:0,&quot;transparency&quot;:0}],&quot;type&quot;:3},&quot;glow&quot;:{&quot;colorType&quot;:0},&quot;line&quot;:{&quot;solidLine&quot;:{&quot;brightness&quot;:0,&quot;colorType&quot;:1,&quot;foreColorIndex&quot;:2,&quot;transparency&quot;:0},&quot;type&quot;:1},&quot;shadow&quot;:{&quot;colorType&quot;:0},&quot;threeD&quot;:{&quot;curvedSurface&quot;:{&quot;brightness&quot;:0,&quot;colorType&quot;:2,&quot;rgb&quot;:&quot;#000000&quot;},&quot;depth&quot;:{&quot;colorType&quot;:0}}},&quot;text&quot;:{&quot;fill&quot;:{&quot;solid&quot;:{&quot;brightness&quot;:0,&quot;colorType&quot;:1,&quot;foreColorIndex&quot;:2,&quot;transparency&quot;:0},&quot;type&quot;:1},&quot;glow&quot;:{&quot;colorType&quot;:0},&quot;line&quot;:{&quot;type&quot;:0},&quot;shadow&quot;:{&quot;colorType&quot;:0},&quot;threeD&quot;:{&quot;curvedSurface&quot;:{&quot;brightness&quot;:0,&quot;colorType&quot;:2,&quot;rgb&quot;:&quot;#000000&quot;},&quot;depth&quot;:{&quot;colorType&quot;:0}}}}"/>
+  <p:tag name="KSO_WM_BEAUTIFY_FLAG" val="#wm#"/>
+  <p:tag name="KSO_WM_UNIT_FILL_TYPE" val="3"/>
+  <p:tag name="KSO_WM_UNIT_LINE_FORE_SCHEMECOLOR_INDEX" val="2"/>
+  <p:tag name="KSO_WM_UNIT_LINE_FILL_TYPE" val="2"/>
+  <p:tag name="KSO_WM_UNIT_TEXT_FILL_FORE_SCHEMECOLOR_INDEX" val="2"/>
+  <p:tag name="KSO_WM_UNIT_TEXT_FILL_TYPE" val="1"/>
+  <p:tag name="KSO_WM_UNIT_USESOURCEFORMAT_APPLY" val="0"/>
+</p:tagLst>
+</file>
+
+<file path=ppt/tags/tag155.xml><?xml version="1.0" encoding="utf-8"?>
+<p:tagLst xmlns:p="http://schemas.openxmlformats.org/presentationml/2006/main">
+  <p:tag name="KSO_WM_UNIT_HIGHLIGHT" val="0"/>
+  <p:tag name="KSO_WM_UNIT_COMPATIBLE" val="0"/>
+  <p:tag name="KSO_WM_UNIT_DIAGRAM_ISNUMVISUAL" val="0"/>
+  <p:tag name="KSO_WM_UNIT_DIAGRAM_ISREFERUNIT" val="0"/>
+  <p:tag name="KSO_WM_UNIT_ID" val="diagram20231090_4*n_h_h_i*1_2_4_3"/>
+  <p:tag name="KSO_WM_TEMPLATE_CATEGORY" val="diagram"/>
+  <p:tag name="KSO_WM_TEMPLATE_INDEX" val="20231090"/>
+  <p:tag name="KSO_WM_UNIT_LAYERLEVEL" val="1_1_1_1"/>
+  <p:tag name="KSO_WM_TAG_VERSION" val="3.0"/>
+  <p:tag name="KSO_WM_DIAGRAM_GROUP_CODE" val="n1-1"/>
+  <p:tag name="KSO_WM_UNIT_TYPE" val="n_h_h_i"/>
+  <p:tag name="KSO_WM_UNIT_INDEX" val="1_2_4_3"/>
+  <p:tag name="KSO_WM_DIAGRAM_VERSION" val="3"/>
+  <p:tag name="KSO_WM_DIAGRAM_COLOR_TRICK" val="4"/>
+  <p:tag name="KSO_WM_DIAGRAM_COLOR_TEXT_CAN_REMOVE" val="n"/>
+  <p:tag name="KSO_WM_DIAGRAM_MAX_ITEMCNT" val="6"/>
+  <p:tag name="KSO_WM_DIAGRAM_MIN_ITEMCNT" val="3"/>
+  <p:tag name="KSO_WM_DIAGRAM_VIRTUALLY_FRAME" val="{&quot;height&quot;:382.3500061035156,&quot;left&quot;:21.1,&quot;top&quot;:116.39999694824219,&quot;width&quot;:884.3}"/>
+  <p:tag name="KSO_WM_DIAGRAM_COLOR_MATCH_VALUE" val="{&quot;shape&quot;:{&quot;fill&quot;:{&quot;gradient&quot;:[{&quot;brightness&quot;:0.20000000298023224,&quot;colorType&quot;:1,&quot;foreColorIndex&quot;:8,&quot;pos&quot;:1,&quot;transparency&quot;:0},{&quot;brightness&quot;:0,&quot;colorType&quot;:1,&quot;foreColorIndex&quot;:8,&quot;pos&quot;:0,&quot;transparency&quot;:0}],&quot;type&quot;:3},&quot;glow&quot;:{&quot;colorType&quot;:0},&quot;line&quot;:{&quot;solidLine&quot;:{&quot;brightness&quot;:0,&quot;colorType&quot;:1,&quot;foreColorIndex&quot;:2,&quot;transparency&quot;:0},&quot;type&quot;:1},&quot;shadow&quot;:{&quot;colorType&quot;:0},&quot;threeD&quot;:{&quot;curvedSurface&quot;:{&quot;brightness&quot;:0,&quot;colorType&quot;:2,&quot;rgb&quot;:&quot;#000000&quot;},&quot;depth&quot;:{&quot;colorType&quot;:0}}},&quot;text&quot;:{&quot;fill&quot;:{&quot;solid&quot;:{&quot;brightness&quot;:0,&quot;colorType&quot;:1,&quot;foreColorIndex&quot;:2,&quot;transparency&quot;:0},&quot;type&quot;:1},&quot;glow&quot;:{&quot;colorType&quot;:0},&quot;line&quot;:{&quot;type&quot;:0},&quot;shadow&quot;:{&quot;colorType&quot;:0},&quot;threeD&quot;:{&quot;curvedSurface&quot;:{&quot;brightness&quot;:0,&quot;colorType&quot;:2,&quot;rgb&quot;:&quot;#000000&quot;},&quot;depth&quot;:{&quot;colorType&quot;:0}}}}"/>
+  <p:tag name="KSO_WM_BEAUTIFY_FLAG" val="#wm#"/>
+  <p:tag name="KSO_WM_UNIT_FILL_TYPE" val="3"/>
+  <p:tag name="KSO_WM_UNIT_LINE_FORE_SCHEMECOLOR_INDEX" val="2"/>
+  <p:tag name="KSO_WM_UNIT_LINE_FILL_TYPE" val="2"/>
+  <p:tag name="KSO_WM_UNIT_TEXT_FILL_FORE_SCHEMECOLOR_INDEX" val="2"/>
+  <p:tag name="KSO_WM_UNIT_TEXT_FILL_TYPE" val="1"/>
+  <p:tag name="KSO_WM_UNIT_USESOURCEFORMAT_APPLY" val="0"/>
+</p:tagLst>
+</file>
+
+<file path=ppt/tags/tag156.xml><?xml version="1.0" encoding="utf-8"?>
+<p:tagLst xmlns:p="http://schemas.openxmlformats.org/presentationml/2006/main">
+  <p:tag name="KSO_WM_UNIT_HIGHLIGHT" val="0"/>
+  <p:tag name="KSO_WM_UNIT_COMPATIBLE" val="0"/>
+  <p:tag name="KSO_WM_UNIT_DIAGRAM_ISNUMVISUAL" val="0"/>
+  <p:tag name="KSO_WM_UNIT_DIAGRAM_ISREFERUNIT" val="0"/>
+  <p:tag name="KSO_WM_UNIT_ID" val="diagram20231090_4*n_h_h_i*1_2_3_3"/>
+  <p:tag name="KSO_WM_TEMPLATE_CATEGORY" val="diagram"/>
+  <p:tag name="KSO_WM_TEMPLATE_INDEX" val="20231090"/>
+  <p:tag name="KSO_WM_UNIT_LAYERLEVEL" val="1_1_1_1"/>
+  <p:tag name="KSO_WM_TAG_VERSION" val="3.0"/>
+  <p:tag name="KSO_WM_DIAGRAM_GROUP_CODE" val="n1-1"/>
+  <p:tag name="KSO_WM_UNIT_TYPE" val="n_h_h_i"/>
+  <p:tag name="KSO_WM_UNIT_INDEX" val="1_2_3_3"/>
+  <p:tag name="KSO_WM_DIAGRAM_VERSION" val="3"/>
+  <p:tag name="KSO_WM_DIAGRAM_COLOR_TRICK" val="4"/>
+  <p:tag name="KSO_WM_DIAGRAM_COLOR_TEXT_CAN_REMOVE" val="n"/>
+  <p:tag name="KSO_WM_DIAGRAM_MAX_ITEMCNT" val="6"/>
+  <p:tag name="KSO_WM_DIAGRAM_MIN_ITEMCNT" val="3"/>
+  <p:tag name="KSO_WM_DIAGRAM_VIRTUALLY_FRAME" val="{&quot;height&quot;:382.3500061035156,&quot;left&quot;:21.1,&quot;top&quot;:116.39999694824219,&quot;width&quot;:884.3}"/>
+  <p:tag name="KSO_WM_DIAGRAM_COLOR_MATCH_VALUE" val="{&quot;shape&quot;:{&quot;fill&quot;:{&quot;gradient&quot;:[{&quot;brightness&quot;:0,&quot;colorType&quot;:1,&quot;foreColorIndex&quot;:7,&quot;pos&quot;:0,&quot;transparency&quot;:0},{&quot;brightness&quot;:0.20000000298023224,&quot;colorType&quot;:1,&quot;foreColorIndex&quot;:7,&quot;pos&quot;:1,&quot;transparency&quot;:0}],&quot;type&quot;:3},&quot;glow&quot;:{&quot;colorType&quot;:0},&quot;line&quot;:{&quot;solidLine&quot;:{&quot;brightness&quot;:0,&quot;colorType&quot;:1,&quot;foreColorIndex&quot;:2,&quot;transparency&quot;:0},&quot;type&quot;:1},&quot;shadow&quot;:{&quot;colorType&quot;:0},&quot;threeD&quot;:{&quot;curvedSurface&quot;:{&quot;brightness&quot;:0,&quot;colorType&quot;:2,&quot;rgb&quot;:&quot;#000000&quot;},&quot;depth&quot;:{&quot;colorType&quot;:0}}},&quot;text&quot;:{&quot;fill&quot;:{&quot;solid&quot;:{&quot;brightness&quot;:0,&quot;colorType&quot;:1,&quot;foreColorIndex&quot;:2,&quot;transparency&quot;:0},&quot;type&quot;:1},&quot;glow&quot;:{&quot;colorType&quot;:0},&quot;line&quot;:{&quot;type&quot;:0},&quot;shadow&quot;:{&quot;colorType&quot;:0},&quot;threeD&quot;:{&quot;curvedSurface&quot;:{&quot;brightness&quot;:0,&quot;colorType&quot;:2,&quot;rgb&quot;:&quot;#000000&quot;},&quot;depth&quot;:{&quot;colorType&quot;:0}}}}"/>
+  <p:tag name="KSO_WM_BEAUTIFY_FLAG" val="#wm#"/>
+  <p:tag name="KSO_WM_UNIT_FILL_TYPE" val="3"/>
+  <p:tag name="KSO_WM_UNIT_LINE_FORE_SCHEMECOLOR_INDEX" val="2"/>
+  <p:tag name="KSO_WM_UNIT_LINE_FILL_TYPE" val="2"/>
+  <p:tag name="KSO_WM_UNIT_TEXT_FILL_FORE_SCHEMECOLOR_INDEX" val="2"/>
+  <p:tag name="KSO_WM_UNIT_TEXT_FILL_TYPE" val="1"/>
+  <p:tag name="KSO_WM_UNIT_USESOURCEFORMAT_APPLY" val="0"/>
+</p:tagLst>
+</file>
+
+<file path=ppt/tags/tag157.xml><?xml version="1.0" encoding="utf-8"?>
+<p:tagLst xmlns:p="http://schemas.openxmlformats.org/presentationml/2006/main">
+  <p:tag name="KSO_WM_UNIT_HIGHLIGHT" val="0"/>
+  <p:tag name="KSO_WM_UNIT_COMPATIBLE" val="0"/>
+  <p:tag name="KSO_WM_UNIT_DIAGRAM_ISNUMVISUAL" val="0"/>
+  <p:tag name="KSO_WM_UNIT_DIAGRAM_ISREFERUNIT" val="0"/>
+  <p:tag name="KSO_WM_UNIT_ID" val="diagram20231090_4*n_h_h_i*1_2_2_3"/>
+  <p:tag name="KSO_WM_TEMPLATE_CATEGORY" val="diagram"/>
+  <p:tag name="KSO_WM_TEMPLATE_INDEX" val="20231090"/>
+  <p:tag name="KSO_WM_UNIT_LAYERLEVEL" val="1_1_1_1"/>
+  <p:tag name="KSO_WM_TAG_VERSION" val="3.0"/>
+  <p:tag name="KSO_WM_DIAGRAM_GROUP_CODE" val="n1-1"/>
+  <p:tag name="KSO_WM_UNIT_TYPE" val="n_h_h_i"/>
+  <p:tag name="KSO_WM_UNIT_INDEX" val="1_2_2_3"/>
+  <p:tag name="KSO_WM_DIAGRAM_VERSION" val="3"/>
+  <p:tag name="KSO_WM_DIAGRAM_COLOR_TRICK" val="4"/>
+  <p:tag name="KSO_WM_DIAGRAM_COLOR_TEXT_CAN_REMOVE" val="n"/>
+  <p:tag name="KSO_WM_DIAGRAM_MAX_ITEMCNT" val="6"/>
+  <p:tag name="KSO_WM_DIAGRAM_MIN_ITEMCNT" val="3"/>
+  <p:tag name="KSO_WM_DIAGRAM_VIRTUALLY_FRAME" val="{&quot;height&quot;:382.3500061035156,&quot;left&quot;:21.1,&quot;top&quot;:116.39999694824219,&quot;width&quot;:884.3}"/>
+  <p:tag name="KSO_WM_DIAGRAM_COLOR_MATCH_VALUE" val="{&quot;shape&quot;:{&quot;fill&quot;:{&quot;gradient&quot;:[{&quot;brightness&quot;:0.20000000298023224,&quot;colorType&quot;:1,&quot;foreColorIndex&quot;:6,&quot;pos&quot;:1,&quot;transparency&quot;:0},{&quot;brightness&quot;:0,&quot;colorType&quot;:1,&quot;foreColorIndex&quot;:6,&quot;pos&quot;:0,&quot;transparency&quot;:0}],&quot;type&quot;:3},&quot;glow&quot;:{&quot;colorType&quot;:0},&quot;line&quot;:{&quot;solidLine&quot;:{&quot;brightness&quot;:0,&quot;colorType&quot;:1,&quot;foreColorIndex&quot;:2,&quot;transparency&quot;:0},&quot;type&quot;:1},&quot;shadow&quot;:{&quot;colorType&quot;:0},&quot;threeD&quot;:{&quot;curvedSurface&quot;:{&quot;brightness&quot;:0,&quot;colorType&quot;:2,&quot;rgb&quot;:&quot;#000000&quot;},&quot;depth&quot;:{&quot;colorType&quot;:0}}},&quot;text&quot;:{&quot;fill&quot;:{&quot;solid&quot;:{&quot;brightness&quot;:0,&quot;colorType&quot;:1,&quot;foreColorIndex&quot;:2,&quot;transparency&quot;:0},&quot;type&quot;:1},&quot;glow&quot;:{&quot;colorType&quot;:0},&quot;line&quot;:{&quot;type&quot;:0},&quot;shadow&quot;:{&quot;colorType&quot;:0},&quot;threeD&quot;:{&quot;curvedSurface&quot;:{&quot;brightness&quot;:0,&quot;colorType&quot;:2,&quot;rgb&quot;:&quot;#000000&quot;},&quot;depth&quot;:{&quot;colorType&quot;:0}}}}"/>
+  <p:tag name="KSO_WM_BEAUTIFY_FLAG" val="#wm#"/>
+  <p:tag name="KSO_WM_UNIT_FILL_TYPE" val="3"/>
+  <p:tag name="KSO_WM_UNIT_LINE_FORE_SCHEMECOLOR_INDEX" val="2"/>
+  <p:tag name="KSO_WM_UNIT_LINE_FILL_TYPE" val="2"/>
+  <p:tag name="KSO_WM_UNIT_TEXT_FILL_FORE_SCHEMECOLOR_INDEX" val="2"/>
+  <p:tag name="KSO_WM_UNIT_TEXT_FILL_TYPE" val="1"/>
+  <p:tag name="KSO_WM_UNIT_USESOURCEFORMAT_APPLY" val="0"/>
+</p:tagLst>
+</file>
+
+<file path=ppt/tags/tag158.xml><?xml version="1.0" encoding="utf-8"?>
+<p:tagLst xmlns:p="http://schemas.openxmlformats.org/presentationml/2006/main">
+  <p:tag name="KSO_WM_UNIT_HIGHLIGHT" val="0"/>
+  <p:tag name="KSO_WM_UNIT_COMPATIBLE" val="0"/>
+  <p:tag name="KSO_WM_UNIT_DIAGRAM_ISNUMVISUAL" val="0"/>
+  <p:tag name="KSO_WM_UNIT_DIAGRAM_ISREFERUNIT" val="0"/>
+  <p:tag name="KSO_WM_UNIT_ID" val="diagram20231090_4*n_h_h_i*1_2_1_3"/>
+  <p:tag name="KSO_WM_TEMPLATE_CATEGORY" val="diagram"/>
+  <p:tag name="KSO_WM_TEMPLATE_INDEX" val="20231090"/>
+  <p:tag name="KSO_WM_UNIT_LAYERLEVEL" val="1_1_1_1"/>
+  <p:tag name="KSO_WM_TAG_VERSION" val="3.0"/>
+  <p:tag name="KSO_WM_DIAGRAM_GROUP_CODE" val="n1-1"/>
+  <p:tag name="KSO_WM_UNIT_TYPE" val="n_h_h_i"/>
+  <p:tag name="KSO_WM_UNIT_INDEX" val="1_2_1_3"/>
+  <p:tag name="KSO_WM_DIAGRAM_VERSION" val="3"/>
+  <p:tag name="KSO_WM_DIAGRAM_COLOR_TRICK" val="4"/>
+  <p:tag name="KSO_WM_DIAGRAM_COLOR_TEXT_CAN_REMOVE" val="n"/>
+  <p:tag name="KSO_WM_DIAGRAM_MAX_ITEMCNT" val="6"/>
+  <p:tag name="KSO_WM_DIAGRAM_MIN_ITEMCNT" val="3"/>
+  <p:tag name="KSO_WM_DIAGRAM_VIRTUALLY_FRAME" val="{&quot;height&quot;:382.3500061035156,&quot;left&quot;:21.1,&quot;top&quot;:116.39999694824219,&quot;width&quot;:884.3}"/>
+  <p:tag name="KSO_WM_DIAGRAM_COLOR_MATCH_VALUE" val="{&quot;shape&quot;:{&quot;fill&quot;:{&quot;gradient&quot;:[{&quot;brightness&quot;:0.20000000298023224,&quot;colorType&quot;:1,&quot;foreColorIndex&quot;:5,&quot;pos&quot;:1,&quot;transparency&quot;:0},{&quot;brightness&quot;:0,&quot;colorType&quot;:1,&quot;foreColorIndex&quot;:5,&quot;pos&quot;:0,&quot;transparency&quot;:0}],&quot;type&quot;:3},&quot;glow&quot;:{&quot;colorType&quot;:0},&quot;line&quot;:{&quot;solidLine&quot;:{&quot;brightness&quot;:0,&quot;colorType&quot;:1,&quot;foreColorIndex&quot;:2,&quot;transparency&quot;:0},&quot;type&quot;:1},&quot;shadow&quot;:{&quot;colorType&quot;:0},&quot;threeD&quot;:{&quot;curvedSurface&quot;:{&quot;brightness&quot;:0,&quot;colorType&quot;:2,&quot;rgb&quot;:&quot;#000000&quot;},&quot;depth&quot;:{&quot;colorType&quot;:0}}},&quot;text&quot;:{&quot;fill&quot;:{&quot;solid&quot;:{&quot;brightness&quot;:0,&quot;colorType&quot;:1,&quot;foreColorIndex&quot;:2,&quot;transparency&quot;:0},&quot;type&quot;:1},&quot;glow&quot;:{&quot;colorType&quot;:0},&quot;line&quot;:{&quot;type&quot;:0},&quot;shadow&quot;:{&quot;colorType&quot;:0},&quot;threeD&quot;:{&quot;curvedSurface&quot;:{&quot;brightness&quot;:0,&quot;colorType&quot;:2,&quot;rgb&quot;:&quot;#000000&quot;},&quot;depth&quot;:{&quot;colorType&quot;:0}}}}"/>
+  <p:tag name="KSO_WM_BEAUTIFY_FLAG" val="#wm#"/>
+  <p:tag name="KSO_WM_UNIT_FILL_TYPE" val="3"/>
+  <p:tag name="KSO_WM_UNIT_LINE_FORE_SCHEMECOLOR_INDEX" val="2"/>
+  <p:tag name="KSO_WM_UNIT_LINE_FILL_TYPE" val="2"/>
+  <p:tag name="KSO_WM_UNIT_TEXT_FILL_FORE_SCHEMECOLOR_INDEX" val="2"/>
+  <p:tag name="KSO_WM_UNIT_TEXT_FILL_TYPE" val="1"/>
+  <p:tag name="KSO_WM_UNIT_USESOURCEFORMAT_APPLY" val="0"/>
+</p:tagLst>
+</file>
+
+<file path=ppt/tags/tag159.xml><?xml version="1.0" encoding="utf-8"?>
+<p:tagLst xmlns:p="http://schemas.openxmlformats.org/presentationml/2006/main">
+  <p:tag name="KSO_WM_UNIT_HIGHLIGHT" val="0"/>
+  <p:tag name="KSO_WM_UNIT_COMPATIBLE" val="0"/>
+  <p:tag name="KSO_WM_UNIT_DIAGRAM_ISNUMVISUAL" val="0"/>
+  <p:tag name="KSO_WM_UNIT_DIAGRAM_ISREFERUNIT" val="0"/>
+  <p:tag name="KSO_WM_UNIT_ID" val="diagram20231090_4*n_h_a*1_1_1"/>
+  <p:tag name="KSO_WM_TEMPLATE_CATEGORY" val="diagram"/>
+  <p:tag name="KSO_WM_TEMPLATE_INDEX" val="20231090"/>
+  <p:tag name="KSO_WM_UNIT_LAYERLEVEL" val="1_1_1"/>
+  <p:tag name="KSO_WM_TAG_VERSION" val="3.0"/>
+  <p:tag name="KSO_WM_DIAGRAM_GROUP_CODE" val="n1-1"/>
+  <p:tag name="KSO_WM_UNIT_TYPE" val="n_h_a"/>
+  <p:tag name="KSO_WM_UNIT_INDEX" val="1_1_1"/>
+  <p:tag name="KSO_WM_UNIT_ISCONTENTSTITLE" val="0"/>
+  <p:tag name="KSO_WM_UNIT_ISNUMDGMTITLE" val="0"/>
+  <p:tag name="KSO_WM_UNIT_NOCLEAR" val="0"/>
+  <p:tag name="KSO_WM_DIAGRAM_VERSION" val="3"/>
+  <p:tag name="KSO_WM_DIAGRAM_COLOR_TRICK" val="4"/>
+  <p:tag name="KSO_WM_DIAGRAM_COLOR_TEXT_CAN_REMOVE" val="n"/>
+  <p:tag name="KSO_WM_DIAGRAM_MAX_ITEMCNT" val="6"/>
+  <p:tag name="KSO_WM_DIAGRAM_MIN_ITEMCNT" val="3"/>
+  <p:tag name="KSO_WM_DIAGRAM_VIRTUALLY_FRAME" val="{&quot;height&quot;:382.3500061035156,&quot;left&quot;:21.1,&quot;top&quot;:116.39999694824219,&quot;width&quot;:884.3}"/>
+  <p:tag name="KSO_WM_DIAGRAM_COLOR_MATCH_VALUE" val="{&quot;shape&quot;:{&quot;fill&quot;:{&quot;solid&quot;:{&quot;brightness&quot;:0,&quot;colorType&quot;:2,&quot;rgb&quot;:&quot;#ffffff&quot;,&quot;transparency&quot;:0},&quot;type&quot;:1},&quot;glow&quot;:{&quot;colorType&quot;:0},&quot;line&quot;:{&quot;type&quot;:0},&quot;shadow&quot;:{&quot;colorType&quot;:0},&quot;threeD&quot;:{&quot;curvedSurface&quot;:{&quot;brightness&quot;:0,&quot;colorType&quot;:2,&quot;rgb&quot;:&quot;#000000&quot;},&quot;depth&quot;:{&quot;colorType&quot;:0}}},&quot;text&quot;:{&quot;fill&quot;:{&quot;solid&quot;:{&quot;brightness&quot;:0,&quot;colorType&quot;:2,&quot;rgb&quot;:&quot;#262626&quot;,&quot;transparency&quot;:0},&quot;type&quot;:1},&quot;glow&quot;:{&quot;colorType&quot;:0},&quot;line&quot;:{&quot;type&quot;:0},&quot;shadow&quot;:{&quot;colorType&quot;:0},&quot;threeD&quot;:{&quot;curvedSurface&quot;:{&quot;brightness&quot;:0,&quot;colorType&quot;:2,&quot;rgb&quot;:&quot;#000000&quot;},&quot;depth&quot;:{&quot;colorType&quot;:0}}}}"/>
+  <p:tag name="KSO_WM_UNIT_FILL_FORE_SCHEMECOLOR_INDEX" val="14"/>
+  <p:tag name="KSO_WM_UNIT_FILL_FORE_SCHEMECOLOR_INDEX_BRIGHTNESS" val="0"/>
+  <p:tag name="KSO_WM_UNIT_TEXT_FILL_TYPE" val="1"/>
+  <p:tag name="KSO_WM_UNIT_TEXT_TYPE" val="1"/>
+  <p:tag name="KSO_WM_BEAUTIFY_FLAG" val="#wm#"/>
+  <p:tag name="KSO_WM_UNIT_PRESET_TEXT" val="单击此处&#10;添加标题"/>
+  <p:tag name="KSO_WM_UNIT_USESOURCEFORMAT_APPLY" val="0"/>
+</p:tagLst>
+</file>
+
 <file path=ppt/tags/tag16.xml><?xml version="1.0" encoding="utf-8"?>
 <p:tagLst xmlns:p="http://schemas.openxmlformats.org/presentationml/2006/main">
   <p:tag name="KSO_WM_DIAGRAM_VIRTUALLY_FRAME" val="{&quot;height&quot;:340,&quot;left&quot;:60,&quot;top&quot;:140,&quot;width&quot;:840}"/>
+</p:tagLst>
+</file>
+
+<file path=ppt/tags/tag160.xml><?xml version="1.0" encoding="utf-8"?>
+<p:tagLst xmlns:p="http://schemas.openxmlformats.org/presentationml/2006/main">
+  <p:tag name="KSO_WM_UNIT_HIGHLIGHT" val="0"/>
+  <p:tag name="KSO_WM_UNIT_COMPATIBLE" val="0"/>
+  <p:tag name="KSO_WM_UNIT_DIAGRAM_ISNUMVISUAL" val="0"/>
+  <p:tag name="KSO_WM_UNIT_DIAGRAM_ISREFERUNIT" val="0"/>
+  <p:tag name="KSO_WM_UNIT_ID" val="diagram20231090_4*n_h_h_i*1_2_2_1"/>
+  <p:tag name="KSO_WM_TEMPLATE_CATEGORY" val="diagram"/>
+  <p:tag name="KSO_WM_TEMPLATE_INDEX" val="20231090"/>
+  <p:tag name="KSO_WM_UNIT_LAYERLEVEL" val="1_1_1_1"/>
+  <p:tag name="KSO_WM_TAG_VERSION" val="3.0"/>
+  <p:tag name="KSO_WM_DIAGRAM_GROUP_CODE" val="n1-1"/>
+  <p:tag name="KSO_WM_UNIT_TYPE" val="n_h_h_i"/>
+  <p:tag name="KSO_WM_UNIT_INDEX" val="1_2_2_1"/>
+  <p:tag name="KSO_WM_DIAGRAM_VERSION" val="3"/>
+  <p:tag name="KSO_WM_DIAGRAM_COLOR_TRICK" val="4"/>
+  <p:tag name="KSO_WM_DIAGRAM_COLOR_TEXT_CAN_REMOVE" val="n"/>
+  <p:tag name="KSO_WM_DIAGRAM_MAX_ITEMCNT" val="6"/>
+  <p:tag name="KSO_WM_DIAGRAM_MIN_ITEMCNT" val="3"/>
+  <p:tag name="KSO_WM_DIAGRAM_VIRTUALLY_FRAME" val="{&quot;height&quot;:382.3500061035156,&quot;left&quot;:21.1,&quot;top&quot;:116.39999694824219,&quot;width&quot;:884.3}"/>
+  <p:tag name="KSO_WM_DIAGRAM_COLOR_MATCH_VALUE" val="{&quot;shape&quot;:{&quot;fill&quot;:{&quot;gradient&quot;:[{&quot;brightness&quot;:0.15000000596046448,&quot;colorType&quot;:1,&quot;foreColorIndex&quot;:6,&quot;pos&quot;:1,&quot;transparency&quot;:0},{&quot;brightness&quot;:0.25,&quot;colorType&quot;:1,&quot;foreColorIndex&quot;:6,&quot;pos&quot;:0,&quot;transparency&quot;:0}],&quot;type&quot;:3},&quot;glow&quot;:{&quot;colorType&quot;:0},&quot;line&quot;:{&quot;type&quot;:0},&quot;shadow&quot;:{&quot;colorType&quot;:0},&quot;threeD&quot;:{&quot;curvedSurface&quot;:{&quot;brightness&quot;:0,&quot;colorType&quot;:2,&quot;rgb&quot;:&quot;#000000&quot;},&quot;depth&quot;:{&quot;colorType&quot;:0}}},&quot;text&quot;:{&quot;fill&quot;:{&quot;solid&quot;:{&quot;brightness&quot;:0,&quot;colorType&quot;:1,&quot;foreColorIndex&quot;:1,&quot;transparency&quot;:0},&quot;type&quot;:1},&quot;glow&quot;:{&quot;colorType&quot;:0},&quot;line&quot;:{&quot;type&quot;:0},&quot;shadow&quot;:{&quot;colorType&quot;:0},&quot;threeD&quot;:{&quot;curvedSurface&quot;:{&quot;brightness&quot;:0,&quot;colorType&quot;:2,&quot;rgb&quot;:&quot;#000000&quot;},&quot;depth&quot;:{&quot;colorType&quot;:0}}}}"/>
+  <p:tag name="KSO_WM_BEAUTIFY_FLAG" val="#wm#"/>
+  <p:tag name="KSO_WM_UNIT_FILL_TYPE" val="3"/>
+  <p:tag name="KSO_WM_UNIT_TEXT_FILL_FORE_SCHEMECOLOR_INDEX" val="1"/>
+  <p:tag name="KSO_WM_UNIT_TEXT_FILL_TYPE" val="1"/>
+  <p:tag name="KSO_WM_UNIT_USESOURCEFORMAT_APPLY" val="0"/>
+</p:tagLst>
+</file>
+
+<file path=ppt/tags/tag161.xml><?xml version="1.0" encoding="utf-8"?>
+<p:tagLst xmlns:p="http://schemas.openxmlformats.org/presentationml/2006/main">
+  <p:tag name="KSO_WM_UNIT_HIGHLIGHT" val="0"/>
+  <p:tag name="KSO_WM_UNIT_COMPATIBLE" val="0"/>
+  <p:tag name="KSO_WM_UNIT_DIAGRAM_ISNUMVISUAL" val="0"/>
+  <p:tag name="KSO_WM_UNIT_DIAGRAM_ISREFERUNIT" val="0"/>
+  <p:tag name="KSO_WM_DIAGRAM_GROUP_CODE" val="n1-1"/>
+  <p:tag name="KSO_WM_UNIT_ID" val="diagram20231090_4*n_h_h_x*1_2_3_1"/>
+  <p:tag name="KSO_WM_TEMPLATE_CATEGORY" val="diagram"/>
+  <p:tag name="KSO_WM_TEMPLATE_INDEX" val="20231090"/>
+  <p:tag name="KSO_WM_UNIT_LAYERLEVEL" val="1_1_1_1"/>
+  <p:tag name="KSO_WM_TAG_VERSION" val="3.0"/>
+  <p:tag name="KSO_WM_UNIT_VALUE" val="77*77"/>
+  <p:tag name="KSO_WM_UNIT_TYPE" val="n_h_h_x"/>
+  <p:tag name="KSO_WM_UNIT_INDEX" val="1_2_3_1"/>
+  <p:tag name="KSO_WM_DIAGRAM_VERSION" val="3"/>
+  <p:tag name="KSO_WM_DIAGRAM_COLOR_TRICK" val="4"/>
+  <p:tag name="KSO_WM_DIAGRAM_COLOR_TEXT_CAN_REMOVE" val="n"/>
+  <p:tag name="KSO_WM_DIAGRAM_MAX_ITEMCNT" val="6"/>
+  <p:tag name="KSO_WM_DIAGRAM_MIN_ITEMCNT" val="3"/>
+  <p:tag name="KSO_WM_DIAGRAM_VIRTUALLY_FRAME" val="{&quot;height&quot;:382.3500061035156,&quot;left&quot;:21.1,&quot;top&quot;:116.39999694824219,&quot;width&quot;:884.3}"/>
+  <p:tag name="KSO_WM_DIAGRAM_COLOR_MATCH_VALUE" val="{&quot;shape&quot;:{&quot;fill&quot;:{&quot;solid&quot;:{&quot;brightness&quot;:0,&quot;colorType&quot;:2,&quot;rgb&quot;:&quot;#ffffff&quot;,&quot;transparency&quot;:0.10000000149011612},&quot;type&quot;:1},&quot;glow&quot;:{&quot;colorType&quot;:0},&quot;line&quot;:{&quot;type&quot;:0},&quot;shadow&quot;:{&quot;colorType&quot;:0},&quot;threeD&quot;:{&quot;curvedSurface&quot;:{&quot;brightness&quot;:0,&quot;colorType&quot;:2,&quot;rgb&quot;:&quot;#000000&quot;},&quot;depth&quot;:{&quot;colorType&quot;:0}}},&quot;text&quot;:{&quot;fill&quot;:{},&quot;glow&quot;:{},&quot;line&quot;:{},&quot;shadow&quot;:{},&quot;threeD&quot;:{}}}"/>
+  <p:tag name="KSO_WM_BEAUTIFY_FLAG" val="#wm#"/>
+  <p:tag name="KSO_WM_UNIT_FILL_TYPE" val="1"/>
+  <p:tag name="KSO_WM_UNIT_FILL_FORE_SCHEMECOLOR_INDEX" val="14"/>
+  <p:tag name="KSO_WM_UNIT_FILL_FORE_SCHEMECOLOR_INDEX_BRIGHTNESS" val="0"/>
+  <p:tag name="KSO_WM_UNIT_USESOURCEFORMAT_APPLY" val="0"/>
+</p:tagLst>
+</file>
+
+<file path=ppt/tags/tag162.xml><?xml version="1.0" encoding="utf-8"?>
+<p:tagLst xmlns:p="http://schemas.openxmlformats.org/presentationml/2006/main">
+  <p:tag name="KSO_WM_UNIT_HIGHLIGHT" val="0"/>
+  <p:tag name="KSO_WM_UNIT_COMPATIBLE" val="0"/>
+  <p:tag name="KSO_WM_UNIT_DIAGRAM_ISNUMVISUAL" val="0"/>
+  <p:tag name="KSO_WM_UNIT_DIAGRAM_ISREFERUNIT" val="0"/>
+  <p:tag name="KSO_WM_UNIT_ID" val="diagram20231090_4*n_h_h_i*1_2_6_1"/>
+  <p:tag name="KSO_WM_TEMPLATE_CATEGORY" val="diagram"/>
+  <p:tag name="KSO_WM_TEMPLATE_INDEX" val="20231090"/>
+  <p:tag name="KSO_WM_UNIT_LAYERLEVEL" val="1_1_1_1"/>
+  <p:tag name="KSO_WM_TAG_VERSION" val="3.0"/>
+  <p:tag name="KSO_WM_DIAGRAM_GROUP_CODE" val="n1-1"/>
+  <p:tag name="KSO_WM_UNIT_TYPE" val="n_h_h_i"/>
+  <p:tag name="KSO_WM_UNIT_INDEX" val="1_2_6_1"/>
+  <p:tag name="KSO_WM_DIAGRAM_VERSION" val="3"/>
+  <p:tag name="KSO_WM_DIAGRAM_COLOR_TRICK" val="4"/>
+  <p:tag name="KSO_WM_DIAGRAM_COLOR_TEXT_CAN_REMOVE" val="n"/>
+  <p:tag name="KSO_WM_DIAGRAM_MAX_ITEMCNT" val="6"/>
+  <p:tag name="KSO_WM_DIAGRAM_MIN_ITEMCNT" val="3"/>
+  <p:tag name="KSO_WM_DIAGRAM_VIRTUALLY_FRAME" val="{&quot;height&quot;:382.3500061035156,&quot;left&quot;:21.1,&quot;top&quot;:116.39999694824219,&quot;width&quot;:884.3}"/>
+  <p:tag name="KSO_WM_DIAGRAM_COLOR_MATCH_VALUE" val="{&quot;shape&quot;:{&quot;fill&quot;:{&quot;gradient&quot;:[{&quot;brightness&quot;:0.15000000596046448,&quot;colorType&quot;:1,&quot;foreColorIndex&quot;:8,&quot;pos&quot;:1,&quot;transparency&quot;:0},{&quot;brightness&quot;:0.25,&quot;colorType&quot;:1,&quot;foreColorIndex&quot;:8,&quot;pos&quot;:0,&quot;transparency&quot;:0}],&quot;type&quot;:3},&quot;glow&quot;:{&quot;colorType&quot;:0},&quot;line&quot;:{&quot;type&quot;:0},&quot;shadow&quot;:{&quot;colorType&quot;:0},&quot;threeD&quot;:{&quot;curvedSurface&quot;:{&quot;brightness&quot;:0,&quot;colorType&quot;:2,&quot;rgb&quot;:&quot;#000000&quot;},&quot;depth&quot;:{&quot;colorType&quot;:0}}},&quot;text&quot;:{&quot;fill&quot;:{&quot;solid&quot;:{&quot;brightness&quot;:0,&quot;colorType&quot;:1,&quot;foreColorIndex&quot;:1,&quot;transparency&quot;:0},&quot;type&quot;:1},&quot;glow&quot;:{&quot;colorType&quot;:0},&quot;line&quot;:{&quot;type&quot;:0},&quot;shadow&quot;:{&quot;colorType&quot;:0},&quot;threeD&quot;:{&quot;curvedSurface&quot;:{&quot;brightness&quot;:0,&quot;colorType&quot;:2,&quot;rgb&quot;:&quot;#000000&quot;},&quot;depth&quot;:{&quot;colorType&quot;:0}}}}"/>
+  <p:tag name="KSO_WM_BEAUTIFY_FLAG" val="#wm#"/>
+  <p:tag name="KSO_WM_UNIT_FILL_TYPE" val="3"/>
+  <p:tag name="KSO_WM_UNIT_TEXT_FILL_FORE_SCHEMECOLOR_INDEX" val="1"/>
+  <p:tag name="KSO_WM_UNIT_TEXT_FILL_TYPE" val="1"/>
+  <p:tag name="KSO_WM_UNIT_USESOURCEFORMAT_APPLY" val="0"/>
+</p:tagLst>
+</file>
+
+<file path=ppt/tags/tag163.xml><?xml version="1.0" encoding="utf-8"?>
+<p:tagLst xmlns:p="http://schemas.openxmlformats.org/presentationml/2006/main">
+  <p:tag name="KSO_WM_UNIT_HIGHLIGHT" val="0"/>
+  <p:tag name="KSO_WM_UNIT_COMPATIBLE" val="0"/>
+  <p:tag name="KSO_WM_UNIT_DIAGRAM_ISNUMVISUAL" val="0"/>
+  <p:tag name="KSO_WM_UNIT_DIAGRAM_ISREFERUNIT" val="0"/>
+  <p:tag name="KSO_WM_DIAGRAM_GROUP_CODE" val="n1-1"/>
+  <p:tag name="KSO_WM_UNIT_ID" val="diagram20231090_4*n_h_h_x*1_2_2_1"/>
+  <p:tag name="KSO_WM_TEMPLATE_CATEGORY" val="diagram"/>
+  <p:tag name="KSO_WM_TEMPLATE_INDEX" val="20231090"/>
+  <p:tag name="KSO_WM_UNIT_LAYERLEVEL" val="1_1_1_1"/>
+  <p:tag name="KSO_WM_TAG_VERSION" val="3.0"/>
+  <p:tag name="KSO_WM_DIAGRAM_VERSION" val="3"/>
+  <p:tag name="KSO_WM_DIAGRAM_COLOR_TRICK" val="4"/>
+  <p:tag name="KSO_WM_DIAGRAM_COLOR_TEXT_CAN_REMOVE" val="n"/>
+  <p:tag name="KSO_WM_UNIT_VALUE" val="73*65"/>
+  <p:tag name="KSO_WM_UNIT_TYPE" val="n_h_h_x"/>
+  <p:tag name="KSO_WM_UNIT_INDEX" val="1_2_2_1"/>
+  <p:tag name="KSO_WM_DIAGRAM_MAX_ITEMCNT" val="6"/>
+  <p:tag name="KSO_WM_DIAGRAM_MIN_ITEMCNT" val="3"/>
+  <p:tag name="KSO_WM_DIAGRAM_VIRTUALLY_FRAME" val="{&quot;height&quot;:382.3500061035156,&quot;left&quot;:21.1,&quot;top&quot;:116.39999694824219,&quot;width&quot;:884.3}"/>
+  <p:tag name="KSO_WM_DIAGRAM_COLOR_MATCH_VALUE" val="{&quot;shape&quot;:{&quot;fill&quot;:{&quot;solid&quot;:{&quot;brightness&quot;:0,&quot;colorType&quot;:2,&quot;rgb&quot;:&quot;#ffffff&quot;,&quot;transparency&quot;:0.10000000149011612},&quot;type&quot;:1},&quot;glow&quot;:{&quot;colorType&quot;:0},&quot;line&quot;:{&quot;type&quot;:0},&quot;shadow&quot;:{&quot;colorType&quot;:0},&quot;threeD&quot;:{&quot;curvedSurface&quot;:{&quot;brightness&quot;:0,&quot;colorType&quot;:2,&quot;rgb&quot;:&quot;#000000&quot;},&quot;depth&quot;:{&quot;colorType&quot;:0}}},&quot;text&quot;:{&quot;fill&quot;:{},&quot;glow&quot;:{},&quot;line&quot;:{},&quot;shadow&quot;:{},&quot;threeD&quot;:{}}}"/>
+  <p:tag name="KSO_WM_BEAUTIFY_FLAG" val="#wm#"/>
+  <p:tag name="KSO_WM_UNIT_FILL_TYPE" val="1"/>
+  <p:tag name="KSO_WM_UNIT_FILL_FORE_SCHEMECOLOR_INDEX" val="14"/>
+  <p:tag name="KSO_WM_UNIT_FILL_FORE_SCHEMECOLOR_INDEX_BRIGHTNESS" val="0"/>
+  <p:tag name="KSO_WM_UNIT_USESOURCEFORMAT_APPLY" val="0"/>
+</p:tagLst>
+</file>
+
+<file path=ppt/tags/tag164.xml><?xml version="1.0" encoding="utf-8"?>
+<p:tagLst xmlns:p="http://schemas.openxmlformats.org/presentationml/2006/main">
+  <p:tag name="KSO_WM_UNIT_HIGHLIGHT" val="0"/>
+  <p:tag name="KSO_WM_UNIT_COMPATIBLE" val="0"/>
+  <p:tag name="KSO_WM_UNIT_DIAGRAM_ISNUMVISUAL" val="0"/>
+  <p:tag name="KSO_WM_UNIT_DIAGRAM_ISREFERUNIT" val="0"/>
+  <p:tag name="KSO_WM_UNIT_ID" val="diagram20231090_4*n_h_h_i*1_2_4_1"/>
+  <p:tag name="KSO_WM_TEMPLATE_CATEGORY" val="diagram"/>
+  <p:tag name="KSO_WM_TEMPLATE_INDEX" val="20231090"/>
+  <p:tag name="KSO_WM_UNIT_LAYERLEVEL" val="1_1_1_1"/>
+  <p:tag name="KSO_WM_TAG_VERSION" val="3.0"/>
+  <p:tag name="KSO_WM_DIAGRAM_GROUP_CODE" val="n1-1"/>
+  <p:tag name="KSO_WM_UNIT_TYPE" val="n_h_h_i"/>
+  <p:tag name="KSO_WM_UNIT_INDEX" val="1_2_4_1"/>
+  <p:tag name="KSO_WM_DIAGRAM_VERSION" val="3"/>
+  <p:tag name="KSO_WM_DIAGRAM_COLOR_TRICK" val="4"/>
+  <p:tag name="KSO_WM_DIAGRAM_COLOR_TEXT_CAN_REMOVE" val="n"/>
+  <p:tag name="KSO_WM_DIAGRAM_MAX_ITEMCNT" val="6"/>
+  <p:tag name="KSO_WM_DIAGRAM_MIN_ITEMCNT" val="3"/>
+  <p:tag name="KSO_WM_DIAGRAM_VIRTUALLY_FRAME" val="{&quot;height&quot;:382.3500061035156,&quot;left&quot;:21.1,&quot;top&quot;:116.39999694824219,&quot;width&quot;:884.3}"/>
+  <p:tag name="KSO_WM_DIAGRAM_COLOR_MATCH_VALUE" val="{&quot;shape&quot;:{&quot;fill&quot;:{&quot;gradient&quot;:[{&quot;brightness&quot;:0.15000000596046448,&quot;colorType&quot;:1,&quot;foreColorIndex&quot;:7,&quot;pos&quot;:1,&quot;transparency&quot;:0},{&quot;brightness&quot;:0.25,&quot;colorType&quot;:1,&quot;foreColorIndex&quot;:7,&quot;pos&quot;:0,&quot;transparency&quot;:0}],&quot;type&quot;:3},&quot;glow&quot;:{&quot;colorType&quot;:0},&quot;line&quot;:{&quot;type&quot;:0},&quot;shadow&quot;:{&quot;colorType&quot;:0},&quot;threeD&quot;:{&quot;curvedSurface&quot;:{&quot;brightness&quot;:0,&quot;colorType&quot;:2,&quot;rgb&quot;:&quot;#000000&quot;},&quot;depth&quot;:{&quot;colorType&quot;:0}}},&quot;text&quot;:{&quot;fill&quot;:{&quot;solid&quot;:{&quot;brightness&quot;:0,&quot;colorType&quot;:1,&quot;foreColorIndex&quot;:1,&quot;transparency&quot;:0},&quot;type&quot;:1},&quot;glow&quot;:{&quot;colorType&quot;:0},&quot;line&quot;:{&quot;type&quot;:0},&quot;shadow&quot;:{&quot;colorType&quot;:0},&quot;threeD&quot;:{&quot;curvedSurface&quot;:{&quot;brightness&quot;:0,&quot;colorType&quot;:2,&quot;rgb&quot;:&quot;#000000&quot;},&quot;depth&quot;:{&quot;colorType&quot;:0}}}}"/>
+  <p:tag name="KSO_WM_BEAUTIFY_FLAG" val="#wm#"/>
+  <p:tag name="KSO_WM_UNIT_FILL_TYPE" val="3"/>
+  <p:tag name="KSO_WM_UNIT_TEXT_FILL_FORE_SCHEMECOLOR_INDEX" val="1"/>
+  <p:tag name="KSO_WM_UNIT_TEXT_FILL_TYPE" val="1"/>
+  <p:tag name="KSO_WM_UNIT_USESOURCEFORMAT_APPLY" val="0"/>
+</p:tagLst>
+</file>
+
+<file path=ppt/tags/tag165.xml><?xml version="1.0" encoding="utf-8"?>
+<p:tagLst xmlns:p="http://schemas.openxmlformats.org/presentationml/2006/main">
+  <p:tag name="KSO_WM_UNIT_HIGHLIGHT" val="0"/>
+  <p:tag name="KSO_WM_UNIT_COMPATIBLE" val="0"/>
+  <p:tag name="KSO_WM_UNIT_DIAGRAM_ISNUMVISUAL" val="0"/>
+  <p:tag name="KSO_WM_UNIT_DIAGRAM_ISREFERUNIT" val="0"/>
+  <p:tag name="KSO_WM_DIAGRAM_GROUP_CODE" val="n1-1"/>
+  <p:tag name="KSO_WM_UNIT_ID" val="diagram20231090_4*n_h_h_x*1_2_4_1"/>
+  <p:tag name="KSO_WM_TEMPLATE_CATEGORY" val="diagram"/>
+  <p:tag name="KSO_WM_TEMPLATE_INDEX" val="20231090"/>
+  <p:tag name="KSO_WM_UNIT_LAYERLEVEL" val="1_1_1_1"/>
+  <p:tag name="KSO_WM_TAG_VERSION" val="3.0"/>
+  <p:tag name="KSO_WM_DIAGRAM_VERSION" val="3"/>
+  <p:tag name="KSO_WM_DIAGRAM_COLOR_TRICK" val="4"/>
+  <p:tag name="KSO_WM_DIAGRAM_COLOR_TEXT_CAN_REMOVE" val="n"/>
+  <p:tag name="KSO_WM_UNIT_VALUE" val="73*60"/>
+  <p:tag name="KSO_WM_UNIT_TYPE" val="n_h_h_x"/>
+  <p:tag name="KSO_WM_UNIT_INDEX" val="1_2_4_1"/>
+  <p:tag name="KSO_WM_DIAGRAM_MAX_ITEMCNT" val="6"/>
+  <p:tag name="KSO_WM_DIAGRAM_MIN_ITEMCNT" val="3"/>
+  <p:tag name="KSO_WM_DIAGRAM_VIRTUALLY_FRAME" val="{&quot;height&quot;:382.3500061035156,&quot;left&quot;:21.1,&quot;top&quot;:116.39999694824219,&quot;width&quot;:884.3}"/>
+  <p:tag name="KSO_WM_DIAGRAM_COLOR_MATCH_VALUE" val="{&quot;shape&quot;:{&quot;fill&quot;:{&quot;solid&quot;:{&quot;brightness&quot;:0,&quot;colorType&quot;:2,&quot;rgb&quot;:&quot;#ffffff&quot;,&quot;transparency&quot;:0.10000000149011612},&quot;type&quot;:1},&quot;glow&quot;:{&quot;colorType&quot;:0},&quot;line&quot;:{&quot;type&quot;:0},&quot;shadow&quot;:{&quot;colorType&quot;:0},&quot;threeD&quot;:{&quot;curvedSurface&quot;:{&quot;brightness&quot;:0,&quot;colorType&quot;:2,&quot;rgb&quot;:&quot;#000000&quot;},&quot;depth&quot;:{&quot;colorType&quot;:0}}},&quot;text&quot;:{&quot;fill&quot;:{},&quot;glow&quot;:{},&quot;line&quot;:{},&quot;shadow&quot;:{},&quot;threeD&quot;:{}}}"/>
+  <p:tag name="KSO_WM_BEAUTIFY_FLAG" val="#wm#"/>
+  <p:tag name="KSO_WM_UNIT_FILL_TYPE" val="1"/>
+  <p:tag name="KSO_WM_UNIT_FILL_FORE_SCHEMECOLOR_INDEX" val="14"/>
+  <p:tag name="KSO_WM_UNIT_FILL_FORE_SCHEMECOLOR_INDEX_BRIGHTNESS" val="0"/>
+  <p:tag name="KSO_WM_UNIT_USESOURCEFORMAT_APPLY" val="0"/>
+</p:tagLst>
+</file>
+
+<file path=ppt/tags/tag166.xml><?xml version="1.0" encoding="utf-8"?>
+<p:tagLst xmlns:p="http://schemas.openxmlformats.org/presentationml/2006/main">
+  <p:tag name="KSO_WM_UNIT_HIGHLIGHT" val="0"/>
+  <p:tag name="KSO_WM_UNIT_COMPATIBLE" val="0"/>
+  <p:tag name="KSO_WM_UNIT_DIAGRAM_ISNUMVISUAL" val="0"/>
+  <p:tag name="KSO_WM_UNIT_DIAGRAM_ISREFERUNIT" val="0"/>
+  <p:tag name="KSO_WM_DIAGRAM_GROUP_CODE" val="n1-1"/>
+  <p:tag name="KSO_WM_UNIT_ID" val="diagram20231090_4*n_h_h_x*1_2_1_1"/>
+  <p:tag name="KSO_WM_TEMPLATE_CATEGORY" val="diagram"/>
+  <p:tag name="KSO_WM_TEMPLATE_INDEX" val="20231090"/>
+  <p:tag name="KSO_WM_UNIT_LAYERLEVEL" val="1_1_1_1"/>
+  <p:tag name="KSO_WM_TAG_VERSION" val="3.0"/>
+  <p:tag name="KSO_WM_DIAGRAM_VERSION" val="3"/>
+  <p:tag name="KSO_WM_DIAGRAM_COLOR_TRICK" val="4"/>
+  <p:tag name="KSO_WM_DIAGRAM_COLOR_TEXT_CAN_REMOVE" val="n"/>
+  <p:tag name="KSO_WM_UNIT_VALUE" val="80*68"/>
+  <p:tag name="KSO_WM_UNIT_TYPE" val="n_h_h_x"/>
+  <p:tag name="KSO_WM_UNIT_INDEX" val="1_2_1_1"/>
+  <p:tag name="KSO_WM_DIAGRAM_MAX_ITEMCNT" val="6"/>
+  <p:tag name="KSO_WM_DIAGRAM_MIN_ITEMCNT" val="3"/>
+  <p:tag name="KSO_WM_DIAGRAM_VIRTUALLY_FRAME" val="{&quot;height&quot;:382.3500061035156,&quot;left&quot;:21.1,&quot;top&quot;:116.39999694824219,&quot;width&quot;:884.3}"/>
+  <p:tag name="KSO_WM_DIAGRAM_COLOR_MATCH_VALUE" val="{&quot;shape&quot;:{&quot;fill&quot;:{&quot;solid&quot;:{&quot;brightness&quot;:0,&quot;colorType&quot;:2,&quot;rgb&quot;:&quot;#ffffff&quot;,&quot;transparency&quot;:0.10000000149011612},&quot;type&quot;:1},&quot;glow&quot;:{&quot;colorType&quot;:0},&quot;line&quot;:{&quot;type&quot;:0},&quot;shadow&quot;:{&quot;colorType&quot;:0},&quot;threeD&quot;:{&quot;curvedSurface&quot;:{&quot;brightness&quot;:0,&quot;colorType&quot;:2,&quot;rgb&quot;:&quot;#000000&quot;},&quot;depth&quot;:{&quot;colorType&quot;:0}}},&quot;text&quot;:{&quot;fill&quot;:{},&quot;glow&quot;:{},&quot;line&quot;:{},&quot;shadow&quot;:{},&quot;threeD&quot;:{}}}"/>
+  <p:tag name="KSO_WM_BEAUTIFY_FLAG" val="#wm#"/>
+  <p:tag name="KSO_WM_UNIT_FILL_TYPE" val="1"/>
+  <p:tag name="KSO_WM_UNIT_FILL_FORE_SCHEMECOLOR_INDEX" val="14"/>
+  <p:tag name="KSO_WM_UNIT_FILL_FORE_SCHEMECOLOR_INDEX_BRIGHTNESS" val="0"/>
+  <p:tag name="KSO_WM_UNIT_USESOURCEFORMAT_APPLY" val="0"/>
+</p:tagLst>
+</file>
+
+<file path=ppt/tags/tag167.xml><?xml version="1.0" encoding="utf-8"?>
+<p:tagLst xmlns:p="http://schemas.openxmlformats.org/presentationml/2006/main">
+  <p:tag name="KSO_WM_UNIT_HIGHLIGHT" val="0"/>
+  <p:tag name="KSO_WM_UNIT_COMPATIBLE" val="0"/>
+  <p:tag name="KSO_WM_UNIT_DIAGRAM_ISNUMVISUAL" val="0"/>
+  <p:tag name="KSO_WM_UNIT_DIAGRAM_ISREFERUNIT" val="0"/>
+  <p:tag name="KSO_WM_DIAGRAM_GROUP_CODE" val="n1-1"/>
+  <p:tag name="KSO_WM_UNIT_ID" val="diagram20231090_4*n_h_h_x*1_2_5_1"/>
+  <p:tag name="KSO_WM_TEMPLATE_CATEGORY" val="diagram"/>
+  <p:tag name="KSO_WM_TEMPLATE_INDEX" val="20231090"/>
+  <p:tag name="KSO_WM_UNIT_LAYERLEVEL" val="1_1_1_1"/>
+  <p:tag name="KSO_WM_TAG_VERSION" val="3.0"/>
+  <p:tag name="KSO_WM_DIAGRAM_VERSION" val="3"/>
+  <p:tag name="KSO_WM_DIAGRAM_COLOR_TRICK" val="4"/>
+  <p:tag name="KSO_WM_DIAGRAM_COLOR_TEXT_CAN_REMOVE" val="n"/>
+  <p:tag name="KSO_WM_UNIT_VALUE" val="69*69"/>
+  <p:tag name="KSO_WM_UNIT_TYPE" val="n_h_h_x"/>
+  <p:tag name="KSO_WM_UNIT_INDEX" val="1_2_5_1"/>
+  <p:tag name="KSO_WM_DIAGRAM_MAX_ITEMCNT" val="6"/>
+  <p:tag name="KSO_WM_DIAGRAM_MIN_ITEMCNT" val="3"/>
+  <p:tag name="KSO_WM_DIAGRAM_VIRTUALLY_FRAME" val="{&quot;height&quot;:382.3500061035156,&quot;left&quot;:21.1,&quot;top&quot;:116.39999694824219,&quot;width&quot;:884.3}"/>
+  <p:tag name="KSO_WM_DIAGRAM_COLOR_MATCH_VALUE" val="{&quot;shape&quot;:{&quot;fill&quot;:{&quot;solid&quot;:{&quot;brightness&quot;:0,&quot;colorType&quot;:2,&quot;rgb&quot;:&quot;#ffffff&quot;,&quot;transparency&quot;:0.10000000149011612},&quot;type&quot;:1},&quot;glow&quot;:{&quot;colorType&quot;:0},&quot;line&quot;:{&quot;type&quot;:0},&quot;shadow&quot;:{&quot;colorType&quot;:0},&quot;threeD&quot;:{&quot;curvedSurface&quot;:{&quot;brightness&quot;:0,&quot;colorType&quot;:2,&quot;rgb&quot;:&quot;#000000&quot;},&quot;depth&quot;:{&quot;colorType&quot;:0}}},&quot;text&quot;:{&quot;fill&quot;:{},&quot;glow&quot;:{},&quot;line&quot;:{},&quot;shadow&quot;:{},&quot;threeD&quot;:{}}}"/>
+  <p:tag name="KSO_WM_BEAUTIFY_FLAG" val="#wm#"/>
+  <p:tag name="KSO_WM_UNIT_FILL_TYPE" val="1"/>
+  <p:tag name="KSO_WM_UNIT_FILL_FORE_SCHEMECOLOR_INDEX" val="14"/>
+  <p:tag name="KSO_WM_UNIT_FILL_FORE_SCHEMECOLOR_INDEX_BRIGHTNESS" val="0"/>
+  <p:tag name="KSO_WM_UNIT_USESOURCEFORMAT_APPLY" val="0"/>
+</p:tagLst>
+</file>
+
+<file path=ppt/tags/tag168.xml><?xml version="1.0" encoding="utf-8"?>
+<p:tagLst xmlns:p="http://schemas.openxmlformats.org/presentationml/2006/main">
+  <p:tag name="KSO_WM_UNIT_HIGHLIGHT" val="0"/>
+  <p:tag name="KSO_WM_UNIT_COMPATIBLE" val="0"/>
+  <p:tag name="KSO_WM_UNIT_DIAGRAM_ISNUMVISUAL" val="0"/>
+  <p:tag name="KSO_WM_UNIT_DIAGRAM_ISREFERUNIT" val="0"/>
+  <p:tag name="KSO_WM_DIAGRAM_GROUP_CODE" val="n1-1"/>
+  <p:tag name="KSO_WM_UNIT_ID" val="diagram20231090_4*n_h_h_x*1_2_6_1"/>
+  <p:tag name="KSO_WM_TEMPLATE_CATEGORY" val="diagram"/>
+  <p:tag name="KSO_WM_TEMPLATE_INDEX" val="20231090"/>
+  <p:tag name="KSO_WM_UNIT_LAYERLEVEL" val="1_1_1_1"/>
+  <p:tag name="KSO_WM_TAG_VERSION" val="3.0"/>
+  <p:tag name="KSO_WM_DIAGRAM_VERSION" val="3"/>
+  <p:tag name="KSO_WM_DIAGRAM_COLOR_TRICK" val="4"/>
+  <p:tag name="KSO_WM_DIAGRAM_COLOR_TEXT_CAN_REMOVE" val="n"/>
+  <p:tag name="KSO_WM_UNIT_VALUE" val="72*61"/>
+  <p:tag name="KSO_WM_UNIT_TYPE" val="n_h_h_x"/>
+  <p:tag name="KSO_WM_UNIT_INDEX" val="1_2_6_1"/>
+  <p:tag name="KSO_WM_DIAGRAM_MAX_ITEMCNT" val="6"/>
+  <p:tag name="KSO_WM_DIAGRAM_MIN_ITEMCNT" val="3"/>
+  <p:tag name="KSO_WM_DIAGRAM_VIRTUALLY_FRAME" val="{&quot;height&quot;:382.3500061035156,&quot;left&quot;:21.1,&quot;top&quot;:116.39999694824219,&quot;width&quot;:884.3}"/>
+  <p:tag name="KSO_WM_DIAGRAM_COLOR_MATCH_VALUE" val="{&quot;shape&quot;:{&quot;fill&quot;:{&quot;solid&quot;:{&quot;brightness&quot;:0,&quot;colorType&quot;:2,&quot;rgb&quot;:&quot;#ffffff&quot;,&quot;transparency&quot;:0.10000000149011612},&quot;type&quot;:1},&quot;glow&quot;:{&quot;colorType&quot;:0},&quot;line&quot;:{&quot;type&quot;:0},&quot;shadow&quot;:{&quot;colorType&quot;:0},&quot;threeD&quot;:{&quot;curvedSurface&quot;:{&quot;brightness&quot;:0,&quot;colorType&quot;:2,&quot;rgb&quot;:&quot;#000000&quot;},&quot;depth&quot;:{&quot;colorType&quot;:0}}},&quot;text&quot;:{&quot;fill&quot;:{},&quot;glow&quot;:{},&quot;line&quot;:{},&quot;shadow&quot;:{},&quot;threeD&quot;:{}}}"/>
+  <p:tag name="KSO_WM_BEAUTIFY_FLAG" val="#wm#"/>
+  <p:tag name="KSO_WM_UNIT_FILL_TYPE" val="1"/>
+  <p:tag name="KSO_WM_UNIT_FILL_FORE_SCHEMECOLOR_INDEX" val="14"/>
+  <p:tag name="KSO_WM_UNIT_FILL_FORE_SCHEMECOLOR_INDEX_BRIGHTNESS" val="0"/>
+  <p:tag name="KSO_WM_UNIT_USESOURCEFORMAT_APPLY" val="0"/>
+</p:tagLst>
+</file>
+
+<file path=ppt/tags/tag169.xml><?xml version="1.0" encoding="utf-8"?>
+<p:tagLst xmlns:p="http://schemas.openxmlformats.org/presentationml/2006/main">
+  <p:tag name="KSO_WM_SLIDE_ID" val="diagram20231090_4"/>
+  <p:tag name="KSO_WM_TEMPLATE_SUBCATEGORY" val="0"/>
+  <p:tag name="KSO_WM_TEMPLATE_MASTER_TYPE" val="0"/>
+  <p:tag name="KSO_WM_TEMPLATE_COLOR_TYPE" val="0"/>
+  <p:tag name="KSO_WM_SLIDE_ITEM_CNT" val="6"/>
+  <p:tag name="KSO_WM_SLIDE_INDEX" val="4"/>
+  <p:tag name="KSO_WM_TAG_VERSION" val="3.0"/>
+  <p:tag name="KSO_WM_BEAUTIFY_FLAG" val="#wm#"/>
+  <p:tag name="KSO_WM_TEMPLATE_CATEGORY" val="custom"/>
+  <p:tag name="KSO_WM_TEMPLATE_INDEX" val="20238441"/>
+  <p:tag name="KSO_WM_SLIDE_TYPE" val="text"/>
+  <p:tag name="KSO_WM_SLIDE_SUBTYPE" val="diag"/>
+  <p:tag name="KSO_WM_SLIDE_SIZE" val="850.75*367.85"/>
+  <p:tag name="KSO_WM_SLIDE_POSITION" val="54.65*130.9"/>
+  <p:tag name="KSO_WM_SLIDE_LAYOUT" val="a_n"/>
+  <p:tag name="KSO_WM_SLIDE_LAYOUT_CNT" val="1_1"/>
+  <p:tag name="KSO_WM_SPECIAL_SOURCE" val="bdnull"/>
+  <p:tag name="KSO_WM_DIAGRAM_GROUP_CODE" val="n1-1"/>
+  <p:tag name="KSO_WM_SLIDE_DIAGTYPE" val="n"/>
 </p:tagLst>
 </file>
 
@@ -41399,9 +49290,665 @@
 </p:tagLst>
 </file>
 
+<file path=ppt/tags/tag170.xml><?xml version="1.0" encoding="utf-8"?>
+<p:tagLst xmlns:p="http://schemas.openxmlformats.org/presentationml/2006/main">
+  <p:tag name="KSO_WM_UNIT_FILL_FORE_SCHEMECOLOR_INDEX_1_BRIGHTNESS" val="0"/>
+  <p:tag name="KSO_WM_UNIT_FILL_FORE_SCHEMECOLOR_INDEX_1" val="10"/>
+  <p:tag name="KSO_WM_UNIT_FILL_FORE_SCHEMECOLOR_INDEX_1_POS" val="0.04"/>
+  <p:tag name="KSO_WM_UNIT_FILL_FORE_SCHEMECOLOR_INDEX_1_TRANS" val="0"/>
+  <p:tag name="KSO_WM_UNIT_FILL_FORE_SCHEMECOLOR_INDEX_2_BRIGHTNESS" val="0"/>
+  <p:tag name="KSO_WM_UNIT_FILL_FORE_SCHEMECOLOR_INDEX_2" val="5"/>
+  <p:tag name="KSO_WM_UNIT_FILL_FORE_SCHEMECOLOR_INDEX_2_POS" val="0.54"/>
+  <p:tag name="KSO_WM_UNIT_FILL_FORE_SCHEMECOLOR_INDEX_2_TRANS" val="0"/>
+  <p:tag name="KSO_WM_UNIT_FILL_FORE_SCHEMECOLOR_INDEX_3_BRIGHTNESS" val="0"/>
+  <p:tag name="KSO_WM_UNIT_FILL_FORE_SCHEMECOLOR_INDEX_3" val="5"/>
+  <p:tag name="KSO_WM_UNIT_FILL_FORE_SCHEMECOLOR_INDEX_3_POS" val="1"/>
+  <p:tag name="KSO_WM_UNIT_FILL_FORE_SCHEMECOLOR_INDEX_3_TRANS" val="0"/>
+  <p:tag name="KSO_WM_UNIT_FILL_GRADIENT_TYPE" val="0"/>
+  <p:tag name="KSO_WM_UNIT_FILL_GRADIENT_ANGLE" val="45"/>
+  <p:tag name="KSO_WM_UNIT_FILL_GRADIENT_DIRECTION" val="0"/>
+  <p:tag name="KSO_WM_UNIT_FILL_TYPE" val="3"/>
+  <p:tag name="KSO_WM_UNIT_TEXT_FILL_FORE_SCHEMECOLOR_INDEX_BRIGHTNESS" val="0"/>
+  <p:tag name="KSO_WM_UNIT_TEXT_FILL_TYPE" val="1"/>
+  <p:tag name="KSO_WM_UNIT_LINE_FORE_SCHEMECOLOR_INDEX_1_BRIGHTNESS" val="0"/>
+  <p:tag name="KSO_WM_UNIT_LINE_FORE_SCHEMECOLOR_INDEX_1" val="5"/>
+  <p:tag name="KSO_WM_UNIT_LINE_FORE_SCHEMECOLOR_INDEX_1_POS" val="0"/>
+  <p:tag name="KSO_WM_UNIT_LINE_FORE_SCHEMECOLOR_INDEX_1_TRANS" val="1"/>
+  <p:tag name="KSO_WM_UNIT_LINE_FORE_SCHEMECOLOR_INDEX_2_BRIGHTNESS" val="0"/>
+  <p:tag name="KSO_WM_UNIT_LINE_FORE_SCHEMECOLOR_INDEX_2" val="5"/>
+  <p:tag name="KSO_WM_UNIT_LINE_FORE_SCHEMECOLOR_INDEX_2_POS" val="0.64"/>
+  <p:tag name="KSO_WM_UNIT_LINE_FORE_SCHEMECOLOR_INDEX_2_TRANS" val="0"/>
+  <p:tag name="KSO_WM_UNIT_LINE_FORE_SCHEMECOLOR_INDEX_3_BRIGHTNESS" val="0.8"/>
+  <p:tag name="KSO_WM_UNIT_LINE_FORE_SCHEMECOLOR_INDEX_3" val="15"/>
+  <p:tag name="KSO_WM_UNIT_LINE_FORE_SCHEMECOLOR_INDEX_3_POS" val="0.9"/>
+  <p:tag name="KSO_WM_UNIT_LINE_FORE_SCHEMECOLOR_INDEX_3_TRANS" val="0.53"/>
+  <p:tag name="KSO_WM_UNIT_LINE_FORE_SCHEMECOLOR_INDEX_4_BRIGHTNESS" val="0.8"/>
+  <p:tag name="KSO_WM_UNIT_LINE_FORE_SCHEMECOLOR_INDEX_4" val="15"/>
+  <p:tag name="KSO_WM_UNIT_LINE_FORE_SCHEMECOLOR_INDEX_4_POS" val="0.95"/>
+  <p:tag name="KSO_WM_UNIT_LINE_FORE_SCHEMECOLOR_INDEX_4_TRANS" val="0"/>
+  <p:tag name="KSO_WM_UNIT_LINE_FORE_SCHEMECOLOR_INDEX_5_BRIGHTNESS" val="0.8"/>
+  <p:tag name="KSO_WM_UNIT_LINE_FORE_SCHEMECOLOR_INDEX_5" val="15"/>
+  <p:tag name="KSO_WM_UNIT_LINE_FORE_SCHEMECOLOR_INDEX_5_POS" val="1"/>
+  <p:tag name="KSO_WM_UNIT_LINE_FORE_SCHEMECOLOR_INDEX_5_TRANS" val="0.9"/>
+  <p:tag name="KSO_WM_UNIT_LINE_GRADIENT_TYPE" val="0"/>
+  <p:tag name="KSO_WM_UNIT_LINE_GRADIENT_ANGLE" val="0"/>
+  <p:tag name="KSO_WM_UNIT_LINE_GRADIENT_DIRECTION" val="3"/>
+  <p:tag name="KSO_WM_UNIT_LINE_FILL_TYPE" val="5"/>
+  <p:tag name="KSO_WM_BEAUTIFY_FLAG" val="#wm#"/>
+  <p:tag name="KSO_WM_UNIT_HIGHLIGHT" val="0"/>
+  <p:tag name="KSO_WM_UNIT_COMPATIBLE" val="0"/>
+  <p:tag name="KSO_WM_UNIT_DIAGRAM_ISNUMVISUAL" val="0"/>
+  <p:tag name="KSO_WM_UNIT_DIAGRAM_ISREFERUNIT" val="0"/>
+  <p:tag name="KSO_WM_UNIT_ID" val="diagram20230945_3*n_h_i*1_2_1"/>
+  <p:tag name="KSO_WM_TEMPLATE_CATEGORY" val="diagram"/>
+  <p:tag name="KSO_WM_TEMPLATE_INDEX" val="20230945"/>
+  <p:tag name="KSO_WM_UNIT_LAYERLEVEL" val="1_1_1"/>
+  <p:tag name="KSO_WM_TAG_VERSION" val="3.0"/>
+  <p:tag name="KSO_WM_DIAGRAM_VERSION" val="3"/>
+  <p:tag name="KSO_WM_DIAGRAM_COLOR_TRICK" val="3"/>
+  <p:tag name="KSO_WM_DIAGRAM_COLOR_TEXT_CAN_REMOVE" val="n"/>
+  <p:tag name="KSO_WM_DIAGRAM_GROUP_CODE" val="n1-1"/>
+  <p:tag name="KSO_WM_UNIT_TYPE" val="n_h_i"/>
+  <p:tag name="KSO_WM_UNIT_INDEX" val="1_2_1"/>
+  <p:tag name="KSO_WM_DIAGRAM_MAX_ITEMCNT" val="4"/>
+  <p:tag name="KSO_WM_DIAGRAM_MIN_ITEMCNT" val="2"/>
+  <p:tag name="KSO_WM_DIAGRAM_VIRTUALLY_FRAME" val="{&quot;height&quot;:389.44646137868324,&quot;left&quot;:36.37472440944882,&quot;top&quot;:113.1,&quot;width&quot;:913.9252755905512}"/>
+  <p:tag name="KSO_WM_DIAGRAM_COLOR_MATCH_VALUE" val="{&quot;shape&quot;:{&quot;fill&quot;:{&quot;type&quot;:0},&quot;glow&quot;:{&quot;colorType&quot;:0},&quot;line&quot;:{&quot;gradient&quot;:[{&quot;brightness&quot;:0.5,&quot;colorType&quot;:1,&quot;foreColorIndex&quot;:13,&quot;pos&quot;:1,&quot;transparency&quot;:0.699999988079071},{&quot;brightness&quot;:0.800000011920929,&quot;colorType&quot;:2,&quot;pos&quot;:0.15000000596046448,&quot;rgb&quot;:&quot;#ffffff&quot;,&quot;transparency&quot;:1}],&quot;type&quot;:2},&quot;shadow&quot;:{&quot;colorType&quot;:0},&quot;threeD&quot;:{&quot;curvedSurface&quot;:{&quot;brightness&quot;:0,&quot;colorType&quot;:2,&quot;rgb&quot;:&quot;#000000&quot;},&quot;depth&quot;:{&quot;colorType&quot;:0}}},&quot;text&quot;:{&quot;fill&quot;:{&quot;solid&quot;:{&quot;brightness&quot;:0,&quot;colorType&quot;:1,&quot;foreColorIndex&quot;:2,&quot;transparency&quot;:0},&quot;type&quot;:1},&quot;glow&quot;:{&quot;colorType&quot;:0},&quot;line&quot;:{&quot;type&quot;:0},&quot;shadow&quot;:{&quot;colorType&quot;:0},&quot;threeD&quot;:{&quot;curvedSurface&quot;:{&quot;brightness&quot;:0,&quot;colorType&quot;:2,&quot;rgb&quot;:&quot;#000000&quot;},&quot;depth&quot;:{&quot;colorType&quot;:0}}}}"/>
+  <p:tag name="KSO_WM_UNIT_USESOURCEFORMAT_APPLY" val="0"/>
+</p:tagLst>
+</file>
+
+<file path=ppt/tags/tag171.xml><?xml version="1.0" encoding="utf-8"?>
+<p:tagLst xmlns:p="http://schemas.openxmlformats.org/presentationml/2006/main">
+  <p:tag name="KSO_WM_UNIT_FILL_FORE_SCHEMECOLOR_INDEX_1_BRIGHTNESS" val="0"/>
+  <p:tag name="KSO_WM_UNIT_FILL_FORE_SCHEMECOLOR_INDEX_1" val="10"/>
+  <p:tag name="KSO_WM_UNIT_FILL_FORE_SCHEMECOLOR_INDEX_1_POS" val="0.04"/>
+  <p:tag name="KSO_WM_UNIT_FILL_FORE_SCHEMECOLOR_INDEX_1_TRANS" val="0"/>
+  <p:tag name="KSO_WM_UNIT_FILL_FORE_SCHEMECOLOR_INDEX_2_BRIGHTNESS" val="0"/>
+  <p:tag name="KSO_WM_UNIT_FILL_FORE_SCHEMECOLOR_INDEX_2" val="5"/>
+  <p:tag name="KSO_WM_UNIT_FILL_FORE_SCHEMECOLOR_INDEX_2_POS" val="0.54"/>
+  <p:tag name="KSO_WM_UNIT_FILL_FORE_SCHEMECOLOR_INDEX_2_TRANS" val="0"/>
+  <p:tag name="KSO_WM_UNIT_FILL_FORE_SCHEMECOLOR_INDEX_3_BRIGHTNESS" val="0"/>
+  <p:tag name="KSO_WM_UNIT_FILL_FORE_SCHEMECOLOR_INDEX_3" val="5"/>
+  <p:tag name="KSO_WM_UNIT_FILL_FORE_SCHEMECOLOR_INDEX_3_POS" val="1"/>
+  <p:tag name="KSO_WM_UNIT_FILL_FORE_SCHEMECOLOR_INDEX_3_TRANS" val="0"/>
+  <p:tag name="KSO_WM_UNIT_FILL_GRADIENT_TYPE" val="0"/>
+  <p:tag name="KSO_WM_UNIT_FILL_GRADIENT_ANGLE" val="45"/>
+  <p:tag name="KSO_WM_UNIT_FILL_GRADIENT_DIRECTION" val="0"/>
+  <p:tag name="KSO_WM_UNIT_TEXT_FILL_FORE_SCHEMECOLOR_INDEX_BRIGHTNESS" val="0"/>
+  <p:tag name="KSO_WM_UNIT_LINE_FORE_SCHEMECOLOR_INDEX_1_BRIGHTNESS" val="0.95"/>
+  <p:tag name="KSO_WM_UNIT_LINE_FORE_SCHEMECOLOR_INDEX_1" val="5"/>
+  <p:tag name="KSO_WM_UNIT_LINE_FORE_SCHEMECOLOR_INDEX_1_POS" val="0.09"/>
+  <p:tag name="KSO_WM_UNIT_LINE_FORE_SCHEMECOLOR_INDEX_1_TRANS" val="0.3"/>
+  <p:tag name="KSO_WM_BEAUTIFY_FLAG" val="#wm#"/>
+  <p:tag name="KSO_WM_UNIT_HIGHLIGHT" val="0"/>
+  <p:tag name="KSO_WM_UNIT_COMPATIBLE" val="0"/>
+  <p:tag name="KSO_WM_UNIT_DIAGRAM_ISNUMVISUAL" val="0"/>
+  <p:tag name="KSO_WM_UNIT_DIAGRAM_ISREFERUNIT" val="0"/>
+  <p:tag name="KSO_WM_UNIT_ID" val="diagram20230945_3*n_h_a*1_1_1"/>
+  <p:tag name="KSO_WM_TEMPLATE_CATEGORY" val="diagram"/>
+  <p:tag name="KSO_WM_TEMPLATE_INDEX" val="20230945"/>
+  <p:tag name="KSO_WM_UNIT_LAYERLEVEL" val="1_1_1"/>
+  <p:tag name="KSO_WM_TAG_VERSION" val="3.0"/>
+  <p:tag name="KSO_WM_DIAGRAM_VERSION" val="3"/>
+  <p:tag name="KSO_WM_DIAGRAM_COLOR_TRICK" val="3"/>
+  <p:tag name="KSO_WM_DIAGRAM_COLOR_TEXT_CAN_REMOVE" val="n"/>
+  <p:tag name="KSO_WM_UNIT_ISCONTENTSTITLE" val="0"/>
+  <p:tag name="KSO_WM_UNIT_ISNUMDGMTITLE" val="0"/>
+  <p:tag name="KSO_WM_UNIT_NOCLEAR" val="0"/>
+  <p:tag name="KSO_WM_UNIT_VALUE" val="30"/>
+  <p:tag name="KSO_WM_DIAGRAM_GROUP_CODE" val="n1-1"/>
+  <p:tag name="KSO_WM_UNIT_TYPE" val="n_h_a"/>
+  <p:tag name="KSO_WM_UNIT_INDEX" val="1_1_1"/>
+  <p:tag name="KSO_WM_DIAGRAM_MAX_ITEMCNT" val="4"/>
+  <p:tag name="KSO_WM_DIAGRAM_MIN_ITEMCNT" val="2"/>
+  <p:tag name="KSO_WM_DIAGRAM_VIRTUALLY_FRAME" val="{&quot;height&quot;:389.44646137868324,&quot;left&quot;:36.37472440944882,&quot;top&quot;:113.1,&quot;width&quot;:913.9252755905512}"/>
+  <p:tag name="KSO_WM_DIAGRAM_COLOR_MATCH_VALUE" val="{&quot;shape&quot;:{&quot;fill&quot;:{&quot;solid&quot;:{&quot;brightness&quot;:0,&quot;colorType&quot;:1,&quot;foreColorIndex&quot;:5,&quot;transparency&quot;:0},&quot;type&quot;:1},&quot;glow&quot;:{&quot;colorType&quot;:0},&quot;line&quot;:{&quot;gradient&quot;:[{&quot;brightness&quot;:0,&quot;colorType&quot;:2,&quot;pos&quot;:0.3700000047683716,&quot;rgb&quot;:&quot;#ffffff&quot;,&quot;transparency&quot;:0},{&quot;brightness&quot;:0.550000011920929,&quot;colorType&quot;:1,&quot;foreColorIndex&quot;:5,&quot;pos&quot;:0,&quot;transparency&quot;:0},{&quot;brightness&quot;:0,&quot;colorType&quot;:2,&quot;pos&quot;:1,&quot;rgb&quot;:&quot;#ffffff&quot;,&quot;transparency&quot;:0},{&quot;brightness&quot;:0.699999988079071,&quot;colorType&quot;:1,&quot;foreColorIndex&quot;:5,&quot;pos&quot;:0.7099999785423279,&quot;transparency&quot;:0}],&quot;type&quot;:2},&quot;shadow&quot;:{&quot;colorType&quot;:0},&quot;threeD&quot;:{&quot;curvedSurface&quot;:{&quot;brightness&quot;:0,&quot;colorType&quot;:2,&quot;rgb&quot;:&quot;#000000&quot;},&quot;depth&quot;:{&quot;colorType&quot;:0}}},&quot;text&quot;:{&quot;fill&quot;:{&quot;solid&quot;:{&quot;brightness&quot;:0,&quot;colorType&quot;:2,&quot;rgb&quot;:&quot;#ffffff&quot;,&quot;transparency&quot;:0},&quot;type&quot;:1},&quot;glow&quot;:{&quot;colorType&quot;:0},&quot;line&quot;:{&quot;type&quot;:0},&quot;shadow&quot;:{&quot;colorType&quot;:0},&quot;threeD&quot;:{&quot;curvedSurface&quot;:{&quot;brightness&quot;:0,&quot;colorType&quot;:2,&quot;rgb&quot;:&quot;#000000&quot;},&quot;depth&quot;:{&quot;colorType&quot;:0}}}}"/>
+  <p:tag name="KSO_WM_UNIT_TEXT_FILL_TYPE" val="1"/>
+  <p:tag name="KSO_WM_UNIT_TEXT_TYPE" val="1"/>
+  <p:tag name="KSO_WM_UNIT_PRESET_TEXT" val="单击添加&#10;项标题"/>
+  <p:tag name="KSO_WM_UNIT_FILL_TYPE" val="1"/>
+  <p:tag name="KSO_WM_UNIT_FILL_FORE_SCHEMECOLOR_INDEX" val="5"/>
+  <p:tag name="KSO_WM_UNIT_FILL_FORE_SCHEMECOLOR_INDEX_BRIGHTNESS" val="0"/>
+  <p:tag name="KSO_WM_UNIT_LINE_FORE_SCHEMECOLOR_INDEX" val="5"/>
+  <p:tag name="KSO_WM_UNIT_USESOURCEFORMAT_APPLY" val="0"/>
+</p:tagLst>
+</file>
+
+<file path=ppt/tags/tag172.xml><?xml version="1.0" encoding="utf-8"?>
+<p:tagLst xmlns:p="http://schemas.openxmlformats.org/presentationml/2006/main">
+  <p:tag name="KSO_WM_UNIT_ISCONTENTSTITLE" val="0"/>
+  <p:tag name="KSO_WM_UNIT_ISNUMDGMTITLE" val="0"/>
+  <p:tag name="KSO_WM_UNIT_NOCLEAR" val="0"/>
+  <p:tag name="KSO_WM_UNIT_VALUE" val="30"/>
+  <p:tag name="KSO_WM_UNIT_HIGHLIGHT" val="0"/>
+  <p:tag name="KSO_WM_UNIT_COMPATIBLE" val="0"/>
+  <p:tag name="KSO_WM_UNIT_DIAGRAM_ISNUMVISUAL" val="0"/>
+  <p:tag name="KSO_WM_UNIT_DIAGRAM_ISREFERUNIT" val="0"/>
+  <p:tag name="KSO_WM_UNIT_TYPE" val="a"/>
+  <p:tag name="KSO_WM_UNIT_INDEX" val="1"/>
+  <p:tag name="KSO_WM_UNIT_ID" val="diagram20230945_3*a*1"/>
+  <p:tag name="KSO_WM_TEMPLATE_CATEGORY" val="diagram"/>
+  <p:tag name="KSO_WM_TEMPLATE_INDEX" val="20230945"/>
+  <p:tag name="KSO_WM_UNIT_LAYERLEVEL" val="1"/>
+  <p:tag name="KSO_WM_TAG_VERSION" val="3.0"/>
+  <p:tag name="KSO_WM_BEAUTIFY_FLAG" val="#wm#"/>
+  <p:tag name="KSO_WM_DIAGRAM_GROUP_CODE" val="n1-1"/>
+  <p:tag name="KSO_WM_UNIT_TEXT_TYPE" val="1"/>
+  <p:tag name="KSO_WM_UNIT_PRESET_TEXT" val="单击此处添加标题"/>
+  <p:tag name="KSO_WM_UNIT_TEXT_FILL_FORE_SCHEMECOLOR_INDEX" val="13"/>
+  <p:tag name="KSO_WM_UNIT_TEXT_FILL_TYPE" val="1"/>
+  <p:tag name="KSO_WM_UNIT_USESOURCEFORMAT_APPLY" val="0"/>
+</p:tagLst>
+</file>
+
+<file path=ppt/tags/tag173.xml><?xml version="1.0" encoding="utf-8"?>
+<p:tagLst xmlns:p="http://schemas.openxmlformats.org/presentationml/2006/main">
+  <p:tag name="KSO_WM_UNIT_SUBTYPE" val="a"/>
+  <p:tag name="KSO_WM_UNIT_NOCLEAR" val="0"/>
+  <p:tag name="KSO_WM_UNIT_VALUE" val="60"/>
+  <p:tag name="KSO_WM_UNIT_HIGHLIGHT" val="0"/>
+  <p:tag name="KSO_WM_UNIT_COMPATIBLE" val="0"/>
+  <p:tag name="KSO_WM_UNIT_DIAGRAM_ISNUMVISUAL" val="0"/>
+  <p:tag name="KSO_WM_UNIT_DIAGRAM_ISREFERUNIT" val="0"/>
+  <p:tag name="KSO_WM_UNIT_TYPE" val="n_h_h_f"/>
+  <p:tag name="KSO_WM_UNIT_INDEX" val="1_2_4_1"/>
+  <p:tag name="KSO_WM_UNIT_ID" val="diagram20230945_3*n_h_h_f*1_2_4_1"/>
+  <p:tag name="KSO_WM_TEMPLATE_CATEGORY" val="diagram"/>
+  <p:tag name="KSO_WM_TEMPLATE_INDEX" val="20230945"/>
+  <p:tag name="KSO_WM_UNIT_LAYERLEVEL" val="1_1_1_1"/>
+  <p:tag name="KSO_WM_TAG_VERSION" val="3.0"/>
+  <p:tag name="KSO_WM_DIAGRAM_GROUP_CODE" val="n1-1"/>
+  <p:tag name="KSO_WM_DIAGRAM_VERSION" val="3"/>
+  <p:tag name="KSO_WM_DIAGRAM_COLOR_TRICK" val="3"/>
+  <p:tag name="KSO_WM_DIAGRAM_COLOR_TEXT_CAN_REMOVE" val="n"/>
+  <p:tag name="KSO_WM_DIAGRAM_MAX_ITEMCNT" val="4"/>
+  <p:tag name="KSO_WM_DIAGRAM_MIN_ITEMCNT" val="2"/>
+  <p:tag name="KSO_WM_DIAGRAM_VIRTUALLY_FRAME" val="{&quot;height&quot;:389.44646137868324,&quot;left&quot;:36.37472440944882,&quot;top&quot;:113.1,&quot;width&quot;:913.9252755905512}"/>
+  <p:tag name="KSO_WM_DIAGRAM_COLOR_MATCH_VALUE" val="{&quot;shape&quot;:{&quot;fill&quot;:{&quot;type&quot;:0},&quot;glow&quot;:{&quot;colorType&quot;:0},&quot;line&quot;:{&quot;type&quot;:0},&quot;shadow&quot;:{&quot;colorType&quot;:0},&quot;threeD&quot;:{&quot;curvedSurface&quot;:{&quot;brightness&quot;:0,&quot;colorType&quot;:2,&quot;rgb&quot;:&quot;#000000&quot;},&quot;depth&quot;:{&quot;colorType&quot;:0}}},&quot;text&quot;:{&quot;fill&quot;:{&quot;solid&quot;:{&quot;brightness&quot;:0.15000000596046448,&quot;colorType&quot;:1,&quot;foreColorIndex&quot;:13,&quot;transparency&quot;:0},&quot;type&quot;:1},&quot;glow&quot;:{&quot;colorType&quot;:0},&quot;line&quot;:{&quot;type&quot;:0},&quot;shadow&quot;:{&quot;colorType&quot;:0},&quot;threeD&quot;:{&quot;curvedSurface&quot;:{&quot;brightness&quot;:0,&quot;colorType&quot;:2,&quot;rgb&quot;:&quot;#000000&quot;},&quot;depth&quot;:{&quot;colorType&quot;:0}}}}"/>
+  <p:tag name="KSO_WM_BEAUTIFY_FLAG" val="#wm#"/>
+  <p:tag name="KSO_WM_UNIT_TEXT_TYPE" val="1"/>
+  <p:tag name="KSO_WM_UNIT_TEXT_LAYER_COUNT" val="1"/>
+  <p:tag name="KSO_WM_UNIT_PRESET_TEXT" val="单击此处输入你的智能图形项正文，文字是您思想的提炼，请尽量言简意赅的阐述观点。单击此处输入你的智能图形项正文，文字是您思想的提炼。单击此处输入你的智能图形项正文，文字是您思想的提炼。"/>
+  <p:tag name="KSO_WM_UNIT_TEXT_FILL_FORE_SCHEMECOLOR_INDEX" val="1"/>
+  <p:tag name="KSO_WM_UNIT_TEXT_FILL_TYPE" val="1"/>
+  <p:tag name="KSO_WM_UNIT_USESOURCEFORMAT_APPLY" val="0"/>
+</p:tagLst>
+</file>
+
+<file path=ppt/tags/tag174.xml><?xml version="1.0" encoding="utf-8"?>
+<p:tagLst xmlns:p="http://schemas.openxmlformats.org/presentationml/2006/main">
+  <p:tag name="KSO_WM_UNIT_ISCONTENTSTITLE" val="0"/>
+  <p:tag name="KSO_WM_UNIT_ISNUMDGMTITLE" val="0"/>
+  <p:tag name="KSO_WM_UNIT_NOCLEAR" val="0"/>
+  <p:tag name="KSO_WM_UNIT_VALUE" val="10"/>
+  <p:tag name="KSO_WM_UNIT_HIGHLIGHT" val="0"/>
+  <p:tag name="KSO_WM_UNIT_COMPATIBLE" val="0"/>
+  <p:tag name="KSO_WM_UNIT_DIAGRAM_ISNUMVISUAL" val="0"/>
+  <p:tag name="KSO_WM_UNIT_DIAGRAM_ISREFERUNIT" val="0"/>
+  <p:tag name="KSO_WM_UNIT_TYPE" val="n_h_h_a"/>
+  <p:tag name="KSO_WM_UNIT_INDEX" val="1_2_4_1"/>
+  <p:tag name="KSO_WM_UNIT_ID" val="diagram20230945_3*n_h_h_a*1_2_4_1"/>
+  <p:tag name="KSO_WM_TEMPLATE_CATEGORY" val="diagram"/>
+  <p:tag name="KSO_WM_TEMPLATE_INDEX" val="20230945"/>
+  <p:tag name="KSO_WM_UNIT_LAYERLEVEL" val="1_1_1_1"/>
+  <p:tag name="KSO_WM_TAG_VERSION" val="3.0"/>
+  <p:tag name="KSO_WM_DIAGRAM_GROUP_CODE" val="n1-1"/>
+  <p:tag name="KSO_WM_DIAGRAM_VERSION" val="3"/>
+  <p:tag name="KSO_WM_DIAGRAM_COLOR_TRICK" val="3"/>
+  <p:tag name="KSO_WM_DIAGRAM_COLOR_TEXT_CAN_REMOVE" val="n"/>
+  <p:tag name="KSO_WM_DIAGRAM_MAX_ITEMCNT" val="4"/>
+  <p:tag name="KSO_WM_DIAGRAM_MIN_ITEMCNT" val="2"/>
+  <p:tag name="KSO_WM_DIAGRAM_VIRTUALLY_FRAME" val="{&quot;height&quot;:389.44646137868324,&quot;left&quot;:36.37472440944882,&quot;top&quot;:113.1,&quot;width&quot;:913.9252755905512}"/>
+  <p:tag name="KSO_WM_DIAGRAM_COLOR_MATCH_VALUE" val="{&quot;shape&quot;:{&quot;fill&quot;:{&quot;type&quot;:0},&quot;glow&quot;:{&quot;colorType&quot;:0},&quot;line&quot;:{&quot;type&quot;:0},&quot;shadow&quot;:{&quot;colorType&quot;:0},&quot;threeD&quot;:{&quot;curvedSurface&quot;:{&quot;brightness&quot;:0,&quot;colorType&quot;:2,&quot;rgb&quot;:&quot;#000000&quot;},&quot;depth&quot;:{&quot;colorType&quot;:0}}},&quot;text&quot;:{&quot;fill&quot;:{&quot;solid&quot;:{&quot;brightness&quot;:0,&quot;colorType&quot;:1,&quot;foreColorIndex&quot;:5,&quot;transparency&quot;:0},&quot;type&quot;:1},&quot;glow&quot;:{&quot;colorType&quot;:0},&quot;line&quot;:{&quot;type&quot;:0},&quot;shadow&quot;:{&quot;colorType&quot;:0},&quot;threeD&quot;:{&quot;curvedSurface&quot;:{&quot;brightness&quot;:0,&quot;colorType&quot;:2,&quot;rgb&quot;:&quot;#000000&quot;},&quot;depth&quot;:{&quot;colorType&quot;:0}}}}"/>
+  <p:tag name="KSO_WM_BEAUTIFY_FLAG" val="#wm#"/>
+  <p:tag name="KSO_WM_UNIT_TEXT_TYPE" val="1"/>
+  <p:tag name="KSO_WM_UNIT_PRESET_TEXT" val="添加标题"/>
+  <p:tag name="KSO_WM_UNIT_TEXT_FILL_FORE_SCHEMECOLOR_INDEX" val="1"/>
+  <p:tag name="KSO_WM_UNIT_TEXT_FILL_TYPE" val="1"/>
+  <p:tag name="KSO_WM_UNIT_USESOURCEFORMAT_APPLY" val="0"/>
+</p:tagLst>
+</file>
+
+<file path=ppt/tags/tag175.xml><?xml version="1.0" encoding="utf-8"?>
+<p:tagLst xmlns:p="http://schemas.openxmlformats.org/presentationml/2006/main">
+  <p:tag name="KSO_WM_UNIT_SUBTYPE" val="a"/>
+  <p:tag name="KSO_WM_UNIT_NOCLEAR" val="0"/>
+  <p:tag name="KSO_WM_UNIT_VALUE" val="60"/>
+  <p:tag name="KSO_WM_UNIT_HIGHLIGHT" val="0"/>
+  <p:tag name="KSO_WM_UNIT_COMPATIBLE" val="0"/>
+  <p:tag name="KSO_WM_UNIT_DIAGRAM_ISNUMVISUAL" val="0"/>
+  <p:tag name="KSO_WM_UNIT_DIAGRAM_ISREFERUNIT" val="0"/>
+  <p:tag name="KSO_WM_UNIT_TYPE" val="n_h_h_f"/>
+  <p:tag name="KSO_WM_UNIT_INDEX" val="1_2_3_1"/>
+  <p:tag name="KSO_WM_UNIT_ID" val="diagram20230945_3*n_h_h_f*1_2_3_1"/>
+  <p:tag name="KSO_WM_TEMPLATE_CATEGORY" val="diagram"/>
+  <p:tag name="KSO_WM_TEMPLATE_INDEX" val="20230945"/>
+  <p:tag name="KSO_WM_UNIT_LAYERLEVEL" val="1_1_1_1"/>
+  <p:tag name="KSO_WM_TAG_VERSION" val="3.0"/>
+  <p:tag name="KSO_WM_DIAGRAM_GROUP_CODE" val="n1-1"/>
+  <p:tag name="KSO_WM_DIAGRAM_VERSION" val="3"/>
+  <p:tag name="KSO_WM_DIAGRAM_COLOR_TRICK" val="3"/>
+  <p:tag name="KSO_WM_DIAGRAM_COLOR_TEXT_CAN_REMOVE" val="n"/>
+  <p:tag name="KSO_WM_DIAGRAM_MAX_ITEMCNT" val="4"/>
+  <p:tag name="KSO_WM_DIAGRAM_MIN_ITEMCNT" val="2"/>
+  <p:tag name="KSO_WM_DIAGRAM_VIRTUALLY_FRAME" val="{&quot;height&quot;:389.44646137868324,&quot;left&quot;:36.37472440944882,&quot;top&quot;:113.1,&quot;width&quot;:913.9252755905512}"/>
+  <p:tag name="KSO_WM_DIAGRAM_COLOR_MATCH_VALUE" val="{&quot;shape&quot;:{&quot;fill&quot;:{&quot;type&quot;:0},&quot;glow&quot;:{&quot;colorType&quot;:0},&quot;line&quot;:{&quot;type&quot;:0},&quot;shadow&quot;:{&quot;colorType&quot;:0},&quot;threeD&quot;:{&quot;curvedSurface&quot;:{&quot;brightness&quot;:0,&quot;colorType&quot;:2,&quot;rgb&quot;:&quot;#000000&quot;},&quot;depth&quot;:{&quot;colorType&quot;:0}}},&quot;text&quot;:{&quot;fill&quot;:{&quot;solid&quot;:{&quot;brightness&quot;:0.15000000596046448,&quot;colorType&quot;:1,&quot;foreColorIndex&quot;:13,&quot;transparency&quot;:0},&quot;type&quot;:1},&quot;glow&quot;:{&quot;colorType&quot;:0},&quot;line&quot;:{&quot;type&quot;:0},&quot;shadow&quot;:{&quot;colorType&quot;:0},&quot;threeD&quot;:{&quot;curvedSurface&quot;:{&quot;brightness&quot;:0,&quot;colorType&quot;:2,&quot;rgb&quot;:&quot;#000000&quot;},&quot;depth&quot;:{&quot;colorType&quot;:0}}}}"/>
+  <p:tag name="KSO_WM_BEAUTIFY_FLAG" val="#wm#"/>
+  <p:tag name="KSO_WM_UNIT_TEXT_TYPE" val="1"/>
+  <p:tag name="KSO_WM_UNIT_TEXT_LAYER_COUNT" val="1"/>
+  <p:tag name="KSO_WM_UNIT_PRESET_TEXT" val="单击此处输入你的智能图形项正文，文字是您思想的提炼，请尽量言简意赅的阐述观点。单击此处输入你的智能图形项正文，文字是您思想的提炼。单击此处输入你的智能图形项正文，文字是您思想的提炼。"/>
+  <p:tag name="KSO_WM_UNIT_TEXT_FILL_FORE_SCHEMECOLOR_INDEX" val="1"/>
+  <p:tag name="KSO_WM_UNIT_TEXT_FILL_TYPE" val="1"/>
+  <p:tag name="KSO_WM_UNIT_USESOURCEFORMAT_APPLY" val="0"/>
+</p:tagLst>
+</file>
+
+<file path=ppt/tags/tag176.xml><?xml version="1.0" encoding="utf-8"?>
+<p:tagLst xmlns:p="http://schemas.openxmlformats.org/presentationml/2006/main">
+  <p:tag name="KSO_WM_UNIT_ISCONTENTSTITLE" val="0"/>
+  <p:tag name="KSO_WM_UNIT_ISNUMDGMTITLE" val="0"/>
+  <p:tag name="KSO_WM_UNIT_NOCLEAR" val="0"/>
+  <p:tag name="KSO_WM_UNIT_VALUE" val="10"/>
+  <p:tag name="KSO_WM_UNIT_HIGHLIGHT" val="0"/>
+  <p:tag name="KSO_WM_UNIT_COMPATIBLE" val="0"/>
+  <p:tag name="KSO_WM_UNIT_DIAGRAM_ISNUMVISUAL" val="0"/>
+  <p:tag name="KSO_WM_UNIT_DIAGRAM_ISREFERUNIT" val="0"/>
+  <p:tag name="KSO_WM_UNIT_TYPE" val="n_h_h_a"/>
+  <p:tag name="KSO_WM_UNIT_INDEX" val="1_2_3_1"/>
+  <p:tag name="KSO_WM_UNIT_ID" val="diagram20230945_3*n_h_h_a*1_2_3_1"/>
+  <p:tag name="KSO_WM_TEMPLATE_CATEGORY" val="diagram"/>
+  <p:tag name="KSO_WM_TEMPLATE_INDEX" val="20230945"/>
+  <p:tag name="KSO_WM_UNIT_LAYERLEVEL" val="1_1_1_1"/>
+  <p:tag name="KSO_WM_TAG_VERSION" val="3.0"/>
+  <p:tag name="KSO_WM_DIAGRAM_GROUP_CODE" val="n1-1"/>
+  <p:tag name="KSO_WM_DIAGRAM_VERSION" val="3"/>
+  <p:tag name="KSO_WM_DIAGRAM_COLOR_TRICK" val="3"/>
+  <p:tag name="KSO_WM_DIAGRAM_COLOR_TEXT_CAN_REMOVE" val="n"/>
+  <p:tag name="KSO_WM_DIAGRAM_MAX_ITEMCNT" val="4"/>
+  <p:tag name="KSO_WM_DIAGRAM_MIN_ITEMCNT" val="2"/>
+  <p:tag name="KSO_WM_DIAGRAM_VIRTUALLY_FRAME" val="{&quot;height&quot;:389.44646137868324,&quot;left&quot;:36.37472440944882,&quot;top&quot;:113.1,&quot;width&quot;:913.9252755905512}"/>
+  <p:tag name="KSO_WM_DIAGRAM_COLOR_MATCH_VALUE" val="{&quot;shape&quot;:{&quot;fill&quot;:{&quot;type&quot;:0},&quot;glow&quot;:{&quot;colorType&quot;:0},&quot;line&quot;:{&quot;type&quot;:0},&quot;shadow&quot;:{&quot;colorType&quot;:0},&quot;threeD&quot;:{&quot;curvedSurface&quot;:{&quot;brightness&quot;:0,&quot;colorType&quot;:2,&quot;rgb&quot;:&quot;#000000&quot;},&quot;depth&quot;:{&quot;colorType&quot;:0}}},&quot;text&quot;:{&quot;fill&quot;:{&quot;solid&quot;:{&quot;brightness&quot;:0,&quot;colorType&quot;:1,&quot;foreColorIndex&quot;:7,&quot;transparency&quot;:0},&quot;type&quot;:1},&quot;glow&quot;:{&quot;colorType&quot;:0},&quot;line&quot;:{&quot;type&quot;:0},&quot;shadow&quot;:{&quot;colorType&quot;:0},&quot;threeD&quot;:{&quot;curvedSurface&quot;:{&quot;brightness&quot;:0,&quot;colorType&quot;:2,&quot;rgb&quot;:&quot;#000000&quot;},&quot;depth&quot;:{&quot;colorType&quot;:0}}}}"/>
+  <p:tag name="KSO_WM_BEAUTIFY_FLAG" val="#wm#"/>
+  <p:tag name="KSO_WM_UNIT_TEXT_TYPE" val="1"/>
+  <p:tag name="KSO_WM_UNIT_PRESET_TEXT" val="添加标题"/>
+  <p:tag name="KSO_WM_UNIT_TEXT_FILL_FORE_SCHEMECOLOR_INDEX" val="1"/>
+  <p:tag name="KSO_WM_UNIT_TEXT_FILL_TYPE" val="1"/>
+  <p:tag name="KSO_WM_UNIT_USESOURCEFORMAT_APPLY" val="0"/>
+</p:tagLst>
+</file>
+
+<file path=ppt/tags/tag177.xml><?xml version="1.0" encoding="utf-8"?>
+<p:tagLst xmlns:p="http://schemas.openxmlformats.org/presentationml/2006/main">
+  <p:tag name="KSO_WM_UNIT_SUBTYPE" val="a"/>
+  <p:tag name="KSO_WM_UNIT_NOCLEAR" val="0"/>
+  <p:tag name="KSO_WM_UNIT_VALUE" val="60"/>
+  <p:tag name="KSO_WM_UNIT_HIGHLIGHT" val="0"/>
+  <p:tag name="KSO_WM_UNIT_COMPATIBLE" val="0"/>
+  <p:tag name="KSO_WM_UNIT_DIAGRAM_ISNUMVISUAL" val="0"/>
+  <p:tag name="KSO_WM_UNIT_DIAGRAM_ISREFERUNIT" val="0"/>
+  <p:tag name="KSO_WM_UNIT_TYPE" val="n_h_h_f"/>
+  <p:tag name="KSO_WM_UNIT_INDEX" val="1_2_2_1"/>
+  <p:tag name="KSO_WM_UNIT_ID" val="diagram20230945_3*n_h_h_f*1_2_2_1"/>
+  <p:tag name="KSO_WM_TEMPLATE_CATEGORY" val="diagram"/>
+  <p:tag name="KSO_WM_TEMPLATE_INDEX" val="20230945"/>
+  <p:tag name="KSO_WM_UNIT_LAYERLEVEL" val="1_1_1_1"/>
+  <p:tag name="KSO_WM_TAG_VERSION" val="3.0"/>
+  <p:tag name="KSO_WM_DIAGRAM_GROUP_CODE" val="n1-1"/>
+  <p:tag name="KSO_WM_DIAGRAM_VERSION" val="3"/>
+  <p:tag name="KSO_WM_DIAGRAM_COLOR_TRICK" val="3"/>
+  <p:tag name="KSO_WM_DIAGRAM_COLOR_TEXT_CAN_REMOVE" val="n"/>
+  <p:tag name="KSO_WM_DIAGRAM_MAX_ITEMCNT" val="4"/>
+  <p:tag name="KSO_WM_DIAGRAM_MIN_ITEMCNT" val="2"/>
+  <p:tag name="KSO_WM_DIAGRAM_VIRTUALLY_FRAME" val="{&quot;height&quot;:389.44646137868324,&quot;left&quot;:36.37472440944882,&quot;top&quot;:113.1,&quot;width&quot;:913.9252755905512}"/>
+  <p:tag name="KSO_WM_DIAGRAM_COLOR_MATCH_VALUE" val="{&quot;shape&quot;:{&quot;fill&quot;:{&quot;type&quot;:0},&quot;glow&quot;:{&quot;colorType&quot;:0},&quot;line&quot;:{&quot;type&quot;:0},&quot;shadow&quot;:{&quot;colorType&quot;:0},&quot;threeD&quot;:{&quot;curvedSurface&quot;:{&quot;brightness&quot;:0,&quot;colorType&quot;:2,&quot;rgb&quot;:&quot;#000000&quot;},&quot;depth&quot;:{&quot;colorType&quot;:0}}},&quot;text&quot;:{&quot;fill&quot;:{&quot;solid&quot;:{&quot;brightness&quot;:0.15000000596046448,&quot;colorType&quot;:1,&quot;foreColorIndex&quot;:13,&quot;transparency&quot;:0},&quot;type&quot;:1},&quot;glow&quot;:{&quot;colorType&quot;:0},&quot;line&quot;:{&quot;type&quot;:0},&quot;shadow&quot;:{&quot;colorType&quot;:0},&quot;threeD&quot;:{&quot;curvedSurface&quot;:{&quot;brightness&quot;:0,&quot;colorType&quot;:2,&quot;rgb&quot;:&quot;#000000&quot;},&quot;depth&quot;:{&quot;colorType&quot;:0}}}}"/>
+  <p:tag name="KSO_WM_BEAUTIFY_FLAG" val="#wm#"/>
+  <p:tag name="KSO_WM_UNIT_TEXT_TYPE" val="1"/>
+  <p:tag name="KSO_WM_UNIT_TEXT_LAYER_COUNT" val="1"/>
+  <p:tag name="KSO_WM_UNIT_PRESET_TEXT" val="单击此处输入你的智能图形项正文，文字是您思想的提炼，请尽量言简意赅的阐述观点。单击此处输入你的智能图形项正文，文字是您思想的提炼。单击此处输入你的智能图形项正文，文字是您思想的提炼。"/>
+  <p:tag name="KSO_WM_UNIT_TEXT_FILL_FORE_SCHEMECOLOR_INDEX" val="1"/>
+  <p:tag name="KSO_WM_UNIT_TEXT_FILL_TYPE" val="1"/>
+  <p:tag name="KSO_WM_UNIT_USESOURCEFORMAT_APPLY" val="0"/>
+</p:tagLst>
+</file>
+
+<file path=ppt/tags/tag178.xml><?xml version="1.0" encoding="utf-8"?>
+<p:tagLst xmlns:p="http://schemas.openxmlformats.org/presentationml/2006/main">
+  <p:tag name="KSO_WM_UNIT_ISCONTENTSTITLE" val="0"/>
+  <p:tag name="KSO_WM_UNIT_ISNUMDGMTITLE" val="0"/>
+  <p:tag name="KSO_WM_UNIT_NOCLEAR" val="0"/>
+  <p:tag name="KSO_WM_UNIT_VALUE" val="10"/>
+  <p:tag name="KSO_WM_UNIT_HIGHLIGHT" val="0"/>
+  <p:tag name="KSO_WM_UNIT_COMPATIBLE" val="0"/>
+  <p:tag name="KSO_WM_UNIT_DIAGRAM_ISNUMVISUAL" val="0"/>
+  <p:tag name="KSO_WM_UNIT_DIAGRAM_ISREFERUNIT" val="0"/>
+  <p:tag name="KSO_WM_UNIT_TYPE" val="n_h_h_a"/>
+  <p:tag name="KSO_WM_UNIT_INDEX" val="1_2_2_1"/>
+  <p:tag name="KSO_WM_UNIT_ID" val="diagram20230945_3*n_h_h_a*1_2_2_1"/>
+  <p:tag name="KSO_WM_TEMPLATE_CATEGORY" val="diagram"/>
+  <p:tag name="KSO_WM_TEMPLATE_INDEX" val="20230945"/>
+  <p:tag name="KSO_WM_UNIT_LAYERLEVEL" val="1_1_1_1"/>
+  <p:tag name="KSO_WM_TAG_VERSION" val="3.0"/>
+  <p:tag name="KSO_WM_DIAGRAM_GROUP_CODE" val="n1-1"/>
+  <p:tag name="KSO_WM_DIAGRAM_VERSION" val="3"/>
+  <p:tag name="KSO_WM_DIAGRAM_COLOR_TRICK" val="3"/>
+  <p:tag name="KSO_WM_DIAGRAM_COLOR_TEXT_CAN_REMOVE" val="n"/>
+  <p:tag name="KSO_WM_DIAGRAM_MAX_ITEMCNT" val="4"/>
+  <p:tag name="KSO_WM_DIAGRAM_MIN_ITEMCNT" val="2"/>
+  <p:tag name="KSO_WM_DIAGRAM_VIRTUALLY_FRAME" val="{&quot;height&quot;:389.44646137868324,&quot;left&quot;:36.37472440944882,&quot;top&quot;:113.1,&quot;width&quot;:913.9252755905512}"/>
+  <p:tag name="KSO_WM_DIAGRAM_COLOR_MATCH_VALUE" val="{&quot;shape&quot;:{&quot;fill&quot;:{&quot;type&quot;:0},&quot;glow&quot;:{&quot;colorType&quot;:0},&quot;line&quot;:{&quot;type&quot;:0},&quot;shadow&quot;:{&quot;colorType&quot;:0},&quot;threeD&quot;:{&quot;curvedSurface&quot;:{&quot;brightness&quot;:0,&quot;colorType&quot;:2,&quot;rgb&quot;:&quot;#000000&quot;},&quot;depth&quot;:{&quot;colorType&quot;:0}}},&quot;text&quot;:{&quot;fill&quot;:{&quot;solid&quot;:{&quot;brightness&quot;:0,&quot;colorType&quot;:1,&quot;foreColorIndex&quot;:6,&quot;transparency&quot;:0},&quot;type&quot;:1},&quot;glow&quot;:{&quot;colorType&quot;:0},&quot;line&quot;:{&quot;type&quot;:0},&quot;shadow&quot;:{&quot;colorType&quot;:0},&quot;threeD&quot;:{&quot;curvedSurface&quot;:{&quot;brightness&quot;:0,&quot;colorType&quot;:2,&quot;rgb&quot;:&quot;#000000&quot;},&quot;depth&quot;:{&quot;colorType&quot;:0}}}}"/>
+  <p:tag name="KSO_WM_BEAUTIFY_FLAG" val="#wm#"/>
+  <p:tag name="KSO_WM_UNIT_TEXT_TYPE" val="1"/>
+  <p:tag name="KSO_WM_UNIT_PRESET_TEXT" val="添加标题"/>
+  <p:tag name="KSO_WM_UNIT_TEXT_FILL_FORE_SCHEMECOLOR_INDEX" val="1"/>
+  <p:tag name="KSO_WM_UNIT_TEXT_FILL_TYPE" val="1"/>
+  <p:tag name="KSO_WM_UNIT_USESOURCEFORMAT_APPLY" val="0"/>
+</p:tagLst>
+</file>
+
+<file path=ppt/tags/tag179.xml><?xml version="1.0" encoding="utf-8"?>
+<p:tagLst xmlns:p="http://schemas.openxmlformats.org/presentationml/2006/main">
+  <p:tag name="KSO_WM_UNIT_SUBTYPE" val="a"/>
+  <p:tag name="KSO_WM_UNIT_NOCLEAR" val="0"/>
+  <p:tag name="KSO_WM_UNIT_VALUE" val="60"/>
+  <p:tag name="KSO_WM_UNIT_HIGHLIGHT" val="0"/>
+  <p:tag name="KSO_WM_UNIT_COMPATIBLE" val="0"/>
+  <p:tag name="KSO_WM_UNIT_DIAGRAM_ISNUMVISUAL" val="0"/>
+  <p:tag name="KSO_WM_UNIT_DIAGRAM_ISREFERUNIT" val="0"/>
+  <p:tag name="KSO_WM_UNIT_TYPE" val="n_h_h_f"/>
+  <p:tag name="KSO_WM_UNIT_INDEX" val="1_2_1_1"/>
+  <p:tag name="KSO_WM_UNIT_ID" val="diagram20230945_3*n_h_h_f*1_2_1_1"/>
+  <p:tag name="KSO_WM_TEMPLATE_CATEGORY" val="diagram"/>
+  <p:tag name="KSO_WM_TEMPLATE_INDEX" val="20230945"/>
+  <p:tag name="KSO_WM_UNIT_LAYERLEVEL" val="1_1_1_1"/>
+  <p:tag name="KSO_WM_TAG_VERSION" val="3.0"/>
+  <p:tag name="KSO_WM_DIAGRAM_GROUP_CODE" val="n1-1"/>
+  <p:tag name="KSO_WM_DIAGRAM_VERSION" val="3"/>
+  <p:tag name="KSO_WM_DIAGRAM_COLOR_TRICK" val="3"/>
+  <p:tag name="KSO_WM_DIAGRAM_COLOR_TEXT_CAN_REMOVE" val="n"/>
+  <p:tag name="KSO_WM_DIAGRAM_MAX_ITEMCNT" val="4"/>
+  <p:tag name="KSO_WM_DIAGRAM_MIN_ITEMCNT" val="2"/>
+  <p:tag name="KSO_WM_DIAGRAM_VIRTUALLY_FRAME" val="{&quot;height&quot;:389.44646137868324,&quot;left&quot;:36.37472440944882,&quot;top&quot;:113.1,&quot;width&quot;:913.9252755905512}"/>
+  <p:tag name="KSO_WM_DIAGRAM_COLOR_MATCH_VALUE" val="{&quot;shape&quot;:{&quot;fill&quot;:{&quot;type&quot;:0},&quot;glow&quot;:{&quot;colorType&quot;:0},&quot;line&quot;:{&quot;type&quot;:0},&quot;shadow&quot;:{&quot;colorType&quot;:0},&quot;threeD&quot;:{&quot;curvedSurface&quot;:{&quot;brightness&quot;:0,&quot;colorType&quot;:2,&quot;rgb&quot;:&quot;#000000&quot;},&quot;depth&quot;:{&quot;colorType&quot;:0}}},&quot;text&quot;:{&quot;fill&quot;:{&quot;solid&quot;:{&quot;brightness&quot;:0.15000000596046448,&quot;colorType&quot;:1,&quot;foreColorIndex&quot;:13,&quot;transparency&quot;:0},&quot;type&quot;:1},&quot;glow&quot;:{&quot;colorType&quot;:0},&quot;line&quot;:{&quot;type&quot;:0},&quot;shadow&quot;:{&quot;colorType&quot;:0},&quot;threeD&quot;:{&quot;curvedSurface&quot;:{&quot;brightness&quot;:0,&quot;colorType&quot;:2,&quot;rgb&quot;:&quot;#000000&quot;},&quot;depth&quot;:{&quot;colorType&quot;:0}}}}"/>
+  <p:tag name="KSO_WM_BEAUTIFY_FLAG" val="#wm#"/>
+  <p:tag name="KSO_WM_UNIT_TEXT_TYPE" val="1"/>
+  <p:tag name="KSO_WM_UNIT_TEXT_LAYER_COUNT" val="1"/>
+  <p:tag name="KSO_WM_UNIT_PRESET_TEXT" val="单击此处输入你的智能图形项正文，文字是您思想的提炼，请尽量言简意赅的阐述观点。单击此处输入你的智能图形项正文，文字是您思想的提炼。单击此处输入你的智能图形项正文，文字是您思想的提炼。"/>
+  <p:tag name="KSO_WM_UNIT_TEXT_FILL_FORE_SCHEMECOLOR_INDEX" val="1"/>
+  <p:tag name="KSO_WM_UNIT_TEXT_FILL_TYPE" val="1"/>
+  <p:tag name="KSO_WM_UNIT_USESOURCEFORMAT_APPLY" val="0"/>
+</p:tagLst>
+</file>
+
 <file path=ppt/tags/tag18.xml><?xml version="1.0" encoding="utf-8"?>
 <p:tagLst xmlns:p="http://schemas.openxmlformats.org/presentationml/2006/main">
   <p:tag name="KSO_WM_DIAGRAM_VIRTUALLY_FRAME" val="{&quot;height&quot;:340,&quot;left&quot;:60,&quot;top&quot;:140,&quot;width&quot;:840}"/>
+</p:tagLst>
+</file>
+
+<file path=ppt/tags/tag180.xml><?xml version="1.0" encoding="utf-8"?>
+<p:tagLst xmlns:p="http://schemas.openxmlformats.org/presentationml/2006/main">
+  <p:tag name="KSO_WM_UNIT_ISCONTENTSTITLE" val="0"/>
+  <p:tag name="KSO_WM_UNIT_ISNUMDGMTITLE" val="0"/>
+  <p:tag name="KSO_WM_UNIT_NOCLEAR" val="0"/>
+  <p:tag name="KSO_WM_UNIT_VALUE" val="10"/>
+  <p:tag name="KSO_WM_UNIT_HIGHLIGHT" val="0"/>
+  <p:tag name="KSO_WM_UNIT_COMPATIBLE" val="0"/>
+  <p:tag name="KSO_WM_UNIT_DIAGRAM_ISNUMVISUAL" val="0"/>
+  <p:tag name="KSO_WM_UNIT_DIAGRAM_ISREFERUNIT" val="0"/>
+  <p:tag name="KSO_WM_UNIT_TYPE" val="n_h_h_a"/>
+  <p:tag name="KSO_WM_UNIT_INDEX" val="1_2_1_1"/>
+  <p:tag name="KSO_WM_UNIT_ID" val="diagram20230945_3*n_h_h_a*1_2_1_1"/>
+  <p:tag name="KSO_WM_TEMPLATE_CATEGORY" val="diagram"/>
+  <p:tag name="KSO_WM_TEMPLATE_INDEX" val="20230945"/>
+  <p:tag name="KSO_WM_UNIT_LAYERLEVEL" val="1_1_1_1"/>
+  <p:tag name="KSO_WM_TAG_VERSION" val="3.0"/>
+  <p:tag name="KSO_WM_DIAGRAM_GROUP_CODE" val="n1-1"/>
+  <p:tag name="KSO_WM_DIAGRAM_VERSION" val="3"/>
+  <p:tag name="KSO_WM_DIAGRAM_COLOR_TRICK" val="3"/>
+  <p:tag name="KSO_WM_DIAGRAM_COLOR_TEXT_CAN_REMOVE" val="n"/>
+  <p:tag name="KSO_WM_DIAGRAM_MAX_ITEMCNT" val="4"/>
+  <p:tag name="KSO_WM_DIAGRAM_MIN_ITEMCNT" val="2"/>
+  <p:tag name="KSO_WM_DIAGRAM_VIRTUALLY_FRAME" val="{&quot;height&quot;:389.44646137868324,&quot;left&quot;:36.37472440944882,&quot;top&quot;:113.1,&quot;width&quot;:913.9252755905512}"/>
+  <p:tag name="KSO_WM_DIAGRAM_COLOR_MATCH_VALUE" val="{&quot;shape&quot;:{&quot;fill&quot;:{&quot;type&quot;:0},&quot;glow&quot;:{&quot;colorType&quot;:0},&quot;line&quot;:{&quot;type&quot;:0},&quot;shadow&quot;:{&quot;colorType&quot;:0},&quot;threeD&quot;:{&quot;curvedSurface&quot;:{&quot;brightness&quot;:0,&quot;colorType&quot;:2,&quot;rgb&quot;:&quot;#000000&quot;},&quot;depth&quot;:{&quot;colorType&quot;:0}}},&quot;text&quot;:{&quot;fill&quot;:{&quot;solid&quot;:{&quot;brightness&quot;:0,&quot;colorType&quot;:1,&quot;foreColorIndex&quot;:5,&quot;transparency&quot;:0},&quot;type&quot;:1},&quot;glow&quot;:{&quot;colorType&quot;:0},&quot;line&quot;:{&quot;type&quot;:0},&quot;shadow&quot;:{&quot;colorType&quot;:0},&quot;threeD&quot;:{&quot;curvedSurface&quot;:{&quot;brightness&quot;:0,&quot;colorType&quot;:2,&quot;rgb&quot;:&quot;#000000&quot;},&quot;depth&quot;:{&quot;colorType&quot;:0}}}}"/>
+  <p:tag name="KSO_WM_BEAUTIFY_FLAG" val="#wm#"/>
+  <p:tag name="KSO_WM_UNIT_TEXT_TYPE" val="1"/>
+  <p:tag name="KSO_WM_UNIT_PRESET_TEXT" val="添加标题"/>
+  <p:tag name="KSO_WM_UNIT_TEXT_FILL_FORE_SCHEMECOLOR_INDEX" val="1"/>
+  <p:tag name="KSO_WM_UNIT_TEXT_FILL_TYPE" val="1"/>
+  <p:tag name="KSO_WM_UNIT_USESOURCEFORMAT_APPLY" val="0"/>
+</p:tagLst>
+</file>
+
+<file path=ppt/tags/tag181.xml><?xml version="1.0" encoding="utf-8"?>
+<p:tagLst xmlns:p="http://schemas.openxmlformats.org/presentationml/2006/main">
+  <p:tag name="KSO_WM_UNIT_FILL_FORE_SCHEMECOLOR_INDEX_1_BRIGHTNESS" val="0"/>
+  <p:tag name="KSO_WM_UNIT_FILL_FORE_SCHEMECOLOR_INDEX_1" val="10"/>
+  <p:tag name="KSO_WM_UNIT_FILL_FORE_SCHEMECOLOR_INDEX_1_POS" val="0.04"/>
+  <p:tag name="KSO_WM_UNIT_FILL_FORE_SCHEMECOLOR_INDEX_1_TRANS" val="0"/>
+  <p:tag name="KSO_WM_UNIT_FILL_FORE_SCHEMECOLOR_INDEX_2_BRIGHTNESS" val="0"/>
+  <p:tag name="KSO_WM_UNIT_FILL_FORE_SCHEMECOLOR_INDEX_2" val="5"/>
+  <p:tag name="KSO_WM_UNIT_FILL_FORE_SCHEMECOLOR_INDEX_2_POS" val="0.54"/>
+  <p:tag name="KSO_WM_UNIT_FILL_FORE_SCHEMECOLOR_INDEX_2_TRANS" val="0"/>
+  <p:tag name="KSO_WM_UNIT_FILL_FORE_SCHEMECOLOR_INDEX_3_BRIGHTNESS" val="0"/>
+  <p:tag name="KSO_WM_UNIT_FILL_FORE_SCHEMECOLOR_INDEX_3" val="5"/>
+  <p:tag name="KSO_WM_UNIT_FILL_FORE_SCHEMECOLOR_INDEX_3_POS" val="1"/>
+  <p:tag name="KSO_WM_UNIT_FILL_FORE_SCHEMECOLOR_INDEX_3_TRANS" val="0"/>
+  <p:tag name="KSO_WM_UNIT_FILL_GRADIENT_TYPE" val="0"/>
+  <p:tag name="KSO_WM_UNIT_FILL_GRADIENT_ANGLE" val="45"/>
+  <p:tag name="KSO_WM_UNIT_FILL_GRADIENT_DIRECTION" val="0"/>
+  <p:tag name="KSO_WM_UNIT_TEXT_FILL_FORE_SCHEMECOLOR_INDEX_BRIGHTNESS" val="0"/>
+  <p:tag name="KSO_WM_UNIT_LINE_FORE_SCHEMECOLOR_INDEX_1_BRIGHTNESS" val="0.95"/>
+  <p:tag name="KSO_WM_UNIT_LINE_FORE_SCHEMECOLOR_INDEX_1" val="5"/>
+  <p:tag name="KSO_WM_UNIT_LINE_FORE_SCHEMECOLOR_INDEX_1_POS" val="0.09"/>
+  <p:tag name="KSO_WM_UNIT_LINE_FORE_SCHEMECOLOR_INDEX_1_TRANS" val="0.3"/>
+  <p:tag name="KSO_WM_BEAUTIFY_FLAG" val="#wm#"/>
+  <p:tag name="KSO_WM_UNIT_HIGHLIGHT" val="0"/>
+  <p:tag name="KSO_WM_UNIT_COMPATIBLE" val="0"/>
+  <p:tag name="KSO_WM_UNIT_DIAGRAM_ISNUMVISUAL" val="0"/>
+  <p:tag name="KSO_WM_UNIT_DIAGRAM_ISREFERUNIT" val="0"/>
+  <p:tag name="KSO_WM_UNIT_ID" val="diagram20230945_3*n_h_h_i*1_2_2_1"/>
+  <p:tag name="KSO_WM_TEMPLATE_CATEGORY" val="diagram"/>
+  <p:tag name="KSO_WM_TEMPLATE_INDEX" val="20230945"/>
+  <p:tag name="KSO_WM_UNIT_LAYERLEVEL" val="1_1_1_1"/>
+  <p:tag name="KSO_WM_TAG_VERSION" val="3.0"/>
+  <p:tag name="KSO_WM_DIAGRAM_VERSION" val="3"/>
+  <p:tag name="KSO_WM_DIAGRAM_COLOR_TRICK" val="3"/>
+  <p:tag name="KSO_WM_DIAGRAM_COLOR_TEXT_CAN_REMOVE" val="n"/>
+  <p:tag name="KSO_WM_DIAGRAM_GROUP_CODE" val="n1-1"/>
+  <p:tag name="KSO_WM_UNIT_SUBTYPE" val="d"/>
+  <p:tag name="KSO_WM_UNIT_TYPE" val="n_h_h_i"/>
+  <p:tag name="KSO_WM_UNIT_INDEX" val="1_2_2_1"/>
+  <p:tag name="KSO_WM_DIAGRAM_MAX_ITEMCNT" val="4"/>
+  <p:tag name="KSO_WM_DIAGRAM_MIN_ITEMCNT" val="2"/>
+  <p:tag name="KSO_WM_DIAGRAM_VIRTUALLY_FRAME" val="{&quot;height&quot;:389.44646137868324,&quot;left&quot;:36.37472440944882,&quot;top&quot;:113.1,&quot;width&quot;:913.9252755905512}"/>
+  <p:tag name="KSO_WM_DIAGRAM_COLOR_MATCH_VALUE" val="{&quot;shape&quot;:{&quot;fill&quot;:{&quot;solid&quot;:{&quot;brightness&quot;:0,&quot;colorType&quot;:1,&quot;foreColorIndex&quot;:6,&quot;transparency&quot;:0},&quot;type&quot;:1},&quot;glow&quot;:{&quot;colorType&quot;:0},&quot;line&quot;:{&quot;gradient&quot;:[{&quot;brightness&quot;:0,&quot;colorType&quot;:2,&quot;pos&quot;:0.3700000047683716,&quot;rgb&quot;:&quot;#ffffff&quot;,&quot;transparency&quot;:0},{&quot;brightness&quot;:0.800000011920929,&quot;colorType&quot;:1,&quot;foreColorIndex&quot;:6,&quot;pos&quot;:0,&quot;transparency&quot;:0},{&quot;brightness&quot;:0,&quot;colorType&quot;:2,&quot;pos&quot;:1,&quot;rgb&quot;:&quot;#ffffff&quot;,&quot;transparency&quot;:0},{&quot;brightness&quot;:0.800000011920929,&quot;colorType&quot;:1,&quot;foreColorIndex&quot;:6,&quot;pos&quot;:0.7099999785423279,&quot;transparency&quot;:0}],&quot;type&quot;:2},&quot;shadow&quot;:{&quot;colorType&quot;:0},&quot;threeD&quot;:{&quot;curvedSurface&quot;:{&quot;brightness&quot;:0,&quot;colorType&quot;:2,&quot;rgb&quot;:&quot;#000000&quot;},&quot;depth&quot;:{&quot;colorType&quot;:0}}},&quot;text&quot;:{&quot;fill&quot;:{&quot;solid&quot;:{&quot;brightness&quot;:0,&quot;colorType&quot;:2,&quot;rgb&quot;:&quot;#ffffff&quot;,&quot;transparency&quot;:0},&quot;type&quot;:1},&quot;glow&quot;:{&quot;colorType&quot;:0},&quot;line&quot;:{&quot;type&quot;:0},&quot;shadow&quot;:{&quot;colorType&quot;:0},&quot;threeD&quot;:{&quot;curvedSurface&quot;:{&quot;brightness&quot;:0,&quot;colorType&quot;:2,&quot;rgb&quot;:&quot;#000000&quot;},&quot;depth&quot;:{&quot;colorType&quot;:0}}}}"/>
+  <p:tag name="KSO_WM_UNIT_TEXT_FILL_TYPE" val="1"/>
+  <p:tag name="KSO_WM_UNIT_FILL_TYPE" val="1"/>
+  <p:tag name="KSO_WM_UNIT_FILL_FORE_SCHEMECOLOR_INDEX" val="6"/>
+  <p:tag name="KSO_WM_UNIT_FILL_FORE_SCHEMECOLOR_INDEX_BRIGHTNESS" val="0"/>
+  <p:tag name="KSO_WM_UNIT_LINE_FORE_SCHEMECOLOR_INDEX" val="6"/>
+  <p:tag name="KSO_WM_UNIT_USESOURCEFORMAT_APPLY" val="0"/>
+</p:tagLst>
+</file>
+
+<file path=ppt/tags/tag182.xml><?xml version="1.0" encoding="utf-8"?>
+<p:tagLst xmlns:p="http://schemas.openxmlformats.org/presentationml/2006/main">
+  <p:tag name="KSO_WM_UNIT_FILL_FORE_SCHEMECOLOR_INDEX_1_BRIGHTNESS" val="0"/>
+  <p:tag name="KSO_WM_UNIT_FILL_FORE_SCHEMECOLOR_INDEX_1" val="10"/>
+  <p:tag name="KSO_WM_UNIT_FILL_FORE_SCHEMECOLOR_INDEX_1_POS" val="0.04"/>
+  <p:tag name="KSO_WM_UNIT_FILL_FORE_SCHEMECOLOR_INDEX_1_TRANS" val="0"/>
+  <p:tag name="KSO_WM_UNIT_FILL_FORE_SCHEMECOLOR_INDEX_2_BRIGHTNESS" val="0"/>
+  <p:tag name="KSO_WM_UNIT_FILL_FORE_SCHEMECOLOR_INDEX_2" val="5"/>
+  <p:tag name="KSO_WM_UNIT_FILL_FORE_SCHEMECOLOR_INDEX_2_POS" val="0.54"/>
+  <p:tag name="KSO_WM_UNIT_FILL_FORE_SCHEMECOLOR_INDEX_2_TRANS" val="0"/>
+  <p:tag name="KSO_WM_UNIT_FILL_FORE_SCHEMECOLOR_INDEX_3_BRIGHTNESS" val="0"/>
+  <p:tag name="KSO_WM_UNIT_FILL_FORE_SCHEMECOLOR_INDEX_3" val="5"/>
+  <p:tag name="KSO_WM_UNIT_FILL_FORE_SCHEMECOLOR_INDEX_3_POS" val="1"/>
+  <p:tag name="KSO_WM_UNIT_FILL_FORE_SCHEMECOLOR_INDEX_3_TRANS" val="0"/>
+  <p:tag name="KSO_WM_UNIT_FILL_GRADIENT_TYPE" val="0"/>
+  <p:tag name="KSO_WM_UNIT_FILL_GRADIENT_ANGLE" val="45"/>
+  <p:tag name="KSO_WM_UNIT_FILL_GRADIENT_DIRECTION" val="0"/>
+  <p:tag name="KSO_WM_UNIT_TEXT_FILL_FORE_SCHEMECOLOR_INDEX_BRIGHTNESS" val="0"/>
+  <p:tag name="KSO_WM_UNIT_LINE_FORE_SCHEMECOLOR_INDEX_1_BRIGHTNESS" val="0.95"/>
+  <p:tag name="KSO_WM_UNIT_LINE_FORE_SCHEMECOLOR_INDEX_1" val="5"/>
+  <p:tag name="KSO_WM_UNIT_LINE_FORE_SCHEMECOLOR_INDEX_1_POS" val="0.09"/>
+  <p:tag name="KSO_WM_UNIT_LINE_FORE_SCHEMECOLOR_INDEX_1_TRANS" val="0.3"/>
+  <p:tag name="KSO_WM_BEAUTIFY_FLAG" val="#wm#"/>
+  <p:tag name="KSO_WM_UNIT_HIGHLIGHT" val="0"/>
+  <p:tag name="KSO_WM_UNIT_COMPATIBLE" val="0"/>
+  <p:tag name="KSO_WM_UNIT_DIAGRAM_ISNUMVISUAL" val="0"/>
+  <p:tag name="KSO_WM_UNIT_DIAGRAM_ISREFERUNIT" val="0"/>
+  <p:tag name="KSO_WM_UNIT_ID" val="diagram20230945_3*n_h_h_i*1_2_4_1"/>
+  <p:tag name="KSO_WM_TEMPLATE_CATEGORY" val="diagram"/>
+  <p:tag name="KSO_WM_TEMPLATE_INDEX" val="20230945"/>
+  <p:tag name="KSO_WM_UNIT_LAYERLEVEL" val="1_1_1_1"/>
+  <p:tag name="KSO_WM_TAG_VERSION" val="3.0"/>
+  <p:tag name="KSO_WM_DIAGRAM_VERSION" val="3"/>
+  <p:tag name="KSO_WM_DIAGRAM_COLOR_TRICK" val="3"/>
+  <p:tag name="KSO_WM_DIAGRAM_COLOR_TEXT_CAN_REMOVE" val="n"/>
+  <p:tag name="KSO_WM_DIAGRAM_GROUP_CODE" val="n1-1"/>
+  <p:tag name="KSO_WM_UNIT_SUBTYPE" val="d"/>
+  <p:tag name="KSO_WM_UNIT_TYPE" val="n_h_h_i"/>
+  <p:tag name="KSO_WM_UNIT_INDEX" val="1_2_4_1"/>
+  <p:tag name="KSO_WM_DIAGRAM_MAX_ITEMCNT" val="4"/>
+  <p:tag name="KSO_WM_DIAGRAM_MIN_ITEMCNT" val="2"/>
+  <p:tag name="KSO_WM_DIAGRAM_VIRTUALLY_FRAME" val="{&quot;height&quot;:389.44646137868324,&quot;left&quot;:36.37472440944882,&quot;top&quot;:113.1,&quot;width&quot;:913.9252755905512}"/>
+  <p:tag name="KSO_WM_DIAGRAM_COLOR_MATCH_VALUE" val="{&quot;shape&quot;:{&quot;fill&quot;:{&quot;solid&quot;:{&quot;brightness&quot;:0,&quot;colorType&quot;:1,&quot;foreColorIndex&quot;:5,&quot;transparency&quot;:0},&quot;type&quot;:1},&quot;glow&quot;:{&quot;colorType&quot;:0},&quot;line&quot;:{&quot;gradient&quot;:[{&quot;brightness&quot;:0,&quot;colorType&quot;:2,&quot;pos&quot;:0.3700000047683716,&quot;rgb&quot;:&quot;#ffffff&quot;,&quot;transparency&quot;:0},{&quot;brightness&quot;:0.800000011920929,&quot;colorType&quot;:1,&quot;foreColorIndex&quot;:5,&quot;pos&quot;:0,&quot;transparency&quot;:0},{&quot;brightness&quot;:0,&quot;colorType&quot;:2,&quot;pos&quot;:1,&quot;rgb&quot;:&quot;#ffffff&quot;,&quot;transparency&quot;:0},{&quot;brightness&quot;:0.800000011920929,&quot;colorType&quot;:1,&quot;foreColorIndex&quot;:5,&quot;pos&quot;:0.7099999785423279,&quot;transparency&quot;:0}],&quot;type&quot;:2},&quot;shadow&quot;:{&quot;colorType&quot;:0},&quot;threeD&quot;:{&quot;curvedSurface&quot;:{&quot;brightness&quot;:0,&quot;colorType&quot;:2,&quot;rgb&quot;:&quot;#000000&quot;},&quot;depth&quot;:{&quot;colorType&quot;:0}}},&quot;text&quot;:{&quot;fill&quot;:{&quot;solid&quot;:{&quot;brightness&quot;:0,&quot;colorType&quot;:2,&quot;rgb&quot;:&quot;#ffffff&quot;,&quot;transparency&quot;:0},&quot;type&quot;:1},&quot;glow&quot;:{&quot;colorType&quot;:0},&quot;line&quot;:{&quot;type&quot;:0},&quot;shadow&quot;:{&quot;colorType&quot;:0},&quot;threeD&quot;:{&quot;curvedSurface&quot;:{&quot;brightness&quot;:0,&quot;colorType&quot;:2,&quot;rgb&quot;:&quot;#000000&quot;},&quot;depth&quot;:{&quot;colorType&quot;:0}}}}"/>
+  <p:tag name="KSO_WM_UNIT_TEXT_FILL_TYPE" val="1"/>
+  <p:tag name="KSO_WM_UNIT_FILL_TYPE" val="1"/>
+  <p:tag name="KSO_WM_UNIT_FILL_FORE_SCHEMECOLOR_INDEX" val="5"/>
+  <p:tag name="KSO_WM_UNIT_FILL_FORE_SCHEMECOLOR_INDEX_BRIGHTNESS" val="0"/>
+  <p:tag name="KSO_WM_UNIT_LINE_FORE_SCHEMECOLOR_INDEX" val="5"/>
+  <p:tag name="KSO_WM_UNIT_USESOURCEFORMAT_APPLY" val="0"/>
+</p:tagLst>
+</file>
+
+<file path=ppt/tags/tag183.xml><?xml version="1.0" encoding="utf-8"?>
+<p:tagLst xmlns:p="http://schemas.openxmlformats.org/presentationml/2006/main">
+  <p:tag name="KSO_WM_UNIT_FILL_FORE_SCHEMECOLOR_INDEX_1_BRIGHTNESS" val="0"/>
+  <p:tag name="KSO_WM_UNIT_FILL_FORE_SCHEMECOLOR_INDEX_1" val="10"/>
+  <p:tag name="KSO_WM_UNIT_FILL_FORE_SCHEMECOLOR_INDEX_1_POS" val="0.04"/>
+  <p:tag name="KSO_WM_UNIT_FILL_FORE_SCHEMECOLOR_INDEX_1_TRANS" val="0"/>
+  <p:tag name="KSO_WM_UNIT_FILL_FORE_SCHEMECOLOR_INDEX_2_BRIGHTNESS" val="0"/>
+  <p:tag name="KSO_WM_UNIT_FILL_FORE_SCHEMECOLOR_INDEX_2" val="5"/>
+  <p:tag name="KSO_WM_UNIT_FILL_FORE_SCHEMECOLOR_INDEX_2_POS" val="0.54"/>
+  <p:tag name="KSO_WM_UNIT_FILL_FORE_SCHEMECOLOR_INDEX_2_TRANS" val="0"/>
+  <p:tag name="KSO_WM_UNIT_FILL_FORE_SCHEMECOLOR_INDEX_3_BRIGHTNESS" val="0"/>
+  <p:tag name="KSO_WM_UNIT_FILL_FORE_SCHEMECOLOR_INDEX_3" val="5"/>
+  <p:tag name="KSO_WM_UNIT_FILL_FORE_SCHEMECOLOR_INDEX_3_POS" val="1"/>
+  <p:tag name="KSO_WM_UNIT_FILL_FORE_SCHEMECOLOR_INDEX_3_TRANS" val="0"/>
+  <p:tag name="KSO_WM_UNIT_FILL_GRADIENT_TYPE" val="0"/>
+  <p:tag name="KSO_WM_UNIT_FILL_GRADIENT_ANGLE" val="45"/>
+  <p:tag name="KSO_WM_UNIT_FILL_GRADIENT_DIRECTION" val="0"/>
+  <p:tag name="KSO_WM_UNIT_TEXT_FILL_FORE_SCHEMECOLOR_INDEX_BRIGHTNESS" val="0"/>
+  <p:tag name="KSO_WM_UNIT_LINE_FORE_SCHEMECOLOR_INDEX_1_BRIGHTNESS" val="0.95"/>
+  <p:tag name="KSO_WM_UNIT_LINE_FORE_SCHEMECOLOR_INDEX_1" val="5"/>
+  <p:tag name="KSO_WM_UNIT_LINE_FORE_SCHEMECOLOR_INDEX_1_POS" val="0.09"/>
+  <p:tag name="KSO_WM_UNIT_LINE_FORE_SCHEMECOLOR_INDEX_1_TRANS" val="0.3"/>
+  <p:tag name="KSO_WM_BEAUTIFY_FLAG" val="#wm#"/>
+  <p:tag name="KSO_WM_UNIT_HIGHLIGHT" val="0"/>
+  <p:tag name="KSO_WM_UNIT_COMPATIBLE" val="0"/>
+  <p:tag name="KSO_WM_UNIT_DIAGRAM_ISNUMVISUAL" val="0"/>
+  <p:tag name="KSO_WM_UNIT_DIAGRAM_ISREFERUNIT" val="0"/>
+  <p:tag name="KSO_WM_UNIT_ID" val="diagram20230945_3*n_h_h_i*1_2_1_1"/>
+  <p:tag name="KSO_WM_TEMPLATE_CATEGORY" val="diagram"/>
+  <p:tag name="KSO_WM_TEMPLATE_INDEX" val="20230945"/>
+  <p:tag name="KSO_WM_UNIT_LAYERLEVEL" val="1_1_1_1"/>
+  <p:tag name="KSO_WM_TAG_VERSION" val="3.0"/>
+  <p:tag name="KSO_WM_DIAGRAM_VERSION" val="3"/>
+  <p:tag name="KSO_WM_DIAGRAM_COLOR_TRICK" val="3"/>
+  <p:tag name="KSO_WM_DIAGRAM_COLOR_TEXT_CAN_REMOVE" val="n"/>
+  <p:tag name="KSO_WM_DIAGRAM_GROUP_CODE" val="n1-1"/>
+  <p:tag name="KSO_WM_UNIT_SUBTYPE" val="d"/>
+  <p:tag name="KSO_WM_UNIT_TYPE" val="n_h_h_i"/>
+  <p:tag name="KSO_WM_UNIT_INDEX" val="1_2_1_1"/>
+  <p:tag name="KSO_WM_DIAGRAM_MAX_ITEMCNT" val="4"/>
+  <p:tag name="KSO_WM_DIAGRAM_MIN_ITEMCNT" val="2"/>
+  <p:tag name="KSO_WM_DIAGRAM_VIRTUALLY_FRAME" val="{&quot;height&quot;:389.44646137868324,&quot;left&quot;:36.37472440944882,&quot;top&quot;:113.1,&quot;width&quot;:913.9252755905512}"/>
+  <p:tag name="KSO_WM_DIAGRAM_COLOR_MATCH_VALUE" val="{&quot;shape&quot;:{&quot;fill&quot;:{&quot;solid&quot;:{&quot;brightness&quot;:0,&quot;colorType&quot;:1,&quot;foreColorIndex&quot;:5,&quot;transparency&quot;:0},&quot;type&quot;:1},&quot;glow&quot;:{&quot;colorType&quot;:0},&quot;line&quot;:{&quot;gradient&quot;:[{&quot;brightness&quot;:0,&quot;colorType&quot;:2,&quot;pos&quot;:0.3700000047683716,&quot;rgb&quot;:&quot;#ffffff&quot;,&quot;transparency&quot;:0},{&quot;brightness&quot;:0.800000011920929,&quot;colorType&quot;:1,&quot;foreColorIndex&quot;:5,&quot;pos&quot;:0,&quot;transparency&quot;:0},{&quot;brightness&quot;:0,&quot;colorType&quot;:2,&quot;pos&quot;:1,&quot;rgb&quot;:&quot;#ffffff&quot;,&quot;transparency&quot;:0},{&quot;brightness&quot;:0.800000011920929,&quot;colorType&quot;:1,&quot;foreColorIndex&quot;:5,&quot;pos&quot;:0.7099999785423279,&quot;transparency&quot;:0}],&quot;type&quot;:2},&quot;shadow&quot;:{&quot;colorType&quot;:0},&quot;threeD&quot;:{&quot;curvedSurface&quot;:{&quot;brightness&quot;:0,&quot;colorType&quot;:2,&quot;rgb&quot;:&quot;#000000&quot;},&quot;depth&quot;:{&quot;colorType&quot;:0}}},&quot;text&quot;:{&quot;fill&quot;:{&quot;solid&quot;:{&quot;brightness&quot;:0,&quot;colorType&quot;:2,&quot;rgb&quot;:&quot;#ffffff&quot;,&quot;transparency&quot;:0},&quot;type&quot;:1},&quot;glow&quot;:{&quot;colorType&quot;:0},&quot;line&quot;:{&quot;type&quot;:0},&quot;shadow&quot;:{&quot;colorType&quot;:0},&quot;threeD&quot;:{&quot;curvedSurface&quot;:{&quot;brightness&quot;:0,&quot;colorType&quot;:2,&quot;rgb&quot;:&quot;#000000&quot;},&quot;depth&quot;:{&quot;colorType&quot;:0}}}}"/>
+  <p:tag name="KSO_WM_UNIT_TEXT_FILL_TYPE" val="1"/>
+  <p:tag name="KSO_WM_UNIT_FILL_TYPE" val="1"/>
+  <p:tag name="KSO_WM_UNIT_FILL_FORE_SCHEMECOLOR_INDEX" val="5"/>
+  <p:tag name="KSO_WM_UNIT_FILL_FORE_SCHEMECOLOR_INDEX_BRIGHTNESS" val="0"/>
+  <p:tag name="KSO_WM_UNIT_LINE_FORE_SCHEMECOLOR_INDEX" val="5"/>
+  <p:tag name="KSO_WM_UNIT_USESOURCEFORMAT_APPLY" val="0"/>
+</p:tagLst>
+</file>
+
+<file path=ppt/tags/tag184.xml><?xml version="1.0" encoding="utf-8"?>
+<p:tagLst xmlns:p="http://schemas.openxmlformats.org/presentationml/2006/main">
+  <p:tag name="KSO_WM_UNIT_FILL_FORE_SCHEMECOLOR_INDEX_1_BRIGHTNESS" val="0"/>
+  <p:tag name="KSO_WM_UNIT_FILL_FORE_SCHEMECOLOR_INDEX_1" val="10"/>
+  <p:tag name="KSO_WM_UNIT_FILL_FORE_SCHEMECOLOR_INDEX_1_POS" val="0.04"/>
+  <p:tag name="KSO_WM_UNIT_FILL_FORE_SCHEMECOLOR_INDEX_1_TRANS" val="0"/>
+  <p:tag name="KSO_WM_UNIT_FILL_FORE_SCHEMECOLOR_INDEX_2_BRIGHTNESS" val="0"/>
+  <p:tag name="KSO_WM_UNIT_FILL_FORE_SCHEMECOLOR_INDEX_2" val="5"/>
+  <p:tag name="KSO_WM_UNIT_FILL_FORE_SCHEMECOLOR_INDEX_2_POS" val="0.54"/>
+  <p:tag name="KSO_WM_UNIT_FILL_FORE_SCHEMECOLOR_INDEX_2_TRANS" val="0"/>
+  <p:tag name="KSO_WM_UNIT_FILL_FORE_SCHEMECOLOR_INDEX_3_BRIGHTNESS" val="0"/>
+  <p:tag name="KSO_WM_UNIT_FILL_FORE_SCHEMECOLOR_INDEX_3" val="5"/>
+  <p:tag name="KSO_WM_UNIT_FILL_FORE_SCHEMECOLOR_INDEX_3_POS" val="1"/>
+  <p:tag name="KSO_WM_UNIT_FILL_FORE_SCHEMECOLOR_INDEX_3_TRANS" val="0"/>
+  <p:tag name="KSO_WM_UNIT_FILL_GRADIENT_TYPE" val="0"/>
+  <p:tag name="KSO_WM_UNIT_FILL_GRADIENT_ANGLE" val="45"/>
+  <p:tag name="KSO_WM_UNIT_FILL_GRADIENT_DIRECTION" val="0"/>
+  <p:tag name="KSO_WM_UNIT_TEXT_FILL_FORE_SCHEMECOLOR_INDEX_BRIGHTNESS" val="0"/>
+  <p:tag name="KSO_WM_UNIT_LINE_FORE_SCHEMECOLOR_INDEX_1_BRIGHTNESS" val="0.95"/>
+  <p:tag name="KSO_WM_UNIT_LINE_FORE_SCHEMECOLOR_INDEX_1" val="5"/>
+  <p:tag name="KSO_WM_UNIT_LINE_FORE_SCHEMECOLOR_INDEX_1_POS" val="0.09"/>
+  <p:tag name="KSO_WM_UNIT_LINE_FORE_SCHEMECOLOR_INDEX_1_TRANS" val="0.3"/>
+  <p:tag name="KSO_WM_BEAUTIFY_FLAG" val="#wm#"/>
+  <p:tag name="KSO_WM_UNIT_HIGHLIGHT" val="0"/>
+  <p:tag name="KSO_WM_UNIT_COMPATIBLE" val="0"/>
+  <p:tag name="KSO_WM_UNIT_DIAGRAM_ISNUMVISUAL" val="0"/>
+  <p:tag name="KSO_WM_UNIT_DIAGRAM_ISREFERUNIT" val="0"/>
+  <p:tag name="KSO_WM_UNIT_ID" val="diagram20230945_3*n_h_h_i*1_2_3_1"/>
+  <p:tag name="KSO_WM_TEMPLATE_CATEGORY" val="diagram"/>
+  <p:tag name="KSO_WM_TEMPLATE_INDEX" val="20230945"/>
+  <p:tag name="KSO_WM_UNIT_LAYERLEVEL" val="1_1_1_1"/>
+  <p:tag name="KSO_WM_TAG_VERSION" val="3.0"/>
+  <p:tag name="KSO_WM_DIAGRAM_VERSION" val="3"/>
+  <p:tag name="KSO_WM_DIAGRAM_COLOR_TRICK" val="3"/>
+  <p:tag name="KSO_WM_DIAGRAM_COLOR_TEXT_CAN_REMOVE" val="n"/>
+  <p:tag name="KSO_WM_DIAGRAM_GROUP_CODE" val="n1-1"/>
+  <p:tag name="KSO_WM_UNIT_SUBTYPE" val="d"/>
+  <p:tag name="KSO_WM_UNIT_TYPE" val="n_h_h_i"/>
+  <p:tag name="KSO_WM_UNIT_INDEX" val="1_2_3_1"/>
+  <p:tag name="KSO_WM_DIAGRAM_MAX_ITEMCNT" val="4"/>
+  <p:tag name="KSO_WM_DIAGRAM_MIN_ITEMCNT" val="2"/>
+  <p:tag name="KSO_WM_DIAGRAM_VIRTUALLY_FRAME" val="{&quot;height&quot;:389.44646137868324,&quot;left&quot;:36.37472440944882,&quot;top&quot;:113.1,&quot;width&quot;:913.9252755905512}"/>
+  <p:tag name="KSO_WM_DIAGRAM_COLOR_MATCH_VALUE" val="{&quot;shape&quot;:{&quot;fill&quot;:{&quot;solid&quot;:{&quot;brightness&quot;:0,&quot;colorType&quot;:1,&quot;foreColorIndex&quot;:7,&quot;transparency&quot;:0},&quot;type&quot;:1},&quot;glow&quot;:{&quot;colorType&quot;:0},&quot;line&quot;:{&quot;gradient&quot;:[{&quot;brightness&quot;:0,&quot;colorType&quot;:2,&quot;pos&quot;:0.3700000047683716,&quot;rgb&quot;:&quot;#ffffff&quot;,&quot;transparency&quot;:0},{&quot;brightness&quot;:0.800000011920929,&quot;colorType&quot;:1,&quot;foreColorIndex&quot;:10,&quot;pos&quot;:0,&quot;transparency&quot;:0},{&quot;brightness&quot;:0,&quot;colorType&quot;:2,&quot;pos&quot;:1,&quot;rgb&quot;:&quot;#ffffff&quot;,&quot;transparency&quot;:0},{&quot;brightness&quot;:0.800000011920929,&quot;colorType&quot;:1,&quot;foreColorIndex&quot;:7,&quot;pos&quot;:0.7099999785423279,&quot;transparency&quot;:0}],&quot;type&quot;:2},&quot;shadow&quot;:{&quot;colorType&quot;:0},&quot;threeD&quot;:{&quot;curvedSurface&quot;:{&quot;brightness&quot;:0,&quot;colorType&quot;:2,&quot;rgb&quot;:&quot;#000000&quot;},&quot;depth&quot;:{&quot;colorType&quot;:0}}},&quot;text&quot;:{&quot;fill&quot;:{&quot;solid&quot;:{&quot;brightness&quot;:0,&quot;colorType&quot;:2,&quot;rgb&quot;:&quot;#ffffff&quot;,&quot;transparency&quot;:0},&quot;type&quot;:1},&quot;glow&quot;:{&quot;colorType&quot;:0},&quot;line&quot;:{&quot;type&quot;:0},&quot;shadow&quot;:{&quot;colorType&quot;:0},&quot;threeD&quot;:{&quot;curvedSurface&quot;:{&quot;brightness&quot;:0,&quot;colorType&quot;:2,&quot;rgb&quot;:&quot;#000000&quot;},&quot;depth&quot;:{&quot;colorType&quot;:0}}}}"/>
+  <p:tag name="KSO_WM_UNIT_TEXT_FILL_TYPE" val="1"/>
+  <p:tag name="KSO_WM_UNIT_FILL_TYPE" val="1"/>
+  <p:tag name="KSO_WM_UNIT_FILL_FORE_SCHEMECOLOR_INDEX" val="7"/>
+  <p:tag name="KSO_WM_UNIT_FILL_FORE_SCHEMECOLOR_INDEX_BRIGHTNESS" val="0"/>
+  <p:tag name="KSO_WM_UNIT_LINE_FORE_SCHEMECOLOR_INDEX" val="7"/>
+  <p:tag name="KSO_WM_UNIT_USESOURCEFORMAT_APPLY" val="0"/>
+</p:tagLst>
+</file>
+
+<file path=ppt/tags/tag185.xml><?xml version="1.0" encoding="utf-8"?>
+<p:tagLst xmlns:p="http://schemas.openxmlformats.org/presentationml/2006/main">
+  <p:tag name="KSO_WM_SLIDE_ID" val="diagram20230945_3"/>
+  <p:tag name="KSO_WM_TEMPLATE_SUBCATEGORY" val="0"/>
+  <p:tag name="KSO_WM_TEMPLATE_MASTER_TYPE" val="0"/>
+  <p:tag name="KSO_WM_TEMPLATE_COLOR_TYPE" val="0"/>
+  <p:tag name="KSO_WM_SLIDE_ITEM_CNT" val="4"/>
+  <p:tag name="KSO_WM_SLIDE_INDEX" val="3"/>
+  <p:tag name="KSO_WM_TAG_VERSION" val="3.0"/>
+  <p:tag name="KSO_WM_BEAUTIFY_FLAG" val="#wm#"/>
+  <p:tag name="KSO_WM_TEMPLATE_CATEGORY" val="custom"/>
+  <p:tag name="KSO_WM_TEMPLATE_INDEX" val="20238441"/>
+  <p:tag name="KSO_WM_SLIDE_TYPE" val="text"/>
+  <p:tag name="KSO_WM_SLIDE_SUBTYPE" val="diag"/>
+  <p:tag name="KSO_WM_SLIDE_SIZE" val="807.497*366.297"/>
+  <p:tag name="KSO_WM_SLIDE_POSITION" val="77.1747*136.212"/>
+  <p:tag name="KSO_WM_SLIDE_LAYOUT" val="a_n"/>
+  <p:tag name="KSO_WM_SLIDE_LAYOUT_CNT" val="1_1"/>
+  <p:tag name="KSO_WM_SPECIAL_SOURCE" val="bdnull"/>
+  <p:tag name="KSO_WM_DIAGRAM_GROUP_CODE" val="n1-1"/>
+  <p:tag name="KSO_WM_SLIDE_DIAGTYPE" val="n"/>
 </p:tagLst>
 </file>
 
@@ -41413,7 +49960,14 @@
 
 <file path=ppt/tags/tag2.xml><?xml version="1.0" encoding="utf-8"?>
 <p:tagLst xmlns:p="http://schemas.openxmlformats.org/presentationml/2006/main">
-  <p:tag name="KSO_WM_DIAGRAM_VIRTUALLY_FRAME" val="{&quot;height&quot;:340,&quot;left&quot;:60,&quot;top&quot;:140,&quot;width&quot;:840}"/>
+  <p:tag name="KSO_WM_UNIT_HIGHLIGHT" val="0"/>
+  <p:tag name="KSO_WM_UNIT_COMPATIBLE" val="0"/>
+  <p:tag name="KSO_WM_UNIT_DIAGRAM_ISNUMVISUAL" val="0"/>
+  <p:tag name="KSO_WM_UNIT_DIAGRAM_ISREFERUNIT" val="0"/>
+  <p:tag name="KSO_WM_UNIT_ID" val="_1**"/>
+  <p:tag name="KSO_WM_UNIT_LAYERLEVEL" val="1"/>
+  <p:tag name="KSO_WM_TAG_VERSION" val="3.0"/>
+  <p:tag name="KSO_WM_BEAUTIFY_FLAG" val="#wm#"/>
 </p:tagLst>
 </file>
 
@@ -41479,7 +50033,14 @@
 
 <file path=ppt/tags/tag3.xml><?xml version="1.0" encoding="utf-8"?>
 <p:tagLst xmlns:p="http://schemas.openxmlformats.org/presentationml/2006/main">
-  <p:tag name="KSO_WM_DIAGRAM_VIRTUALLY_FRAME" val="{&quot;height&quot;:340,&quot;left&quot;:60,&quot;top&quot;:140,&quot;width&quot;:840}"/>
+  <p:tag name="KSO_WM_UNIT_HIGHLIGHT" val="0"/>
+  <p:tag name="KSO_WM_UNIT_COMPATIBLE" val="0"/>
+  <p:tag name="KSO_WM_UNIT_DIAGRAM_ISNUMVISUAL" val="0"/>
+  <p:tag name="KSO_WM_UNIT_DIAGRAM_ISREFERUNIT" val="0"/>
+  <p:tag name="KSO_WM_UNIT_ID" val="_1**"/>
+  <p:tag name="KSO_WM_UNIT_LAYERLEVEL" val="1"/>
+  <p:tag name="KSO_WM_TAG_VERSION" val="3.0"/>
+  <p:tag name="KSO_WM_BEAUTIFY_FLAG" val="#wm#"/>
 </p:tagLst>
 </file>
 
@@ -41491,49 +50052,49 @@
 
 <file path=ppt/tags/tag31.xml><?xml version="1.0" encoding="utf-8"?>
 <p:tagLst xmlns:p="http://schemas.openxmlformats.org/presentationml/2006/main">
-  <p:tag name="KSO_WM_DIAGRAM_VIRTUALLY_FRAME" val="{&quot;height&quot;:340,&quot;left&quot;:59.35,&quot;top&quot;:140,&quot;width&quot;:840.65}"/>
+  <p:tag name="KSO_WM_DIAGRAM_VIRTUALLY_FRAME" val="{&quot;height&quot;:340,&quot;left&quot;:60,&quot;top&quot;:140,&quot;width&quot;:840}"/>
 </p:tagLst>
 </file>
 
 <file path=ppt/tags/tag32.xml><?xml version="1.0" encoding="utf-8"?>
 <p:tagLst xmlns:p="http://schemas.openxmlformats.org/presentationml/2006/main">
-  <p:tag name="KSO_WM_DIAGRAM_VIRTUALLY_FRAME" val="{&quot;height&quot;:340,&quot;left&quot;:59.35,&quot;top&quot;:140,&quot;width&quot;:840.65}"/>
+  <p:tag name="KSO_WM_DIAGRAM_VIRTUALLY_FRAME" val="{&quot;height&quot;:340,&quot;left&quot;:60,&quot;top&quot;:140,&quot;width&quot;:840}"/>
 </p:tagLst>
 </file>
 
 <file path=ppt/tags/tag33.xml><?xml version="1.0" encoding="utf-8"?>
 <p:tagLst xmlns:p="http://schemas.openxmlformats.org/presentationml/2006/main">
-  <p:tag name="KSO_WM_DIAGRAM_VIRTUALLY_FRAME" val="{&quot;height&quot;:340,&quot;left&quot;:59.35,&quot;top&quot;:140,&quot;width&quot;:840.65}"/>
+  <p:tag name="KSO_WM_DIAGRAM_VIRTUALLY_FRAME" val="{&quot;height&quot;:340,&quot;left&quot;:60,&quot;top&quot;:140,&quot;width&quot;:840}"/>
 </p:tagLst>
 </file>
 
 <file path=ppt/tags/tag34.xml><?xml version="1.0" encoding="utf-8"?>
 <p:tagLst xmlns:p="http://schemas.openxmlformats.org/presentationml/2006/main">
-  <p:tag name="KSO_WM_DIAGRAM_VIRTUALLY_FRAME" val="{&quot;height&quot;:340,&quot;left&quot;:59.35,&quot;top&quot;:140,&quot;width&quot;:840.65}"/>
+  <p:tag name="KSO_WM_DIAGRAM_VIRTUALLY_FRAME" val="{&quot;height&quot;:340,&quot;left&quot;:60,&quot;top&quot;:140,&quot;width&quot;:840}"/>
 </p:tagLst>
 </file>
 
 <file path=ppt/tags/tag35.xml><?xml version="1.0" encoding="utf-8"?>
 <p:tagLst xmlns:p="http://schemas.openxmlformats.org/presentationml/2006/main">
-  <p:tag name="KSO_WM_DIAGRAM_VIRTUALLY_FRAME" val="{&quot;height&quot;:340,&quot;left&quot;:59.35,&quot;top&quot;:140,&quot;width&quot;:840.65}"/>
+  <p:tag name="KSO_WM_DIAGRAM_VIRTUALLY_FRAME" val="{&quot;height&quot;:340,&quot;left&quot;:60,&quot;top&quot;:140,&quot;width&quot;:840}"/>
 </p:tagLst>
 </file>
 
 <file path=ppt/tags/tag36.xml><?xml version="1.0" encoding="utf-8"?>
 <p:tagLst xmlns:p="http://schemas.openxmlformats.org/presentationml/2006/main">
-  <p:tag name="KSO_WM_DIAGRAM_VIRTUALLY_FRAME" val="{&quot;height&quot;:340,&quot;left&quot;:59.35,&quot;top&quot;:140,&quot;width&quot;:840.65}"/>
+  <p:tag name="KSO_WM_DIAGRAM_VIRTUALLY_FRAME" val="{&quot;height&quot;:340,&quot;left&quot;:60,&quot;top&quot;:140,&quot;width&quot;:840}"/>
 </p:tagLst>
 </file>
 
 <file path=ppt/tags/tag37.xml><?xml version="1.0" encoding="utf-8"?>
 <p:tagLst xmlns:p="http://schemas.openxmlformats.org/presentationml/2006/main">
-  <p:tag name="KSO_WM_DIAGRAM_VIRTUALLY_FRAME" val="{&quot;height&quot;:340,&quot;left&quot;:59.35,&quot;top&quot;:140,&quot;width&quot;:840.65}"/>
+  <p:tag name="KSO_WM_DIAGRAM_VIRTUALLY_FRAME" val="{&quot;height&quot;:340,&quot;left&quot;:60,&quot;top&quot;:140,&quot;width&quot;:840}"/>
 </p:tagLst>
 </file>
 
 <file path=ppt/tags/tag38.xml><?xml version="1.0" encoding="utf-8"?>
 <p:tagLst xmlns:p="http://schemas.openxmlformats.org/presentationml/2006/main">
-  <p:tag name="KSO_WM_DIAGRAM_VIRTUALLY_FRAME" val="{&quot;height&quot;:340,&quot;left&quot;:59.35,&quot;top&quot;:140,&quot;width&quot;:840.65}"/>
+  <p:tag name="KSO_WM_DIAGRAM_VIRTUALLY_FRAME" val="{&quot;height&quot;:340,&quot;left&quot;:60,&quot;top&quot;:140,&quot;width&quot;:840}"/>
 </p:tagLst>
 </file>
 
@@ -41545,7 +50106,14 @@
 
 <file path=ppt/tags/tag4.xml><?xml version="1.0" encoding="utf-8"?>
 <p:tagLst xmlns:p="http://schemas.openxmlformats.org/presentationml/2006/main">
-  <p:tag name="KSO_WM_DIAGRAM_VIRTUALLY_FRAME" val="{&quot;height&quot;:340,&quot;left&quot;:60,&quot;top&quot;:140,&quot;width&quot;:840}"/>
+  <p:tag name="KSO_WM_UNIT_HIGHLIGHT" val="0"/>
+  <p:tag name="KSO_WM_UNIT_COMPATIBLE" val="0"/>
+  <p:tag name="KSO_WM_UNIT_DIAGRAM_ISNUMVISUAL" val="0"/>
+  <p:tag name="KSO_WM_UNIT_DIAGRAM_ISREFERUNIT" val="0"/>
+  <p:tag name="KSO_WM_UNIT_ID" val="_1**"/>
+  <p:tag name="KSO_WM_UNIT_LAYERLEVEL" val="1"/>
+  <p:tag name="KSO_WM_TAG_VERSION" val="3.0"/>
+  <p:tag name="KSO_WM_BEAUTIFY_FLAG" val="#wm#"/>
 </p:tagLst>
 </file>
 
@@ -41611,7 +50179,21 @@
 
 <file path=ppt/tags/tag5.xml><?xml version="1.0" encoding="utf-8"?>
 <p:tagLst xmlns:p="http://schemas.openxmlformats.org/presentationml/2006/main">
-  <p:tag name="KSO_WM_DIAGRAM_VIRTUALLY_FRAME" val="{&quot;height&quot;:340,&quot;left&quot;:60,&quot;top&quot;:140,&quot;width&quot;:840}"/>
+  <p:tag name="KSO_WM_UNIT_HIGHLIGHT" val="0"/>
+  <p:tag name="KSO_WM_UNIT_COMPATIBLE" val="0"/>
+  <p:tag name="KSO_WM_UNIT_DIAGRAM_ISNUMVISUAL" val="0"/>
+  <p:tag name="KSO_WM_UNIT_DIAGRAM_ISREFERUNIT" val="0"/>
+  <p:tag name="KSO_WM_UNIT_ID" val="_1*a*1"/>
+  <p:tag name="KSO_WM_UNIT_LAYERLEVEL" val="1"/>
+  <p:tag name="KSO_WM_TAG_VERSION" val="3.0"/>
+  <p:tag name="KSO_WM_BEAUTIFY_FLAG" val="#wm#"/>
+  <p:tag name="KSO_WM_UNIT_ISCONTENTSTITLE" val="0"/>
+  <p:tag name="KSO_WM_UNIT_ISNUMDGMTITLE" val="0"/>
+  <p:tag name="KSO_WM_UNIT_PRESET_TEXT" val="单击此处编辑母版标题样式"/>
+  <p:tag name="KSO_WM_UNIT_NOCLEAR" val="0"/>
+  <p:tag name="KSO_WM_UNIT_VALUE" val="20"/>
+  <p:tag name="KSO_WM_UNIT_TYPE" val="a"/>
+  <p:tag name="KSO_WM_UNIT_INDEX" val="1"/>
 </p:tagLst>
 </file>
 
@@ -41629,55 +50211,62 @@
 
 <file path=ppt/tags/tag52.xml><?xml version="1.0" encoding="utf-8"?>
 <p:tagLst xmlns:p="http://schemas.openxmlformats.org/presentationml/2006/main">
-  <p:tag name="KSO_WM_DIAGRAM_VIRTUALLY_FRAME" val="{&quot;height&quot;:340,&quot;left&quot;:60,&quot;top&quot;:140,&quot;width&quot;:846.6}"/>
+  <p:tag name="KSO_WM_DIAGRAM_VIRTUALLY_FRAME" val="{&quot;height&quot;:340,&quot;left&quot;:59.35,&quot;top&quot;:140,&quot;width&quot;:840.65}"/>
 </p:tagLst>
 </file>
 
 <file path=ppt/tags/tag53.xml><?xml version="1.0" encoding="utf-8"?>
 <p:tagLst xmlns:p="http://schemas.openxmlformats.org/presentationml/2006/main">
-  <p:tag name="KSO_WM_DIAGRAM_VIRTUALLY_FRAME" val="{&quot;height&quot;:340,&quot;left&quot;:60,&quot;top&quot;:140,&quot;width&quot;:846.6}"/>
+  <p:tag name="KSO_WM_DIAGRAM_VIRTUALLY_FRAME" val="{&quot;height&quot;:340,&quot;left&quot;:59.35,&quot;top&quot;:140,&quot;width&quot;:840.65}"/>
 </p:tagLst>
 </file>
 
 <file path=ppt/tags/tag54.xml><?xml version="1.0" encoding="utf-8"?>
 <p:tagLst xmlns:p="http://schemas.openxmlformats.org/presentationml/2006/main">
-  <p:tag name="KSO_WM_DIAGRAM_VIRTUALLY_FRAME" val="{&quot;height&quot;:340,&quot;left&quot;:60,&quot;top&quot;:140,&quot;width&quot;:846.6}"/>
+  <p:tag name="KSO_WM_DIAGRAM_VIRTUALLY_FRAME" val="{&quot;height&quot;:340,&quot;left&quot;:59.35,&quot;top&quot;:140,&quot;width&quot;:840.65}"/>
 </p:tagLst>
 </file>
 
 <file path=ppt/tags/tag55.xml><?xml version="1.0" encoding="utf-8"?>
 <p:tagLst xmlns:p="http://schemas.openxmlformats.org/presentationml/2006/main">
-  <p:tag name="KSO_WM_DIAGRAM_VIRTUALLY_FRAME" val="{&quot;height&quot;:340,&quot;left&quot;:60,&quot;top&quot;:140,&quot;width&quot;:846.6}"/>
+  <p:tag name="KSO_WM_DIAGRAM_VIRTUALLY_FRAME" val="{&quot;height&quot;:340,&quot;left&quot;:59.35,&quot;top&quot;:140,&quot;width&quot;:840.65}"/>
 </p:tagLst>
 </file>
 
 <file path=ppt/tags/tag56.xml><?xml version="1.0" encoding="utf-8"?>
 <p:tagLst xmlns:p="http://schemas.openxmlformats.org/presentationml/2006/main">
-  <p:tag name="KSO_WM_DIAGRAM_VIRTUALLY_FRAME" val="{&quot;height&quot;:340,&quot;left&quot;:60,&quot;top&quot;:140,&quot;width&quot;:846.6}"/>
+  <p:tag name="KSO_WM_DIAGRAM_VIRTUALLY_FRAME" val="{&quot;height&quot;:340,&quot;left&quot;:59.35,&quot;top&quot;:140,&quot;width&quot;:840.65}"/>
 </p:tagLst>
 </file>
 
 <file path=ppt/tags/tag57.xml><?xml version="1.0" encoding="utf-8"?>
 <p:tagLst xmlns:p="http://schemas.openxmlformats.org/presentationml/2006/main">
-  <p:tag name="KSO_WM_DIAGRAM_VIRTUALLY_FRAME" val="{&quot;height&quot;:340,&quot;left&quot;:60,&quot;top&quot;:140,&quot;width&quot;:846.6}"/>
+  <p:tag name="KSO_WM_DIAGRAM_VIRTUALLY_FRAME" val="{&quot;height&quot;:340,&quot;left&quot;:59.35,&quot;top&quot;:140,&quot;width&quot;:840.65}"/>
 </p:tagLst>
 </file>
 
 <file path=ppt/tags/tag58.xml><?xml version="1.0" encoding="utf-8"?>
 <p:tagLst xmlns:p="http://schemas.openxmlformats.org/presentationml/2006/main">
-  <p:tag name="KSO_WM_DIAGRAM_VIRTUALLY_FRAME" val="{&quot;height&quot;:340,&quot;left&quot;:60,&quot;top&quot;:140,&quot;width&quot;:846.6}"/>
+  <p:tag name="KSO_WM_DIAGRAM_VIRTUALLY_FRAME" val="{&quot;height&quot;:340,&quot;left&quot;:59.35,&quot;top&quot;:140,&quot;width&quot;:840.65}"/>
 </p:tagLst>
 </file>
 
 <file path=ppt/tags/tag59.xml><?xml version="1.0" encoding="utf-8"?>
 <p:tagLst xmlns:p="http://schemas.openxmlformats.org/presentationml/2006/main">
-  <p:tag name="KSO_WM_DIAGRAM_VIRTUALLY_FRAME" val="{&quot;height&quot;:340,&quot;left&quot;:60,&quot;top&quot;:140,&quot;width&quot;:846.6}"/>
+  <p:tag name="KSO_WM_DIAGRAM_VIRTUALLY_FRAME" val="{&quot;height&quot;:340,&quot;left&quot;:59.35,&quot;top&quot;:140,&quot;width&quot;:840.65}"/>
 </p:tagLst>
 </file>
 
 <file path=ppt/tags/tag6.xml><?xml version="1.0" encoding="utf-8"?>
 <p:tagLst xmlns:p="http://schemas.openxmlformats.org/presentationml/2006/main">
-  <p:tag name="KSO_WM_DIAGRAM_VIRTUALLY_FRAME" val="{&quot;height&quot;:340,&quot;left&quot;:60,&quot;top&quot;:140,&quot;width&quot;:840}"/>
+  <p:tag name="KSO_WM_UNIT_HIGHLIGHT" val="0"/>
+  <p:tag name="KSO_WM_UNIT_COMPATIBLE" val="0"/>
+  <p:tag name="KSO_WM_UNIT_DIAGRAM_ISNUMVISUAL" val="0"/>
+  <p:tag name="KSO_WM_UNIT_DIAGRAM_ISREFERUNIT" val="0"/>
+  <p:tag name="KSO_WM_UNIT_ID" val="_1**"/>
+  <p:tag name="KSO_WM_UNIT_LAYERLEVEL" val="1"/>
+  <p:tag name="KSO_WM_TAG_VERSION" val="3.0"/>
+  <p:tag name="KSO_WM_BEAUTIFY_FLAG" val="#wm#"/>
 </p:tagLst>
 </file>
 
@@ -41743,7 +50332,14 @@
 
 <file path=ppt/tags/tag7.xml><?xml version="1.0" encoding="utf-8"?>
 <p:tagLst xmlns:p="http://schemas.openxmlformats.org/presentationml/2006/main">
-  <p:tag name="KSO_WM_DIAGRAM_VIRTUALLY_FRAME" val="{&quot;height&quot;:340,&quot;left&quot;:60,&quot;top&quot;:140,&quot;width&quot;:840}"/>
+  <p:tag name="KSO_WM_UNIT_HIGHLIGHT" val="0"/>
+  <p:tag name="KSO_WM_UNIT_COMPATIBLE" val="0"/>
+  <p:tag name="KSO_WM_UNIT_DIAGRAM_ISNUMVISUAL" val="0"/>
+  <p:tag name="KSO_WM_UNIT_DIAGRAM_ISREFERUNIT" val="0"/>
+  <p:tag name="KSO_WM_UNIT_ID" val="_1**"/>
+  <p:tag name="KSO_WM_UNIT_LAYERLEVEL" val="1"/>
+  <p:tag name="KSO_WM_TAG_VERSION" val="3.0"/>
+  <p:tag name="KSO_WM_BEAUTIFY_FLAG" val="#wm#"/>
 </p:tagLst>
 </file>
 
@@ -41761,55 +50357,62 @@
 
 <file path=ppt/tags/tag72.xml><?xml version="1.0" encoding="utf-8"?>
 <p:tagLst xmlns:p="http://schemas.openxmlformats.org/presentationml/2006/main">
-  <p:tag name="KSO_WM_DIAGRAM_VIRTUALLY_FRAME" val="{&quot;height&quot;:340,&quot;left&quot;:60,&quot;top&quot;:140,&quot;width&quot;:840}"/>
+  <p:tag name="KSO_WM_DIAGRAM_VIRTUALLY_FRAME" val="{&quot;height&quot;:340,&quot;left&quot;:60,&quot;top&quot;:140,&quot;width&quot;:846.6}"/>
 </p:tagLst>
 </file>
 
 <file path=ppt/tags/tag73.xml><?xml version="1.0" encoding="utf-8"?>
 <p:tagLst xmlns:p="http://schemas.openxmlformats.org/presentationml/2006/main">
-  <p:tag name="KSO_WM_DIAGRAM_VIRTUALLY_FRAME" val="{&quot;height&quot;:340,&quot;left&quot;:60,&quot;top&quot;:140,&quot;width&quot;:840}"/>
+  <p:tag name="KSO_WM_DIAGRAM_VIRTUALLY_FRAME" val="{&quot;height&quot;:340,&quot;left&quot;:60,&quot;top&quot;:140,&quot;width&quot;:846.6}"/>
 </p:tagLst>
 </file>
 
 <file path=ppt/tags/tag74.xml><?xml version="1.0" encoding="utf-8"?>
 <p:tagLst xmlns:p="http://schemas.openxmlformats.org/presentationml/2006/main">
-  <p:tag name="KSO_WM_DIAGRAM_VIRTUALLY_FRAME" val="{&quot;height&quot;:340,&quot;left&quot;:60,&quot;top&quot;:140,&quot;width&quot;:840}"/>
+  <p:tag name="KSO_WM_DIAGRAM_VIRTUALLY_FRAME" val="{&quot;height&quot;:340,&quot;left&quot;:60,&quot;top&quot;:140,&quot;width&quot;:846.6}"/>
 </p:tagLst>
 </file>
 
 <file path=ppt/tags/tag75.xml><?xml version="1.0" encoding="utf-8"?>
 <p:tagLst xmlns:p="http://schemas.openxmlformats.org/presentationml/2006/main">
-  <p:tag name="KSO_WM_DIAGRAM_VIRTUALLY_FRAME" val="{&quot;height&quot;:340,&quot;left&quot;:60,&quot;top&quot;:140,&quot;width&quot;:840}"/>
+  <p:tag name="KSO_WM_DIAGRAM_VIRTUALLY_FRAME" val="{&quot;height&quot;:340,&quot;left&quot;:60,&quot;top&quot;:140,&quot;width&quot;:846.6}"/>
 </p:tagLst>
 </file>
 
 <file path=ppt/tags/tag76.xml><?xml version="1.0" encoding="utf-8"?>
 <p:tagLst xmlns:p="http://schemas.openxmlformats.org/presentationml/2006/main">
-  <p:tag name="KSO_WM_DIAGRAM_VIRTUALLY_FRAME" val="{&quot;height&quot;:340,&quot;left&quot;:60,&quot;top&quot;:140,&quot;width&quot;:840}"/>
+  <p:tag name="KSO_WM_DIAGRAM_VIRTUALLY_FRAME" val="{&quot;height&quot;:340,&quot;left&quot;:60,&quot;top&quot;:140,&quot;width&quot;:846.6}"/>
 </p:tagLst>
 </file>
 
 <file path=ppt/tags/tag77.xml><?xml version="1.0" encoding="utf-8"?>
 <p:tagLst xmlns:p="http://schemas.openxmlformats.org/presentationml/2006/main">
-  <p:tag name="KSO_WM_DIAGRAM_VIRTUALLY_FRAME" val="{&quot;height&quot;:340,&quot;left&quot;:60,&quot;top&quot;:140,&quot;width&quot;:840}"/>
+  <p:tag name="KSO_WM_DIAGRAM_VIRTUALLY_FRAME" val="{&quot;height&quot;:340,&quot;left&quot;:60,&quot;top&quot;:140,&quot;width&quot;:846.6}"/>
 </p:tagLst>
 </file>
 
 <file path=ppt/tags/tag78.xml><?xml version="1.0" encoding="utf-8"?>
 <p:tagLst xmlns:p="http://schemas.openxmlformats.org/presentationml/2006/main">
-  <p:tag name="KSO_WM_DIAGRAM_VIRTUALLY_FRAME" val="{&quot;height&quot;:340,&quot;left&quot;:60,&quot;top&quot;:140,&quot;width&quot;:840}"/>
+  <p:tag name="KSO_WM_DIAGRAM_VIRTUALLY_FRAME" val="{&quot;height&quot;:340,&quot;left&quot;:60,&quot;top&quot;:140,&quot;width&quot;:846.6}"/>
 </p:tagLst>
 </file>
 
 <file path=ppt/tags/tag79.xml><?xml version="1.0" encoding="utf-8"?>
 <p:tagLst xmlns:p="http://schemas.openxmlformats.org/presentationml/2006/main">
-  <p:tag name="KSO_WM_DIAGRAM_VIRTUALLY_FRAME" val="{&quot;height&quot;:340,&quot;left&quot;:60,&quot;top&quot;:140,&quot;width&quot;:840}"/>
+  <p:tag name="KSO_WM_DIAGRAM_VIRTUALLY_FRAME" val="{&quot;height&quot;:340,&quot;left&quot;:60,&quot;top&quot;:140,&quot;width&quot;:846.6}"/>
 </p:tagLst>
 </file>
 
 <file path=ppt/tags/tag8.xml><?xml version="1.0" encoding="utf-8"?>
 <p:tagLst xmlns:p="http://schemas.openxmlformats.org/presentationml/2006/main">
-  <p:tag name="KSO_WM_DIAGRAM_VIRTUALLY_FRAME" val="{&quot;height&quot;:340,&quot;left&quot;:60,&quot;top&quot;:140,&quot;width&quot;:840}"/>
+  <p:tag name="KSO_WM_UNIT_HIGHLIGHT" val="0"/>
+  <p:tag name="KSO_WM_UNIT_COMPATIBLE" val="0"/>
+  <p:tag name="KSO_WM_UNIT_DIAGRAM_ISNUMVISUAL" val="0"/>
+  <p:tag name="KSO_WM_UNIT_DIAGRAM_ISREFERUNIT" val="0"/>
+  <p:tag name="KSO_WM_UNIT_ID" val="_1**"/>
+  <p:tag name="KSO_WM_UNIT_LAYERLEVEL" val="1"/>
+  <p:tag name="KSO_WM_TAG_VERSION" val="3.0"/>
+  <p:tag name="KSO_WM_BEAUTIFY_FLAG" val="#wm#"/>
 </p:tagLst>
 </file>
 
@@ -41863,13 +50466,13 @@
 
 <file path=ppt/tags/tag88.xml><?xml version="1.0" encoding="utf-8"?>
 <p:tagLst xmlns:p="http://schemas.openxmlformats.org/presentationml/2006/main">
-  <p:tag name="KSO_WM_DIAGRAM_VIRTUALLY_FRAME" val="{&quot;height&quot;:270,&quot;left&quot;:60,&quot;top&quot;:150,&quot;width&quot;:840}"/>
+  <p:tag name="KSO_WM_DIAGRAM_VIRTUALLY_FRAME" val="{&quot;height&quot;:340,&quot;left&quot;:60,&quot;top&quot;:140,&quot;width&quot;:840}"/>
 </p:tagLst>
 </file>
 
 <file path=ppt/tags/tag89.xml><?xml version="1.0" encoding="utf-8"?>
 <p:tagLst xmlns:p="http://schemas.openxmlformats.org/presentationml/2006/main">
-  <p:tag name="KSO_WM_DIAGRAM_VIRTUALLY_FRAME" val="{&quot;height&quot;:270,&quot;left&quot;:60,&quot;top&quot;:150,&quot;width&quot;:840}"/>
+  <p:tag name="KSO_WM_DIAGRAM_VIRTUALLY_FRAME" val="{&quot;height&quot;:340,&quot;left&quot;:60,&quot;top&quot;:140,&quot;width&quot;:840}"/>
 </p:tagLst>
 </file>
 
@@ -41881,37 +50484,37 @@
 
 <file path=ppt/tags/tag90.xml><?xml version="1.0" encoding="utf-8"?>
 <p:tagLst xmlns:p="http://schemas.openxmlformats.org/presentationml/2006/main">
-  <p:tag name="KSO_WM_DIAGRAM_VIRTUALLY_FRAME" val="{&quot;height&quot;:270,&quot;left&quot;:60,&quot;top&quot;:150,&quot;width&quot;:840}"/>
+  <p:tag name="KSO_WM_DIAGRAM_VIRTUALLY_FRAME" val="{&quot;height&quot;:340,&quot;left&quot;:60,&quot;top&quot;:140,&quot;width&quot;:840}"/>
 </p:tagLst>
 </file>
 
 <file path=ppt/tags/tag91.xml><?xml version="1.0" encoding="utf-8"?>
 <p:tagLst xmlns:p="http://schemas.openxmlformats.org/presentationml/2006/main">
-  <p:tag name="KSO_WM_DIAGRAM_VIRTUALLY_FRAME" val="{&quot;height&quot;:270,&quot;left&quot;:60,&quot;top&quot;:150,&quot;width&quot;:840}"/>
+  <p:tag name="KSO_WM_DIAGRAM_VIRTUALLY_FRAME" val="{&quot;height&quot;:340,&quot;left&quot;:60,&quot;top&quot;:140,&quot;width&quot;:840}"/>
 </p:tagLst>
 </file>
 
 <file path=ppt/tags/tag92.xml><?xml version="1.0" encoding="utf-8"?>
 <p:tagLst xmlns:p="http://schemas.openxmlformats.org/presentationml/2006/main">
-  <p:tag name="KSO_WM_DIAGRAM_VIRTUALLY_FRAME" val="{&quot;height&quot;:270,&quot;left&quot;:60,&quot;top&quot;:150,&quot;width&quot;:840}"/>
+  <p:tag name="KSO_WM_DIAGRAM_VIRTUALLY_FRAME" val="{&quot;height&quot;:340,&quot;left&quot;:60,&quot;top&quot;:140,&quot;width&quot;:840}"/>
 </p:tagLst>
 </file>
 
 <file path=ppt/tags/tag93.xml><?xml version="1.0" encoding="utf-8"?>
 <p:tagLst xmlns:p="http://schemas.openxmlformats.org/presentationml/2006/main">
-  <p:tag name="KSO_WM_DIAGRAM_VIRTUALLY_FRAME" val="{&quot;height&quot;:270,&quot;left&quot;:60,&quot;top&quot;:150,&quot;width&quot;:840}"/>
+  <p:tag name="KSO_WM_DIAGRAM_VIRTUALLY_FRAME" val="{&quot;height&quot;:340,&quot;left&quot;:60,&quot;top&quot;:140,&quot;width&quot;:840}"/>
 </p:tagLst>
 </file>
 
 <file path=ppt/tags/tag94.xml><?xml version="1.0" encoding="utf-8"?>
 <p:tagLst xmlns:p="http://schemas.openxmlformats.org/presentationml/2006/main">
-  <p:tag name="KSO_WM_DIAGRAM_VIRTUALLY_FRAME" val="{&quot;height&quot;:270,&quot;left&quot;:60,&quot;top&quot;:150,&quot;width&quot;:840}"/>
+  <p:tag name="KSO_WM_DIAGRAM_VIRTUALLY_FRAME" val="{&quot;height&quot;:340,&quot;left&quot;:60,&quot;top&quot;:140,&quot;width&quot;:840}"/>
 </p:tagLst>
 </file>
 
 <file path=ppt/tags/tag95.xml><?xml version="1.0" encoding="utf-8"?>
 <p:tagLst xmlns:p="http://schemas.openxmlformats.org/presentationml/2006/main">
-  <p:tag name="KSO_WM_DIAGRAM_VIRTUALLY_FRAME" val="{&quot;height&quot;:270,&quot;left&quot;:60,&quot;top&quot;:150,&quot;width&quot;:840}"/>
+  <p:tag name="KSO_WM_DIAGRAM_VIRTUALLY_FRAME" val="{&quot;height&quot;:340,&quot;left&quot;:60,&quot;top&quot;:140,&quot;width&quot;:840}"/>
 </p:tagLst>
 </file>
 
